--- a/docs/public/course-assets/course-pptx/in-005.pptx
+++ b/docs/public/course-assets/course-pptx/in-005.pptx
@@ -2,25 +2,25 @@
 <file path=ppt/presentation.xml><?xml version="1.0" encoding="utf-8"?>
 <p:presentation xmlns:p="http://schemas.openxmlformats.org/presentationml/2006/main">
   <p:sldMasterIdLst>
-    <p:sldMasterId xmlns:r="http://schemas.openxmlformats.org/officeDocument/2006/relationships" id="2147483648" r:id="R940ca4c2428b4e93"/>
+    <p:sldMasterId xmlns:r="http://schemas.openxmlformats.org/officeDocument/2006/relationships" id="2147483648" r:id="R3660ae38a9164881"/>
   </p:sldMasterIdLst>
   <p:notesMasterIdLst>
-    <p:notesMasterId xmlns:r="http://schemas.openxmlformats.org/officeDocument/2006/relationships" r:id="R58f685e920234c09"/>
+    <p:notesMasterId xmlns:r="http://schemas.openxmlformats.org/officeDocument/2006/relationships" r:id="R9a2679d9a92848ab"/>
   </p:notesMasterIdLst>
   <p:sldIdLst>
-    <p:sldId xmlns:r="http://schemas.openxmlformats.org/officeDocument/2006/relationships" id="256" r:id="R07f90f0113ba444e"/>
-    <p:sldId xmlns:r="http://schemas.openxmlformats.org/officeDocument/2006/relationships" id="257" r:id="R65f2f311b8044b52"/>
-    <p:sldId xmlns:r="http://schemas.openxmlformats.org/officeDocument/2006/relationships" id="258" r:id="Rfe125698198b4d57"/>
-    <p:sldId xmlns:r="http://schemas.openxmlformats.org/officeDocument/2006/relationships" id="259" r:id="R0c47c63c83da430c"/>
-    <p:sldId xmlns:r="http://schemas.openxmlformats.org/officeDocument/2006/relationships" id="260" r:id="Rc1b07e03f972457f"/>
-    <p:sldId xmlns:r="http://schemas.openxmlformats.org/officeDocument/2006/relationships" id="261" r:id="R25b9129847034fde"/>
-    <p:sldId xmlns:r="http://schemas.openxmlformats.org/officeDocument/2006/relationships" id="262" r:id="Re94f421dd5074239"/>
-    <p:sldId xmlns:r="http://schemas.openxmlformats.org/officeDocument/2006/relationships" id="263" r:id="Rb94fdd54cc2f4576"/>
-    <p:sldId xmlns:r="http://schemas.openxmlformats.org/officeDocument/2006/relationships" id="264" r:id="R5b3a2e52eb024e70"/>
-    <p:sldId xmlns:r="http://schemas.openxmlformats.org/officeDocument/2006/relationships" id="265" r:id="R2e677ca8e22d4ee9"/>
-    <p:sldId xmlns:r="http://schemas.openxmlformats.org/officeDocument/2006/relationships" id="266" r:id="R2398cdd98bb542ff"/>
-    <p:sldId xmlns:r="http://schemas.openxmlformats.org/officeDocument/2006/relationships" id="267" r:id="R9f7318af455542d0"/>
-    <p:sldId xmlns:r="http://schemas.openxmlformats.org/officeDocument/2006/relationships" id="268" r:id="Rbda3da48bc834d8b"/>
+    <p:sldId xmlns:r="http://schemas.openxmlformats.org/officeDocument/2006/relationships" id="256" r:id="Raced5d69cd504e88"/>
+    <p:sldId xmlns:r="http://schemas.openxmlformats.org/officeDocument/2006/relationships" id="257" r:id="R0bc6d80b224b44d6"/>
+    <p:sldId xmlns:r="http://schemas.openxmlformats.org/officeDocument/2006/relationships" id="258" r:id="Rb6a800993804479e"/>
+    <p:sldId xmlns:r="http://schemas.openxmlformats.org/officeDocument/2006/relationships" id="259" r:id="R1f0870ae51d0479e"/>
+    <p:sldId xmlns:r="http://schemas.openxmlformats.org/officeDocument/2006/relationships" id="260" r:id="R7b142fb6ba6f49d2"/>
+    <p:sldId xmlns:r="http://schemas.openxmlformats.org/officeDocument/2006/relationships" id="261" r:id="R2a28b2e69bc740ba"/>
+    <p:sldId xmlns:r="http://schemas.openxmlformats.org/officeDocument/2006/relationships" id="262" r:id="Rc5e2c768e8ac46da"/>
+    <p:sldId xmlns:r="http://schemas.openxmlformats.org/officeDocument/2006/relationships" id="263" r:id="Rf7b0b69976ea403a"/>
+    <p:sldId xmlns:r="http://schemas.openxmlformats.org/officeDocument/2006/relationships" id="264" r:id="R08cd01a4a04e473f"/>
+    <p:sldId xmlns:r="http://schemas.openxmlformats.org/officeDocument/2006/relationships" id="265" r:id="R5c61fdf9c1ac4669"/>
+    <p:sldId xmlns:r="http://schemas.openxmlformats.org/officeDocument/2006/relationships" id="266" r:id="Rf7779ca174324594"/>
+    <p:sldId xmlns:r="http://schemas.openxmlformats.org/officeDocument/2006/relationships" id="267" r:id="Rbec93c6bba8a4962"/>
+    <p:sldId xmlns:r="http://schemas.openxmlformats.org/officeDocument/2006/relationships" id="268" r:id="R8adb5ef998fc4961"/>
   </p:sldIdLst>
   <p:sldSz cx="12192000" cy="6858000"/>
   <p:notesSz cx="6858000" cy="9144000"/>
@@ -1405,7 +1405,7 @@
   </p:cSld>
   <p:clrMap bg1="lt1" tx1="dk1" bg2="lt2" tx2="dk2" accent1="accent1" accent2="accent2" accent3="accent3" accent4="accent4" accent5="accent5" accent6="accent6" hlink="hlink" folHlink="folHlink"/>
   <p:sldLayoutIdLst>
-    <p:sldLayoutId xmlns:r="http://schemas.openxmlformats.org/officeDocument/2006/relationships" id="2147483649" r:id="Rce44f1676c80414f"/>
+    <p:sldLayoutId xmlns:r="http://schemas.openxmlformats.org/officeDocument/2006/relationships" id="2147483649" r:id="Ra6b5e3fec14c4774"/>
   </p:sldLayoutIdLst>
   <p:txStyles>
     <p:titleStyle>
@@ -1956,7 +1956,7 @@
           <p:cNvPr id="1" name="cover-rule">
             <a:extLst xmlns:a="http://schemas.openxmlformats.org/drawingml/2006/main">
               <a:ext uri="{FF2B5EF4-FFF2-40B4-BE49-F238E27FC236}">
-                <a16:creationId xmlns:a16="http://schemas.microsoft.com/office/drawing/2014/main" id="{A7CEDAAD-D089-4BC3-8251-8F808CB3F0AE}"/>
+                <a16:creationId xmlns:a16="http://schemas.microsoft.com/office/drawing/2014/main" id="{D08B794C-2053-4045-B9F8-77D683F97ABC}"/>
               </a:ext>
             </a:extLst>
           </p:cNvPr>
@@ -1989,7 +1989,7 @@
           <p:cNvPr id="2" name="cover-ring-1">
             <a:extLst xmlns:a="http://schemas.openxmlformats.org/drawingml/2006/main">
               <a:ext uri="{FF2B5EF4-FFF2-40B4-BE49-F238E27FC236}">
-                <a16:creationId xmlns:a16="http://schemas.microsoft.com/office/drawing/2014/main" id="{700A9D12-BFE4-4508-8611-56B19DF685F5}"/>
+                <a16:creationId xmlns:a16="http://schemas.microsoft.com/office/drawing/2014/main" id="{E5148196-37BF-4A08-8228-4E8D02344859}"/>
               </a:ext>
             </a:extLst>
           </p:cNvPr>
@@ -2020,7 +2020,7 @@
           <p:cNvPr id="3" name="cover-ring-2">
             <a:extLst xmlns:a="http://schemas.openxmlformats.org/drawingml/2006/main">
               <a:ext uri="{FF2B5EF4-FFF2-40B4-BE49-F238E27FC236}">
-                <a16:creationId xmlns:a16="http://schemas.microsoft.com/office/drawing/2014/main" id="{102D41E6-E952-4D71-A270-D46D3320214C}"/>
+                <a16:creationId xmlns:a16="http://schemas.microsoft.com/office/drawing/2014/main" id="{4257C6DB-6784-46D3-9A40-F58A04832D69}"/>
               </a:ext>
             </a:extLst>
           </p:cNvPr>
@@ -2051,7 +2051,7 @@
           <p:cNvPr id="4" name="cover-core">
             <a:extLst xmlns:a="http://schemas.openxmlformats.org/drawingml/2006/main">
               <a:ext uri="{FF2B5EF4-FFF2-40B4-BE49-F238E27FC236}">
-                <a16:creationId xmlns:a16="http://schemas.microsoft.com/office/drawing/2014/main" id="{4918273C-68C2-4B40-9947-FF6117823279}"/>
+                <a16:creationId xmlns:a16="http://schemas.microsoft.com/office/drawing/2014/main" id="{02278054-5F02-4A8A-B914-2855F438CFB7}"/>
               </a:ext>
             </a:extLst>
           </p:cNvPr>
@@ -2084,7 +2084,7 @@
           <p:cNvPr id="5" name="cover-line-1">
             <a:extLst xmlns:a="http://schemas.openxmlformats.org/drawingml/2006/main">
               <a:ext uri="{FF2B5EF4-FFF2-40B4-BE49-F238E27FC236}">
-                <a16:creationId xmlns:a16="http://schemas.microsoft.com/office/drawing/2014/main" id="{0F88A1E7-33F3-4074-8EC5-13E69B61ECDF}"/>
+                <a16:creationId xmlns:a16="http://schemas.microsoft.com/office/drawing/2014/main" id="{C7C99866-AC8B-4DCD-8FCD-D046959872D8}"/>
               </a:ext>
             </a:extLst>
           </p:cNvPr>
@@ -2115,7 +2115,7 @@
           <p:cNvPr id="6" name="cover-line-2">
             <a:extLst xmlns:a="http://schemas.openxmlformats.org/drawingml/2006/main">
               <a:ext uri="{FF2B5EF4-FFF2-40B4-BE49-F238E27FC236}">
-                <a16:creationId xmlns:a16="http://schemas.microsoft.com/office/drawing/2014/main" id="{4E43F6D1-0B5D-45E7-99F5-E36420C635DB}"/>
+                <a16:creationId xmlns:a16="http://schemas.microsoft.com/office/drawing/2014/main" id="{E3B5D6A1-57EE-4D9B-B635-3BE1F5D05D80}"/>
               </a:ext>
             </a:extLst>
           </p:cNvPr>
@@ -2146,7 +2146,7 @@
           <p:cNvPr id="7" name="cover-eyebrow">
             <a:extLst xmlns:a="http://schemas.openxmlformats.org/drawingml/2006/main">
               <a:ext uri="{FF2B5EF4-FFF2-40B4-BE49-F238E27FC236}">
-                <a16:creationId xmlns:a16="http://schemas.microsoft.com/office/drawing/2014/main" id="{14699BC1-201F-4710-8A71-ED2D0B690F98}"/>
+                <a16:creationId xmlns:a16="http://schemas.microsoft.com/office/drawing/2014/main" id="{A923E4D5-CB56-473E-ADF8-12E570799EBB}"/>
               </a:ext>
             </a:extLst>
           </p:cNvPr>
@@ -2204,7 +2204,7 @@
           <p:cNvPr id="8" name="cover-title">
             <a:extLst xmlns:a="http://schemas.openxmlformats.org/drawingml/2006/main">
               <a:ext uri="{FF2B5EF4-FFF2-40B4-BE49-F238E27FC236}">
-                <a16:creationId xmlns:a16="http://schemas.microsoft.com/office/drawing/2014/main" id="{69C5936F-0369-4B54-98A2-E87B17368EE6}"/>
+                <a16:creationId xmlns:a16="http://schemas.microsoft.com/office/drawing/2014/main" id="{90D5330C-63FC-455D-A151-660483C86C19}"/>
               </a:ext>
             </a:extLst>
           </p:cNvPr>
@@ -2262,7 +2262,7 @@
           <p:cNvPr id="9" name="cover-subtitle">
             <a:extLst xmlns:a="http://schemas.openxmlformats.org/drawingml/2006/main">
               <a:ext uri="{FF2B5EF4-FFF2-40B4-BE49-F238E27FC236}">
-                <a16:creationId xmlns:a16="http://schemas.microsoft.com/office/drawing/2014/main" id="{15C655AE-C437-44D5-8790-225E6F907F5D}"/>
+                <a16:creationId xmlns:a16="http://schemas.microsoft.com/office/drawing/2014/main" id="{2303AB61-75E1-4E06-A1A7-DAD80591D980}"/>
               </a:ext>
             </a:extLst>
           </p:cNvPr>
@@ -2324,7 +2324,7 @@
           <p:cNvPr id="10" name="cover-lead">
             <a:extLst xmlns:a="http://schemas.openxmlformats.org/drawingml/2006/main">
               <a:ext uri="{FF2B5EF4-FFF2-40B4-BE49-F238E27FC236}">
-                <a16:creationId xmlns:a16="http://schemas.microsoft.com/office/drawing/2014/main" id="{601167B1-6C62-4682-966E-06C726518076}"/>
+                <a16:creationId xmlns:a16="http://schemas.microsoft.com/office/drawing/2014/main" id="{2ED482D8-32FD-4FD6-A8C8-8B1DE681FEB7}"/>
               </a:ext>
             </a:extLst>
           </p:cNvPr>
@@ -2372,7 +2372,7 @@
                 <a:ea typeface="PingFang SC"/>
                 <a:cs typeface="PingFang SC"/>
               </a:rPr>
-              <a:t>制造、能源与供应链连接着设备、人员、物料和连续运行的物理过程。这里的 AI 不能只在离线测试中“准确”，还要在不同工况、季节、班次和设备状态下稳定工作…</a:t>
+              <a:t>制造、能源与供应链连接着设备、人员、物料和连续运行的物理过程；这里的 AI 不能只在离线测试中“准确”；还要在不同工况、季节、班次和设备状态下稳定工作</a:t>
             </a:r>
           </a:p>
         </p:txBody>
@@ -2382,7 +2382,7 @@
           <p:cNvPr id="11" name="cover-course">
             <a:extLst xmlns:a="http://schemas.openxmlformats.org/drawingml/2006/main">
               <a:ext uri="{FF2B5EF4-FFF2-40B4-BE49-F238E27FC236}">
-                <a16:creationId xmlns:a16="http://schemas.microsoft.com/office/drawing/2014/main" id="{ECF72523-4FAD-43D2-A890-C29CE71034BB}"/>
+                <a16:creationId xmlns:a16="http://schemas.microsoft.com/office/drawing/2014/main" id="{36D5E00E-85F3-4DE7-B6D0-36F18B375390}"/>
               </a:ext>
             </a:extLst>
           </p:cNvPr>
@@ -2440,7 +2440,7 @@
           <p:cNvPr id="12" name="cover-id">
             <a:extLst xmlns:a="http://schemas.openxmlformats.org/drawingml/2006/main">
               <a:ext uri="{FF2B5EF4-FFF2-40B4-BE49-F238E27FC236}">
-                <a16:creationId xmlns:a16="http://schemas.microsoft.com/office/drawing/2014/main" id="{81B61E57-3B6A-4639-8227-97784585C96E}"/>
+                <a16:creationId xmlns:a16="http://schemas.microsoft.com/office/drawing/2014/main" id="{2AF297BB-5AE6-43F4-B30F-2750FF27B7F9}"/>
               </a:ext>
             </a:extLst>
           </p:cNvPr>
@@ -2496,7 +2496,7 @@
     </p:spTree>
     <p:extLst>
       <p:ext uri="{BB962C8B-B14F-4D97-AF65-F5344CB8AC3E}">
-        <p14:creationId xmlns:p14="http://schemas.microsoft.com/office/powerpoint/2010/main" val="149825355"/>
+        <p14:creationId xmlns:p14="http://schemas.microsoft.com/office/powerpoint/2010/main" val="1315661761"/>
       </p:ext>
     </p:extLst>
   </p:cSld>
@@ -2527,7 +2527,7 @@
           <p:cNvPr id="1" name="s10-rule">
             <a:extLst xmlns:a="http://schemas.openxmlformats.org/drawingml/2006/main">
               <a:ext uri="{FF2B5EF4-FFF2-40B4-BE49-F238E27FC236}">
-                <a16:creationId xmlns:a16="http://schemas.microsoft.com/office/drawing/2014/main" id="{ED6B67CD-BD3D-4184-A31C-974CC3C89F11}"/>
+                <a16:creationId xmlns:a16="http://schemas.microsoft.com/office/drawing/2014/main" id="{42425259-BEED-4E19-9608-562F854E2A42}"/>
               </a:ext>
             </a:extLst>
           </p:cNvPr>
@@ -2560,7 +2560,7 @@
           <p:cNvPr id="2" name="s10-eyebrow">
             <a:extLst xmlns:a="http://schemas.openxmlformats.org/drawingml/2006/main">
               <a:ext uri="{FF2B5EF4-FFF2-40B4-BE49-F238E27FC236}">
-                <a16:creationId xmlns:a16="http://schemas.microsoft.com/office/drawing/2014/main" id="{CC7FADBF-58CD-4D0A-9A9B-565F7ECE6D7F}"/>
+                <a16:creationId xmlns:a16="http://schemas.microsoft.com/office/drawing/2014/main" id="{2BB84781-7985-4518-8696-FC60DB3D69DA}"/>
               </a:ext>
             </a:extLst>
           </p:cNvPr>
@@ -2618,7 +2618,7 @@
           <p:cNvPr id="3" name="s10-title">
             <a:extLst xmlns:a="http://schemas.openxmlformats.org/drawingml/2006/main">
               <a:ext uri="{FF2B5EF4-FFF2-40B4-BE49-F238E27FC236}">
-                <a16:creationId xmlns:a16="http://schemas.microsoft.com/office/drawing/2014/main" id="{D0350DA3-7CE8-4384-81ED-DBF57B068D0A}"/>
+                <a16:creationId xmlns:a16="http://schemas.microsoft.com/office/drawing/2014/main" id="{234893D7-F90C-4D24-854C-D6A0249BD7EB}"/>
               </a:ext>
             </a:extLst>
           </p:cNvPr>
@@ -2643,7 +2643,7 @@
         </p:spPr>
         <p:txBody>
           <a:bodyPr xmlns:a="http://schemas.openxmlformats.org/drawingml/2006/main" lIns="0" tIns="0" rIns="0" bIns="0" anchor="ctr">
-            <a:normAutofit fontScale="84097"/>
+            <a:normAutofit fontScale="100000"/>
           </a:bodyPr>
           <a:lstStyle xmlns:a="http://schemas.openxmlformats.org/drawingml/2006/main"/>
           <a:p xmlns:a="http://schemas.openxmlformats.org/drawingml/2006/main">
@@ -2666,7 +2666,7 @@
                 <a:ea typeface="PingFang SC"/>
                 <a:cs typeface="PingFang SC"/>
               </a:rPr>
-              <a:t>生产、能源和采购负责人比较方案，不让单一成本指标自动决定排程</a:t>
+              <a:t>能源与供应风险不能由单一成本指标决策</a:t>
             </a:r>
           </a:p>
         </p:txBody>
@@ -2676,7 +2676,7 @@
           <p:cNvPr id="4" name="s10-footer">
             <a:extLst xmlns:a="http://schemas.openxmlformats.org/drawingml/2006/main">
               <a:ext uri="{FF2B5EF4-FFF2-40B4-BE49-F238E27FC236}">
-                <a16:creationId xmlns:a16="http://schemas.microsoft.com/office/drawing/2014/main" id="{A02121E4-3780-425E-B0CC-8BB1442DC714}"/>
+                <a16:creationId xmlns:a16="http://schemas.microsoft.com/office/drawing/2014/main" id="{790AD0AD-7AF3-4AAA-B172-F3D79B73532E}"/>
               </a:ext>
             </a:extLst>
           </p:cNvPr>
@@ -2707,7 +2707,7 @@
           <p:cNvPr id="5" name="s10-identity">
             <a:extLst xmlns:a="http://schemas.openxmlformats.org/drawingml/2006/main">
               <a:ext uri="{FF2B5EF4-FFF2-40B4-BE49-F238E27FC236}">
-                <a16:creationId xmlns:a16="http://schemas.microsoft.com/office/drawing/2014/main" id="{0971714A-4420-4215-9ADE-CED082B50C85}"/>
+                <a16:creationId xmlns:a16="http://schemas.microsoft.com/office/drawing/2014/main" id="{A9B84E15-4CA5-470D-962B-8A82C75975D0}"/>
               </a:ext>
             </a:extLst>
           </p:cNvPr>
@@ -2765,7 +2765,7 @@
           <p:cNvPr id="6" name="case-title">
             <a:extLst xmlns:a="http://schemas.openxmlformats.org/drawingml/2006/main">
               <a:ext uri="{FF2B5EF4-FFF2-40B4-BE49-F238E27FC236}">
-                <a16:creationId xmlns:a16="http://schemas.microsoft.com/office/drawing/2014/main" id="{ABF50264-2C99-4FEC-971F-8FED3A0814D6}"/>
+                <a16:creationId xmlns:a16="http://schemas.microsoft.com/office/drawing/2014/main" id="{0170189E-B20E-4D6D-A09F-F66DF6247E12}"/>
               </a:ext>
             </a:extLst>
           </p:cNvPr>
@@ -2829,23 +2829,23 @@
           <p:cNvPr id="7" name="case-row-0">
             <a:extLst xmlns:a="http://schemas.openxmlformats.org/drawingml/2006/main">
               <a:ext uri="{FF2B5EF4-FFF2-40B4-BE49-F238E27FC236}">
-                <a16:creationId xmlns:a16="http://schemas.microsoft.com/office/drawing/2014/main" id="{2FBD8F9E-A0A8-4265-BECD-E52260AC7642}"/>
-              </a:ext>
-            </a:extLst>
-          </p:cNvPr>
-          <p:cNvSpPr>
-            <a:spLocks xmlns:a="http://schemas.openxmlformats.org/drawingml/2006/main" noGrp="1"/>
-          </p:cNvSpPr>
-          <p:nvPr/>
-        </p:nvSpPr>
-        <p:spPr>
-          <a:xfrm xmlns:a="http://schemas.openxmlformats.org/drawingml/2006/main">
-            <a:off x="4286250" y="2228850"/>
-            <a:ext cx="6534150" cy="1238250"/>
+                <a16:creationId xmlns:a16="http://schemas.microsoft.com/office/drawing/2014/main" id="{C049DAF9-1028-476C-A5FB-F84E62AD3722}"/>
+              </a:ext>
+            </a:extLst>
+          </p:cNvPr>
+          <p:cNvSpPr>
+            <a:spLocks xmlns:a="http://schemas.openxmlformats.org/drawingml/2006/main" noGrp="1"/>
+          </p:cNvSpPr>
+          <p:nvPr/>
+        </p:nvSpPr>
+        <p:spPr>
+          <a:xfrm xmlns:a="http://schemas.openxmlformats.org/drawingml/2006/main">
+            <a:off x="4286250" y="2057400"/>
+            <a:ext cx="6534150" cy="838200"/>
           </a:xfrm>
           <a:prstGeom xmlns:a="http://schemas.openxmlformats.org/drawingml/2006/main" prst="roundRect">
             <a:avLst>
-              <a:gd name="adj" fmla="val 10000"/>
+              <a:gd name="adj" fmla="val 14773"/>
             </a:avLst>
           </a:prstGeom>
           <a:solidFill xmlns:a="http://schemas.openxmlformats.org/drawingml/2006/main">
@@ -2893,23 +2893,87 @@
           <p:cNvPr id="8" name="case-row-1">
             <a:extLst xmlns:a="http://schemas.openxmlformats.org/drawingml/2006/main">
               <a:ext uri="{FF2B5EF4-FFF2-40B4-BE49-F238E27FC236}">
-                <a16:creationId xmlns:a16="http://schemas.microsoft.com/office/drawing/2014/main" id="{7C96B4D4-0AF0-455A-A8A1-13303358767D}"/>
-              </a:ext>
-            </a:extLst>
-          </p:cNvPr>
-          <p:cNvSpPr>
-            <a:spLocks xmlns:a="http://schemas.openxmlformats.org/drawingml/2006/main" noGrp="1"/>
-          </p:cNvSpPr>
-          <p:nvPr/>
-        </p:nvSpPr>
-        <p:spPr>
-          <a:xfrm xmlns:a="http://schemas.openxmlformats.org/drawingml/2006/main">
-            <a:off x="4286250" y="3714750"/>
-            <a:ext cx="6534150" cy="1238250"/>
+                <a16:creationId xmlns:a16="http://schemas.microsoft.com/office/drawing/2014/main" id="{2E39512C-D6B6-4F15-B881-49AC75A8585E}"/>
+              </a:ext>
+            </a:extLst>
+          </p:cNvPr>
+          <p:cNvSpPr>
+            <a:spLocks xmlns:a="http://schemas.openxmlformats.org/drawingml/2006/main" noGrp="1"/>
+          </p:cNvSpPr>
+          <p:nvPr/>
+        </p:nvSpPr>
+        <p:spPr>
+          <a:xfrm xmlns:a="http://schemas.openxmlformats.org/drawingml/2006/main">
+            <a:off x="4286250" y="3086100"/>
+            <a:ext cx="6534150" cy="838200"/>
           </a:xfrm>
           <a:prstGeom xmlns:a="http://schemas.openxmlformats.org/drawingml/2006/main" prst="roundRect">
             <a:avLst>
-              <a:gd name="adj" fmla="val 10000"/>
+              <a:gd name="adj" fmla="val 14773"/>
+            </a:avLst>
+          </a:prstGeom>
+          <a:solidFill xmlns:a="http://schemas.openxmlformats.org/drawingml/2006/main">
+            <a:srgbClr val="FFFFFF"/>
+          </a:solidFill>
+          <a:ln xmlns:a="http://schemas.openxmlformats.org/drawingml/2006/main" w="9525">
+            <a:solidFill>
+              <a:srgbClr val="D8E0E8"/>
+            </a:solidFill>
+            <a:prstDash val="solid"/>
+          </a:ln>
+        </p:spPr>
+        <p:txBody>
+          <a:bodyPr xmlns:a="http://schemas.openxmlformats.org/drawingml/2006/main" lIns="152400" tIns="133350" rIns="152400" bIns="133350" anchor="ctr">
+            <a:normAutofit fontScale="100000"/>
+          </a:bodyPr>
+          <a:lstStyle xmlns:a="http://schemas.openxmlformats.org/drawingml/2006/main"/>
+          <a:p xmlns:a="http://schemas.openxmlformats.org/drawingml/2006/main">
+            <a:pPr algn="l">
+              <a:defRPr sz="1575" b="0">
+                <a:solidFill>
+                  <a:srgbClr val="10233F"/>
+                </a:solidFill>
+                <a:latin typeface="PingFang SC"/>
+                <a:ea typeface="PingFang SC"/>
+                <a:cs typeface="PingFang SC"/>
+              </a:defRPr>
+            </a:pPr>
+            <a:r>
+              <a:rPr sz="1575" b="0">
+                <a:solidFill>
+                  <a:srgbClr val="10233F"/>
+                </a:solidFill>
+                <a:latin typeface="PingFang SC"/>
+                <a:ea typeface="PingFang SC"/>
+                <a:cs typeface="PingFang SC"/>
+              </a:rPr>
+              <a:t>方案｜系统生成多个满足设备、交期、库存与能源约束的排程，标明每个方案的假设和脆弱点</a:t>
+            </a:r>
+          </a:p>
+        </p:txBody>
+      </p:sp>
+      <p:sp>
+        <p:nvSpPr>
+          <p:cNvPr id="9" name="case-row-2">
+            <a:extLst xmlns:a="http://schemas.openxmlformats.org/drawingml/2006/main">
+              <a:ext uri="{FF2B5EF4-FFF2-40B4-BE49-F238E27FC236}">
+                <a16:creationId xmlns:a16="http://schemas.microsoft.com/office/drawing/2014/main" id="{CE8FC798-3FD7-4606-A11C-0872C24A5E6E}"/>
+              </a:ext>
+            </a:extLst>
+          </p:cNvPr>
+          <p:cNvSpPr>
+            <a:spLocks xmlns:a="http://schemas.openxmlformats.org/drawingml/2006/main" noGrp="1"/>
+          </p:cNvSpPr>
+          <p:nvPr/>
+        </p:nvSpPr>
+        <p:spPr>
+          <a:xfrm xmlns:a="http://schemas.openxmlformats.org/drawingml/2006/main">
+            <a:off x="4286250" y="4114800"/>
+            <a:ext cx="6534150" cy="838200"/>
+          </a:xfrm>
+          <a:prstGeom xmlns:a="http://schemas.openxmlformats.org/drawingml/2006/main" prst="roundRect">
+            <a:avLst>
+              <a:gd name="adj" fmla="val 14773"/>
             </a:avLst>
           </a:prstGeom>
           <a:solidFill xmlns:a="http://schemas.openxmlformats.org/drawingml/2006/main">
@@ -2917,7 +2981,7 @@
           </a:solidFill>
           <a:ln xmlns:a="http://schemas.openxmlformats.org/drawingml/2006/main" w="9525">
             <a:solidFill>
-              <a:srgbClr val="E5783F"/>
+              <a:srgbClr val="9A3F16"/>
             </a:solidFill>
             <a:prstDash val="solid"/>
           </a:ln>
@@ -2947,17 +3011,17 @@
                 <a:ea typeface="PingFang SC"/>
                 <a:cs typeface="PingFang SC"/>
               </a:rPr>
-              <a:t>验证｜验收“能耗与供应风险联合决策”时，要同时记录适用场景、证据来源、失败条件与人工责任</a:t>
-            </a:r>
-          </a:p>
-        </p:txBody>
-      </p:sp>
-      <p:sp>
-        <p:nvSpPr>
-          <p:cNvPr id="9" name="s10-takeaway-rule">
-            <a:extLst xmlns:a="http://schemas.openxmlformats.org/drawingml/2006/main">
-              <a:ext uri="{FF2B5EF4-FFF2-40B4-BE49-F238E27FC236}">
-                <a16:creationId xmlns:a16="http://schemas.microsoft.com/office/drawing/2014/main" id="{30E42AF1-2DDD-4779-B05D-4D5D91259DAF}"/>
+              <a:t>决策｜生产、能源和采购负责人比较方案，不让单一成本指标自动决定排程；外部条件变化后重新计算并保留原计划回退</a:t>
+            </a:r>
+          </a:p>
+        </p:txBody>
+      </p:sp>
+      <p:sp>
+        <p:nvSpPr>
+          <p:cNvPr id="10" name="s10-takeaway-rule">
+            <a:extLst xmlns:a="http://schemas.openxmlformats.org/drawingml/2006/main">
+              <a:ext uri="{FF2B5EF4-FFF2-40B4-BE49-F238E27FC236}">
+                <a16:creationId xmlns:a16="http://schemas.microsoft.com/office/drawing/2014/main" id="{0EACB684-D88E-495C-8AF1-F95272FD8DA0}"/>
               </a:ext>
             </a:extLst>
           </p:cNvPr>
@@ -2987,10 +3051,10 @@
       </p:sp>
       <p:sp>
         <p:nvSpPr>
-          <p:cNvPr id="10" name="s10-takeaway">
-            <a:extLst xmlns:a="http://schemas.openxmlformats.org/drawingml/2006/main">
-              <a:ext uri="{FF2B5EF4-FFF2-40B4-BE49-F238E27FC236}">
-                <a16:creationId xmlns:a16="http://schemas.microsoft.com/office/drawing/2014/main" id="{0C55D031-D44B-40B3-873F-66C3D1B94898}"/>
+          <p:cNvPr id="11" name="s10-takeaway">
+            <a:extLst xmlns:a="http://schemas.openxmlformats.org/drawingml/2006/main">
+              <a:ext uri="{FF2B5EF4-FFF2-40B4-BE49-F238E27FC236}">
+                <a16:creationId xmlns:a16="http://schemas.microsoft.com/office/drawing/2014/main" id="{B2B8D213-EBDF-424A-86B2-415635B2759F}"/>
               </a:ext>
             </a:extLst>
           </p:cNvPr>
@@ -3038,7 +3102,7 @@
                 <a:ea typeface="PingFang SC"/>
                 <a:cs typeface="PingFang SC"/>
               </a:rPr>
-              <a:t>生产、能源和采购负责人比较方案，不让单一成本指标自动决定排程</a:t>
+              <a:t>能源与供应风险不能由单一成本指标决策</a:t>
             </a:r>
           </a:p>
         </p:txBody>
@@ -3046,7 +3110,7 @@
     </p:spTree>
     <p:extLst>
       <p:ext uri="{BB962C8B-B14F-4D97-AF65-F5344CB8AC3E}">
-        <p14:creationId xmlns:p14="http://schemas.microsoft.com/office/powerpoint/2010/main" val="2010112089"/>
+        <p14:creationId xmlns:p14="http://schemas.microsoft.com/office/powerpoint/2010/main" val="1257323974"/>
       </p:ext>
     </p:extLst>
   </p:cSld>
@@ -3077,7 +3141,7 @@
           <p:cNvPr id="1" name="s11-rule">
             <a:extLst xmlns:a="http://schemas.openxmlformats.org/drawingml/2006/main">
               <a:ext uri="{FF2B5EF4-FFF2-40B4-BE49-F238E27FC236}">
-                <a16:creationId xmlns:a16="http://schemas.microsoft.com/office/drawing/2014/main" id="{4167331C-52C0-48AD-A27F-058AAE935CFB}"/>
+                <a16:creationId xmlns:a16="http://schemas.microsoft.com/office/drawing/2014/main" id="{6BD14A60-FD1E-4800-9EAB-7F963F24F604}"/>
               </a:ext>
             </a:extLst>
           </p:cNvPr>
@@ -3110,7 +3174,7 @@
           <p:cNvPr id="2" name="s11-eyebrow">
             <a:extLst xmlns:a="http://schemas.openxmlformats.org/drawingml/2006/main">
               <a:ext uri="{FF2B5EF4-FFF2-40B4-BE49-F238E27FC236}">
-                <a16:creationId xmlns:a16="http://schemas.microsoft.com/office/drawing/2014/main" id="{3DADA25A-C919-4BF0-A201-5694D44E928B}"/>
+                <a16:creationId xmlns:a16="http://schemas.microsoft.com/office/drawing/2014/main" id="{2583BE81-C5A6-4581-B8EB-B16251BF8643}"/>
               </a:ext>
             </a:extLst>
           </p:cNvPr>
@@ -3168,7 +3232,7 @@
           <p:cNvPr id="3" name="s11-title">
             <a:extLst xmlns:a="http://schemas.openxmlformats.org/drawingml/2006/main">
               <a:ext uri="{FF2B5EF4-FFF2-40B4-BE49-F238E27FC236}">
-                <a16:creationId xmlns:a16="http://schemas.microsoft.com/office/drawing/2014/main" id="{12454E23-7981-4D4C-BEE3-1B9E06970492}"/>
+                <a16:creationId xmlns:a16="http://schemas.microsoft.com/office/drawing/2014/main" id="{2357B46A-F195-4520-93E7-BCC5876BAF3D}"/>
               </a:ext>
             </a:extLst>
           </p:cNvPr>
@@ -3216,7 +3280,7 @@
                 <a:ea typeface="PingFang SC"/>
                 <a:cs typeface="PingFang SC"/>
               </a:rPr>
-              <a:t>把方法落实为可验证的行动</a:t>
+              <a:t>制造、能源与供应链：一次可验收练习</a:t>
             </a:r>
           </a:p>
         </p:txBody>
@@ -3226,7 +3290,7 @@
           <p:cNvPr id="4" name="s11-footer">
             <a:extLst xmlns:a="http://schemas.openxmlformats.org/drawingml/2006/main">
               <a:ext uri="{FF2B5EF4-FFF2-40B4-BE49-F238E27FC236}">
-                <a16:creationId xmlns:a16="http://schemas.microsoft.com/office/drawing/2014/main" id="{D15874E7-92A1-48CB-A878-EEE309EFBF0E}"/>
+                <a16:creationId xmlns:a16="http://schemas.microsoft.com/office/drawing/2014/main" id="{9FC1292F-A670-41A3-BAA9-8ABF5591052A}"/>
               </a:ext>
             </a:extLst>
           </p:cNvPr>
@@ -3257,7 +3321,7 @@
           <p:cNvPr id="5" name="s11-identity">
             <a:extLst xmlns:a="http://schemas.openxmlformats.org/drawingml/2006/main">
               <a:ext uri="{FF2B5EF4-FFF2-40B4-BE49-F238E27FC236}">
-                <a16:creationId xmlns:a16="http://schemas.microsoft.com/office/drawing/2014/main" id="{D972A12F-1E1C-469A-AA62-8FC979D57D12}"/>
+                <a16:creationId xmlns:a16="http://schemas.microsoft.com/office/drawing/2014/main" id="{D85DD1EE-B5E0-471A-9C35-403D001EB723}"/>
               </a:ext>
             </a:extLst>
           </p:cNvPr>
@@ -3315,7 +3379,7 @@
           <p:cNvPr id="6" name="practice-circle-0">
             <a:extLst xmlns:a="http://schemas.openxmlformats.org/drawingml/2006/main">
               <a:ext uri="{FF2B5EF4-FFF2-40B4-BE49-F238E27FC236}">
-                <a16:creationId xmlns:a16="http://schemas.microsoft.com/office/drawing/2014/main" id="{33218486-F2D7-4685-A6E1-86B437805B84}"/>
+                <a16:creationId xmlns:a16="http://schemas.microsoft.com/office/drawing/2014/main" id="{4D10CAF8-F414-493C-9C2A-F364E0744EAD}"/>
               </a:ext>
             </a:extLst>
           </p:cNvPr>
@@ -3348,7 +3412,7 @@
           <p:cNvPr id="7" name="practice-number-0">
             <a:extLst xmlns:a="http://schemas.openxmlformats.org/drawingml/2006/main">
               <a:ext uri="{FF2B5EF4-FFF2-40B4-BE49-F238E27FC236}">
-                <a16:creationId xmlns:a16="http://schemas.microsoft.com/office/drawing/2014/main" id="{0928E0D3-2649-4394-835B-1D0C5BECF66B}"/>
+                <a16:creationId xmlns:a16="http://schemas.microsoft.com/office/drawing/2014/main" id="{402E7EF8-7AD0-482A-96FC-CC325E86BC1E}"/>
               </a:ext>
             </a:extLst>
           </p:cNvPr>
@@ -3406,7 +3470,7 @@
           <p:cNvPr id="8" name="practice-item-0">
             <a:extLst xmlns:a="http://schemas.openxmlformats.org/drawingml/2006/main">
               <a:ext uri="{FF2B5EF4-FFF2-40B4-BE49-F238E27FC236}">
-                <a16:creationId xmlns:a16="http://schemas.microsoft.com/office/drawing/2014/main" id="{208F58EC-1018-4421-B6FB-4EB2FB07C560}"/>
+                <a16:creationId xmlns:a16="http://schemas.microsoft.com/office/drawing/2014/main" id="{678A6524-52CA-4959-B9A7-4ED3A026AC39}"/>
               </a:ext>
             </a:extLst>
           </p:cNvPr>
@@ -3470,7 +3534,7 @@
           <p:cNvPr id="9" name="practice-connector-0">
             <a:extLst xmlns:a="http://schemas.openxmlformats.org/drawingml/2006/main">
               <a:ext uri="{FF2B5EF4-FFF2-40B4-BE49-F238E27FC236}">
-                <a16:creationId xmlns:a16="http://schemas.microsoft.com/office/drawing/2014/main" id="{B66551D9-F955-493B-AD20-4A4B180DA76B}"/>
+                <a16:creationId xmlns:a16="http://schemas.microsoft.com/office/drawing/2014/main" id="{F1F8CE07-3C02-4B42-853C-229C8DC87A0A}"/>
               </a:ext>
             </a:extLst>
           </p:cNvPr>
@@ -3490,7 +3554,7 @@
           <a:noFill xmlns:a="http://schemas.openxmlformats.org/drawingml/2006/main"/>
           <a:ln xmlns:a="http://schemas.openxmlformats.org/drawingml/2006/main" w="28575">
             <a:solidFill>
-              <a:srgbClr val="E5783F"/>
+              <a:srgbClr val="9A3F16"/>
             </a:solidFill>
             <a:prstDash val="solid"/>
           </a:ln>
@@ -3501,7 +3565,7 @@
           <p:cNvPr id="10" name="practice-circle-1">
             <a:extLst xmlns:a="http://schemas.openxmlformats.org/drawingml/2006/main">
               <a:ext uri="{FF2B5EF4-FFF2-40B4-BE49-F238E27FC236}">
-                <a16:creationId xmlns:a16="http://schemas.microsoft.com/office/drawing/2014/main" id="{74C17F0E-F90C-4873-92C9-E3A65553BA7F}"/>
+                <a16:creationId xmlns:a16="http://schemas.microsoft.com/office/drawing/2014/main" id="{C22D987E-395A-40D9-8791-30323B8B25BD}"/>
               </a:ext>
             </a:extLst>
           </p:cNvPr>
@@ -3534,7 +3598,7 @@
           <p:cNvPr id="11" name="practice-number-1">
             <a:extLst xmlns:a="http://schemas.openxmlformats.org/drawingml/2006/main">
               <a:ext uri="{FF2B5EF4-FFF2-40B4-BE49-F238E27FC236}">
-                <a16:creationId xmlns:a16="http://schemas.microsoft.com/office/drawing/2014/main" id="{484364A7-46AF-4A2A-86BE-EE3A0E2E8021}"/>
+                <a16:creationId xmlns:a16="http://schemas.microsoft.com/office/drawing/2014/main" id="{A30C062F-46C8-4214-8E94-9AF3FC309FB3}"/>
               </a:ext>
             </a:extLst>
           </p:cNvPr>
@@ -3592,7 +3656,7 @@
           <p:cNvPr id="12" name="practice-item-1">
             <a:extLst xmlns:a="http://schemas.openxmlformats.org/drawingml/2006/main">
               <a:ext uri="{FF2B5EF4-FFF2-40B4-BE49-F238E27FC236}">
-                <a16:creationId xmlns:a16="http://schemas.microsoft.com/office/drawing/2014/main" id="{D61359FD-2843-41E5-B27A-CDD40B49118B}"/>
+                <a16:creationId xmlns:a16="http://schemas.microsoft.com/office/drawing/2014/main" id="{14331E08-0A44-48AF-BEE0-F69D92694ECF}"/>
               </a:ext>
             </a:extLst>
           </p:cNvPr>
@@ -3656,7 +3720,7 @@
           <p:cNvPr id="13" name="practice-connector-1">
             <a:extLst xmlns:a="http://schemas.openxmlformats.org/drawingml/2006/main">
               <a:ext uri="{FF2B5EF4-FFF2-40B4-BE49-F238E27FC236}">
-                <a16:creationId xmlns:a16="http://schemas.microsoft.com/office/drawing/2014/main" id="{E875D2FF-29B7-4352-9C20-91E64F7BD65E}"/>
+                <a16:creationId xmlns:a16="http://schemas.microsoft.com/office/drawing/2014/main" id="{4A83A19A-B758-4789-B27C-A906ED9615C0}"/>
               </a:ext>
             </a:extLst>
           </p:cNvPr>
@@ -3676,7 +3740,7 @@
           <a:noFill xmlns:a="http://schemas.openxmlformats.org/drawingml/2006/main"/>
           <a:ln xmlns:a="http://schemas.openxmlformats.org/drawingml/2006/main" w="28575">
             <a:solidFill>
-              <a:srgbClr val="E5783F"/>
+              <a:srgbClr val="9A3F16"/>
             </a:solidFill>
             <a:prstDash val="solid"/>
           </a:ln>
@@ -3687,7 +3751,7 @@
           <p:cNvPr id="14" name="practice-circle-2">
             <a:extLst xmlns:a="http://schemas.openxmlformats.org/drawingml/2006/main">
               <a:ext uri="{FF2B5EF4-FFF2-40B4-BE49-F238E27FC236}">
-                <a16:creationId xmlns:a16="http://schemas.microsoft.com/office/drawing/2014/main" id="{C8408E3E-2E71-4FF2-9931-F753E6FD6307}"/>
+                <a16:creationId xmlns:a16="http://schemas.microsoft.com/office/drawing/2014/main" id="{FEDB40E5-B2E5-4C23-B6C8-BAC8341AAFF1}"/>
               </a:ext>
             </a:extLst>
           </p:cNvPr>
@@ -3705,7 +3769,7 @@
             <a:avLst/>
           </a:prstGeom>
           <a:solidFill xmlns:a="http://schemas.openxmlformats.org/drawingml/2006/main">
-            <a:srgbClr val="E5783F"/>
+            <a:srgbClr val="9A3F16"/>
           </a:solidFill>
           <a:ln xmlns:a="http://schemas.openxmlformats.org/drawingml/2006/main" w="28575">
             <a:solidFill>
@@ -3720,7 +3784,7 @@
           <p:cNvPr id="15" name="practice-number-2">
             <a:extLst xmlns:a="http://schemas.openxmlformats.org/drawingml/2006/main">
               <a:ext uri="{FF2B5EF4-FFF2-40B4-BE49-F238E27FC236}">
-                <a16:creationId xmlns:a16="http://schemas.microsoft.com/office/drawing/2014/main" id="{C9505150-0774-498C-9C9A-E509E89F98D8}"/>
+                <a16:creationId xmlns:a16="http://schemas.microsoft.com/office/drawing/2014/main" id="{AF56969B-0DC2-4BD3-9BBE-15268837CF6B}"/>
               </a:ext>
             </a:extLst>
           </p:cNvPr>
@@ -3778,7 +3842,7 @@
           <p:cNvPr id="16" name="practice-item-2">
             <a:extLst xmlns:a="http://schemas.openxmlformats.org/drawingml/2006/main">
               <a:ext uri="{FF2B5EF4-FFF2-40B4-BE49-F238E27FC236}">
-                <a16:creationId xmlns:a16="http://schemas.microsoft.com/office/drawing/2014/main" id="{1C556B4B-86FF-49A7-A953-DDE2A413A359}"/>
+                <a16:creationId xmlns:a16="http://schemas.microsoft.com/office/drawing/2014/main" id="{ACB59018-6574-4D05-949B-960B88759177}"/>
               </a:ext>
             </a:extLst>
           </p:cNvPr>
@@ -3802,7 +3866,7 @@
           </a:solidFill>
           <a:ln xmlns:a="http://schemas.openxmlformats.org/drawingml/2006/main" w="19050">
             <a:solidFill>
-              <a:srgbClr val="E5783F"/>
+              <a:srgbClr val="9A3F16"/>
             </a:solidFill>
             <a:prstDash val="solid"/>
           </a:ln>
@@ -3840,7 +3904,7 @@
     </p:spTree>
     <p:extLst>
       <p:ext uri="{BB962C8B-B14F-4D97-AF65-F5344CB8AC3E}">
-        <p14:creationId xmlns:p14="http://schemas.microsoft.com/office/powerpoint/2010/main" val="1364070900"/>
+        <p14:creationId xmlns:p14="http://schemas.microsoft.com/office/powerpoint/2010/main" val="1012925588"/>
       </p:ext>
     </p:extLst>
   </p:cSld>
@@ -3871,7 +3935,7 @@
           <p:cNvPr id="1" name="s12-rule">
             <a:extLst xmlns:a="http://schemas.openxmlformats.org/drawingml/2006/main">
               <a:ext uri="{FF2B5EF4-FFF2-40B4-BE49-F238E27FC236}">
-                <a16:creationId xmlns:a16="http://schemas.microsoft.com/office/drawing/2014/main" id="{C91E32E5-4EC9-436C-86CA-1CDCEE0EF55E}"/>
+                <a16:creationId xmlns:a16="http://schemas.microsoft.com/office/drawing/2014/main" id="{74C7E533-76BE-48B9-945B-9342E01D2FEC}"/>
               </a:ext>
             </a:extLst>
           </p:cNvPr>
@@ -3904,7 +3968,7 @@
           <p:cNvPr id="2" name="s12-eyebrow">
             <a:extLst xmlns:a="http://schemas.openxmlformats.org/drawingml/2006/main">
               <a:ext uri="{FF2B5EF4-FFF2-40B4-BE49-F238E27FC236}">
-                <a16:creationId xmlns:a16="http://schemas.microsoft.com/office/drawing/2014/main" id="{2745FAFA-EEE0-440D-A27F-0B3BCB6A55F7}"/>
+                <a16:creationId xmlns:a16="http://schemas.microsoft.com/office/drawing/2014/main" id="{FBE27A92-0817-4AC7-BAF6-9FC73306DE7A}"/>
               </a:ext>
             </a:extLst>
           </p:cNvPr>
@@ -3962,7 +4026,7 @@
           <p:cNvPr id="3" name="s12-title">
             <a:extLst xmlns:a="http://schemas.openxmlformats.org/drawingml/2006/main">
               <a:ext uri="{FF2B5EF4-FFF2-40B4-BE49-F238E27FC236}">
-                <a16:creationId xmlns:a16="http://schemas.microsoft.com/office/drawing/2014/main" id="{56C7AA6A-95E1-4851-9923-8B1F969F9ED9}"/>
+                <a16:creationId xmlns:a16="http://schemas.microsoft.com/office/drawing/2014/main" id="{A055B616-BE2A-423E-ABE8-1CFA3A74AC89}"/>
               </a:ext>
             </a:extLst>
           </p:cNvPr>
@@ -4010,7 +4074,7 @@
                 <a:ea typeface="PingFang SC"/>
                 <a:cs typeface="PingFang SC"/>
               </a:rPr>
-              <a:t>带走三条可复用的判断原则</a:t>
+              <a:t>制造、能源与供应链：判断时先抓住三点</a:t>
             </a:r>
           </a:p>
         </p:txBody>
@@ -4020,7 +4084,7 @@
           <p:cNvPr id="4" name="s12-footer">
             <a:extLst xmlns:a="http://schemas.openxmlformats.org/drawingml/2006/main">
               <a:ext uri="{FF2B5EF4-FFF2-40B4-BE49-F238E27FC236}">
-                <a16:creationId xmlns:a16="http://schemas.microsoft.com/office/drawing/2014/main" id="{D2E9602E-1E3A-4833-B1CF-CAF3994682A4}"/>
+                <a16:creationId xmlns:a16="http://schemas.microsoft.com/office/drawing/2014/main" id="{356120CA-60AC-4664-A099-8C6A40951F51}"/>
               </a:ext>
             </a:extLst>
           </p:cNvPr>
@@ -4051,7 +4115,7 @@
           <p:cNvPr id="5" name="s12-identity">
             <a:extLst xmlns:a="http://schemas.openxmlformats.org/drawingml/2006/main">
               <a:ext uri="{FF2B5EF4-FFF2-40B4-BE49-F238E27FC236}">
-                <a16:creationId xmlns:a16="http://schemas.microsoft.com/office/drawing/2014/main" id="{A5098228-6D00-42E3-A36C-1C876D4B039A}"/>
+                <a16:creationId xmlns:a16="http://schemas.microsoft.com/office/drawing/2014/main" id="{CC5B816D-A287-4A1E-B4C6-DA4C719AEAE4}"/>
               </a:ext>
             </a:extLst>
           </p:cNvPr>
@@ -4109,7 +4173,7 @@
           <p:cNvPr id="6" name="recap-circle-0">
             <a:extLst xmlns:a="http://schemas.openxmlformats.org/drawingml/2006/main">
               <a:ext uri="{FF2B5EF4-FFF2-40B4-BE49-F238E27FC236}">
-                <a16:creationId xmlns:a16="http://schemas.microsoft.com/office/drawing/2014/main" id="{9FA05AFE-0DC6-4E6F-B1CB-42C8C37D9ABD}"/>
+                <a16:creationId xmlns:a16="http://schemas.microsoft.com/office/drawing/2014/main" id="{D0D9BEB5-CA72-44D3-86D3-00401AEF7C68}"/>
               </a:ext>
             </a:extLst>
           </p:cNvPr>
@@ -4142,7 +4206,7 @@
           <p:cNvPr id="7" name="recap-number-0">
             <a:extLst xmlns:a="http://schemas.openxmlformats.org/drawingml/2006/main">
               <a:ext uri="{FF2B5EF4-FFF2-40B4-BE49-F238E27FC236}">
-                <a16:creationId xmlns:a16="http://schemas.microsoft.com/office/drawing/2014/main" id="{B3FD3C19-787C-434E-B233-33915A8CE9E8}"/>
+                <a16:creationId xmlns:a16="http://schemas.microsoft.com/office/drawing/2014/main" id="{B1AB86CD-5CCF-4A1B-BA11-729815614476}"/>
               </a:ext>
             </a:extLst>
           </p:cNvPr>
@@ -4200,7 +4264,7 @@
           <p:cNvPr id="8" name="recap-item-0">
             <a:extLst xmlns:a="http://schemas.openxmlformats.org/drawingml/2006/main">
               <a:ext uri="{FF2B5EF4-FFF2-40B4-BE49-F238E27FC236}">
-                <a16:creationId xmlns:a16="http://schemas.microsoft.com/office/drawing/2014/main" id="{CDF350FD-898B-4767-9F41-2E0F6B03C6FB}"/>
+                <a16:creationId xmlns:a16="http://schemas.microsoft.com/office/drawing/2014/main" id="{00273C92-728F-4916-801C-CB1AF2D784C2}"/>
               </a:ext>
             </a:extLst>
           </p:cNvPr>
@@ -4264,7 +4328,7 @@
           <p:cNvPr id="9" name="recap-connector-0">
             <a:extLst xmlns:a="http://schemas.openxmlformats.org/drawingml/2006/main">
               <a:ext uri="{FF2B5EF4-FFF2-40B4-BE49-F238E27FC236}">
-                <a16:creationId xmlns:a16="http://schemas.microsoft.com/office/drawing/2014/main" id="{B7C556EA-DCC1-4E1D-A166-35AEBF6C9F3B}"/>
+                <a16:creationId xmlns:a16="http://schemas.microsoft.com/office/drawing/2014/main" id="{AE3C4AFD-9BE0-4776-AD80-AD51D4B661CE}"/>
               </a:ext>
             </a:extLst>
           </p:cNvPr>
@@ -4284,7 +4348,7 @@
           <a:noFill xmlns:a="http://schemas.openxmlformats.org/drawingml/2006/main"/>
           <a:ln xmlns:a="http://schemas.openxmlformats.org/drawingml/2006/main" w="28575">
             <a:solidFill>
-              <a:srgbClr val="E5783F"/>
+              <a:srgbClr val="9A3F16"/>
             </a:solidFill>
             <a:prstDash val="solid"/>
           </a:ln>
@@ -4295,7 +4359,7 @@
           <p:cNvPr id="10" name="recap-circle-1">
             <a:extLst xmlns:a="http://schemas.openxmlformats.org/drawingml/2006/main">
               <a:ext uri="{FF2B5EF4-FFF2-40B4-BE49-F238E27FC236}">
-                <a16:creationId xmlns:a16="http://schemas.microsoft.com/office/drawing/2014/main" id="{3A74EAE8-A94B-40E9-A650-F77C5CA4944E}"/>
+                <a16:creationId xmlns:a16="http://schemas.microsoft.com/office/drawing/2014/main" id="{229D2FDC-4F52-453B-BC73-C7078EC9BB39}"/>
               </a:ext>
             </a:extLst>
           </p:cNvPr>
@@ -4328,7 +4392,7 @@
           <p:cNvPr id="11" name="recap-number-1">
             <a:extLst xmlns:a="http://schemas.openxmlformats.org/drawingml/2006/main">
               <a:ext uri="{FF2B5EF4-FFF2-40B4-BE49-F238E27FC236}">
-                <a16:creationId xmlns:a16="http://schemas.microsoft.com/office/drawing/2014/main" id="{03121A63-3667-451B-927E-C22D7DA3FFB1}"/>
+                <a16:creationId xmlns:a16="http://schemas.microsoft.com/office/drawing/2014/main" id="{F7423CEC-3AFC-42C0-BEDB-C756E6C5F4C9}"/>
               </a:ext>
             </a:extLst>
           </p:cNvPr>
@@ -4386,7 +4450,7 @@
           <p:cNvPr id="12" name="recap-item-1">
             <a:extLst xmlns:a="http://schemas.openxmlformats.org/drawingml/2006/main">
               <a:ext uri="{FF2B5EF4-FFF2-40B4-BE49-F238E27FC236}">
-                <a16:creationId xmlns:a16="http://schemas.microsoft.com/office/drawing/2014/main" id="{7BBFD77D-B4E9-4B35-BC23-A0522336AA98}"/>
+                <a16:creationId xmlns:a16="http://schemas.microsoft.com/office/drawing/2014/main" id="{EBE14382-D3A8-4583-BF84-A09D71B9C8ED}"/>
               </a:ext>
             </a:extLst>
           </p:cNvPr>
@@ -4440,7 +4504,7 @@
                 <a:ea typeface="PingFang SC"/>
                 <a:cs typeface="PingFang SC"/>
               </a:rPr>
-              <a:t>视觉检测、时序检测和过程建模可以辅助发现表面缺陷、尺寸偏差或工艺异常</a:t>
+              <a:t>质量检测必须同时管理误报与漏报</a:t>
             </a:r>
           </a:p>
         </p:txBody>
@@ -4450,7 +4514,7 @@
           <p:cNvPr id="13" name="recap-connector-1">
             <a:extLst xmlns:a="http://schemas.openxmlformats.org/drawingml/2006/main">
               <a:ext uri="{FF2B5EF4-FFF2-40B4-BE49-F238E27FC236}">
-                <a16:creationId xmlns:a16="http://schemas.microsoft.com/office/drawing/2014/main" id="{C64E02FF-A9C9-4050-B606-57606CD37C0E}"/>
+                <a16:creationId xmlns:a16="http://schemas.microsoft.com/office/drawing/2014/main" id="{34CDC13F-0CF2-42F0-A64D-98590D4CD653}"/>
               </a:ext>
             </a:extLst>
           </p:cNvPr>
@@ -4470,7 +4534,7 @@
           <a:noFill xmlns:a="http://schemas.openxmlformats.org/drawingml/2006/main"/>
           <a:ln xmlns:a="http://schemas.openxmlformats.org/drawingml/2006/main" w="28575">
             <a:solidFill>
-              <a:srgbClr val="E5783F"/>
+              <a:srgbClr val="9A3F16"/>
             </a:solidFill>
             <a:prstDash val="solid"/>
           </a:ln>
@@ -4481,7 +4545,7 @@
           <p:cNvPr id="14" name="recap-circle-2">
             <a:extLst xmlns:a="http://schemas.openxmlformats.org/drawingml/2006/main">
               <a:ext uri="{FF2B5EF4-FFF2-40B4-BE49-F238E27FC236}">
-                <a16:creationId xmlns:a16="http://schemas.microsoft.com/office/drawing/2014/main" id="{DC2C2CFF-6A55-4AAD-B192-00967881F04B}"/>
+                <a16:creationId xmlns:a16="http://schemas.microsoft.com/office/drawing/2014/main" id="{36C12B82-F957-4D60-B9F2-E34511CD548A}"/>
               </a:ext>
             </a:extLst>
           </p:cNvPr>
@@ -4499,7 +4563,7 @@
             <a:avLst/>
           </a:prstGeom>
           <a:solidFill xmlns:a="http://schemas.openxmlformats.org/drawingml/2006/main">
-            <a:srgbClr val="E5783F"/>
+            <a:srgbClr val="9A3F16"/>
           </a:solidFill>
           <a:ln xmlns:a="http://schemas.openxmlformats.org/drawingml/2006/main" w="28575">
             <a:solidFill>
@@ -4514,7 +4578,7 @@
           <p:cNvPr id="15" name="recap-number-2">
             <a:extLst xmlns:a="http://schemas.openxmlformats.org/drawingml/2006/main">
               <a:ext uri="{FF2B5EF4-FFF2-40B4-BE49-F238E27FC236}">
-                <a16:creationId xmlns:a16="http://schemas.microsoft.com/office/drawing/2014/main" id="{635142B2-4306-4583-B9AC-7EE102DB3934}"/>
+                <a16:creationId xmlns:a16="http://schemas.microsoft.com/office/drawing/2014/main" id="{FC321EC6-FC1F-4785-B30A-14AC9A0E3F93}"/>
               </a:ext>
             </a:extLst>
           </p:cNvPr>
@@ -4572,7 +4636,7 @@
           <p:cNvPr id="16" name="recap-item-2">
             <a:extLst xmlns:a="http://schemas.openxmlformats.org/drawingml/2006/main">
               <a:ext uri="{FF2B5EF4-FFF2-40B4-BE49-F238E27FC236}">
-                <a16:creationId xmlns:a16="http://schemas.microsoft.com/office/drawing/2014/main" id="{C67C9F92-A382-4943-9FEC-8C4B6D389CC6}"/>
+                <a16:creationId xmlns:a16="http://schemas.microsoft.com/office/drawing/2014/main" id="{3D263152-61B3-4146-8662-8DF19E64015D}"/>
               </a:ext>
             </a:extLst>
           </p:cNvPr>
@@ -4596,7 +4660,7 @@
           </a:solidFill>
           <a:ln xmlns:a="http://schemas.openxmlformats.org/drawingml/2006/main" w="19050">
             <a:solidFill>
-              <a:srgbClr val="E5783F"/>
+              <a:srgbClr val="9A3F16"/>
             </a:solidFill>
             <a:prstDash val="solid"/>
           </a:ln>
@@ -4634,7 +4698,7 @@
     </p:spTree>
     <p:extLst>
       <p:ext uri="{BB962C8B-B14F-4D97-AF65-F5344CB8AC3E}">
-        <p14:creationId xmlns:p14="http://schemas.microsoft.com/office/powerpoint/2010/main" val="715814298"/>
+        <p14:creationId xmlns:p14="http://schemas.microsoft.com/office/powerpoint/2010/main" val="1214323277"/>
       </p:ext>
     </p:extLst>
   </p:cSld>
@@ -4665,7 +4729,7 @@
           <p:cNvPr id="1" name="s13-rule">
             <a:extLst xmlns:a="http://schemas.openxmlformats.org/drawingml/2006/main">
               <a:ext uri="{FF2B5EF4-FFF2-40B4-BE49-F238E27FC236}">
-                <a16:creationId xmlns:a16="http://schemas.microsoft.com/office/drawing/2014/main" id="{34573B0A-5DCD-4CE1-B051-E3E305838822}"/>
+                <a16:creationId xmlns:a16="http://schemas.microsoft.com/office/drawing/2014/main" id="{E8B6D34D-3EE3-4179-826D-554C477AB261}"/>
               </a:ext>
             </a:extLst>
           </p:cNvPr>
@@ -4698,7 +4762,7 @@
           <p:cNvPr id="2" name="s13-eyebrow">
             <a:extLst xmlns:a="http://schemas.openxmlformats.org/drawingml/2006/main">
               <a:ext uri="{FF2B5EF4-FFF2-40B4-BE49-F238E27FC236}">
-                <a16:creationId xmlns:a16="http://schemas.microsoft.com/office/drawing/2014/main" id="{EA813FF2-A9E8-476D-9547-09827076EA7D}"/>
+                <a16:creationId xmlns:a16="http://schemas.microsoft.com/office/drawing/2014/main" id="{8F93DCF5-8EC2-4BA4-8DFE-DCD7B2980D5D}"/>
               </a:ext>
             </a:extLst>
           </p:cNvPr>
@@ -4756,7 +4820,7 @@
           <p:cNvPr id="3" name="s13-title">
             <a:extLst xmlns:a="http://schemas.openxmlformats.org/drawingml/2006/main">
               <a:ext uri="{FF2B5EF4-FFF2-40B4-BE49-F238E27FC236}">
-                <a16:creationId xmlns:a16="http://schemas.microsoft.com/office/drawing/2014/main" id="{F706DA24-2FE9-4375-A5C2-543577965B6C}"/>
+                <a16:creationId xmlns:a16="http://schemas.microsoft.com/office/drawing/2014/main" id="{E4B4EC3A-87DF-4862-934A-8ECC11BA32BD}"/>
               </a:ext>
             </a:extLst>
           </p:cNvPr>
@@ -4804,7 +4868,7 @@
                 <a:ea typeface="PingFang SC"/>
                 <a:cs typeface="PingFang SC"/>
               </a:rPr>
-              <a:t>从公开重制课件回到可核对的学习资料</a:t>
+              <a:t>制造、能源与供应链：依据、边界与延伸</a:t>
             </a:r>
           </a:p>
         </p:txBody>
@@ -4814,7 +4878,7 @@
           <p:cNvPr id="4" name="s13-footer">
             <a:extLst xmlns:a="http://schemas.openxmlformats.org/drawingml/2006/main">
               <a:ext uri="{FF2B5EF4-FFF2-40B4-BE49-F238E27FC236}">
-                <a16:creationId xmlns:a16="http://schemas.microsoft.com/office/drawing/2014/main" id="{A8F18C9A-2191-425A-A2ED-261034E3A41F}"/>
+                <a16:creationId xmlns:a16="http://schemas.microsoft.com/office/drawing/2014/main" id="{7D47A2A1-50ED-4691-926F-248E5C1BF446}"/>
               </a:ext>
             </a:extLst>
           </p:cNvPr>
@@ -4845,7 +4909,7 @@
           <p:cNvPr id="5" name="s13-identity">
             <a:extLst xmlns:a="http://schemas.openxmlformats.org/drawingml/2006/main">
               <a:ext uri="{FF2B5EF4-FFF2-40B4-BE49-F238E27FC236}">
-                <a16:creationId xmlns:a16="http://schemas.microsoft.com/office/drawing/2014/main" id="{397DBC9E-59F8-4513-9A34-875EFFFDD9A8}"/>
+                <a16:creationId xmlns:a16="http://schemas.microsoft.com/office/drawing/2014/main" id="{1FF5FEDF-5A7F-4F41-A7EC-E060738372B1}"/>
               </a:ext>
             </a:extLst>
           </p:cNvPr>
@@ -4903,7 +4967,7 @@
           <p:cNvPr id="6" name="source-0">
             <a:extLst xmlns:a="http://schemas.openxmlformats.org/drawingml/2006/main">
               <a:ext uri="{FF2B5EF4-FFF2-40B4-BE49-F238E27FC236}">
-                <a16:creationId xmlns:a16="http://schemas.microsoft.com/office/drawing/2014/main" id="{83432E0C-1F7B-424B-87AE-698E9256D97C}"/>
+                <a16:creationId xmlns:a16="http://schemas.microsoft.com/office/drawing/2014/main" id="{22655792-664D-47ED-8BB4-C5FD5506169F}"/>
               </a:ext>
             </a:extLst>
           </p:cNvPr>
@@ -4927,7 +4991,7 @@
           </a:solidFill>
           <a:ln xmlns:a="http://schemas.openxmlformats.org/drawingml/2006/main" w="9525">
             <a:solidFill>
-              <a:srgbClr val="E5783F"/>
+              <a:srgbClr val="9A3F16"/>
             </a:solidFill>
             <a:prstDash val="solid"/>
           </a:ln>
@@ -4967,7 +5031,7 @@
           <p:cNvPr id="7" name="source-1">
             <a:extLst xmlns:a="http://schemas.openxmlformats.org/drawingml/2006/main">
               <a:ext uri="{FF2B5EF4-FFF2-40B4-BE49-F238E27FC236}">
-                <a16:creationId xmlns:a16="http://schemas.microsoft.com/office/drawing/2014/main" id="{BF36F758-36B3-426E-A35C-8F69DCBBBE16}"/>
+                <a16:creationId xmlns:a16="http://schemas.microsoft.com/office/drawing/2014/main" id="{619CC3F0-D3DA-4121-8366-B32165B6D3C9}"/>
               </a:ext>
             </a:extLst>
           </p:cNvPr>
@@ -5031,7 +5095,7 @@
           <p:cNvPr id="8" name="source-2">
             <a:extLst xmlns:a="http://schemas.openxmlformats.org/drawingml/2006/main">
               <a:ext uri="{FF2B5EF4-FFF2-40B4-BE49-F238E27FC236}">
-                <a16:creationId xmlns:a16="http://schemas.microsoft.com/office/drawing/2014/main" id="{552E5870-51A6-48B0-8BDB-E8FE1691B63A}"/>
+                <a16:creationId xmlns:a16="http://schemas.microsoft.com/office/drawing/2014/main" id="{0C81F756-84D9-406D-9E4B-EDF9EC1FBB12}"/>
               </a:ext>
             </a:extLst>
           </p:cNvPr>
@@ -5095,7 +5159,7 @@
           <p:cNvPr id="9" name="source-3">
             <a:extLst xmlns:a="http://schemas.openxmlformats.org/drawingml/2006/main">
               <a:ext uri="{FF2B5EF4-FFF2-40B4-BE49-F238E27FC236}">
-                <a16:creationId xmlns:a16="http://schemas.microsoft.com/office/drawing/2014/main" id="{C6011D18-2D48-411F-AEA1-5192C2EF0A21}"/>
+                <a16:creationId xmlns:a16="http://schemas.microsoft.com/office/drawing/2014/main" id="{07EFDBCB-9B7D-4D60-A718-D82BF2F2C9CF}"/>
               </a:ext>
             </a:extLst>
           </p:cNvPr>
@@ -5159,7 +5223,7 @@
           <p:cNvPr id="10" name="source-4">
             <a:extLst xmlns:a="http://schemas.openxmlformats.org/drawingml/2006/main">
               <a:ext uri="{FF2B5EF4-FFF2-40B4-BE49-F238E27FC236}">
-                <a16:creationId xmlns:a16="http://schemas.microsoft.com/office/drawing/2014/main" id="{3224B091-6F1C-4557-BBBF-9D7692D3B594}"/>
+                <a16:creationId xmlns:a16="http://schemas.microsoft.com/office/drawing/2014/main" id="{11A361EC-0468-462A-96BE-B6FECA5BE4A5}"/>
               </a:ext>
             </a:extLst>
           </p:cNvPr>
@@ -5223,7 +5287,7 @@
           <p:cNvPr id="11" name="s13-takeaway-rule">
             <a:extLst xmlns:a="http://schemas.openxmlformats.org/drawingml/2006/main">
               <a:ext uri="{FF2B5EF4-FFF2-40B4-BE49-F238E27FC236}">
-                <a16:creationId xmlns:a16="http://schemas.microsoft.com/office/drawing/2014/main" id="{80CB9F4D-FF33-4140-9415-EEC16105291C}"/>
+                <a16:creationId xmlns:a16="http://schemas.microsoft.com/office/drawing/2014/main" id="{E4ED91AF-17DC-4D25-A919-29DAF3097466}"/>
               </a:ext>
             </a:extLst>
           </p:cNvPr>
@@ -5256,7 +5320,7 @@
           <p:cNvPr id="12" name="s13-takeaway">
             <a:extLst xmlns:a="http://schemas.openxmlformats.org/drawingml/2006/main">
               <a:ext uri="{FF2B5EF4-FFF2-40B4-BE49-F238E27FC236}">
-                <a16:creationId xmlns:a16="http://schemas.microsoft.com/office/drawing/2014/main" id="{B10931F2-DBAA-44CC-9C53-7EC6F9D1772B}"/>
+                <a16:creationId xmlns:a16="http://schemas.microsoft.com/office/drawing/2014/main" id="{E6CC4071-964B-4CAD-B460-7DF78B267220}"/>
               </a:ext>
             </a:extLst>
           </p:cNvPr>
@@ -5312,7 +5376,7 @@
     </p:spTree>
     <p:extLst>
       <p:ext uri="{BB962C8B-B14F-4D97-AF65-F5344CB8AC3E}">
-        <p14:creationId xmlns:p14="http://schemas.microsoft.com/office/powerpoint/2010/main" val="538844045"/>
+        <p14:creationId xmlns:p14="http://schemas.microsoft.com/office/powerpoint/2010/main" val="1023732065"/>
       </p:ext>
     </p:extLst>
   </p:cSld>
@@ -5343,7 +5407,7 @@
           <p:cNvPr id="1" name="s2-rule">
             <a:extLst xmlns:a="http://schemas.openxmlformats.org/drawingml/2006/main">
               <a:ext uri="{FF2B5EF4-FFF2-40B4-BE49-F238E27FC236}">
-                <a16:creationId xmlns:a16="http://schemas.microsoft.com/office/drawing/2014/main" id="{9B5DC17F-E221-4AF0-A55D-F9DAC4F084DD}"/>
+                <a16:creationId xmlns:a16="http://schemas.microsoft.com/office/drawing/2014/main" id="{DFBF7FE6-BF72-4F31-819F-9A9992F266E7}"/>
               </a:ext>
             </a:extLst>
           </p:cNvPr>
@@ -5376,7 +5440,7 @@
           <p:cNvPr id="2" name="s2-eyebrow">
             <a:extLst xmlns:a="http://schemas.openxmlformats.org/drawingml/2006/main">
               <a:ext uri="{FF2B5EF4-FFF2-40B4-BE49-F238E27FC236}">
-                <a16:creationId xmlns:a16="http://schemas.microsoft.com/office/drawing/2014/main" id="{170B727D-7675-49E0-9FF2-4429E67A44BE}"/>
+                <a16:creationId xmlns:a16="http://schemas.microsoft.com/office/drawing/2014/main" id="{51515225-FD80-4A67-9E06-EBDAC081D85C}"/>
               </a:ext>
             </a:extLst>
           </p:cNvPr>
@@ -5434,7 +5498,7 @@
           <p:cNvPr id="3" name="s2-title">
             <a:extLst xmlns:a="http://schemas.openxmlformats.org/drawingml/2006/main">
               <a:ext uri="{FF2B5EF4-FFF2-40B4-BE49-F238E27FC236}">
-                <a16:creationId xmlns:a16="http://schemas.microsoft.com/office/drawing/2014/main" id="{4422ED7F-35AD-4393-9651-8BDEACBABA78}"/>
+                <a16:creationId xmlns:a16="http://schemas.microsoft.com/office/drawing/2014/main" id="{EF217965-5657-4FB6-AE8D-0B8B1EDCE150}"/>
               </a:ext>
             </a:extLst>
           </p:cNvPr>
@@ -5482,7 +5546,7 @@
                 <a:ea typeface="PingFang SC"/>
                 <a:cs typeface="PingFang SC"/>
               </a:rPr>
-              <a:t>学完这一节，你能完成这些判断与行动</a:t>
+              <a:t>制造、能源与供应链：4项学习结果</a:t>
             </a:r>
           </a:p>
         </p:txBody>
@@ -5492,7 +5556,7 @@
           <p:cNvPr id="4" name="s2-footer">
             <a:extLst xmlns:a="http://schemas.openxmlformats.org/drawingml/2006/main">
               <a:ext uri="{FF2B5EF4-FFF2-40B4-BE49-F238E27FC236}">
-                <a16:creationId xmlns:a16="http://schemas.microsoft.com/office/drawing/2014/main" id="{F5C37E87-ED00-449F-B4BF-18BF6C8281CD}"/>
+                <a16:creationId xmlns:a16="http://schemas.microsoft.com/office/drawing/2014/main" id="{5926E469-A316-4F59-B9E2-14BE8CCF082C}"/>
               </a:ext>
             </a:extLst>
           </p:cNvPr>
@@ -5523,7 +5587,7 @@
           <p:cNvPr id="5" name="s2-identity">
             <a:extLst xmlns:a="http://schemas.openxmlformats.org/drawingml/2006/main">
               <a:ext uri="{FF2B5EF4-FFF2-40B4-BE49-F238E27FC236}">
-                <a16:creationId xmlns:a16="http://schemas.microsoft.com/office/drawing/2014/main" id="{07161CC4-C402-46CF-9F2F-1190BF8A702E}"/>
+                <a16:creationId xmlns:a16="http://schemas.microsoft.com/office/drawing/2014/main" id="{69DDE6FB-5A61-4CC8-B936-3CDDAC66406A}"/>
               </a:ext>
             </a:extLst>
           </p:cNvPr>
@@ -5581,7 +5645,7 @@
           <p:cNvPr id="6" name="objective-1">
             <a:extLst xmlns:a="http://schemas.openxmlformats.org/drawingml/2006/main">
               <a:ext uri="{FF2B5EF4-FFF2-40B4-BE49-F238E27FC236}">
-                <a16:creationId xmlns:a16="http://schemas.microsoft.com/office/drawing/2014/main" id="{46EBE14A-E973-429E-956D-B77A91540518}"/>
+                <a16:creationId xmlns:a16="http://schemas.microsoft.com/office/drawing/2014/main" id="{E5E871C6-6A0F-4939-9542-00CB8ABC09A8}"/>
               </a:ext>
             </a:extLst>
           </p:cNvPr>
@@ -5668,7 +5732,7 @@
           <p:cNvPr id="7" name="objective-2">
             <a:extLst xmlns:a="http://schemas.openxmlformats.org/drawingml/2006/main">
               <a:ext uri="{FF2B5EF4-FFF2-40B4-BE49-F238E27FC236}">
-                <a16:creationId xmlns:a16="http://schemas.microsoft.com/office/drawing/2014/main" id="{73E41582-88E0-4369-81F2-75EA43CAA54B}"/>
+                <a16:creationId xmlns:a16="http://schemas.microsoft.com/office/drawing/2014/main" id="{626179C2-F493-4058-917C-ED1A93FBE70E}"/>
               </a:ext>
             </a:extLst>
           </p:cNvPr>
@@ -5755,7 +5819,7 @@
           <p:cNvPr id="8" name="objective-3">
             <a:extLst xmlns:a="http://schemas.openxmlformats.org/drawingml/2006/main">
               <a:ext uri="{FF2B5EF4-FFF2-40B4-BE49-F238E27FC236}">
-                <a16:creationId xmlns:a16="http://schemas.microsoft.com/office/drawing/2014/main" id="{A464A0C6-DB97-4BDB-BD6A-90379B66F208}"/>
+                <a16:creationId xmlns:a16="http://schemas.microsoft.com/office/drawing/2014/main" id="{565BA89D-6628-47D9-8EEF-A2E6ACDBF248}"/>
               </a:ext>
             </a:extLst>
           </p:cNvPr>
@@ -5842,7 +5906,7 @@
           <p:cNvPr id="9" name="objective-4">
             <a:extLst xmlns:a="http://schemas.openxmlformats.org/drawingml/2006/main">
               <a:ext uri="{FF2B5EF4-FFF2-40B4-BE49-F238E27FC236}">
-                <a16:creationId xmlns:a16="http://schemas.microsoft.com/office/drawing/2014/main" id="{5435249A-AFDB-4CD7-88D3-A7C8C06DCB41}"/>
+                <a16:creationId xmlns:a16="http://schemas.microsoft.com/office/drawing/2014/main" id="{E54F05B5-12AB-40C8-95BE-548E46D0361F}"/>
               </a:ext>
             </a:extLst>
           </p:cNvPr>
@@ -5866,7 +5930,7 @@
           </a:solidFill>
           <a:ln xmlns:a="http://schemas.openxmlformats.org/drawingml/2006/main" w="19050">
             <a:solidFill>
-              <a:srgbClr val="E5783F"/>
+              <a:srgbClr val="9A3F16"/>
             </a:solidFill>
             <a:prstDash val="solid"/>
           </a:ln>
@@ -5927,7 +5991,7 @@
     </p:spTree>
     <p:extLst>
       <p:ext uri="{BB962C8B-B14F-4D97-AF65-F5344CB8AC3E}">
-        <p14:creationId xmlns:p14="http://schemas.microsoft.com/office/powerpoint/2010/main" val="618520150"/>
+        <p14:creationId xmlns:p14="http://schemas.microsoft.com/office/powerpoint/2010/main" val="1176224083"/>
       </p:ext>
     </p:extLst>
   </p:cSld>
@@ -5958,7 +6022,7 @@
           <p:cNvPr id="1" name="s3-rule">
             <a:extLst xmlns:a="http://schemas.openxmlformats.org/drawingml/2006/main">
               <a:ext uri="{FF2B5EF4-FFF2-40B4-BE49-F238E27FC236}">
-                <a16:creationId xmlns:a16="http://schemas.microsoft.com/office/drawing/2014/main" id="{3F6569B0-A556-407D-A8C7-18BB81B3026B}"/>
+                <a16:creationId xmlns:a16="http://schemas.microsoft.com/office/drawing/2014/main" id="{5150DD4F-B97A-4427-A1BD-0DBCD76E46FF}"/>
               </a:ext>
             </a:extLst>
           </p:cNvPr>
@@ -5991,7 +6055,7 @@
           <p:cNvPr id="2" name="s3-eyebrow">
             <a:extLst xmlns:a="http://schemas.openxmlformats.org/drawingml/2006/main">
               <a:ext uri="{FF2B5EF4-FFF2-40B4-BE49-F238E27FC236}">
-                <a16:creationId xmlns:a16="http://schemas.microsoft.com/office/drawing/2014/main" id="{0EA1CBBC-3968-4292-9272-79E26458EF94}"/>
+                <a16:creationId xmlns:a16="http://schemas.microsoft.com/office/drawing/2014/main" id="{86CCF425-635C-43F2-8CF3-7866269A1570}"/>
               </a:ext>
             </a:extLst>
           </p:cNvPr>
@@ -6049,7 +6113,7 @@
           <p:cNvPr id="3" name="s3-title">
             <a:extLst xmlns:a="http://schemas.openxmlformats.org/drawingml/2006/main">
               <a:ext uri="{FF2B5EF4-FFF2-40B4-BE49-F238E27FC236}">
-                <a16:creationId xmlns:a16="http://schemas.microsoft.com/office/drawing/2014/main" id="{9F595A2C-7293-48AE-A399-F3416840955B}"/>
+                <a16:creationId xmlns:a16="http://schemas.microsoft.com/office/drawing/2014/main" id="{6BEC4432-1B77-4040-A547-918EBF9C5B91}"/>
               </a:ext>
             </a:extLst>
           </p:cNvPr>
@@ -6107,7 +6171,7 @@
           <p:cNvPr id="4" name="s3-footer">
             <a:extLst xmlns:a="http://schemas.openxmlformats.org/drawingml/2006/main">
               <a:ext uri="{FF2B5EF4-FFF2-40B4-BE49-F238E27FC236}">
-                <a16:creationId xmlns:a16="http://schemas.microsoft.com/office/drawing/2014/main" id="{4A87B24A-36E0-477D-8749-6ACBAC0DF3B3}"/>
+                <a16:creationId xmlns:a16="http://schemas.microsoft.com/office/drawing/2014/main" id="{399FD018-533C-49FE-96DD-A7A416288288}"/>
               </a:ext>
             </a:extLst>
           </p:cNvPr>
@@ -6138,7 +6202,7 @@
           <p:cNvPr id="5" name="s3-identity">
             <a:extLst xmlns:a="http://schemas.openxmlformats.org/drawingml/2006/main">
               <a:ext uri="{FF2B5EF4-FFF2-40B4-BE49-F238E27FC236}">
-                <a16:creationId xmlns:a16="http://schemas.microsoft.com/office/drawing/2014/main" id="{C8469AC9-02FD-44A0-9424-1551B20EF17A}"/>
+                <a16:creationId xmlns:a16="http://schemas.microsoft.com/office/drawing/2014/main" id="{BDB2D044-9B89-4D23-BD4A-4AC6A19E5E4B}"/>
               </a:ext>
             </a:extLst>
           </p:cNvPr>
@@ -6196,7 +6260,7 @@
           <p:cNvPr id="6" name="core-no-0">
             <a:extLst xmlns:a="http://schemas.openxmlformats.org/drawingml/2006/main">
               <a:ext uri="{FF2B5EF4-FFF2-40B4-BE49-F238E27FC236}">
-                <a16:creationId xmlns:a16="http://schemas.microsoft.com/office/drawing/2014/main" id="{717E0E3E-149E-4E71-982B-7F357798A076}"/>
+                <a16:creationId xmlns:a16="http://schemas.microsoft.com/office/drawing/2014/main" id="{952546A7-B135-4479-A652-2634AF7E298D}"/>
               </a:ext>
             </a:extLst>
           </p:cNvPr>
@@ -6228,7 +6292,7 @@
             <a:pPr algn="l">
               <a:defRPr sz="2250" b="1">
                 <a:solidFill>
-                  <a:srgbClr val="E5783F"/>
+                  <a:srgbClr val="9A3F16"/>
                 </a:solidFill>
                 <a:latin typeface="PingFang SC"/>
                 <a:ea typeface="PingFang SC"/>
@@ -6238,7 +6302,7 @@
             <a:r>
               <a:rPr sz="2250" b="1">
                 <a:solidFill>
-                  <a:srgbClr val="E5783F"/>
+                  <a:srgbClr val="9A3F16"/>
                 </a:solidFill>
                 <a:latin typeface="PingFang SC"/>
                 <a:ea typeface="PingFang SC"/>
@@ -6254,7 +6318,7 @@
           <p:cNvPr id="7" name="core-label-0">
             <a:extLst xmlns:a="http://schemas.openxmlformats.org/drawingml/2006/main">
               <a:ext uri="{FF2B5EF4-FFF2-40B4-BE49-F238E27FC236}">
-                <a16:creationId xmlns:a16="http://schemas.microsoft.com/office/drawing/2014/main" id="{6B414C93-A43C-4847-A55D-7BBC2B57A17D}"/>
+                <a16:creationId xmlns:a16="http://schemas.microsoft.com/office/drawing/2014/main" id="{A525B8B9-1B7D-4550-8B15-8C83F7BD296C}"/>
               </a:ext>
             </a:extLst>
           </p:cNvPr>
@@ -6312,7 +6376,7 @@
           <p:cNvPr id="8" name="core-body-0">
             <a:extLst xmlns:a="http://schemas.openxmlformats.org/drawingml/2006/main">
               <a:ext uri="{FF2B5EF4-FFF2-40B4-BE49-F238E27FC236}">
-                <a16:creationId xmlns:a16="http://schemas.microsoft.com/office/drawing/2014/main" id="{157F712D-C47F-457D-AAFA-8E21477DAB39}"/>
+                <a16:creationId xmlns:a16="http://schemas.microsoft.com/office/drawing/2014/main" id="{D8100DD6-0D45-4FAB-98FD-8A8CEEE0DA42}"/>
               </a:ext>
             </a:extLst>
           </p:cNvPr>
@@ -6336,14 +6400,14 @@
           </a:solidFill>
           <a:ln xmlns:a="http://schemas.openxmlformats.org/drawingml/2006/main" w="19050">
             <a:solidFill>
-              <a:srgbClr val="E5783F"/>
+              <a:srgbClr val="9A3F16"/>
             </a:solidFill>
             <a:prstDash val="solid"/>
           </a:ln>
         </p:spPr>
         <p:txBody>
           <a:bodyPr xmlns:a="http://schemas.openxmlformats.org/drawingml/2006/main" lIns="152400" tIns="133350" rIns="152400" bIns="133350" anchor="ctr">
-            <a:normAutofit fontScale="98233"/>
+            <a:normAutofit fontScale="100000"/>
           </a:bodyPr>
           <a:lstStyle xmlns:a="http://schemas.openxmlformats.org/drawingml/2006/main"/>
           <a:p xmlns:a="http://schemas.openxmlformats.org/drawingml/2006/main">
@@ -6366,7 +6430,7 @@
                 <a:ea typeface="PingFang SC"/>
                 <a:cs typeface="PingFang SC"/>
               </a:rPr>
-              <a:t>工业数据可能来自传感器、控制系统、生产执行系统、质量记录、工单、库存和外部市场。开始建模前，要统一设备与物料编码、计量单位、采样时间、时区、批次和工况。更换传感器…</a:t>
+              <a:t>工业数据可能来自传感器、控制系统、生产执行系统、质量记录、工单、库存和外部市场；开始建模前，要统一设备与物料编码、计量单位、采样时间、时区、批次和工况</a:t>
             </a:r>
           </a:p>
         </p:txBody>
@@ -6376,7 +6440,7 @@
           <p:cNvPr id="9" name="core-no-1">
             <a:extLst xmlns:a="http://schemas.openxmlformats.org/drawingml/2006/main">
               <a:ext uri="{FF2B5EF4-FFF2-40B4-BE49-F238E27FC236}">
-                <a16:creationId xmlns:a16="http://schemas.microsoft.com/office/drawing/2014/main" id="{F1DE5B5C-F20B-4435-BD3D-7738275C72B3}"/>
+                <a16:creationId xmlns:a16="http://schemas.microsoft.com/office/drawing/2014/main" id="{9A1A6905-FC3D-4645-A6D9-39B48CE1CED6}"/>
               </a:ext>
             </a:extLst>
           </p:cNvPr>
@@ -6408,7 +6472,7 @@
             <a:pPr algn="l">
               <a:defRPr sz="2250" b="1">
                 <a:solidFill>
-                  <a:srgbClr val="E5783F"/>
+                  <a:srgbClr val="9A3F16"/>
                 </a:solidFill>
                 <a:latin typeface="PingFang SC"/>
                 <a:ea typeface="PingFang SC"/>
@@ -6418,7 +6482,7 @@
             <a:r>
               <a:rPr sz="2250" b="1">
                 <a:solidFill>
-                  <a:srgbClr val="E5783F"/>
+                  <a:srgbClr val="9A3F16"/>
                 </a:solidFill>
                 <a:latin typeface="PingFang SC"/>
                 <a:ea typeface="PingFang SC"/>
@@ -6434,7 +6498,7 @@
           <p:cNvPr id="10" name="core-body-1">
             <a:extLst xmlns:a="http://schemas.openxmlformats.org/drawingml/2006/main">
               <a:ext uri="{FF2B5EF4-FFF2-40B4-BE49-F238E27FC236}">
-                <a16:creationId xmlns:a16="http://schemas.microsoft.com/office/drawing/2014/main" id="{61CE8C03-2D6D-4C8F-A5D7-9274694776CA}"/>
+                <a16:creationId xmlns:a16="http://schemas.microsoft.com/office/drawing/2014/main" id="{F5B91F4D-FFC2-40E9-A81F-011A869B4FD1}"/>
               </a:ext>
             </a:extLst>
           </p:cNvPr>
@@ -6498,7 +6562,7 @@
           <p:cNvPr id="11" name="s3-takeaway-rule">
             <a:extLst xmlns:a="http://schemas.openxmlformats.org/drawingml/2006/main">
               <a:ext uri="{FF2B5EF4-FFF2-40B4-BE49-F238E27FC236}">
-                <a16:creationId xmlns:a16="http://schemas.microsoft.com/office/drawing/2014/main" id="{99D8108A-1A4A-4226-8B6C-2E95D814C672}"/>
+                <a16:creationId xmlns:a16="http://schemas.microsoft.com/office/drawing/2014/main" id="{A3B956E2-1CBA-48C9-BC6F-707A3C70F315}"/>
               </a:ext>
             </a:extLst>
           </p:cNvPr>
@@ -6531,7 +6595,7 @@
           <p:cNvPr id="12" name="s3-takeaway">
             <a:extLst xmlns:a="http://schemas.openxmlformats.org/drawingml/2006/main">
               <a:ext uri="{FF2B5EF4-FFF2-40B4-BE49-F238E27FC236}">
-                <a16:creationId xmlns:a16="http://schemas.microsoft.com/office/drawing/2014/main" id="{82AD5C86-9B4C-4151-AE5F-C96BA1432F1B}"/>
+                <a16:creationId xmlns:a16="http://schemas.microsoft.com/office/drawing/2014/main" id="{0947E649-EE30-4B29-A096-A4FB934919B7}"/>
               </a:ext>
             </a:extLst>
           </p:cNvPr>
@@ -6587,7 +6651,7 @@
     </p:spTree>
     <p:extLst>
       <p:ext uri="{BB962C8B-B14F-4D97-AF65-F5344CB8AC3E}">
-        <p14:creationId xmlns:p14="http://schemas.microsoft.com/office/powerpoint/2010/main" val="1779289499"/>
+        <p14:creationId xmlns:p14="http://schemas.microsoft.com/office/powerpoint/2010/main" val="1516665626"/>
       </p:ext>
     </p:extLst>
   </p:cSld>
@@ -6618,7 +6682,7 @@
           <p:cNvPr id="1" name="s4-rule">
             <a:extLst xmlns:a="http://schemas.openxmlformats.org/drawingml/2006/main">
               <a:ext uri="{FF2B5EF4-FFF2-40B4-BE49-F238E27FC236}">
-                <a16:creationId xmlns:a16="http://schemas.microsoft.com/office/drawing/2014/main" id="{3FF61CEA-DBF2-436B-9C36-15BA51858A0F}"/>
+                <a16:creationId xmlns:a16="http://schemas.microsoft.com/office/drawing/2014/main" id="{7705F7F8-627A-4117-97AF-95495EC450EF}"/>
               </a:ext>
             </a:extLst>
           </p:cNvPr>
@@ -6651,7 +6715,7 @@
           <p:cNvPr id="2" name="s4-eyebrow">
             <a:extLst xmlns:a="http://schemas.openxmlformats.org/drawingml/2006/main">
               <a:ext uri="{FF2B5EF4-FFF2-40B4-BE49-F238E27FC236}">
-                <a16:creationId xmlns:a16="http://schemas.microsoft.com/office/drawing/2014/main" id="{73DED7AE-8827-47A6-B370-B87687D4EBD9}"/>
+                <a16:creationId xmlns:a16="http://schemas.microsoft.com/office/drawing/2014/main" id="{1F1C73EE-B5D7-4704-A64E-C52CD367437A}"/>
               </a:ext>
             </a:extLst>
           </p:cNvPr>
@@ -6709,7 +6773,7 @@
           <p:cNvPr id="3" name="s4-title">
             <a:extLst xmlns:a="http://schemas.openxmlformats.org/drawingml/2006/main">
               <a:ext uri="{FF2B5EF4-FFF2-40B4-BE49-F238E27FC236}">
-                <a16:creationId xmlns:a16="http://schemas.microsoft.com/office/drawing/2014/main" id="{D880C2D4-DF21-4FBA-ACE1-5C42AC75A16D}"/>
+                <a16:creationId xmlns:a16="http://schemas.microsoft.com/office/drawing/2014/main" id="{C7A876BA-55EC-44C8-A060-B61791BB4EDC}"/>
               </a:ext>
             </a:extLst>
           </p:cNvPr>
@@ -6734,7 +6798,7 @@
         </p:spPr>
         <p:txBody>
           <a:bodyPr xmlns:a="http://schemas.openxmlformats.org/drawingml/2006/main" lIns="0" tIns="0" rIns="0" bIns="0" anchor="ctr">
-            <a:normAutofit fontScale="76449"/>
+            <a:normAutofit fontScale="100000"/>
           </a:bodyPr>
           <a:lstStyle xmlns:a="http://schemas.openxmlformats.org/drawingml/2006/main"/>
           <a:p xmlns:a="http://schemas.openxmlformats.org/drawingml/2006/main">
@@ -6757,7 +6821,7 @@
                 <a:ea typeface="PingFang SC"/>
                 <a:cs typeface="PingFang SC"/>
               </a:rPr>
-              <a:t>预测性维护可结合振动、温度、电流、润滑、巡检和历史工单发现早期异常</a:t>
+              <a:t>设备异常只有进入工单闭环才产生价值</a:t>
             </a:r>
           </a:p>
         </p:txBody>
@@ -6767,7 +6831,7 @@
           <p:cNvPr id="4" name="s4-footer">
             <a:extLst xmlns:a="http://schemas.openxmlformats.org/drawingml/2006/main">
               <a:ext uri="{FF2B5EF4-FFF2-40B4-BE49-F238E27FC236}">
-                <a16:creationId xmlns:a16="http://schemas.microsoft.com/office/drawing/2014/main" id="{347B31EC-9987-4AF0-8A2F-2828DDD81A8B}"/>
+                <a16:creationId xmlns:a16="http://schemas.microsoft.com/office/drawing/2014/main" id="{8E41FE00-F51B-4C00-9D8E-124EE5A75133}"/>
               </a:ext>
             </a:extLst>
           </p:cNvPr>
@@ -6798,7 +6862,7 @@
           <p:cNvPr id="5" name="s4-identity">
             <a:extLst xmlns:a="http://schemas.openxmlformats.org/drawingml/2006/main">
               <a:ext uri="{FF2B5EF4-FFF2-40B4-BE49-F238E27FC236}">
-                <a16:creationId xmlns:a16="http://schemas.microsoft.com/office/drawing/2014/main" id="{1751D579-D51D-4ABA-B84A-0DB68FF15B52}"/>
+                <a16:creationId xmlns:a16="http://schemas.microsoft.com/office/drawing/2014/main" id="{06D3C0AB-B76C-49B8-92C5-0162FA7D0BD5}"/>
               </a:ext>
             </a:extLst>
           </p:cNvPr>
@@ -6856,7 +6920,7 @@
           <p:cNvPr id="6" name="core-no-0">
             <a:extLst xmlns:a="http://schemas.openxmlformats.org/drawingml/2006/main">
               <a:ext uri="{FF2B5EF4-FFF2-40B4-BE49-F238E27FC236}">
-                <a16:creationId xmlns:a16="http://schemas.microsoft.com/office/drawing/2014/main" id="{FBF5B75B-10CB-45FD-B8B2-13EDEEF03A4C}"/>
+                <a16:creationId xmlns:a16="http://schemas.microsoft.com/office/drawing/2014/main" id="{E48A5E16-67AE-4EFC-8A8F-E9328EA55719}"/>
               </a:ext>
             </a:extLst>
           </p:cNvPr>
@@ -6888,7 +6952,7 @@
             <a:pPr algn="l">
               <a:defRPr sz="2250" b="1">
                 <a:solidFill>
-                  <a:srgbClr val="E5783F"/>
+                  <a:srgbClr val="9A3F16"/>
                 </a:solidFill>
                 <a:latin typeface="PingFang SC"/>
                 <a:ea typeface="PingFang SC"/>
@@ -6898,7 +6962,7 @@
             <a:r>
               <a:rPr sz="2250" b="1">
                 <a:solidFill>
-                  <a:srgbClr val="E5783F"/>
+                  <a:srgbClr val="9A3F16"/>
                 </a:solidFill>
                 <a:latin typeface="PingFang SC"/>
                 <a:ea typeface="PingFang SC"/>
@@ -6914,7 +6978,7 @@
           <p:cNvPr id="7" name="core-label-0">
             <a:extLst xmlns:a="http://schemas.openxmlformats.org/drawingml/2006/main">
               <a:ext uri="{FF2B5EF4-FFF2-40B4-BE49-F238E27FC236}">
-                <a16:creationId xmlns:a16="http://schemas.microsoft.com/office/drawing/2014/main" id="{5B40EF00-F9F7-4C7E-8207-6136D97DF08E}"/>
+                <a16:creationId xmlns:a16="http://schemas.microsoft.com/office/drawing/2014/main" id="{561C6C2F-CA71-4058-9FC3-02682B929441}"/>
               </a:ext>
             </a:extLst>
           </p:cNvPr>
@@ -6972,7 +7036,7 @@
           <p:cNvPr id="8" name="core-body-0">
             <a:extLst xmlns:a="http://schemas.openxmlformats.org/drawingml/2006/main">
               <a:ext uri="{FF2B5EF4-FFF2-40B4-BE49-F238E27FC236}">
-                <a16:creationId xmlns:a16="http://schemas.microsoft.com/office/drawing/2014/main" id="{DCCD2889-B257-4ABB-8D81-E638BDFE6750}"/>
+                <a16:creationId xmlns:a16="http://schemas.microsoft.com/office/drawing/2014/main" id="{C2C6B1D5-5F08-42B5-AB98-0564C5787F8A}"/>
               </a:ext>
             </a:extLst>
           </p:cNvPr>
@@ -6996,7 +7060,7 @@
           </a:solidFill>
           <a:ln xmlns:a="http://schemas.openxmlformats.org/drawingml/2006/main" w="19050">
             <a:solidFill>
-              <a:srgbClr val="E5783F"/>
+              <a:srgbClr val="9A3F16"/>
             </a:solidFill>
             <a:prstDash val="solid"/>
           </a:ln>
@@ -7026,7 +7090,7 @@
                 <a:ea typeface="PingFang SC"/>
                 <a:cs typeface="PingFang SC"/>
               </a:rPr>
-              <a:t>预测性维护可结合振动、温度、电流、润滑、巡检和历史工单发现早期异常。模型输出不应只有一个故障概率，还要给出相关信号、变化时间、相似事件、影响设备和不确定性。大模型可以检索说明书与检修规程…</a:t>
+              <a:t>预测性维护可结合振动、温度、电流、润滑、巡检和历史工单发现早期异常；模型输出不应只有一个故障概率；还要给出相关信号、变化时间、相似事件、影响设备和不确定性；大模型可以检索说明书与检修规程</a:t>
             </a:r>
           </a:p>
         </p:txBody>
@@ -7036,7 +7100,7 @@
           <p:cNvPr id="9" name="core-no-1">
             <a:extLst xmlns:a="http://schemas.openxmlformats.org/drawingml/2006/main">
               <a:ext uri="{FF2B5EF4-FFF2-40B4-BE49-F238E27FC236}">
-                <a16:creationId xmlns:a16="http://schemas.microsoft.com/office/drawing/2014/main" id="{E9D51325-3232-488A-882C-F52E901180F0}"/>
+                <a16:creationId xmlns:a16="http://schemas.microsoft.com/office/drawing/2014/main" id="{C966B10E-2D95-4109-8072-3A3BBD2E6FA1}"/>
               </a:ext>
             </a:extLst>
           </p:cNvPr>
@@ -7068,7 +7132,7 @@
             <a:pPr algn="l">
               <a:defRPr sz="2250" b="1">
                 <a:solidFill>
-                  <a:srgbClr val="E5783F"/>
+                  <a:srgbClr val="9A3F16"/>
                 </a:solidFill>
                 <a:latin typeface="PingFang SC"/>
                 <a:ea typeface="PingFang SC"/>
@@ -7078,7 +7142,7 @@
             <a:r>
               <a:rPr sz="2250" b="1">
                 <a:solidFill>
-                  <a:srgbClr val="E5783F"/>
+                  <a:srgbClr val="9A3F16"/>
                 </a:solidFill>
                 <a:latin typeface="PingFang SC"/>
                 <a:ea typeface="PingFang SC"/>
@@ -7094,7 +7158,7 @@
           <p:cNvPr id="10" name="core-body-1">
             <a:extLst xmlns:a="http://schemas.openxmlformats.org/drawingml/2006/main">
               <a:ext uri="{FF2B5EF4-FFF2-40B4-BE49-F238E27FC236}">
-                <a16:creationId xmlns:a16="http://schemas.microsoft.com/office/drawing/2014/main" id="{752ABCBE-0646-46EF-9601-A7695896C8F2}"/>
+                <a16:creationId xmlns:a16="http://schemas.microsoft.com/office/drawing/2014/main" id="{A793F296-FDE3-4E20-AB11-EA21C0273227}"/>
               </a:ext>
             </a:extLst>
           </p:cNvPr>
@@ -7148,7 +7212,7 @@
                 <a:ea typeface="PingFang SC"/>
                 <a:cs typeface="PingFang SC"/>
               </a:rPr>
-              <a:t>维护决策还受生产计划、备件、人员资质和停机窗口约束。更完整的输出是“证据—可能原因—建议检查—所需资源—允许时间窗”，由有权限的工程师确认后生成工单。维修结果、拆检发现和误报警原因应回写…</a:t>
+              <a:t>维护决策还受生产计划、备件、人员资质和停机窗口约束；更完整的输出是“证据—可能原因—建议检查—所需资源—允许时间窗”；由有权限的工程师确认后生成工单；维修结果、拆检发现和误报警原因应回写</a:t>
             </a:r>
           </a:p>
         </p:txBody>
@@ -7158,7 +7222,7 @@
           <p:cNvPr id="11" name="s4-takeaway-rule">
             <a:extLst xmlns:a="http://schemas.openxmlformats.org/drawingml/2006/main">
               <a:ext uri="{FF2B5EF4-FFF2-40B4-BE49-F238E27FC236}">
-                <a16:creationId xmlns:a16="http://schemas.microsoft.com/office/drawing/2014/main" id="{09008D7E-60AC-4A8F-9BDC-9FC6B5DED7D3}"/>
+                <a16:creationId xmlns:a16="http://schemas.microsoft.com/office/drawing/2014/main" id="{C48BB177-EAE0-4E62-80AB-45DC567A87D2}"/>
               </a:ext>
             </a:extLst>
           </p:cNvPr>
@@ -7191,7 +7255,7 @@
           <p:cNvPr id="12" name="s4-takeaway">
             <a:extLst xmlns:a="http://schemas.openxmlformats.org/drawingml/2006/main">
               <a:ext uri="{FF2B5EF4-FFF2-40B4-BE49-F238E27FC236}">
-                <a16:creationId xmlns:a16="http://schemas.microsoft.com/office/drawing/2014/main" id="{4D4D34BE-4EA6-4C88-976B-82F27D18AD40}"/>
+                <a16:creationId xmlns:a16="http://schemas.microsoft.com/office/drawing/2014/main" id="{DD131893-7F73-406D-B20B-3563B144D84A}"/>
               </a:ext>
             </a:extLst>
           </p:cNvPr>
@@ -7239,7 +7303,7 @@
                 <a:ea typeface="PingFang SC"/>
                 <a:cs typeface="PingFang SC"/>
               </a:rPr>
-              <a:t>预测性维护可结合振动、温度、电流、润滑、巡检和历史工单发现早期异常</a:t>
+              <a:t>设备异常只有进入工单闭环才产生价值</a:t>
             </a:r>
           </a:p>
         </p:txBody>
@@ -7247,7 +7311,7 @@
     </p:spTree>
     <p:extLst>
       <p:ext uri="{BB962C8B-B14F-4D97-AF65-F5344CB8AC3E}">
-        <p14:creationId xmlns:p14="http://schemas.microsoft.com/office/powerpoint/2010/main" val="227538095"/>
+        <p14:creationId xmlns:p14="http://schemas.microsoft.com/office/powerpoint/2010/main" val="880528197"/>
       </p:ext>
     </p:extLst>
   </p:cSld>
@@ -7278,7 +7342,7 @@
           <p:cNvPr id="1" name="s5-rule">
             <a:extLst xmlns:a="http://schemas.openxmlformats.org/drawingml/2006/main">
               <a:ext uri="{FF2B5EF4-FFF2-40B4-BE49-F238E27FC236}">
-                <a16:creationId xmlns:a16="http://schemas.microsoft.com/office/drawing/2014/main" id="{F8FD2F57-7CFE-46E2-9D71-CD3CCCBE99A9}"/>
+                <a16:creationId xmlns:a16="http://schemas.microsoft.com/office/drawing/2014/main" id="{07616901-BA70-47DF-A13C-67CF56534DDE}"/>
               </a:ext>
             </a:extLst>
           </p:cNvPr>
@@ -7311,7 +7375,7 @@
           <p:cNvPr id="2" name="s5-eyebrow">
             <a:extLst xmlns:a="http://schemas.openxmlformats.org/drawingml/2006/main">
               <a:ext uri="{FF2B5EF4-FFF2-40B4-BE49-F238E27FC236}">
-                <a16:creationId xmlns:a16="http://schemas.microsoft.com/office/drawing/2014/main" id="{E73B6ED8-5602-42C9-8DA8-77A4231671D2}"/>
+                <a16:creationId xmlns:a16="http://schemas.microsoft.com/office/drawing/2014/main" id="{665EA2C4-7D0D-451A-87D5-E09A5A3F144A}"/>
               </a:ext>
             </a:extLst>
           </p:cNvPr>
@@ -7369,7 +7433,7 @@
           <p:cNvPr id="3" name="s5-title">
             <a:extLst xmlns:a="http://schemas.openxmlformats.org/drawingml/2006/main">
               <a:ext uri="{FF2B5EF4-FFF2-40B4-BE49-F238E27FC236}">
-                <a16:creationId xmlns:a16="http://schemas.microsoft.com/office/drawing/2014/main" id="{5C873776-0CCA-4B82-B536-7914684BBAA9}"/>
+                <a16:creationId xmlns:a16="http://schemas.microsoft.com/office/drawing/2014/main" id="{2E060669-1CC3-4263-9F8C-4086DA90C9BB}"/>
               </a:ext>
             </a:extLst>
           </p:cNvPr>
@@ -7394,7 +7458,7 @@
         </p:spPr>
         <p:txBody>
           <a:bodyPr xmlns:a="http://schemas.openxmlformats.org/drawingml/2006/main" lIns="0" tIns="0" rIns="0" bIns="0" anchor="ctr">
-            <a:normAutofit fontScale="74187"/>
+            <a:normAutofit fontScale="100000"/>
           </a:bodyPr>
           <a:lstStyle xmlns:a="http://schemas.openxmlformats.org/drawingml/2006/main"/>
           <a:p xmlns:a="http://schemas.openxmlformats.org/drawingml/2006/main">
@@ -7417,7 +7481,7 @@
                 <a:ea typeface="PingFang SC"/>
                 <a:cs typeface="PingFang SC"/>
               </a:rPr>
-              <a:t>视觉检测、时序检测和过程建模可以辅助发现表面缺陷、尺寸偏差或工艺异常</a:t>
+              <a:t>质量检测必须同时管理误报与漏报</a:t>
             </a:r>
           </a:p>
         </p:txBody>
@@ -7427,7 +7491,7 @@
           <p:cNvPr id="4" name="s5-footer">
             <a:extLst xmlns:a="http://schemas.openxmlformats.org/drawingml/2006/main">
               <a:ext uri="{FF2B5EF4-FFF2-40B4-BE49-F238E27FC236}">
-                <a16:creationId xmlns:a16="http://schemas.microsoft.com/office/drawing/2014/main" id="{8BF22021-095D-4FF9-90D3-4994044EA969}"/>
+                <a16:creationId xmlns:a16="http://schemas.microsoft.com/office/drawing/2014/main" id="{D81BBFFC-58D0-41BA-8B0B-B8F1E7219579}"/>
               </a:ext>
             </a:extLst>
           </p:cNvPr>
@@ -7458,7 +7522,7 @@
           <p:cNvPr id="5" name="s5-identity">
             <a:extLst xmlns:a="http://schemas.openxmlformats.org/drawingml/2006/main">
               <a:ext uri="{FF2B5EF4-FFF2-40B4-BE49-F238E27FC236}">
-                <a16:creationId xmlns:a16="http://schemas.microsoft.com/office/drawing/2014/main" id="{A2DBE633-470D-4879-A0B5-E344F25C2C49}"/>
+                <a16:creationId xmlns:a16="http://schemas.microsoft.com/office/drawing/2014/main" id="{7ED40890-7210-4E3F-8584-F79958A0CEEE}"/>
               </a:ext>
             </a:extLst>
           </p:cNvPr>
@@ -7516,7 +7580,7 @@
           <p:cNvPr id="6" name="core-no-0">
             <a:extLst xmlns:a="http://schemas.openxmlformats.org/drawingml/2006/main">
               <a:ext uri="{FF2B5EF4-FFF2-40B4-BE49-F238E27FC236}">
-                <a16:creationId xmlns:a16="http://schemas.microsoft.com/office/drawing/2014/main" id="{9A17C68E-797D-4DCA-804B-1A757F2F0778}"/>
+                <a16:creationId xmlns:a16="http://schemas.microsoft.com/office/drawing/2014/main" id="{92A2D9B6-E88C-4754-830B-19B1E901FBCA}"/>
               </a:ext>
             </a:extLst>
           </p:cNvPr>
@@ -7548,7 +7612,7 @@
             <a:pPr algn="l">
               <a:defRPr sz="2250" b="1">
                 <a:solidFill>
-                  <a:srgbClr val="E5783F"/>
+                  <a:srgbClr val="9A3F16"/>
                 </a:solidFill>
                 <a:latin typeface="PingFang SC"/>
                 <a:ea typeface="PingFang SC"/>
@@ -7558,7 +7622,7 @@
             <a:r>
               <a:rPr sz="2250" b="1">
                 <a:solidFill>
-                  <a:srgbClr val="E5783F"/>
+                  <a:srgbClr val="9A3F16"/>
                 </a:solidFill>
                 <a:latin typeface="PingFang SC"/>
                 <a:ea typeface="PingFang SC"/>
@@ -7574,7 +7638,7 @@
           <p:cNvPr id="7" name="core-label-0">
             <a:extLst xmlns:a="http://schemas.openxmlformats.org/drawingml/2006/main">
               <a:ext uri="{FF2B5EF4-FFF2-40B4-BE49-F238E27FC236}">
-                <a16:creationId xmlns:a16="http://schemas.microsoft.com/office/drawing/2014/main" id="{97A31877-4030-45C2-A188-48219DE52F34}"/>
+                <a16:creationId xmlns:a16="http://schemas.microsoft.com/office/drawing/2014/main" id="{D7F4D0FD-9456-4064-BC1C-30B33A2418B4}"/>
               </a:ext>
             </a:extLst>
           </p:cNvPr>
@@ -7632,7 +7696,7 @@
           <p:cNvPr id="8" name="core-body-0">
             <a:extLst xmlns:a="http://schemas.openxmlformats.org/drawingml/2006/main">
               <a:ext uri="{FF2B5EF4-FFF2-40B4-BE49-F238E27FC236}">
-                <a16:creationId xmlns:a16="http://schemas.microsoft.com/office/drawing/2014/main" id="{CE191C1F-4C7B-4484-94D0-13BFBE15D78F}"/>
+                <a16:creationId xmlns:a16="http://schemas.microsoft.com/office/drawing/2014/main" id="{D051B7D2-87D6-4AB8-8BD4-978074440897}"/>
               </a:ext>
             </a:extLst>
           </p:cNvPr>
@@ -7656,7 +7720,7 @@
           </a:solidFill>
           <a:ln xmlns:a="http://schemas.openxmlformats.org/drawingml/2006/main" w="19050">
             <a:solidFill>
-              <a:srgbClr val="E5783F"/>
+              <a:srgbClr val="9A3F16"/>
             </a:solidFill>
             <a:prstDash val="solid"/>
           </a:ln>
@@ -7696,7 +7760,7 @@
           <p:cNvPr id="9" name="core-no-1">
             <a:extLst xmlns:a="http://schemas.openxmlformats.org/drawingml/2006/main">
               <a:ext uri="{FF2B5EF4-FFF2-40B4-BE49-F238E27FC236}">
-                <a16:creationId xmlns:a16="http://schemas.microsoft.com/office/drawing/2014/main" id="{F6B443AD-3FE5-4556-B84D-506149BC79FA}"/>
+                <a16:creationId xmlns:a16="http://schemas.microsoft.com/office/drawing/2014/main" id="{2DF8CD26-5257-4F1C-8A44-48B35D0BC0CC}"/>
               </a:ext>
             </a:extLst>
           </p:cNvPr>
@@ -7728,7 +7792,7 @@
             <a:pPr algn="l">
               <a:defRPr sz="2250" b="1">
                 <a:solidFill>
-                  <a:srgbClr val="E5783F"/>
+                  <a:srgbClr val="9A3F16"/>
                 </a:solidFill>
                 <a:latin typeface="PingFang SC"/>
                 <a:ea typeface="PingFang SC"/>
@@ -7738,7 +7802,7 @@
             <a:r>
               <a:rPr sz="2250" b="1">
                 <a:solidFill>
-                  <a:srgbClr val="E5783F"/>
+                  <a:srgbClr val="9A3F16"/>
                 </a:solidFill>
                 <a:latin typeface="PingFang SC"/>
                 <a:ea typeface="PingFang SC"/>
@@ -7754,7 +7818,7 @@
           <p:cNvPr id="10" name="core-body-1">
             <a:extLst xmlns:a="http://schemas.openxmlformats.org/drawingml/2006/main">
               <a:ext uri="{FF2B5EF4-FFF2-40B4-BE49-F238E27FC236}">
-                <a16:creationId xmlns:a16="http://schemas.microsoft.com/office/drawing/2014/main" id="{23F9F72E-A024-4AA6-8E55-CEE47B915A37}"/>
+                <a16:creationId xmlns:a16="http://schemas.microsoft.com/office/drawing/2014/main" id="{FBAC0DBC-B85E-4DBB-97BA-C9EB01FA8E58}"/>
               </a:ext>
             </a:extLst>
           </p:cNvPr>
@@ -7808,7 +7872,7 @@
                 <a:ea typeface="PingFang SC"/>
                 <a:cs typeface="PingFang SC"/>
               </a:rPr>
-              <a:t>误报会增加复检、停线和报废成本，漏报可能使不合格品流向下游。阈值不能只由算法团队追求最高平均分，而应根据后果与后续检查能力共同设定。模型标记、人工复检、处置结果和客户反馈要能追到同一批次…</a:t>
+              <a:t>误报会增加复检、停线和报废成本；漏报可能使不合格品流向下游；阈值不能只由算法团队追求最高平均分；而应根据后果与后续检查能力共同设定；模型标记、人工复检、处置结果和客户反馈要能追到同一批次</a:t>
             </a:r>
           </a:p>
         </p:txBody>
@@ -7818,7 +7882,7 @@
           <p:cNvPr id="11" name="s5-takeaway-rule">
             <a:extLst xmlns:a="http://schemas.openxmlformats.org/drawingml/2006/main">
               <a:ext uri="{FF2B5EF4-FFF2-40B4-BE49-F238E27FC236}">
-                <a16:creationId xmlns:a16="http://schemas.microsoft.com/office/drawing/2014/main" id="{C946762B-554C-451F-A4C2-216AE0D49A99}"/>
+                <a16:creationId xmlns:a16="http://schemas.microsoft.com/office/drawing/2014/main" id="{D6CE0FEB-151D-4C43-B117-569B6B3BF6C8}"/>
               </a:ext>
             </a:extLst>
           </p:cNvPr>
@@ -7851,7 +7915,7 @@
           <p:cNvPr id="12" name="s5-takeaway">
             <a:extLst xmlns:a="http://schemas.openxmlformats.org/drawingml/2006/main">
               <a:ext uri="{FF2B5EF4-FFF2-40B4-BE49-F238E27FC236}">
-                <a16:creationId xmlns:a16="http://schemas.microsoft.com/office/drawing/2014/main" id="{EBE70AD6-FBD7-43B6-B393-EF527ECE27E0}"/>
+                <a16:creationId xmlns:a16="http://schemas.microsoft.com/office/drawing/2014/main" id="{F30A0C83-8EAB-4327-8E0D-B85BFDADDCD1}"/>
               </a:ext>
             </a:extLst>
           </p:cNvPr>
@@ -7899,7 +7963,7 @@
                 <a:ea typeface="PingFang SC"/>
                 <a:cs typeface="PingFang SC"/>
               </a:rPr>
-              <a:t>视觉检测、时序检测和过程建模可以辅助发现表面缺陷、尺寸偏差或工艺异常</a:t>
+              <a:t>质量检测必须同时管理误报与漏报</a:t>
             </a:r>
           </a:p>
         </p:txBody>
@@ -7907,7 +7971,7 @@
     </p:spTree>
     <p:extLst>
       <p:ext uri="{BB962C8B-B14F-4D97-AF65-F5344CB8AC3E}">
-        <p14:creationId xmlns:p14="http://schemas.microsoft.com/office/powerpoint/2010/main" val="799878433"/>
+        <p14:creationId xmlns:p14="http://schemas.microsoft.com/office/powerpoint/2010/main" val="1826327539"/>
       </p:ext>
     </p:extLst>
   </p:cSld>
@@ -7938,7 +8002,7 @@
           <p:cNvPr id="1" name="s6-rule">
             <a:extLst xmlns:a="http://schemas.openxmlformats.org/drawingml/2006/main">
               <a:ext uri="{FF2B5EF4-FFF2-40B4-BE49-F238E27FC236}">
-                <a16:creationId xmlns:a16="http://schemas.microsoft.com/office/drawing/2014/main" id="{88590842-AE6E-423F-AAA9-E037FF6B16C7}"/>
+                <a16:creationId xmlns:a16="http://schemas.microsoft.com/office/drawing/2014/main" id="{A65C3128-8077-42BF-9B61-718F97FABDD7}"/>
               </a:ext>
             </a:extLst>
           </p:cNvPr>
@@ -7971,7 +8035,7 @@
           <p:cNvPr id="2" name="s6-eyebrow">
             <a:extLst xmlns:a="http://schemas.openxmlformats.org/drawingml/2006/main">
               <a:ext uri="{FF2B5EF4-FFF2-40B4-BE49-F238E27FC236}">
-                <a16:creationId xmlns:a16="http://schemas.microsoft.com/office/drawing/2014/main" id="{4DC95F47-C46B-4D30-9357-E6D8F1322A55}"/>
+                <a16:creationId xmlns:a16="http://schemas.microsoft.com/office/drawing/2014/main" id="{A8E7F270-8E52-47AC-A396-ABD0147EA618}"/>
               </a:ext>
             </a:extLst>
           </p:cNvPr>
@@ -8029,7 +8093,7 @@
           <p:cNvPr id="3" name="s6-title">
             <a:extLst xmlns:a="http://schemas.openxmlformats.org/drawingml/2006/main">
               <a:ext uri="{FF2B5EF4-FFF2-40B4-BE49-F238E27FC236}">
-                <a16:creationId xmlns:a16="http://schemas.microsoft.com/office/drawing/2014/main" id="{30EB6E9A-B981-4C64-B734-A45A3EFE201C}"/>
+                <a16:creationId xmlns:a16="http://schemas.microsoft.com/office/drawing/2014/main" id="{DCEB2E32-00E8-4649-835B-D5448D4E9780}"/>
               </a:ext>
             </a:extLst>
           </p:cNvPr>
@@ -8087,7 +8151,7 @@
           <p:cNvPr id="4" name="s6-footer">
             <a:extLst xmlns:a="http://schemas.openxmlformats.org/drawingml/2006/main">
               <a:ext uri="{FF2B5EF4-FFF2-40B4-BE49-F238E27FC236}">
-                <a16:creationId xmlns:a16="http://schemas.microsoft.com/office/drawing/2014/main" id="{9E525703-5433-4AAD-BB90-7251D1ABF1E3}"/>
+                <a16:creationId xmlns:a16="http://schemas.microsoft.com/office/drawing/2014/main" id="{F018FDB0-2952-412D-9542-1C02057A81DF}"/>
               </a:ext>
             </a:extLst>
           </p:cNvPr>
@@ -8118,7 +8182,7 @@
           <p:cNvPr id="5" name="s6-identity">
             <a:extLst xmlns:a="http://schemas.openxmlformats.org/drawingml/2006/main">
               <a:ext uri="{FF2B5EF4-FFF2-40B4-BE49-F238E27FC236}">
-                <a16:creationId xmlns:a16="http://schemas.microsoft.com/office/drawing/2014/main" id="{D61C818D-0ACB-49BA-886E-692A17FF4C12}"/>
+                <a16:creationId xmlns:a16="http://schemas.microsoft.com/office/drawing/2014/main" id="{312B0360-7A7D-40C8-AFF0-6422B9384988}"/>
               </a:ext>
             </a:extLst>
           </p:cNvPr>
@@ -8176,7 +8240,7 @@
           <p:cNvPr id="6" name="core-no-0">
             <a:extLst xmlns:a="http://schemas.openxmlformats.org/drawingml/2006/main">
               <a:ext uri="{FF2B5EF4-FFF2-40B4-BE49-F238E27FC236}">
-                <a16:creationId xmlns:a16="http://schemas.microsoft.com/office/drawing/2014/main" id="{4FFD54BE-0D82-4D8B-B274-3BB95DDFFCAB}"/>
+                <a16:creationId xmlns:a16="http://schemas.microsoft.com/office/drawing/2014/main" id="{0E5905A0-C866-4915-B986-C0550804D579}"/>
               </a:ext>
             </a:extLst>
           </p:cNvPr>
@@ -8208,7 +8272,7 @@
             <a:pPr algn="l">
               <a:defRPr sz="2250" b="1">
                 <a:solidFill>
-                  <a:srgbClr val="E5783F"/>
+                  <a:srgbClr val="9A3F16"/>
                 </a:solidFill>
                 <a:latin typeface="PingFang SC"/>
                 <a:ea typeface="PingFang SC"/>
@@ -8218,7 +8282,7 @@
             <a:r>
               <a:rPr sz="2250" b="1">
                 <a:solidFill>
-                  <a:srgbClr val="E5783F"/>
+                  <a:srgbClr val="9A3F16"/>
                 </a:solidFill>
                 <a:latin typeface="PingFang SC"/>
                 <a:ea typeface="PingFang SC"/>
@@ -8234,7 +8298,7 @@
           <p:cNvPr id="7" name="core-label-0">
             <a:extLst xmlns:a="http://schemas.openxmlformats.org/drawingml/2006/main">
               <a:ext uri="{FF2B5EF4-FFF2-40B4-BE49-F238E27FC236}">
-                <a16:creationId xmlns:a16="http://schemas.microsoft.com/office/drawing/2014/main" id="{27779767-91BC-411C-A5AC-FCA3A9574E07}"/>
+                <a16:creationId xmlns:a16="http://schemas.microsoft.com/office/drawing/2014/main" id="{74429ED5-2176-41E8-8119-D896E2ACDDC6}"/>
               </a:ext>
             </a:extLst>
           </p:cNvPr>
@@ -8292,7 +8356,7 @@
           <p:cNvPr id="8" name="core-body-0">
             <a:extLst xmlns:a="http://schemas.openxmlformats.org/drawingml/2006/main">
               <a:ext uri="{FF2B5EF4-FFF2-40B4-BE49-F238E27FC236}">
-                <a16:creationId xmlns:a16="http://schemas.microsoft.com/office/drawing/2014/main" id="{3E07F126-C65D-44BC-B5E5-801043E5953A}"/>
+                <a16:creationId xmlns:a16="http://schemas.microsoft.com/office/drawing/2014/main" id="{E08D3530-E62E-4687-A083-BB663FDF4E75}"/>
               </a:ext>
             </a:extLst>
           </p:cNvPr>
@@ -8316,14 +8380,14 @@
           </a:solidFill>
           <a:ln xmlns:a="http://schemas.openxmlformats.org/drawingml/2006/main" w="19050">
             <a:solidFill>
-              <a:srgbClr val="E5783F"/>
+              <a:srgbClr val="9A3F16"/>
             </a:solidFill>
             <a:prstDash val="solid"/>
           </a:ln>
         </p:spPr>
         <p:txBody>
           <a:bodyPr xmlns:a="http://schemas.openxmlformats.org/drawingml/2006/main" lIns="152400" tIns="133350" rIns="152400" bIns="133350" anchor="ctr">
-            <a:normAutofit fontScale="98233"/>
+            <a:normAutofit fontScale="100000"/>
           </a:bodyPr>
           <a:lstStyle xmlns:a="http://schemas.openxmlformats.org/drawingml/2006/main"/>
           <a:p xmlns:a="http://schemas.openxmlformats.org/drawingml/2006/main">
@@ -8346,7 +8410,7 @@
                 <a:ea typeface="PingFang SC"/>
                 <a:cs typeface="PingFang SC"/>
               </a:rPr>
-              <a:t>能源场景需要理解源、网、荷、储之间的关系。负荷和发电预测可为排程、储能和需求响应提供输入，设备模型可发现异常能耗，大模型可帮助检索运行规程和解释告警。但真正的调度方案还要满足容量、温度、寿命…</a:t>
+              <a:t>能源场景需要理解源、网、荷、储之间的关系；负荷和发电预测可为排程、储能和需求响应提供输入；设备模型可发现异常能耗；大模型可帮助检索运行规程和解释告警</a:t>
             </a:r>
           </a:p>
         </p:txBody>
@@ -8356,7 +8420,7 @@
           <p:cNvPr id="9" name="core-no-1">
             <a:extLst xmlns:a="http://schemas.openxmlformats.org/drawingml/2006/main">
               <a:ext uri="{FF2B5EF4-FFF2-40B4-BE49-F238E27FC236}">
-                <a16:creationId xmlns:a16="http://schemas.microsoft.com/office/drawing/2014/main" id="{A703BACB-6C56-4231-9D49-B02F15CEFB68}"/>
+                <a16:creationId xmlns:a16="http://schemas.microsoft.com/office/drawing/2014/main" id="{7FCA96BB-6066-481C-9B20-2A46ED428C69}"/>
               </a:ext>
             </a:extLst>
           </p:cNvPr>
@@ -8388,7 +8452,7 @@
             <a:pPr algn="l">
               <a:defRPr sz="2250" b="1">
                 <a:solidFill>
-                  <a:srgbClr val="E5783F"/>
+                  <a:srgbClr val="9A3F16"/>
                 </a:solidFill>
                 <a:latin typeface="PingFang SC"/>
                 <a:ea typeface="PingFang SC"/>
@@ -8398,7 +8462,7 @@
             <a:r>
               <a:rPr sz="2250" b="1">
                 <a:solidFill>
-                  <a:srgbClr val="E5783F"/>
+                  <a:srgbClr val="9A3F16"/>
                 </a:solidFill>
                 <a:latin typeface="PingFang SC"/>
                 <a:ea typeface="PingFang SC"/>
@@ -8414,7 +8478,7 @@
           <p:cNvPr id="10" name="core-body-1">
             <a:extLst xmlns:a="http://schemas.openxmlformats.org/drawingml/2006/main">
               <a:ext uri="{FF2B5EF4-FFF2-40B4-BE49-F238E27FC236}">
-                <a16:creationId xmlns:a16="http://schemas.microsoft.com/office/drawing/2014/main" id="{51351616-0850-4E5F-8B4D-43FD016A0F15}"/>
+                <a16:creationId xmlns:a16="http://schemas.microsoft.com/office/drawing/2014/main" id="{D6AD75D0-9490-464A-BFD4-AF8DB0A52948}"/>
               </a:ext>
             </a:extLst>
           </p:cNvPr>
@@ -8468,7 +8532,7 @@
                 <a:ea typeface="PingFang SC"/>
                 <a:cs typeface="PingFang SC"/>
               </a:rPr>
-              <a:t>评价不能只看预测误差，还要看建议是否可执行、是否造成峰值转移、是否影响产品质量，以及异常时能否退回既有控制策略。能源基线应说明产量、气候、工况和统计周期；否则…</a:t>
+              <a:t>评价不能只看预测误差；还要看建议是否可执行、是否造成峰值转移、是否影响产品质量；以及异常时能否退回既有控制策略；能源基线应说明产量、气候、工况和统计周期</a:t>
             </a:r>
           </a:p>
         </p:txBody>
@@ -8478,7 +8542,7 @@
           <p:cNvPr id="11" name="s6-takeaway-rule">
             <a:extLst xmlns:a="http://schemas.openxmlformats.org/drawingml/2006/main">
               <a:ext uri="{FF2B5EF4-FFF2-40B4-BE49-F238E27FC236}">
-                <a16:creationId xmlns:a16="http://schemas.microsoft.com/office/drawing/2014/main" id="{3B7096FC-0320-47C8-B908-ACAA3E467BE5}"/>
+                <a16:creationId xmlns:a16="http://schemas.microsoft.com/office/drawing/2014/main" id="{97689EF5-2165-4529-AE7A-1CF39B5AFC0F}"/>
               </a:ext>
             </a:extLst>
           </p:cNvPr>
@@ -8511,7 +8575,7 @@
           <p:cNvPr id="12" name="s6-takeaway">
             <a:extLst xmlns:a="http://schemas.openxmlformats.org/drawingml/2006/main">
               <a:ext uri="{FF2B5EF4-FFF2-40B4-BE49-F238E27FC236}">
-                <a16:creationId xmlns:a16="http://schemas.microsoft.com/office/drawing/2014/main" id="{46A242FB-134B-43C7-A04C-4D25BAC57834}"/>
+                <a16:creationId xmlns:a16="http://schemas.microsoft.com/office/drawing/2014/main" id="{91B99B37-3385-42C4-8B87-AF3DEF5A4661}"/>
               </a:ext>
             </a:extLst>
           </p:cNvPr>
@@ -8567,7 +8631,7 @@
     </p:spTree>
     <p:extLst>
       <p:ext uri="{BB962C8B-B14F-4D97-AF65-F5344CB8AC3E}">
-        <p14:creationId xmlns:p14="http://schemas.microsoft.com/office/powerpoint/2010/main" val="910386455"/>
+        <p14:creationId xmlns:p14="http://schemas.microsoft.com/office/powerpoint/2010/main" val="227158986"/>
       </p:ext>
     </p:extLst>
   </p:cSld>
@@ -8598,7 +8662,7 @@
           <p:cNvPr id="1" name="s7-rule">
             <a:extLst xmlns:a="http://schemas.openxmlformats.org/drawingml/2006/main">
               <a:ext uri="{FF2B5EF4-FFF2-40B4-BE49-F238E27FC236}">
-                <a16:creationId xmlns:a16="http://schemas.microsoft.com/office/drawing/2014/main" id="{863CC7FB-5B1B-4719-9C0F-B7F6F550CD74}"/>
+                <a16:creationId xmlns:a16="http://schemas.microsoft.com/office/drawing/2014/main" id="{E26FB1D1-9F84-4F52-A3D2-6CE2E6096FE4}"/>
               </a:ext>
             </a:extLst>
           </p:cNvPr>
@@ -8631,7 +8695,7 @@
           <p:cNvPr id="2" name="s7-eyebrow">
             <a:extLst xmlns:a="http://schemas.openxmlformats.org/drawingml/2006/main">
               <a:ext uri="{FF2B5EF4-FFF2-40B4-BE49-F238E27FC236}">
-                <a16:creationId xmlns:a16="http://schemas.microsoft.com/office/drawing/2014/main" id="{38DFE017-6275-48CE-BAA1-10BB37BB3A3E}"/>
+                <a16:creationId xmlns:a16="http://schemas.microsoft.com/office/drawing/2014/main" id="{86E550A4-D4CD-46BB-B5E6-B4CDF66CEB17}"/>
               </a:ext>
             </a:extLst>
           </p:cNvPr>
@@ -8689,7 +8753,7 @@
           <p:cNvPr id="3" name="s7-title">
             <a:extLst xmlns:a="http://schemas.openxmlformats.org/drawingml/2006/main">
               <a:ext uri="{FF2B5EF4-FFF2-40B4-BE49-F238E27FC236}">
-                <a16:creationId xmlns:a16="http://schemas.microsoft.com/office/drawing/2014/main" id="{337A6458-5D86-41E4-91D2-15576A695181}"/>
+                <a16:creationId xmlns:a16="http://schemas.microsoft.com/office/drawing/2014/main" id="{9CF08AE1-038C-4474-9308-D774B7AD50D9}"/>
               </a:ext>
             </a:extLst>
           </p:cNvPr>
@@ -8747,7 +8811,7 @@
           <p:cNvPr id="4" name="s7-footer">
             <a:extLst xmlns:a="http://schemas.openxmlformats.org/drawingml/2006/main">
               <a:ext uri="{FF2B5EF4-FFF2-40B4-BE49-F238E27FC236}">
-                <a16:creationId xmlns:a16="http://schemas.microsoft.com/office/drawing/2014/main" id="{BC3222CF-F6BA-49AE-B67E-108A023BD53E}"/>
+                <a16:creationId xmlns:a16="http://schemas.microsoft.com/office/drawing/2014/main" id="{CE8BFAB5-D6DF-4C27-8B13-541C514DB904}"/>
               </a:ext>
             </a:extLst>
           </p:cNvPr>
@@ -8778,7 +8842,7 @@
           <p:cNvPr id="5" name="s7-identity">
             <a:extLst xmlns:a="http://schemas.openxmlformats.org/drawingml/2006/main">
               <a:ext uri="{FF2B5EF4-FFF2-40B4-BE49-F238E27FC236}">
-                <a16:creationId xmlns:a16="http://schemas.microsoft.com/office/drawing/2014/main" id="{C1C6ED32-7C3D-40AC-BC98-777D35900EEC}"/>
+                <a16:creationId xmlns:a16="http://schemas.microsoft.com/office/drawing/2014/main" id="{FFD08BD8-741C-4C13-A36F-F9F399576E55}"/>
               </a:ext>
             </a:extLst>
           </p:cNvPr>
@@ -8836,7 +8900,7 @@
           <p:cNvPr id="6" name="core-no-0">
             <a:extLst xmlns:a="http://schemas.openxmlformats.org/drawingml/2006/main">
               <a:ext uri="{FF2B5EF4-FFF2-40B4-BE49-F238E27FC236}">
-                <a16:creationId xmlns:a16="http://schemas.microsoft.com/office/drawing/2014/main" id="{54FA86E6-041E-4252-B26F-1207472AC9B4}"/>
+                <a16:creationId xmlns:a16="http://schemas.microsoft.com/office/drawing/2014/main" id="{EFA6EE36-E584-4A81-A57A-97D60B505B98}"/>
               </a:ext>
             </a:extLst>
           </p:cNvPr>
@@ -8868,7 +8932,7 @@
             <a:pPr algn="l">
               <a:defRPr sz="2250" b="1">
                 <a:solidFill>
-                  <a:srgbClr val="E5783F"/>
+                  <a:srgbClr val="9A3F16"/>
                 </a:solidFill>
                 <a:latin typeface="PingFang SC"/>
                 <a:ea typeface="PingFang SC"/>
@@ -8878,7 +8942,7 @@
             <a:r>
               <a:rPr sz="2250" b="1">
                 <a:solidFill>
-                  <a:srgbClr val="E5783F"/>
+                  <a:srgbClr val="9A3F16"/>
                 </a:solidFill>
                 <a:latin typeface="PingFang SC"/>
                 <a:ea typeface="PingFang SC"/>
@@ -8894,7 +8958,7 @@
           <p:cNvPr id="7" name="core-label-0">
             <a:extLst xmlns:a="http://schemas.openxmlformats.org/drawingml/2006/main">
               <a:ext uri="{FF2B5EF4-FFF2-40B4-BE49-F238E27FC236}">
-                <a16:creationId xmlns:a16="http://schemas.microsoft.com/office/drawing/2014/main" id="{9B2E6391-F9A8-47B9-B8C4-2758EC95F2CB}"/>
+                <a16:creationId xmlns:a16="http://schemas.microsoft.com/office/drawing/2014/main" id="{30A77C60-BBEF-44C4-80F7-2AD3A590F903}"/>
               </a:ext>
             </a:extLst>
           </p:cNvPr>
@@ -8952,7 +9016,7 @@
           <p:cNvPr id="8" name="core-body-0">
             <a:extLst xmlns:a="http://schemas.openxmlformats.org/drawingml/2006/main">
               <a:ext uri="{FF2B5EF4-FFF2-40B4-BE49-F238E27FC236}">
-                <a16:creationId xmlns:a16="http://schemas.microsoft.com/office/drawing/2014/main" id="{7B610476-0242-417C-882C-87348BD17D7D}"/>
+                <a16:creationId xmlns:a16="http://schemas.microsoft.com/office/drawing/2014/main" id="{D4C7F078-E093-44B5-A4C7-5CCF2CD4BCAA}"/>
               </a:ext>
             </a:extLst>
           </p:cNvPr>
@@ -8976,7 +9040,7 @@
           </a:solidFill>
           <a:ln xmlns:a="http://schemas.openxmlformats.org/drawingml/2006/main" w="19050">
             <a:solidFill>
-              <a:srgbClr val="E5783F"/>
+              <a:srgbClr val="9A3F16"/>
             </a:solidFill>
             <a:prstDash val="solid"/>
           </a:ln>
@@ -9006,7 +9070,7 @@
                 <a:ea typeface="PingFang SC"/>
                 <a:cs typeface="PingFang SC"/>
               </a:rPr>
-              <a:t>供应链模型可综合订单、库存、交付周期、物流事件、供应商状态和外部公开信息，辅助需求预测、缺料预警与方案比较。输出应说明关键假设、数据新鲜度、影响范围和替代方案，而不是给出一个看似确定的单点预测…</a:t>
+              <a:t>供应链模型可综合订单、库存、交付周期、物流事件、供应商状态和外部公开信息；辅助需求预测、缺料预警与方案比较；输出应说明关键假设、数据新鲜度、影响范围和替代方案；而不是给出一个看似确定的单点预测</a:t>
             </a:r>
           </a:p>
         </p:txBody>
@@ -9016,7 +9080,7 @@
           <p:cNvPr id="9" name="core-no-1">
             <a:extLst xmlns:a="http://schemas.openxmlformats.org/drawingml/2006/main">
               <a:ext uri="{FF2B5EF4-FFF2-40B4-BE49-F238E27FC236}">
-                <a16:creationId xmlns:a16="http://schemas.microsoft.com/office/drawing/2014/main" id="{0D732BC9-1025-4AFC-A655-50211778DE66}"/>
+                <a16:creationId xmlns:a16="http://schemas.microsoft.com/office/drawing/2014/main" id="{BC3BD196-92F9-4743-8592-A11B693D5584}"/>
               </a:ext>
             </a:extLst>
           </p:cNvPr>
@@ -9048,7 +9112,7 @@
             <a:pPr algn="l">
               <a:defRPr sz="2250" b="1">
                 <a:solidFill>
-                  <a:srgbClr val="E5783F"/>
+                  <a:srgbClr val="9A3F16"/>
                 </a:solidFill>
                 <a:latin typeface="PingFang SC"/>
                 <a:ea typeface="PingFang SC"/>
@@ -9058,7 +9122,7 @@
             <a:r>
               <a:rPr sz="2250" b="1">
                 <a:solidFill>
-                  <a:srgbClr val="E5783F"/>
+                  <a:srgbClr val="9A3F16"/>
                 </a:solidFill>
                 <a:latin typeface="PingFang SC"/>
                 <a:ea typeface="PingFang SC"/>
@@ -9074,7 +9138,7 @@
           <p:cNvPr id="10" name="core-body-1">
             <a:extLst xmlns:a="http://schemas.openxmlformats.org/drawingml/2006/main">
               <a:ext uri="{FF2B5EF4-FFF2-40B4-BE49-F238E27FC236}">
-                <a16:creationId xmlns:a16="http://schemas.microsoft.com/office/drawing/2014/main" id="{9A653C33-BCB5-4C25-8FF9-02F41AE03F88}"/>
+                <a16:creationId xmlns:a16="http://schemas.microsoft.com/office/drawing/2014/main" id="{A52DFE8A-3D3F-4166-AF4B-D4DF713A2E30}"/>
               </a:ext>
             </a:extLst>
           </p:cNvPr>
@@ -9128,7 +9192,7 @@
                 <a:ea typeface="PingFang SC"/>
                 <a:cs typeface="PingFang SC"/>
               </a:rPr>
-              <a:t>局部最优尤其危险。提高设备利用率可能积压在制品，压低库存可能放大中断风险，选择最低报价也可能增加质量与交付风险。决策应同时检查产能、库存、现金、质量、合规和单一来源依赖，并由采购、生产…</a:t>
+              <a:t>局部最优尤其危险，提高设备利用率可能积压在制品；压低库存可能放大中断风险；选择最低报价也可能增加质量与交付风险；决策应同时检查产能、库存、现金、质量、合规和单一来源依赖</a:t>
             </a:r>
           </a:p>
         </p:txBody>
@@ -9138,7 +9202,7 @@
           <p:cNvPr id="11" name="s7-takeaway-rule">
             <a:extLst xmlns:a="http://schemas.openxmlformats.org/drawingml/2006/main">
               <a:ext uri="{FF2B5EF4-FFF2-40B4-BE49-F238E27FC236}">
-                <a16:creationId xmlns:a16="http://schemas.microsoft.com/office/drawing/2014/main" id="{FCA3A485-18ED-4073-80EF-72DDAB54C4EF}"/>
+                <a16:creationId xmlns:a16="http://schemas.microsoft.com/office/drawing/2014/main" id="{CA09FC8E-E73F-434A-AA99-0FD7639E8476}"/>
               </a:ext>
             </a:extLst>
           </p:cNvPr>
@@ -9171,7 +9235,7 @@
           <p:cNvPr id="12" name="s7-takeaway">
             <a:extLst xmlns:a="http://schemas.openxmlformats.org/drawingml/2006/main">
               <a:ext uri="{FF2B5EF4-FFF2-40B4-BE49-F238E27FC236}">
-                <a16:creationId xmlns:a16="http://schemas.microsoft.com/office/drawing/2014/main" id="{8D8BC919-BF30-486A-8480-05A53DD3592D}"/>
+                <a16:creationId xmlns:a16="http://schemas.microsoft.com/office/drawing/2014/main" id="{64FC64EF-C3FE-482B-ACB6-0721D33E6EA7}"/>
               </a:ext>
             </a:extLst>
           </p:cNvPr>
@@ -9227,7 +9291,7 @@
     </p:spTree>
     <p:extLst>
       <p:ext uri="{BB962C8B-B14F-4D97-AF65-F5344CB8AC3E}">
-        <p14:creationId xmlns:p14="http://schemas.microsoft.com/office/powerpoint/2010/main" val="1101756781"/>
+        <p14:creationId xmlns:p14="http://schemas.microsoft.com/office/powerpoint/2010/main" val="1887588767"/>
       </p:ext>
     </p:extLst>
   </p:cSld>
@@ -9258,7 +9322,7 @@
           <p:cNvPr id="1" name="s8-rule">
             <a:extLst xmlns:a="http://schemas.openxmlformats.org/drawingml/2006/main">
               <a:ext uri="{FF2B5EF4-FFF2-40B4-BE49-F238E27FC236}">
-                <a16:creationId xmlns:a16="http://schemas.microsoft.com/office/drawing/2014/main" id="{92F18590-44F1-4AE9-A836-8BD854F52013}"/>
+                <a16:creationId xmlns:a16="http://schemas.microsoft.com/office/drawing/2014/main" id="{7F7B8AA1-2CE2-4CC6-BFD3-5152D5125FA8}"/>
               </a:ext>
             </a:extLst>
           </p:cNvPr>
@@ -9291,7 +9355,7 @@
           <p:cNvPr id="2" name="s8-eyebrow">
             <a:extLst xmlns:a="http://schemas.openxmlformats.org/drawingml/2006/main">
               <a:ext uri="{FF2B5EF4-FFF2-40B4-BE49-F238E27FC236}">
-                <a16:creationId xmlns:a16="http://schemas.microsoft.com/office/drawing/2014/main" id="{07712D6A-FEFB-4991-82D3-EF1E9689F74C}"/>
+                <a16:creationId xmlns:a16="http://schemas.microsoft.com/office/drawing/2014/main" id="{CBC619B4-4D93-4682-A67F-B5AFD883034B}"/>
               </a:ext>
             </a:extLst>
           </p:cNvPr>
@@ -9349,7 +9413,7 @@
           <p:cNvPr id="3" name="s8-title">
             <a:extLst xmlns:a="http://schemas.openxmlformats.org/drawingml/2006/main">
               <a:ext uri="{FF2B5EF4-FFF2-40B4-BE49-F238E27FC236}">
-                <a16:creationId xmlns:a16="http://schemas.microsoft.com/office/drawing/2014/main" id="{7EF32C5D-EEC6-4977-93ED-ABDA13E2C320}"/>
+                <a16:creationId xmlns:a16="http://schemas.microsoft.com/office/drawing/2014/main" id="{0E8B54F6-A37F-4582-BCFB-717B57432A9D}"/>
               </a:ext>
             </a:extLst>
           </p:cNvPr>
@@ -9407,7 +9471,7 @@
           <p:cNvPr id="4" name="s8-footer">
             <a:extLst xmlns:a="http://schemas.openxmlformats.org/drawingml/2006/main">
               <a:ext uri="{FF2B5EF4-FFF2-40B4-BE49-F238E27FC236}">
-                <a16:creationId xmlns:a16="http://schemas.microsoft.com/office/drawing/2014/main" id="{1807D3C2-CDC0-44D5-967A-CFE8A792B1A2}"/>
+                <a16:creationId xmlns:a16="http://schemas.microsoft.com/office/drawing/2014/main" id="{912DB104-9B2A-4EB8-BA41-F41257850CE4}"/>
               </a:ext>
             </a:extLst>
           </p:cNvPr>
@@ -9438,7 +9502,7 @@
           <p:cNvPr id="5" name="s8-identity">
             <a:extLst xmlns:a="http://schemas.openxmlformats.org/drawingml/2006/main">
               <a:ext uri="{FF2B5EF4-FFF2-40B4-BE49-F238E27FC236}">
-                <a16:creationId xmlns:a16="http://schemas.microsoft.com/office/drawing/2014/main" id="{3E3C223A-0E83-414B-BF90-EA76B8D355AA}"/>
+                <a16:creationId xmlns:a16="http://schemas.microsoft.com/office/drawing/2014/main" id="{56A2EA3B-BEAD-489F-A79B-6214E90DD6BD}"/>
               </a:ext>
             </a:extLst>
           </p:cNvPr>
@@ -9496,7 +9560,7 @@
           <p:cNvPr id="6" name="core-no-0">
             <a:extLst xmlns:a="http://schemas.openxmlformats.org/drawingml/2006/main">
               <a:ext uri="{FF2B5EF4-FFF2-40B4-BE49-F238E27FC236}">
-                <a16:creationId xmlns:a16="http://schemas.microsoft.com/office/drawing/2014/main" id="{AECB17C3-404E-4847-9B63-D6FDB432E431}"/>
+                <a16:creationId xmlns:a16="http://schemas.microsoft.com/office/drawing/2014/main" id="{401008DA-F63C-4CD6-943F-A0E7F4AD42FF}"/>
               </a:ext>
             </a:extLst>
           </p:cNvPr>
@@ -9528,7 +9592,7 @@
             <a:pPr algn="l">
               <a:defRPr sz="2250" b="1">
                 <a:solidFill>
-                  <a:srgbClr val="E5783F"/>
+                  <a:srgbClr val="9A3F16"/>
                 </a:solidFill>
                 <a:latin typeface="PingFang SC"/>
                 <a:ea typeface="PingFang SC"/>
@@ -9538,7 +9602,7 @@
             <a:r>
               <a:rPr sz="2250" b="1">
                 <a:solidFill>
-                  <a:srgbClr val="E5783F"/>
+                  <a:srgbClr val="9A3F16"/>
                 </a:solidFill>
                 <a:latin typeface="PingFang SC"/>
                 <a:ea typeface="PingFang SC"/>
@@ -9554,7 +9618,7 @@
           <p:cNvPr id="7" name="core-label-0">
             <a:extLst xmlns:a="http://schemas.openxmlformats.org/drawingml/2006/main">
               <a:ext uri="{FF2B5EF4-FFF2-40B4-BE49-F238E27FC236}">
-                <a16:creationId xmlns:a16="http://schemas.microsoft.com/office/drawing/2014/main" id="{2ECA4EE3-4427-4A0D-83DB-E787AA5F05B1}"/>
+                <a16:creationId xmlns:a16="http://schemas.microsoft.com/office/drawing/2014/main" id="{8580AE3B-E5B0-43D0-9D24-7DC3DF04B4C9}"/>
               </a:ext>
             </a:extLst>
           </p:cNvPr>
@@ -9612,7 +9676,7 @@
           <p:cNvPr id="8" name="core-body-0">
             <a:extLst xmlns:a="http://schemas.openxmlformats.org/drawingml/2006/main">
               <a:ext uri="{FF2B5EF4-FFF2-40B4-BE49-F238E27FC236}">
-                <a16:creationId xmlns:a16="http://schemas.microsoft.com/office/drawing/2014/main" id="{15069880-3A99-4A09-A168-A3439FB83071}"/>
+                <a16:creationId xmlns:a16="http://schemas.microsoft.com/office/drawing/2014/main" id="{8A6A6B13-381C-428F-9067-B1A605E228E6}"/>
               </a:ext>
             </a:extLst>
           </p:cNvPr>
@@ -9636,14 +9700,14 @@
           </a:solidFill>
           <a:ln xmlns:a="http://schemas.openxmlformats.org/drawingml/2006/main" w="19050">
             <a:solidFill>
-              <a:srgbClr val="E5783F"/>
+              <a:srgbClr val="9A3F16"/>
             </a:solidFill>
             <a:prstDash val="solid"/>
           </a:ln>
         </p:spPr>
         <p:txBody>
           <a:bodyPr xmlns:a="http://schemas.openxmlformats.org/drawingml/2006/main" lIns="152400" tIns="133350" rIns="152400" bIns="133350" anchor="ctr">
-            <a:normAutofit fontScale="92156"/>
+            <a:normAutofit fontScale="98233"/>
           </a:bodyPr>
           <a:lstStyle xmlns:a="http://schemas.openxmlformats.org/drawingml/2006/main"/>
           <a:p xmlns:a="http://schemas.openxmlformats.org/drawingml/2006/main">
@@ -9666,7 +9730,7 @@
                 <a:ea typeface="PingFang SC"/>
                 <a:cs typeface="PingFang SC"/>
               </a:rPr>
-              <a:t>工业 AI 应先在历史回放和影子模式中验证，只提供建议而不直接控制设备。进入半自动或自动执行前，需要风险分析、授权审批和变更管理。模型服务与控制网络应按安全要求隔离，指令需经过范围、速率…</a:t>
+              <a:t>工业 AI 应先在历史回放和影子模式中验证；只提供建议而不直接控制设备；进入半自动或自动执行前；需要风险分析、授权审批和变更管理；模型服务与控制网络应按安全要求隔离</a:t>
             </a:r>
           </a:p>
         </p:txBody>
@@ -9676,7 +9740,7 @@
           <p:cNvPr id="9" name="core-no-1">
             <a:extLst xmlns:a="http://schemas.openxmlformats.org/drawingml/2006/main">
               <a:ext uri="{FF2B5EF4-FFF2-40B4-BE49-F238E27FC236}">
-                <a16:creationId xmlns:a16="http://schemas.microsoft.com/office/drawing/2014/main" id="{914CC4B7-153B-4AF1-B8DF-859E81A768DD}"/>
+                <a16:creationId xmlns:a16="http://schemas.microsoft.com/office/drawing/2014/main" id="{B03C15FF-FF17-498B-B5B5-03255A4CBD02}"/>
               </a:ext>
             </a:extLst>
           </p:cNvPr>
@@ -9708,7 +9772,7 @@
             <a:pPr algn="l">
               <a:defRPr sz="2250" b="1">
                 <a:solidFill>
-                  <a:srgbClr val="E5783F"/>
+                  <a:srgbClr val="9A3F16"/>
                 </a:solidFill>
                 <a:latin typeface="PingFang SC"/>
                 <a:ea typeface="PingFang SC"/>
@@ -9718,7 +9782,7 @@
             <a:r>
               <a:rPr sz="2250" b="1">
                 <a:solidFill>
-                  <a:srgbClr val="E5783F"/>
+                  <a:srgbClr val="9A3F16"/>
                 </a:solidFill>
                 <a:latin typeface="PingFang SC"/>
                 <a:ea typeface="PingFang SC"/>
@@ -9734,7 +9798,7 @@
           <p:cNvPr id="10" name="core-body-1">
             <a:extLst xmlns:a="http://schemas.openxmlformats.org/drawingml/2006/main">
               <a:ext uri="{FF2B5EF4-FFF2-40B4-BE49-F238E27FC236}">
-                <a16:creationId xmlns:a16="http://schemas.microsoft.com/office/drawing/2014/main" id="{5AFB6A39-40A4-4B70-8654-E7747FCA448D}"/>
+                <a16:creationId xmlns:a16="http://schemas.microsoft.com/office/drawing/2014/main" id="{C14E58AE-7612-46FB-AE5C-5D5C258FDF83}"/>
               </a:ext>
             </a:extLst>
           </p:cNvPr>
@@ -9788,7 +9852,7 @@
                 <a:ea typeface="PingFang SC"/>
                 <a:cs typeface="PingFang SC"/>
               </a:rPr>
-              <a:t>系统还要具备人工接管、已验证的回退策略、完整日志和定期演练。模型不可用、数据中断、时间漂移、异常置信度或网络攻击都可能触发降级。任何涉及安全仪表、保护装置和法定运行边界的功能…</a:t>
+              <a:t>系统还要具备人工接管、已验证的回退策略、完整日志和定期演练；模型不可用、数据中断、时间漂移、异常置信度或网络攻击都可能触发降级；任何涉及安全仪表、保护装置和法定运行边界的功能</a:t>
             </a:r>
           </a:p>
         </p:txBody>
@@ -9798,7 +9862,7 @@
           <p:cNvPr id="11" name="s8-takeaway-rule">
             <a:extLst xmlns:a="http://schemas.openxmlformats.org/drawingml/2006/main">
               <a:ext uri="{FF2B5EF4-FFF2-40B4-BE49-F238E27FC236}">
-                <a16:creationId xmlns:a16="http://schemas.microsoft.com/office/drawing/2014/main" id="{6351A6E5-C859-40BD-9660-CC97DA264852}"/>
+                <a16:creationId xmlns:a16="http://schemas.microsoft.com/office/drawing/2014/main" id="{D1315D15-8415-4317-AEAA-8D96DB081B44}"/>
               </a:ext>
             </a:extLst>
           </p:cNvPr>
@@ -9831,7 +9895,7 @@
           <p:cNvPr id="12" name="s8-takeaway">
             <a:extLst xmlns:a="http://schemas.openxmlformats.org/drawingml/2006/main">
               <a:ext uri="{FF2B5EF4-FFF2-40B4-BE49-F238E27FC236}">
-                <a16:creationId xmlns:a16="http://schemas.microsoft.com/office/drawing/2014/main" id="{6263F540-F249-4509-BE5A-A9C7702BBDA0}"/>
+                <a16:creationId xmlns:a16="http://schemas.microsoft.com/office/drawing/2014/main" id="{BED9C002-0064-4FB1-B2AB-7C829A72B8EB}"/>
               </a:ext>
             </a:extLst>
           </p:cNvPr>
@@ -9887,7 +9951,7 @@
     </p:spTree>
     <p:extLst>
       <p:ext uri="{BB962C8B-B14F-4D97-AF65-F5344CB8AC3E}">
-        <p14:creationId xmlns:p14="http://schemas.microsoft.com/office/powerpoint/2010/main" val="1193081735"/>
+        <p14:creationId xmlns:p14="http://schemas.microsoft.com/office/powerpoint/2010/main" val="1564641546"/>
       </p:ext>
     </p:extLst>
   </p:cSld>
@@ -9918,7 +9982,7 @@
           <p:cNvPr id="1" name="s9-rule">
             <a:extLst xmlns:a="http://schemas.openxmlformats.org/drawingml/2006/main">
               <a:ext uri="{FF2B5EF4-FFF2-40B4-BE49-F238E27FC236}">
-                <a16:creationId xmlns:a16="http://schemas.microsoft.com/office/drawing/2014/main" id="{A686DCD7-D96D-4A0C-8601-76BCAC6F2421}"/>
+                <a16:creationId xmlns:a16="http://schemas.microsoft.com/office/drawing/2014/main" id="{FA118E70-63F1-414E-B81A-243EA5CC4A57}"/>
               </a:ext>
             </a:extLst>
           </p:cNvPr>
@@ -9951,7 +10015,7 @@
           <p:cNvPr id="2" name="s9-eyebrow">
             <a:extLst xmlns:a="http://schemas.openxmlformats.org/drawingml/2006/main">
               <a:ext uri="{FF2B5EF4-FFF2-40B4-BE49-F238E27FC236}">
-                <a16:creationId xmlns:a16="http://schemas.microsoft.com/office/drawing/2014/main" id="{3315BCF0-4364-40E3-974E-FEAA8C341169}"/>
+                <a16:creationId xmlns:a16="http://schemas.microsoft.com/office/drawing/2014/main" id="{177E6DEE-9632-441D-B05C-B9923DEEDE25}"/>
               </a:ext>
             </a:extLst>
           </p:cNvPr>
@@ -10009,7 +10073,7 @@
           <p:cNvPr id="3" name="s9-title">
             <a:extLst xmlns:a="http://schemas.openxmlformats.org/drawingml/2006/main">
               <a:ext uri="{FF2B5EF4-FFF2-40B4-BE49-F238E27FC236}">
-                <a16:creationId xmlns:a16="http://schemas.microsoft.com/office/drawing/2014/main" id="{FF165910-CF94-4335-8C5E-C67A21A31D40}"/>
+                <a16:creationId xmlns:a16="http://schemas.microsoft.com/office/drawing/2014/main" id="{EEBD3FF2-15B4-4E67-BE9A-E86FD1F3D018}"/>
               </a:ext>
             </a:extLst>
           </p:cNvPr>
@@ -10067,7 +10131,7 @@
           <p:cNvPr id="4" name="s9-footer">
             <a:extLst xmlns:a="http://schemas.openxmlformats.org/drawingml/2006/main">
               <a:ext uri="{FF2B5EF4-FFF2-40B4-BE49-F238E27FC236}">
-                <a16:creationId xmlns:a16="http://schemas.microsoft.com/office/drawing/2014/main" id="{3A34F9DF-0F03-4C80-A36E-A611A623D782}"/>
+                <a16:creationId xmlns:a16="http://schemas.microsoft.com/office/drawing/2014/main" id="{6591674A-FBDF-4EFB-8801-789B077DD295}"/>
               </a:ext>
             </a:extLst>
           </p:cNvPr>
@@ -10098,7 +10162,7 @@
           <p:cNvPr id="5" name="s9-identity">
             <a:extLst xmlns:a="http://schemas.openxmlformats.org/drawingml/2006/main">
               <a:ext uri="{FF2B5EF4-FFF2-40B4-BE49-F238E27FC236}">
-                <a16:creationId xmlns:a16="http://schemas.microsoft.com/office/drawing/2014/main" id="{CCA6F89F-A3CD-442C-98F2-F8AD32033300}"/>
+                <a16:creationId xmlns:a16="http://schemas.microsoft.com/office/drawing/2014/main" id="{CB3D20F0-A972-4758-84C4-6081FD57EECC}"/>
               </a:ext>
             </a:extLst>
           </p:cNvPr>
@@ -10156,7 +10220,7 @@
           <p:cNvPr id="6" name="case-title">
             <a:extLst xmlns:a="http://schemas.openxmlformats.org/drawingml/2006/main">
               <a:ext uri="{FF2B5EF4-FFF2-40B4-BE49-F238E27FC236}">
-                <a16:creationId xmlns:a16="http://schemas.microsoft.com/office/drawing/2014/main" id="{5B62C353-0544-419E-B08D-337F4CCBF931}"/>
+                <a16:creationId xmlns:a16="http://schemas.microsoft.com/office/drawing/2014/main" id="{4117907A-E001-4306-B6C3-B17FEA67998D}"/>
               </a:ext>
             </a:extLst>
           </p:cNvPr>
@@ -10220,7 +10284,7 @@
           <p:cNvPr id="7" name="case-row-0">
             <a:extLst xmlns:a="http://schemas.openxmlformats.org/drawingml/2006/main">
               <a:ext uri="{FF2B5EF4-FFF2-40B4-BE49-F238E27FC236}">
-                <a16:creationId xmlns:a16="http://schemas.microsoft.com/office/drawing/2014/main" id="{DAEB510E-3249-49CC-9F58-60DCB8C669A7}"/>
+                <a16:creationId xmlns:a16="http://schemas.microsoft.com/office/drawing/2014/main" id="{49F6AE49-3B76-4952-9D13-926792E344D9}"/>
               </a:ext>
             </a:extLst>
           </p:cNvPr>
@@ -10284,7 +10348,7 @@
           <p:cNvPr id="8" name="case-row-1">
             <a:extLst xmlns:a="http://schemas.openxmlformats.org/drawingml/2006/main">
               <a:ext uri="{FF2B5EF4-FFF2-40B4-BE49-F238E27FC236}">
-                <a16:creationId xmlns:a16="http://schemas.microsoft.com/office/drawing/2014/main" id="{A5E30AED-6E3C-402F-9A00-D0BE00072D4F}"/>
+                <a16:creationId xmlns:a16="http://schemas.microsoft.com/office/drawing/2014/main" id="{43F692BF-4374-4E06-B69D-3C7B986B5963}"/>
               </a:ext>
             </a:extLst>
           </p:cNvPr>
@@ -10348,7 +10412,7 @@
           <p:cNvPr id="9" name="case-row-2">
             <a:extLst xmlns:a="http://schemas.openxmlformats.org/drawingml/2006/main">
               <a:ext uri="{FF2B5EF4-FFF2-40B4-BE49-F238E27FC236}">
-                <a16:creationId xmlns:a16="http://schemas.microsoft.com/office/drawing/2014/main" id="{F34AB2A4-6CE1-402F-AD54-FD64A880379F}"/>
+                <a16:creationId xmlns:a16="http://schemas.microsoft.com/office/drawing/2014/main" id="{836D4B1E-F27A-478E-90A5-75F40A892D18}"/>
               </a:ext>
             </a:extLst>
           </p:cNvPr>
@@ -10412,7 +10476,7 @@
           <p:cNvPr id="10" name="case-row-3">
             <a:extLst xmlns:a="http://schemas.openxmlformats.org/drawingml/2006/main">
               <a:ext uri="{FF2B5EF4-FFF2-40B4-BE49-F238E27FC236}">
-                <a16:creationId xmlns:a16="http://schemas.microsoft.com/office/drawing/2014/main" id="{64A91400-A09C-4BD9-9FAB-DA3932556D51}"/>
+                <a16:creationId xmlns:a16="http://schemas.microsoft.com/office/drawing/2014/main" id="{802FC0E0-C073-497A-9EC1-9D6A6D4F43E1}"/>
               </a:ext>
             </a:extLst>
           </p:cNvPr>
@@ -10436,7 +10500,7 @@
           </a:solidFill>
           <a:ln xmlns:a="http://schemas.openxmlformats.org/drawingml/2006/main" w="9525">
             <a:solidFill>
-              <a:srgbClr val="E5783F"/>
+              <a:srgbClr val="9A3F16"/>
             </a:solidFill>
             <a:prstDash val="solid"/>
           </a:ln>
@@ -10476,7 +10540,7 @@
           <p:cNvPr id="11" name="s9-takeaway-rule">
             <a:extLst xmlns:a="http://schemas.openxmlformats.org/drawingml/2006/main">
               <a:ext uri="{FF2B5EF4-FFF2-40B4-BE49-F238E27FC236}">
-                <a16:creationId xmlns:a16="http://schemas.microsoft.com/office/drawing/2014/main" id="{AEECB117-1B31-442E-BFAE-3229EFBA1376}"/>
+                <a16:creationId xmlns:a16="http://schemas.microsoft.com/office/drawing/2014/main" id="{74304477-6514-4C5E-B372-D0F302026884}"/>
               </a:ext>
             </a:extLst>
           </p:cNvPr>
@@ -10509,7 +10573,7 @@
           <p:cNvPr id="12" name="s9-takeaway">
             <a:extLst xmlns:a="http://schemas.openxmlformats.org/drawingml/2006/main">
               <a:ext uri="{FF2B5EF4-FFF2-40B4-BE49-F238E27FC236}">
-                <a16:creationId xmlns:a16="http://schemas.microsoft.com/office/drawing/2014/main" id="{EC26672C-748F-48FF-B94A-87CE6FA98296}"/>
+                <a16:creationId xmlns:a16="http://schemas.microsoft.com/office/drawing/2014/main" id="{6F6D338D-9A74-4DB2-9EE0-4EED3599A255}"/>
               </a:ext>
             </a:extLst>
           </p:cNvPr>
@@ -10565,7 +10629,7 @@
     </p:spTree>
     <p:extLst>
       <p:ext uri="{BB962C8B-B14F-4D97-AF65-F5344CB8AC3E}">
-        <p14:creationId xmlns:p14="http://schemas.microsoft.com/office/powerpoint/2010/main" val="734794415"/>
+        <p14:creationId xmlns:p14="http://schemas.microsoft.com/office/powerpoint/2010/main" val="1141810123"/>
       </p:ext>
     </p:extLst>
   </p:cSld>

--- a/docs/public/course-assets/course-pptx/in-005.pptx
+++ b/docs/public/course-assets/course-pptx/in-005.pptx
@@ -2,25 +2,25 @@
 <file path=ppt/presentation.xml><?xml version="1.0" encoding="utf-8"?>
 <p:presentation xmlns:p="http://schemas.openxmlformats.org/presentationml/2006/main">
   <p:sldMasterIdLst>
-    <p:sldMasterId xmlns:r="http://schemas.openxmlformats.org/officeDocument/2006/relationships" id="2147483648" r:id="R3660ae38a9164881"/>
+    <p:sldMasterId xmlns:r="http://schemas.openxmlformats.org/officeDocument/2006/relationships" id="2147483648" r:id="Re011e289100d479c"/>
   </p:sldMasterIdLst>
   <p:notesMasterIdLst>
-    <p:notesMasterId xmlns:r="http://schemas.openxmlformats.org/officeDocument/2006/relationships" r:id="R9a2679d9a92848ab"/>
+    <p:notesMasterId xmlns:r="http://schemas.openxmlformats.org/officeDocument/2006/relationships" r:id="R7237c0df293a4c8f"/>
   </p:notesMasterIdLst>
   <p:sldIdLst>
-    <p:sldId xmlns:r="http://schemas.openxmlformats.org/officeDocument/2006/relationships" id="256" r:id="Raced5d69cd504e88"/>
-    <p:sldId xmlns:r="http://schemas.openxmlformats.org/officeDocument/2006/relationships" id="257" r:id="R0bc6d80b224b44d6"/>
-    <p:sldId xmlns:r="http://schemas.openxmlformats.org/officeDocument/2006/relationships" id="258" r:id="Rb6a800993804479e"/>
-    <p:sldId xmlns:r="http://schemas.openxmlformats.org/officeDocument/2006/relationships" id="259" r:id="R1f0870ae51d0479e"/>
-    <p:sldId xmlns:r="http://schemas.openxmlformats.org/officeDocument/2006/relationships" id="260" r:id="R7b142fb6ba6f49d2"/>
-    <p:sldId xmlns:r="http://schemas.openxmlformats.org/officeDocument/2006/relationships" id="261" r:id="R2a28b2e69bc740ba"/>
-    <p:sldId xmlns:r="http://schemas.openxmlformats.org/officeDocument/2006/relationships" id="262" r:id="Rc5e2c768e8ac46da"/>
-    <p:sldId xmlns:r="http://schemas.openxmlformats.org/officeDocument/2006/relationships" id="263" r:id="Rf7b0b69976ea403a"/>
-    <p:sldId xmlns:r="http://schemas.openxmlformats.org/officeDocument/2006/relationships" id="264" r:id="R08cd01a4a04e473f"/>
-    <p:sldId xmlns:r="http://schemas.openxmlformats.org/officeDocument/2006/relationships" id="265" r:id="R5c61fdf9c1ac4669"/>
-    <p:sldId xmlns:r="http://schemas.openxmlformats.org/officeDocument/2006/relationships" id="266" r:id="Rf7779ca174324594"/>
-    <p:sldId xmlns:r="http://schemas.openxmlformats.org/officeDocument/2006/relationships" id="267" r:id="Rbec93c6bba8a4962"/>
-    <p:sldId xmlns:r="http://schemas.openxmlformats.org/officeDocument/2006/relationships" id="268" r:id="R8adb5ef998fc4961"/>
+    <p:sldId xmlns:r="http://schemas.openxmlformats.org/officeDocument/2006/relationships" id="256" r:id="R5d3bc90f8480459b"/>
+    <p:sldId xmlns:r="http://schemas.openxmlformats.org/officeDocument/2006/relationships" id="257" r:id="R7d463c17c9834b5d"/>
+    <p:sldId xmlns:r="http://schemas.openxmlformats.org/officeDocument/2006/relationships" id="258" r:id="R705590f349774b04"/>
+    <p:sldId xmlns:r="http://schemas.openxmlformats.org/officeDocument/2006/relationships" id="259" r:id="R11d25b99103a47a2"/>
+    <p:sldId xmlns:r="http://schemas.openxmlformats.org/officeDocument/2006/relationships" id="260" r:id="R80cf95b032fd4688"/>
+    <p:sldId xmlns:r="http://schemas.openxmlformats.org/officeDocument/2006/relationships" id="261" r:id="R25b0d4e5df9243f7"/>
+    <p:sldId xmlns:r="http://schemas.openxmlformats.org/officeDocument/2006/relationships" id="262" r:id="R6a7fc0104fa1492a"/>
+    <p:sldId xmlns:r="http://schemas.openxmlformats.org/officeDocument/2006/relationships" id="263" r:id="R832adcd9c4f84f2d"/>
+    <p:sldId xmlns:r="http://schemas.openxmlformats.org/officeDocument/2006/relationships" id="264" r:id="R6873218653054981"/>
+    <p:sldId xmlns:r="http://schemas.openxmlformats.org/officeDocument/2006/relationships" id="265" r:id="R575cf29147b04102"/>
+    <p:sldId xmlns:r="http://schemas.openxmlformats.org/officeDocument/2006/relationships" id="266" r:id="R03671e870d6e4372"/>
+    <p:sldId xmlns:r="http://schemas.openxmlformats.org/officeDocument/2006/relationships" id="267" r:id="R4d011b53e1c8499f"/>
+    <p:sldId xmlns:r="http://schemas.openxmlformats.org/officeDocument/2006/relationships" id="268" r:id="R0f4a092fbbf043bf"/>
   </p:sldIdLst>
   <p:sldSz cx="12192000" cy="6858000"/>
   <p:notesSz cx="6858000" cy="9144000"/>
@@ -1405,7 +1405,7 @@
   </p:cSld>
   <p:clrMap bg1="lt1" tx1="dk1" bg2="lt2" tx2="dk2" accent1="accent1" accent2="accent2" accent3="accent3" accent4="accent4" accent5="accent5" accent6="accent6" hlink="hlink" folHlink="folHlink"/>
   <p:sldLayoutIdLst>
-    <p:sldLayoutId xmlns:r="http://schemas.openxmlformats.org/officeDocument/2006/relationships" id="2147483649" r:id="Ra6b5e3fec14c4774"/>
+    <p:sldLayoutId xmlns:r="http://schemas.openxmlformats.org/officeDocument/2006/relationships" id="2147483649" r:id="Re702456f0acf4897"/>
   </p:sldLayoutIdLst>
   <p:txStyles>
     <p:titleStyle>
@@ -1956,7 +1956,7 @@
           <p:cNvPr id="1" name="cover-rule">
             <a:extLst xmlns:a="http://schemas.openxmlformats.org/drawingml/2006/main">
               <a:ext uri="{FF2B5EF4-FFF2-40B4-BE49-F238E27FC236}">
-                <a16:creationId xmlns:a16="http://schemas.microsoft.com/office/drawing/2014/main" id="{D08B794C-2053-4045-B9F8-77D683F97ABC}"/>
+                <a16:creationId xmlns:a16="http://schemas.microsoft.com/office/drawing/2014/main" id="{781427FF-90F7-4182-9A5C-5E06F23270E1}"/>
               </a:ext>
             </a:extLst>
           </p:cNvPr>
@@ -1989,7 +1989,7 @@
           <p:cNvPr id="2" name="cover-ring-1">
             <a:extLst xmlns:a="http://schemas.openxmlformats.org/drawingml/2006/main">
               <a:ext uri="{FF2B5EF4-FFF2-40B4-BE49-F238E27FC236}">
-                <a16:creationId xmlns:a16="http://schemas.microsoft.com/office/drawing/2014/main" id="{E5148196-37BF-4A08-8228-4E8D02344859}"/>
+                <a16:creationId xmlns:a16="http://schemas.microsoft.com/office/drawing/2014/main" id="{3F4A7655-099A-4B32-A435-6A94DE1C9FD1}"/>
               </a:ext>
             </a:extLst>
           </p:cNvPr>
@@ -2020,7 +2020,7 @@
           <p:cNvPr id="3" name="cover-ring-2">
             <a:extLst xmlns:a="http://schemas.openxmlformats.org/drawingml/2006/main">
               <a:ext uri="{FF2B5EF4-FFF2-40B4-BE49-F238E27FC236}">
-                <a16:creationId xmlns:a16="http://schemas.microsoft.com/office/drawing/2014/main" id="{4257C6DB-6784-46D3-9A40-F58A04832D69}"/>
+                <a16:creationId xmlns:a16="http://schemas.microsoft.com/office/drawing/2014/main" id="{04E35C3E-6015-4816-B738-313797C8C541}"/>
               </a:ext>
             </a:extLst>
           </p:cNvPr>
@@ -2051,7 +2051,7 @@
           <p:cNvPr id="4" name="cover-core">
             <a:extLst xmlns:a="http://schemas.openxmlformats.org/drawingml/2006/main">
               <a:ext uri="{FF2B5EF4-FFF2-40B4-BE49-F238E27FC236}">
-                <a16:creationId xmlns:a16="http://schemas.microsoft.com/office/drawing/2014/main" id="{02278054-5F02-4A8A-B914-2855F438CFB7}"/>
+                <a16:creationId xmlns:a16="http://schemas.microsoft.com/office/drawing/2014/main" id="{33F7606D-A169-44FC-8B37-0B57925F7A46}"/>
               </a:ext>
             </a:extLst>
           </p:cNvPr>
@@ -2084,7 +2084,7 @@
           <p:cNvPr id="5" name="cover-line-1">
             <a:extLst xmlns:a="http://schemas.openxmlformats.org/drawingml/2006/main">
               <a:ext uri="{FF2B5EF4-FFF2-40B4-BE49-F238E27FC236}">
-                <a16:creationId xmlns:a16="http://schemas.microsoft.com/office/drawing/2014/main" id="{C7C99866-AC8B-4DCD-8FCD-D046959872D8}"/>
+                <a16:creationId xmlns:a16="http://schemas.microsoft.com/office/drawing/2014/main" id="{8D66BFBD-0896-435D-92C2-86BDAB84F60E}"/>
               </a:ext>
             </a:extLst>
           </p:cNvPr>
@@ -2115,7 +2115,7 @@
           <p:cNvPr id="6" name="cover-line-2">
             <a:extLst xmlns:a="http://schemas.openxmlformats.org/drawingml/2006/main">
               <a:ext uri="{FF2B5EF4-FFF2-40B4-BE49-F238E27FC236}">
-                <a16:creationId xmlns:a16="http://schemas.microsoft.com/office/drawing/2014/main" id="{E3B5D6A1-57EE-4D9B-B635-3BE1F5D05D80}"/>
+                <a16:creationId xmlns:a16="http://schemas.microsoft.com/office/drawing/2014/main" id="{CCF1D287-CFC6-4C90-89B9-BBB7D05D7E64}"/>
               </a:ext>
             </a:extLst>
           </p:cNvPr>
@@ -2146,7 +2146,7 @@
           <p:cNvPr id="7" name="cover-eyebrow">
             <a:extLst xmlns:a="http://schemas.openxmlformats.org/drawingml/2006/main">
               <a:ext uri="{FF2B5EF4-FFF2-40B4-BE49-F238E27FC236}">
-                <a16:creationId xmlns:a16="http://schemas.microsoft.com/office/drawing/2014/main" id="{A923E4D5-CB56-473E-ADF8-12E570799EBB}"/>
+                <a16:creationId xmlns:a16="http://schemas.microsoft.com/office/drawing/2014/main" id="{E8954FBE-6B16-48F2-8B3B-B16AA4D10E0C}"/>
               </a:ext>
             </a:extLst>
           </p:cNvPr>
@@ -2204,7 +2204,7 @@
           <p:cNvPr id="8" name="cover-title">
             <a:extLst xmlns:a="http://schemas.openxmlformats.org/drawingml/2006/main">
               <a:ext uri="{FF2B5EF4-FFF2-40B4-BE49-F238E27FC236}">
-                <a16:creationId xmlns:a16="http://schemas.microsoft.com/office/drawing/2014/main" id="{90D5330C-63FC-455D-A151-660483C86C19}"/>
+                <a16:creationId xmlns:a16="http://schemas.microsoft.com/office/drawing/2014/main" id="{8EB16A4F-F9F0-474F-A036-3BFB69C7CAB1}"/>
               </a:ext>
             </a:extLst>
           </p:cNvPr>
@@ -2262,7 +2262,7 @@
           <p:cNvPr id="9" name="cover-subtitle">
             <a:extLst xmlns:a="http://schemas.openxmlformats.org/drawingml/2006/main">
               <a:ext uri="{FF2B5EF4-FFF2-40B4-BE49-F238E27FC236}">
-                <a16:creationId xmlns:a16="http://schemas.microsoft.com/office/drawing/2014/main" id="{2303AB61-75E1-4E06-A1A7-DAD80591D980}"/>
+                <a16:creationId xmlns:a16="http://schemas.microsoft.com/office/drawing/2014/main" id="{6F9B8156-7DBC-4E0C-8540-902720330452}"/>
               </a:ext>
             </a:extLst>
           </p:cNvPr>
@@ -2324,7 +2324,7 @@
           <p:cNvPr id="10" name="cover-lead">
             <a:extLst xmlns:a="http://schemas.openxmlformats.org/drawingml/2006/main">
               <a:ext uri="{FF2B5EF4-FFF2-40B4-BE49-F238E27FC236}">
-                <a16:creationId xmlns:a16="http://schemas.microsoft.com/office/drawing/2014/main" id="{2ED482D8-32FD-4FD6-A8C8-8B1DE681FEB7}"/>
+                <a16:creationId xmlns:a16="http://schemas.microsoft.com/office/drawing/2014/main" id="{56DA82F8-AC0E-4BFF-8880-7304998014BA}"/>
               </a:ext>
             </a:extLst>
           </p:cNvPr>
@@ -2382,7 +2382,7 @@
           <p:cNvPr id="11" name="cover-course">
             <a:extLst xmlns:a="http://schemas.openxmlformats.org/drawingml/2006/main">
               <a:ext uri="{FF2B5EF4-FFF2-40B4-BE49-F238E27FC236}">
-                <a16:creationId xmlns:a16="http://schemas.microsoft.com/office/drawing/2014/main" id="{36D5E00E-85F3-4DE7-B6D0-36F18B375390}"/>
+                <a16:creationId xmlns:a16="http://schemas.microsoft.com/office/drawing/2014/main" id="{A941AA13-088B-4987-BA61-B6251ACB1E3C}"/>
               </a:ext>
             </a:extLst>
           </p:cNvPr>
@@ -2440,7 +2440,7 @@
           <p:cNvPr id="12" name="cover-id">
             <a:extLst xmlns:a="http://schemas.openxmlformats.org/drawingml/2006/main">
               <a:ext uri="{FF2B5EF4-FFF2-40B4-BE49-F238E27FC236}">
-                <a16:creationId xmlns:a16="http://schemas.microsoft.com/office/drawing/2014/main" id="{2AF297BB-5AE6-43F4-B30F-2750FF27B7F9}"/>
+                <a16:creationId xmlns:a16="http://schemas.microsoft.com/office/drawing/2014/main" id="{8B16A0C6-FA6A-4FA9-8A6D-E0B55FBF35CF}"/>
               </a:ext>
             </a:extLst>
           </p:cNvPr>
@@ -2496,7 +2496,7 @@
     </p:spTree>
     <p:extLst>
       <p:ext uri="{BB962C8B-B14F-4D97-AF65-F5344CB8AC3E}">
-        <p14:creationId xmlns:p14="http://schemas.microsoft.com/office/powerpoint/2010/main" val="1315661761"/>
+        <p14:creationId xmlns:p14="http://schemas.microsoft.com/office/powerpoint/2010/main" val="1261011139"/>
       </p:ext>
     </p:extLst>
   </p:cSld>
@@ -2527,7 +2527,7 @@
           <p:cNvPr id="1" name="s10-rule">
             <a:extLst xmlns:a="http://schemas.openxmlformats.org/drawingml/2006/main">
               <a:ext uri="{FF2B5EF4-FFF2-40B4-BE49-F238E27FC236}">
-                <a16:creationId xmlns:a16="http://schemas.microsoft.com/office/drawing/2014/main" id="{42425259-BEED-4E19-9608-562F854E2A42}"/>
+                <a16:creationId xmlns:a16="http://schemas.microsoft.com/office/drawing/2014/main" id="{B6D1C530-CBC2-482C-857D-6320D11751C3}"/>
               </a:ext>
             </a:extLst>
           </p:cNvPr>
@@ -2560,7 +2560,7 @@
           <p:cNvPr id="2" name="s10-eyebrow">
             <a:extLst xmlns:a="http://schemas.openxmlformats.org/drawingml/2006/main">
               <a:ext uri="{FF2B5EF4-FFF2-40B4-BE49-F238E27FC236}">
-                <a16:creationId xmlns:a16="http://schemas.microsoft.com/office/drawing/2014/main" id="{2BB84781-7985-4518-8696-FC60DB3D69DA}"/>
+                <a16:creationId xmlns:a16="http://schemas.microsoft.com/office/drawing/2014/main" id="{8E00CAEC-7705-42DA-BCEF-DBB46E473061}"/>
               </a:ext>
             </a:extLst>
           </p:cNvPr>
@@ -2618,7 +2618,7 @@
           <p:cNvPr id="3" name="s10-title">
             <a:extLst xmlns:a="http://schemas.openxmlformats.org/drawingml/2006/main">
               <a:ext uri="{FF2B5EF4-FFF2-40B4-BE49-F238E27FC236}">
-                <a16:creationId xmlns:a16="http://schemas.microsoft.com/office/drawing/2014/main" id="{234893D7-F90C-4D24-854C-D6A0249BD7EB}"/>
+                <a16:creationId xmlns:a16="http://schemas.microsoft.com/office/drawing/2014/main" id="{2A20C8D9-8918-401A-A365-7F308A04DE1E}"/>
               </a:ext>
             </a:extLst>
           </p:cNvPr>
@@ -2676,7 +2676,7 @@
           <p:cNvPr id="4" name="s10-footer">
             <a:extLst xmlns:a="http://schemas.openxmlformats.org/drawingml/2006/main">
               <a:ext uri="{FF2B5EF4-FFF2-40B4-BE49-F238E27FC236}">
-                <a16:creationId xmlns:a16="http://schemas.microsoft.com/office/drawing/2014/main" id="{790AD0AD-7AF3-4AAA-B172-F3D79B73532E}"/>
+                <a16:creationId xmlns:a16="http://schemas.microsoft.com/office/drawing/2014/main" id="{7E985467-6F5A-4047-8FD6-71927B9F2B34}"/>
               </a:ext>
             </a:extLst>
           </p:cNvPr>
@@ -2707,7 +2707,7 @@
           <p:cNvPr id="5" name="s10-identity">
             <a:extLst xmlns:a="http://schemas.openxmlformats.org/drawingml/2006/main">
               <a:ext uri="{FF2B5EF4-FFF2-40B4-BE49-F238E27FC236}">
-                <a16:creationId xmlns:a16="http://schemas.microsoft.com/office/drawing/2014/main" id="{A9B84E15-4CA5-470D-962B-8A82C75975D0}"/>
+                <a16:creationId xmlns:a16="http://schemas.microsoft.com/office/drawing/2014/main" id="{EAC01B8C-BF47-41D8-A9F8-765358C45AC8}"/>
               </a:ext>
             </a:extLst>
           </p:cNvPr>
@@ -2765,7 +2765,7 @@
           <p:cNvPr id="6" name="case-title">
             <a:extLst xmlns:a="http://schemas.openxmlformats.org/drawingml/2006/main">
               <a:ext uri="{FF2B5EF4-FFF2-40B4-BE49-F238E27FC236}">
-                <a16:creationId xmlns:a16="http://schemas.microsoft.com/office/drawing/2014/main" id="{0170189E-B20E-4D6D-A09F-F66DF6247E12}"/>
+                <a16:creationId xmlns:a16="http://schemas.microsoft.com/office/drawing/2014/main" id="{DEB1E957-D421-49F3-B7AA-AB96CF9305D3}"/>
               </a:ext>
             </a:extLst>
           </p:cNvPr>
@@ -2829,7 +2829,7 @@
           <p:cNvPr id="7" name="case-row-0">
             <a:extLst xmlns:a="http://schemas.openxmlformats.org/drawingml/2006/main">
               <a:ext uri="{FF2B5EF4-FFF2-40B4-BE49-F238E27FC236}">
-                <a16:creationId xmlns:a16="http://schemas.microsoft.com/office/drawing/2014/main" id="{C049DAF9-1028-476C-A5FB-F84E62AD3722}"/>
+                <a16:creationId xmlns:a16="http://schemas.microsoft.com/office/drawing/2014/main" id="{48F58CB1-CEC4-4A80-B67F-6B3B1D9A341D}"/>
               </a:ext>
             </a:extLst>
           </p:cNvPr>
@@ -2893,7 +2893,7 @@
           <p:cNvPr id="8" name="case-row-1">
             <a:extLst xmlns:a="http://schemas.openxmlformats.org/drawingml/2006/main">
               <a:ext uri="{FF2B5EF4-FFF2-40B4-BE49-F238E27FC236}">
-                <a16:creationId xmlns:a16="http://schemas.microsoft.com/office/drawing/2014/main" id="{2E39512C-D6B6-4F15-B881-49AC75A8585E}"/>
+                <a16:creationId xmlns:a16="http://schemas.microsoft.com/office/drawing/2014/main" id="{E4C826A4-F638-47E7-B390-0EAE5EA091A7}"/>
               </a:ext>
             </a:extLst>
           </p:cNvPr>
@@ -2957,7 +2957,7 @@
           <p:cNvPr id="9" name="case-row-2">
             <a:extLst xmlns:a="http://schemas.openxmlformats.org/drawingml/2006/main">
               <a:ext uri="{FF2B5EF4-FFF2-40B4-BE49-F238E27FC236}">
-                <a16:creationId xmlns:a16="http://schemas.microsoft.com/office/drawing/2014/main" id="{CE8FC798-3FD7-4606-A11C-0872C24A5E6E}"/>
+                <a16:creationId xmlns:a16="http://schemas.microsoft.com/office/drawing/2014/main" id="{676386E7-79E2-44CD-BD9A-14A2B8B3F02C}"/>
               </a:ext>
             </a:extLst>
           </p:cNvPr>
@@ -3021,7 +3021,7 @@
           <p:cNvPr id="10" name="s10-takeaway-rule">
             <a:extLst xmlns:a="http://schemas.openxmlformats.org/drawingml/2006/main">
               <a:ext uri="{FF2B5EF4-FFF2-40B4-BE49-F238E27FC236}">
-                <a16:creationId xmlns:a16="http://schemas.microsoft.com/office/drawing/2014/main" id="{0EACB684-D88E-495C-8AF1-F95272FD8DA0}"/>
+                <a16:creationId xmlns:a16="http://schemas.microsoft.com/office/drawing/2014/main" id="{7B8A6D10-B6B4-4285-89BA-8C795F6C3FA6}"/>
               </a:ext>
             </a:extLst>
           </p:cNvPr>
@@ -3054,7 +3054,7 @@
           <p:cNvPr id="11" name="s10-takeaway">
             <a:extLst xmlns:a="http://schemas.openxmlformats.org/drawingml/2006/main">
               <a:ext uri="{FF2B5EF4-FFF2-40B4-BE49-F238E27FC236}">
-                <a16:creationId xmlns:a16="http://schemas.microsoft.com/office/drawing/2014/main" id="{B2B8D213-EBDF-424A-86B2-415635B2759F}"/>
+                <a16:creationId xmlns:a16="http://schemas.microsoft.com/office/drawing/2014/main" id="{10EAB8DC-C85C-4823-BB11-CB5EEB148BC2}"/>
               </a:ext>
             </a:extLst>
           </p:cNvPr>
@@ -3110,7 +3110,7 @@
     </p:spTree>
     <p:extLst>
       <p:ext uri="{BB962C8B-B14F-4D97-AF65-F5344CB8AC3E}">
-        <p14:creationId xmlns:p14="http://schemas.microsoft.com/office/powerpoint/2010/main" val="1257323974"/>
+        <p14:creationId xmlns:p14="http://schemas.microsoft.com/office/powerpoint/2010/main" val="1407475571"/>
       </p:ext>
     </p:extLst>
   </p:cSld>
@@ -3141,7 +3141,7 @@
           <p:cNvPr id="1" name="s11-rule">
             <a:extLst xmlns:a="http://schemas.openxmlformats.org/drawingml/2006/main">
               <a:ext uri="{FF2B5EF4-FFF2-40B4-BE49-F238E27FC236}">
-                <a16:creationId xmlns:a16="http://schemas.microsoft.com/office/drawing/2014/main" id="{6BD14A60-FD1E-4800-9EAB-7F963F24F604}"/>
+                <a16:creationId xmlns:a16="http://schemas.microsoft.com/office/drawing/2014/main" id="{E030FD4F-6326-43E9-A9EF-3494A010860B}"/>
               </a:ext>
             </a:extLst>
           </p:cNvPr>
@@ -3174,7 +3174,7 @@
           <p:cNvPr id="2" name="s11-eyebrow">
             <a:extLst xmlns:a="http://schemas.openxmlformats.org/drawingml/2006/main">
               <a:ext uri="{FF2B5EF4-FFF2-40B4-BE49-F238E27FC236}">
-                <a16:creationId xmlns:a16="http://schemas.microsoft.com/office/drawing/2014/main" id="{2583BE81-C5A6-4581-B8EB-B16251BF8643}"/>
+                <a16:creationId xmlns:a16="http://schemas.microsoft.com/office/drawing/2014/main" id="{8D40F159-EF01-49A0-B8B0-069002911F10}"/>
               </a:ext>
             </a:extLst>
           </p:cNvPr>
@@ -3232,7 +3232,7 @@
           <p:cNvPr id="3" name="s11-title">
             <a:extLst xmlns:a="http://schemas.openxmlformats.org/drawingml/2006/main">
               <a:ext uri="{FF2B5EF4-FFF2-40B4-BE49-F238E27FC236}">
-                <a16:creationId xmlns:a16="http://schemas.microsoft.com/office/drawing/2014/main" id="{2357B46A-F195-4520-93E7-BCC5876BAF3D}"/>
+                <a16:creationId xmlns:a16="http://schemas.microsoft.com/office/drawing/2014/main" id="{50E8E276-C851-4571-98D1-64835EC02E18}"/>
               </a:ext>
             </a:extLst>
           </p:cNvPr>
@@ -3290,7 +3290,7 @@
           <p:cNvPr id="4" name="s11-footer">
             <a:extLst xmlns:a="http://schemas.openxmlformats.org/drawingml/2006/main">
               <a:ext uri="{FF2B5EF4-FFF2-40B4-BE49-F238E27FC236}">
-                <a16:creationId xmlns:a16="http://schemas.microsoft.com/office/drawing/2014/main" id="{9FC1292F-A670-41A3-BAA9-8ABF5591052A}"/>
+                <a16:creationId xmlns:a16="http://schemas.microsoft.com/office/drawing/2014/main" id="{B86BDC39-8090-4173-83C1-F44C2FB3AF40}"/>
               </a:ext>
             </a:extLst>
           </p:cNvPr>
@@ -3321,7 +3321,7 @@
           <p:cNvPr id="5" name="s11-identity">
             <a:extLst xmlns:a="http://schemas.openxmlformats.org/drawingml/2006/main">
               <a:ext uri="{FF2B5EF4-FFF2-40B4-BE49-F238E27FC236}">
-                <a16:creationId xmlns:a16="http://schemas.microsoft.com/office/drawing/2014/main" id="{D85DD1EE-B5E0-471A-9C35-403D001EB723}"/>
+                <a16:creationId xmlns:a16="http://schemas.microsoft.com/office/drawing/2014/main" id="{7455D1D3-C52C-44C7-90CE-ED3A95B684DC}"/>
               </a:ext>
             </a:extLst>
           </p:cNvPr>
@@ -3379,7 +3379,7 @@
           <p:cNvPr id="6" name="practice-circle-0">
             <a:extLst xmlns:a="http://schemas.openxmlformats.org/drawingml/2006/main">
               <a:ext uri="{FF2B5EF4-FFF2-40B4-BE49-F238E27FC236}">
-                <a16:creationId xmlns:a16="http://schemas.microsoft.com/office/drawing/2014/main" id="{4D10CAF8-F414-493C-9C2A-F364E0744EAD}"/>
+                <a16:creationId xmlns:a16="http://schemas.microsoft.com/office/drawing/2014/main" id="{3634194D-1B28-49A2-BF65-9D7E47277481}"/>
               </a:ext>
             </a:extLst>
           </p:cNvPr>
@@ -3412,7 +3412,7 @@
           <p:cNvPr id="7" name="practice-number-0">
             <a:extLst xmlns:a="http://schemas.openxmlformats.org/drawingml/2006/main">
               <a:ext uri="{FF2B5EF4-FFF2-40B4-BE49-F238E27FC236}">
-                <a16:creationId xmlns:a16="http://schemas.microsoft.com/office/drawing/2014/main" id="{402E7EF8-7AD0-482A-96FC-CC325E86BC1E}"/>
+                <a16:creationId xmlns:a16="http://schemas.microsoft.com/office/drawing/2014/main" id="{D4F6CD3F-3154-4289-9822-C95C634D2FB7}"/>
               </a:ext>
             </a:extLst>
           </p:cNvPr>
@@ -3470,7 +3470,7 @@
           <p:cNvPr id="8" name="practice-item-0">
             <a:extLst xmlns:a="http://schemas.openxmlformats.org/drawingml/2006/main">
               <a:ext uri="{FF2B5EF4-FFF2-40B4-BE49-F238E27FC236}">
-                <a16:creationId xmlns:a16="http://schemas.microsoft.com/office/drawing/2014/main" id="{678A6524-52CA-4959-B9A7-4ED3A026AC39}"/>
+                <a16:creationId xmlns:a16="http://schemas.microsoft.com/office/drawing/2014/main" id="{A17A6DAD-2ECB-496F-8666-23314A61DD7B}"/>
               </a:ext>
             </a:extLst>
           </p:cNvPr>
@@ -3534,7 +3534,7 @@
           <p:cNvPr id="9" name="practice-connector-0">
             <a:extLst xmlns:a="http://schemas.openxmlformats.org/drawingml/2006/main">
               <a:ext uri="{FF2B5EF4-FFF2-40B4-BE49-F238E27FC236}">
-                <a16:creationId xmlns:a16="http://schemas.microsoft.com/office/drawing/2014/main" id="{F1F8CE07-3C02-4B42-853C-229C8DC87A0A}"/>
+                <a16:creationId xmlns:a16="http://schemas.microsoft.com/office/drawing/2014/main" id="{8B9FA2FB-B55C-45CE-87AC-D36D7630E0C4}"/>
               </a:ext>
             </a:extLst>
           </p:cNvPr>
@@ -3565,7 +3565,7 @@
           <p:cNvPr id="10" name="practice-circle-1">
             <a:extLst xmlns:a="http://schemas.openxmlformats.org/drawingml/2006/main">
               <a:ext uri="{FF2B5EF4-FFF2-40B4-BE49-F238E27FC236}">
-                <a16:creationId xmlns:a16="http://schemas.microsoft.com/office/drawing/2014/main" id="{C22D987E-395A-40D9-8791-30323B8B25BD}"/>
+                <a16:creationId xmlns:a16="http://schemas.microsoft.com/office/drawing/2014/main" id="{A299DF57-BAA2-4B06-A98E-EF996ECAB22F}"/>
               </a:ext>
             </a:extLst>
           </p:cNvPr>
@@ -3598,7 +3598,7 @@
           <p:cNvPr id="11" name="practice-number-1">
             <a:extLst xmlns:a="http://schemas.openxmlformats.org/drawingml/2006/main">
               <a:ext uri="{FF2B5EF4-FFF2-40B4-BE49-F238E27FC236}">
-                <a16:creationId xmlns:a16="http://schemas.microsoft.com/office/drawing/2014/main" id="{A30C062F-46C8-4214-8E94-9AF3FC309FB3}"/>
+                <a16:creationId xmlns:a16="http://schemas.microsoft.com/office/drawing/2014/main" id="{D632DA36-4D57-4E5F-BB1B-F2BD35BF5AC5}"/>
               </a:ext>
             </a:extLst>
           </p:cNvPr>
@@ -3656,7 +3656,7 @@
           <p:cNvPr id="12" name="practice-item-1">
             <a:extLst xmlns:a="http://schemas.openxmlformats.org/drawingml/2006/main">
               <a:ext uri="{FF2B5EF4-FFF2-40B4-BE49-F238E27FC236}">
-                <a16:creationId xmlns:a16="http://schemas.microsoft.com/office/drawing/2014/main" id="{14331E08-0A44-48AF-BEE0-F69D92694ECF}"/>
+                <a16:creationId xmlns:a16="http://schemas.microsoft.com/office/drawing/2014/main" id="{CCD53963-8732-481A-BC98-D1A826648AB8}"/>
               </a:ext>
             </a:extLst>
           </p:cNvPr>
@@ -3720,7 +3720,7 @@
           <p:cNvPr id="13" name="practice-connector-1">
             <a:extLst xmlns:a="http://schemas.openxmlformats.org/drawingml/2006/main">
               <a:ext uri="{FF2B5EF4-FFF2-40B4-BE49-F238E27FC236}">
-                <a16:creationId xmlns:a16="http://schemas.microsoft.com/office/drawing/2014/main" id="{4A83A19A-B758-4789-B27C-A906ED9615C0}"/>
+                <a16:creationId xmlns:a16="http://schemas.microsoft.com/office/drawing/2014/main" id="{5BDD3DF0-BAAC-4AD1-A010-84EB13A2B4A5}"/>
               </a:ext>
             </a:extLst>
           </p:cNvPr>
@@ -3751,7 +3751,7 @@
           <p:cNvPr id="14" name="practice-circle-2">
             <a:extLst xmlns:a="http://schemas.openxmlformats.org/drawingml/2006/main">
               <a:ext uri="{FF2B5EF4-FFF2-40B4-BE49-F238E27FC236}">
-                <a16:creationId xmlns:a16="http://schemas.microsoft.com/office/drawing/2014/main" id="{FEDB40E5-B2E5-4C23-B6C8-BAC8341AAFF1}"/>
+                <a16:creationId xmlns:a16="http://schemas.microsoft.com/office/drawing/2014/main" id="{9E40F9BE-F942-4634-97E9-B20964F21832}"/>
               </a:ext>
             </a:extLst>
           </p:cNvPr>
@@ -3784,7 +3784,7 @@
           <p:cNvPr id="15" name="practice-number-2">
             <a:extLst xmlns:a="http://schemas.openxmlformats.org/drawingml/2006/main">
               <a:ext uri="{FF2B5EF4-FFF2-40B4-BE49-F238E27FC236}">
-                <a16:creationId xmlns:a16="http://schemas.microsoft.com/office/drawing/2014/main" id="{AF56969B-0DC2-4BD3-9BBE-15268837CF6B}"/>
+                <a16:creationId xmlns:a16="http://schemas.microsoft.com/office/drawing/2014/main" id="{16F84CD5-55CC-43EA-9616-48149915967F}"/>
               </a:ext>
             </a:extLst>
           </p:cNvPr>
@@ -3842,7 +3842,7 @@
           <p:cNvPr id="16" name="practice-item-2">
             <a:extLst xmlns:a="http://schemas.openxmlformats.org/drawingml/2006/main">
               <a:ext uri="{FF2B5EF4-FFF2-40B4-BE49-F238E27FC236}">
-                <a16:creationId xmlns:a16="http://schemas.microsoft.com/office/drawing/2014/main" id="{ACB59018-6574-4D05-949B-960B88759177}"/>
+                <a16:creationId xmlns:a16="http://schemas.microsoft.com/office/drawing/2014/main" id="{90C9132E-6174-49FC-9C0E-36D7F0A23EE2}"/>
               </a:ext>
             </a:extLst>
           </p:cNvPr>
@@ -3904,7 +3904,7 @@
     </p:spTree>
     <p:extLst>
       <p:ext uri="{BB962C8B-B14F-4D97-AF65-F5344CB8AC3E}">
-        <p14:creationId xmlns:p14="http://schemas.microsoft.com/office/powerpoint/2010/main" val="1012925588"/>
+        <p14:creationId xmlns:p14="http://schemas.microsoft.com/office/powerpoint/2010/main" val="1202374205"/>
       </p:ext>
     </p:extLst>
   </p:cSld>
@@ -3935,7 +3935,7 @@
           <p:cNvPr id="1" name="s12-rule">
             <a:extLst xmlns:a="http://schemas.openxmlformats.org/drawingml/2006/main">
               <a:ext uri="{FF2B5EF4-FFF2-40B4-BE49-F238E27FC236}">
-                <a16:creationId xmlns:a16="http://schemas.microsoft.com/office/drawing/2014/main" id="{74C7E533-76BE-48B9-945B-9342E01D2FEC}"/>
+                <a16:creationId xmlns:a16="http://schemas.microsoft.com/office/drawing/2014/main" id="{09FF516E-6B6E-492C-B2C7-089F6F63794D}"/>
               </a:ext>
             </a:extLst>
           </p:cNvPr>
@@ -3968,7 +3968,7 @@
           <p:cNvPr id="2" name="s12-eyebrow">
             <a:extLst xmlns:a="http://schemas.openxmlformats.org/drawingml/2006/main">
               <a:ext uri="{FF2B5EF4-FFF2-40B4-BE49-F238E27FC236}">
-                <a16:creationId xmlns:a16="http://schemas.microsoft.com/office/drawing/2014/main" id="{FBE27A92-0817-4AC7-BAF6-9FC73306DE7A}"/>
+                <a16:creationId xmlns:a16="http://schemas.microsoft.com/office/drawing/2014/main" id="{004764DB-636D-49C8-ABDD-830EA465597A}"/>
               </a:ext>
             </a:extLst>
           </p:cNvPr>
@@ -4026,7 +4026,7 @@
           <p:cNvPr id="3" name="s12-title">
             <a:extLst xmlns:a="http://schemas.openxmlformats.org/drawingml/2006/main">
               <a:ext uri="{FF2B5EF4-FFF2-40B4-BE49-F238E27FC236}">
-                <a16:creationId xmlns:a16="http://schemas.microsoft.com/office/drawing/2014/main" id="{A055B616-BE2A-423E-ABE8-1CFA3A74AC89}"/>
+                <a16:creationId xmlns:a16="http://schemas.microsoft.com/office/drawing/2014/main" id="{87990A9C-9B8C-45E1-99C3-436458D8ED85}"/>
               </a:ext>
             </a:extLst>
           </p:cNvPr>
@@ -4084,7 +4084,7 @@
           <p:cNvPr id="4" name="s12-footer">
             <a:extLst xmlns:a="http://schemas.openxmlformats.org/drawingml/2006/main">
               <a:ext uri="{FF2B5EF4-FFF2-40B4-BE49-F238E27FC236}">
-                <a16:creationId xmlns:a16="http://schemas.microsoft.com/office/drawing/2014/main" id="{356120CA-60AC-4664-A099-8C6A40951F51}"/>
+                <a16:creationId xmlns:a16="http://schemas.microsoft.com/office/drawing/2014/main" id="{A644DE97-B493-4B2E-BB45-205210E3B0A7}"/>
               </a:ext>
             </a:extLst>
           </p:cNvPr>
@@ -4115,7 +4115,7 @@
           <p:cNvPr id="5" name="s12-identity">
             <a:extLst xmlns:a="http://schemas.openxmlformats.org/drawingml/2006/main">
               <a:ext uri="{FF2B5EF4-FFF2-40B4-BE49-F238E27FC236}">
-                <a16:creationId xmlns:a16="http://schemas.microsoft.com/office/drawing/2014/main" id="{CC5B816D-A287-4A1E-B4C6-DA4C719AEAE4}"/>
+                <a16:creationId xmlns:a16="http://schemas.microsoft.com/office/drawing/2014/main" id="{05D34E96-8AE8-44F1-BAA0-B866282AE895}"/>
               </a:ext>
             </a:extLst>
           </p:cNvPr>
@@ -4173,7 +4173,7 @@
           <p:cNvPr id="6" name="recap-circle-0">
             <a:extLst xmlns:a="http://schemas.openxmlformats.org/drawingml/2006/main">
               <a:ext uri="{FF2B5EF4-FFF2-40B4-BE49-F238E27FC236}">
-                <a16:creationId xmlns:a16="http://schemas.microsoft.com/office/drawing/2014/main" id="{D0D9BEB5-CA72-44D3-86D3-00401AEF7C68}"/>
+                <a16:creationId xmlns:a16="http://schemas.microsoft.com/office/drawing/2014/main" id="{062B0680-32DE-4E8D-AC36-481FDD6EA862}"/>
               </a:ext>
             </a:extLst>
           </p:cNvPr>
@@ -4206,7 +4206,7 @@
           <p:cNvPr id="7" name="recap-number-0">
             <a:extLst xmlns:a="http://schemas.openxmlformats.org/drawingml/2006/main">
               <a:ext uri="{FF2B5EF4-FFF2-40B4-BE49-F238E27FC236}">
-                <a16:creationId xmlns:a16="http://schemas.microsoft.com/office/drawing/2014/main" id="{B1AB86CD-5CCF-4A1B-BA11-729815614476}"/>
+                <a16:creationId xmlns:a16="http://schemas.microsoft.com/office/drawing/2014/main" id="{4DAECCEE-539C-4182-BCB5-8A3541C86DAA}"/>
               </a:ext>
             </a:extLst>
           </p:cNvPr>
@@ -4264,7 +4264,7 @@
           <p:cNvPr id="8" name="recap-item-0">
             <a:extLst xmlns:a="http://schemas.openxmlformats.org/drawingml/2006/main">
               <a:ext uri="{FF2B5EF4-FFF2-40B4-BE49-F238E27FC236}">
-                <a16:creationId xmlns:a16="http://schemas.microsoft.com/office/drawing/2014/main" id="{00273C92-728F-4916-801C-CB1AF2D784C2}"/>
+                <a16:creationId xmlns:a16="http://schemas.microsoft.com/office/drawing/2014/main" id="{5AD33BF0-8948-4CAE-A80C-5B6C4CE24D81}"/>
               </a:ext>
             </a:extLst>
           </p:cNvPr>
@@ -4328,7 +4328,7 @@
           <p:cNvPr id="9" name="recap-connector-0">
             <a:extLst xmlns:a="http://schemas.openxmlformats.org/drawingml/2006/main">
               <a:ext uri="{FF2B5EF4-FFF2-40B4-BE49-F238E27FC236}">
-                <a16:creationId xmlns:a16="http://schemas.microsoft.com/office/drawing/2014/main" id="{AE3C4AFD-9BE0-4776-AD80-AD51D4B661CE}"/>
+                <a16:creationId xmlns:a16="http://schemas.microsoft.com/office/drawing/2014/main" id="{B282997F-3943-40E6-985A-BA7120777169}"/>
               </a:ext>
             </a:extLst>
           </p:cNvPr>
@@ -4359,7 +4359,7 @@
           <p:cNvPr id="10" name="recap-circle-1">
             <a:extLst xmlns:a="http://schemas.openxmlformats.org/drawingml/2006/main">
               <a:ext uri="{FF2B5EF4-FFF2-40B4-BE49-F238E27FC236}">
-                <a16:creationId xmlns:a16="http://schemas.microsoft.com/office/drawing/2014/main" id="{229D2FDC-4F52-453B-BC73-C7078EC9BB39}"/>
+                <a16:creationId xmlns:a16="http://schemas.microsoft.com/office/drawing/2014/main" id="{21BF2844-BC77-455E-B4E3-DA64BFF83AFC}"/>
               </a:ext>
             </a:extLst>
           </p:cNvPr>
@@ -4392,7 +4392,7 @@
           <p:cNvPr id="11" name="recap-number-1">
             <a:extLst xmlns:a="http://schemas.openxmlformats.org/drawingml/2006/main">
               <a:ext uri="{FF2B5EF4-FFF2-40B4-BE49-F238E27FC236}">
-                <a16:creationId xmlns:a16="http://schemas.microsoft.com/office/drawing/2014/main" id="{F7423CEC-3AFC-42C0-BEDB-C756E6C5F4C9}"/>
+                <a16:creationId xmlns:a16="http://schemas.microsoft.com/office/drawing/2014/main" id="{951D54F6-6E93-4E2E-8D3F-EAFCDE46F340}"/>
               </a:ext>
             </a:extLst>
           </p:cNvPr>
@@ -4450,7 +4450,7 @@
           <p:cNvPr id="12" name="recap-item-1">
             <a:extLst xmlns:a="http://schemas.openxmlformats.org/drawingml/2006/main">
               <a:ext uri="{FF2B5EF4-FFF2-40B4-BE49-F238E27FC236}">
-                <a16:creationId xmlns:a16="http://schemas.microsoft.com/office/drawing/2014/main" id="{EBE14382-D3A8-4583-BF84-A09D71B9C8ED}"/>
+                <a16:creationId xmlns:a16="http://schemas.microsoft.com/office/drawing/2014/main" id="{5104AE3F-17E3-4A7F-A754-39655B0D30CB}"/>
               </a:ext>
             </a:extLst>
           </p:cNvPr>
@@ -4514,7 +4514,7 @@
           <p:cNvPr id="13" name="recap-connector-1">
             <a:extLst xmlns:a="http://schemas.openxmlformats.org/drawingml/2006/main">
               <a:ext uri="{FF2B5EF4-FFF2-40B4-BE49-F238E27FC236}">
-                <a16:creationId xmlns:a16="http://schemas.microsoft.com/office/drawing/2014/main" id="{34CDC13F-0CF2-42F0-A64D-98590D4CD653}"/>
+                <a16:creationId xmlns:a16="http://schemas.microsoft.com/office/drawing/2014/main" id="{9D623C81-C41E-4F1D-9478-819CA745E642}"/>
               </a:ext>
             </a:extLst>
           </p:cNvPr>
@@ -4545,7 +4545,7 @@
           <p:cNvPr id="14" name="recap-circle-2">
             <a:extLst xmlns:a="http://schemas.openxmlformats.org/drawingml/2006/main">
               <a:ext uri="{FF2B5EF4-FFF2-40B4-BE49-F238E27FC236}">
-                <a16:creationId xmlns:a16="http://schemas.microsoft.com/office/drawing/2014/main" id="{36C12B82-F957-4D60-B9F2-E34511CD548A}"/>
+                <a16:creationId xmlns:a16="http://schemas.microsoft.com/office/drawing/2014/main" id="{D5C51348-7A09-47C6-8B69-6F25DB47DB76}"/>
               </a:ext>
             </a:extLst>
           </p:cNvPr>
@@ -4578,7 +4578,7 @@
           <p:cNvPr id="15" name="recap-number-2">
             <a:extLst xmlns:a="http://schemas.openxmlformats.org/drawingml/2006/main">
               <a:ext uri="{FF2B5EF4-FFF2-40B4-BE49-F238E27FC236}">
-                <a16:creationId xmlns:a16="http://schemas.microsoft.com/office/drawing/2014/main" id="{FC321EC6-FC1F-4785-B30A-14AC9A0E3F93}"/>
+                <a16:creationId xmlns:a16="http://schemas.microsoft.com/office/drawing/2014/main" id="{EB4BEB9E-6A44-4D3A-9B9C-D60A385E8DE5}"/>
               </a:ext>
             </a:extLst>
           </p:cNvPr>
@@ -4636,7 +4636,7 @@
           <p:cNvPr id="16" name="recap-item-2">
             <a:extLst xmlns:a="http://schemas.openxmlformats.org/drawingml/2006/main">
               <a:ext uri="{FF2B5EF4-FFF2-40B4-BE49-F238E27FC236}">
-                <a16:creationId xmlns:a16="http://schemas.microsoft.com/office/drawing/2014/main" id="{3D263152-61B3-4146-8662-8DF19E64015D}"/>
+                <a16:creationId xmlns:a16="http://schemas.microsoft.com/office/drawing/2014/main" id="{6964BF7C-0E68-452A-B679-873A01F9C459}"/>
               </a:ext>
             </a:extLst>
           </p:cNvPr>
@@ -4698,7 +4698,7 @@
     </p:spTree>
     <p:extLst>
       <p:ext uri="{BB962C8B-B14F-4D97-AF65-F5344CB8AC3E}">
-        <p14:creationId xmlns:p14="http://schemas.microsoft.com/office/powerpoint/2010/main" val="1214323277"/>
+        <p14:creationId xmlns:p14="http://schemas.microsoft.com/office/powerpoint/2010/main" val="457346384"/>
       </p:ext>
     </p:extLst>
   </p:cSld>
@@ -4729,7 +4729,7 @@
           <p:cNvPr id="1" name="s13-rule">
             <a:extLst xmlns:a="http://schemas.openxmlformats.org/drawingml/2006/main">
               <a:ext uri="{FF2B5EF4-FFF2-40B4-BE49-F238E27FC236}">
-                <a16:creationId xmlns:a16="http://schemas.microsoft.com/office/drawing/2014/main" id="{E8B6D34D-3EE3-4179-826D-554C477AB261}"/>
+                <a16:creationId xmlns:a16="http://schemas.microsoft.com/office/drawing/2014/main" id="{C1B5934D-5337-404B-A2D1-913F7350D96B}"/>
               </a:ext>
             </a:extLst>
           </p:cNvPr>
@@ -4762,7 +4762,7 @@
           <p:cNvPr id="2" name="s13-eyebrow">
             <a:extLst xmlns:a="http://schemas.openxmlformats.org/drawingml/2006/main">
               <a:ext uri="{FF2B5EF4-FFF2-40B4-BE49-F238E27FC236}">
-                <a16:creationId xmlns:a16="http://schemas.microsoft.com/office/drawing/2014/main" id="{8F93DCF5-8EC2-4BA4-8DFE-DCD7B2980D5D}"/>
+                <a16:creationId xmlns:a16="http://schemas.microsoft.com/office/drawing/2014/main" id="{C1C76574-A6E9-47CF-A8C9-76E909B8F652}"/>
               </a:ext>
             </a:extLst>
           </p:cNvPr>
@@ -4820,7 +4820,7 @@
           <p:cNvPr id="3" name="s13-title">
             <a:extLst xmlns:a="http://schemas.openxmlformats.org/drawingml/2006/main">
               <a:ext uri="{FF2B5EF4-FFF2-40B4-BE49-F238E27FC236}">
-                <a16:creationId xmlns:a16="http://schemas.microsoft.com/office/drawing/2014/main" id="{E4B4EC3A-87DF-4862-934A-8ECC11BA32BD}"/>
+                <a16:creationId xmlns:a16="http://schemas.microsoft.com/office/drawing/2014/main" id="{A8C27F35-81E5-4F37-9F4E-A14E395A532E}"/>
               </a:ext>
             </a:extLst>
           </p:cNvPr>
@@ -4878,7 +4878,7 @@
           <p:cNvPr id="4" name="s13-footer">
             <a:extLst xmlns:a="http://schemas.openxmlformats.org/drawingml/2006/main">
               <a:ext uri="{FF2B5EF4-FFF2-40B4-BE49-F238E27FC236}">
-                <a16:creationId xmlns:a16="http://schemas.microsoft.com/office/drawing/2014/main" id="{7D47A2A1-50ED-4691-926F-248E5C1BF446}"/>
+                <a16:creationId xmlns:a16="http://schemas.microsoft.com/office/drawing/2014/main" id="{367A7C70-2B61-407F-BBE9-4C95C5096B19}"/>
               </a:ext>
             </a:extLst>
           </p:cNvPr>
@@ -4909,7 +4909,7 @@
           <p:cNvPr id="5" name="s13-identity">
             <a:extLst xmlns:a="http://schemas.openxmlformats.org/drawingml/2006/main">
               <a:ext uri="{FF2B5EF4-FFF2-40B4-BE49-F238E27FC236}">
-                <a16:creationId xmlns:a16="http://schemas.microsoft.com/office/drawing/2014/main" id="{1FF5FEDF-5A7F-4F41-A7EC-E060738372B1}"/>
+                <a16:creationId xmlns:a16="http://schemas.microsoft.com/office/drawing/2014/main" id="{E69C137D-C324-41BD-B939-1791BEB7833F}"/>
               </a:ext>
             </a:extLst>
           </p:cNvPr>
@@ -4967,7 +4967,7 @@
           <p:cNvPr id="6" name="source-0">
             <a:extLst xmlns:a="http://schemas.openxmlformats.org/drawingml/2006/main">
               <a:ext uri="{FF2B5EF4-FFF2-40B4-BE49-F238E27FC236}">
-                <a16:creationId xmlns:a16="http://schemas.microsoft.com/office/drawing/2014/main" id="{22655792-664D-47ED-8BB4-C5FD5506169F}"/>
+                <a16:creationId xmlns:a16="http://schemas.microsoft.com/office/drawing/2014/main" id="{AD4DC202-74DA-4E16-A141-FCA3CEBF353A}"/>
               </a:ext>
             </a:extLst>
           </p:cNvPr>
@@ -5031,7 +5031,7 @@
           <p:cNvPr id="7" name="source-1">
             <a:extLst xmlns:a="http://schemas.openxmlformats.org/drawingml/2006/main">
               <a:ext uri="{FF2B5EF4-FFF2-40B4-BE49-F238E27FC236}">
-                <a16:creationId xmlns:a16="http://schemas.microsoft.com/office/drawing/2014/main" id="{619CC3F0-D3DA-4121-8366-B32165B6D3C9}"/>
+                <a16:creationId xmlns:a16="http://schemas.microsoft.com/office/drawing/2014/main" id="{F43D5652-8C1F-4630-9C2F-F6F813A568B0}"/>
               </a:ext>
             </a:extLst>
           </p:cNvPr>
@@ -5095,7 +5095,7 @@
           <p:cNvPr id="8" name="source-2">
             <a:extLst xmlns:a="http://schemas.openxmlformats.org/drawingml/2006/main">
               <a:ext uri="{FF2B5EF4-FFF2-40B4-BE49-F238E27FC236}">
-                <a16:creationId xmlns:a16="http://schemas.microsoft.com/office/drawing/2014/main" id="{0C81F756-84D9-406D-9E4B-EDF9EC1FBB12}"/>
+                <a16:creationId xmlns:a16="http://schemas.microsoft.com/office/drawing/2014/main" id="{D744F6F4-1C4E-490A-9CBF-B02717C38860}"/>
               </a:ext>
             </a:extLst>
           </p:cNvPr>
@@ -5159,7 +5159,7 @@
           <p:cNvPr id="9" name="source-3">
             <a:extLst xmlns:a="http://schemas.openxmlformats.org/drawingml/2006/main">
               <a:ext uri="{FF2B5EF4-FFF2-40B4-BE49-F238E27FC236}">
-                <a16:creationId xmlns:a16="http://schemas.microsoft.com/office/drawing/2014/main" id="{07EFDBCB-9B7D-4D60-A718-D82BF2F2C9CF}"/>
+                <a16:creationId xmlns:a16="http://schemas.microsoft.com/office/drawing/2014/main" id="{05A2DE05-C591-4351-9A09-4D4EA5699D7E}"/>
               </a:ext>
             </a:extLst>
           </p:cNvPr>
@@ -5223,7 +5223,7 @@
           <p:cNvPr id="10" name="source-4">
             <a:extLst xmlns:a="http://schemas.openxmlformats.org/drawingml/2006/main">
               <a:ext uri="{FF2B5EF4-FFF2-40B4-BE49-F238E27FC236}">
-                <a16:creationId xmlns:a16="http://schemas.microsoft.com/office/drawing/2014/main" id="{11A361EC-0468-462A-96BE-B6FECA5BE4A5}"/>
+                <a16:creationId xmlns:a16="http://schemas.microsoft.com/office/drawing/2014/main" id="{2DC65E9A-6AFF-4ADB-9D90-7EE001D2E7DF}"/>
               </a:ext>
             </a:extLst>
           </p:cNvPr>
@@ -5287,7 +5287,7 @@
           <p:cNvPr id="11" name="s13-takeaway-rule">
             <a:extLst xmlns:a="http://schemas.openxmlformats.org/drawingml/2006/main">
               <a:ext uri="{FF2B5EF4-FFF2-40B4-BE49-F238E27FC236}">
-                <a16:creationId xmlns:a16="http://schemas.microsoft.com/office/drawing/2014/main" id="{E4ED91AF-17DC-4D25-A919-29DAF3097466}"/>
+                <a16:creationId xmlns:a16="http://schemas.microsoft.com/office/drawing/2014/main" id="{283B4B29-9E96-4BC4-B604-53E8CCFD7A91}"/>
               </a:ext>
             </a:extLst>
           </p:cNvPr>
@@ -5320,7 +5320,7 @@
           <p:cNvPr id="12" name="s13-takeaway">
             <a:extLst xmlns:a="http://schemas.openxmlformats.org/drawingml/2006/main">
               <a:ext uri="{FF2B5EF4-FFF2-40B4-BE49-F238E27FC236}">
-                <a16:creationId xmlns:a16="http://schemas.microsoft.com/office/drawing/2014/main" id="{E6CC4071-964B-4CAD-B460-7DF78B267220}"/>
+                <a16:creationId xmlns:a16="http://schemas.microsoft.com/office/drawing/2014/main" id="{5AF5857A-79F8-4650-9743-572CE7EFAF6C}"/>
               </a:ext>
             </a:extLst>
           </p:cNvPr>
@@ -5345,7 +5345,7 @@
         </p:spPr>
         <p:txBody>
           <a:bodyPr xmlns:a="http://schemas.openxmlformats.org/drawingml/2006/main" lIns="0" tIns="0" rIns="0" bIns="0" anchor="ctr">
-            <a:normAutofit fontScale="100000"/>
+            <a:normAutofit fontScale="95911"/>
           </a:bodyPr>
           <a:lstStyle xmlns:a="http://schemas.openxmlformats.org/drawingml/2006/main"/>
           <a:p xmlns:a="http://schemas.openxmlformats.org/drawingml/2006/main">
@@ -5368,7 +5368,7 @@
                 <a:ea typeface="PingFang SC"/>
                 <a:cs typeface="PingFang SC"/>
               </a:rPr>
-              <a:t>公开幻灯片只使用课程原创文字与原生图形；完整论证、链接和事实边界请见本节讲义。</a:t>
+              <a:t>课程精编页用于讲授主线；播放器中的“原课件”模式保留团队 PowerPoint 精选页、真实图片和可播放视频。</a:t>
             </a:r>
           </a:p>
         </p:txBody>
@@ -5376,7 +5376,7 @@
     </p:spTree>
     <p:extLst>
       <p:ext uri="{BB962C8B-B14F-4D97-AF65-F5344CB8AC3E}">
-        <p14:creationId xmlns:p14="http://schemas.microsoft.com/office/powerpoint/2010/main" val="1023732065"/>
+        <p14:creationId xmlns:p14="http://schemas.microsoft.com/office/powerpoint/2010/main" val="1247812076"/>
       </p:ext>
     </p:extLst>
   </p:cSld>
@@ -5407,7 +5407,7 @@
           <p:cNvPr id="1" name="s2-rule">
             <a:extLst xmlns:a="http://schemas.openxmlformats.org/drawingml/2006/main">
               <a:ext uri="{FF2B5EF4-FFF2-40B4-BE49-F238E27FC236}">
-                <a16:creationId xmlns:a16="http://schemas.microsoft.com/office/drawing/2014/main" id="{DFBF7FE6-BF72-4F31-819F-9A9992F266E7}"/>
+                <a16:creationId xmlns:a16="http://schemas.microsoft.com/office/drawing/2014/main" id="{68348DA3-161B-4249-BBB9-F7C9B9007C3B}"/>
               </a:ext>
             </a:extLst>
           </p:cNvPr>
@@ -5440,7 +5440,7 @@
           <p:cNvPr id="2" name="s2-eyebrow">
             <a:extLst xmlns:a="http://schemas.openxmlformats.org/drawingml/2006/main">
               <a:ext uri="{FF2B5EF4-FFF2-40B4-BE49-F238E27FC236}">
-                <a16:creationId xmlns:a16="http://schemas.microsoft.com/office/drawing/2014/main" id="{51515225-FD80-4A67-9E06-EBDAC081D85C}"/>
+                <a16:creationId xmlns:a16="http://schemas.microsoft.com/office/drawing/2014/main" id="{2B7317D4-2B52-4194-A70E-1DF9B91C608E}"/>
               </a:ext>
             </a:extLst>
           </p:cNvPr>
@@ -5498,7 +5498,7 @@
           <p:cNvPr id="3" name="s2-title">
             <a:extLst xmlns:a="http://schemas.openxmlformats.org/drawingml/2006/main">
               <a:ext uri="{FF2B5EF4-FFF2-40B4-BE49-F238E27FC236}">
-                <a16:creationId xmlns:a16="http://schemas.microsoft.com/office/drawing/2014/main" id="{EF217965-5657-4FB6-AE8D-0B8B1EDCE150}"/>
+                <a16:creationId xmlns:a16="http://schemas.microsoft.com/office/drawing/2014/main" id="{40F8B085-FB14-458F-9D42-0C747ABAC57B}"/>
               </a:ext>
             </a:extLst>
           </p:cNvPr>
@@ -5556,7 +5556,7 @@
           <p:cNvPr id="4" name="s2-footer">
             <a:extLst xmlns:a="http://schemas.openxmlformats.org/drawingml/2006/main">
               <a:ext uri="{FF2B5EF4-FFF2-40B4-BE49-F238E27FC236}">
-                <a16:creationId xmlns:a16="http://schemas.microsoft.com/office/drawing/2014/main" id="{5926E469-A316-4F59-B9E2-14BE8CCF082C}"/>
+                <a16:creationId xmlns:a16="http://schemas.microsoft.com/office/drawing/2014/main" id="{AA0C96E5-0EA3-405F-A2AC-C0F3916281D3}"/>
               </a:ext>
             </a:extLst>
           </p:cNvPr>
@@ -5587,7 +5587,7 @@
           <p:cNvPr id="5" name="s2-identity">
             <a:extLst xmlns:a="http://schemas.openxmlformats.org/drawingml/2006/main">
               <a:ext uri="{FF2B5EF4-FFF2-40B4-BE49-F238E27FC236}">
-                <a16:creationId xmlns:a16="http://schemas.microsoft.com/office/drawing/2014/main" id="{69DDE6FB-5A61-4CC8-B936-3CDDAC66406A}"/>
+                <a16:creationId xmlns:a16="http://schemas.microsoft.com/office/drawing/2014/main" id="{5E406F93-298A-44B8-A71F-DAECCA8AD358}"/>
               </a:ext>
             </a:extLst>
           </p:cNvPr>
@@ -5645,7 +5645,7 @@
           <p:cNvPr id="6" name="objective-1">
             <a:extLst xmlns:a="http://schemas.openxmlformats.org/drawingml/2006/main">
               <a:ext uri="{FF2B5EF4-FFF2-40B4-BE49-F238E27FC236}">
-                <a16:creationId xmlns:a16="http://schemas.microsoft.com/office/drawing/2014/main" id="{E5E871C6-6A0F-4939-9542-00CB8ABC09A8}"/>
+                <a16:creationId xmlns:a16="http://schemas.microsoft.com/office/drawing/2014/main" id="{ED90C361-9966-4CBA-A055-585DD582F6EF}"/>
               </a:ext>
             </a:extLst>
           </p:cNvPr>
@@ -5732,7 +5732,7 @@
           <p:cNvPr id="7" name="objective-2">
             <a:extLst xmlns:a="http://schemas.openxmlformats.org/drawingml/2006/main">
               <a:ext uri="{FF2B5EF4-FFF2-40B4-BE49-F238E27FC236}">
-                <a16:creationId xmlns:a16="http://schemas.microsoft.com/office/drawing/2014/main" id="{626179C2-F493-4058-917C-ED1A93FBE70E}"/>
+                <a16:creationId xmlns:a16="http://schemas.microsoft.com/office/drawing/2014/main" id="{994FD009-B12A-4681-8A88-CE334E345AB6}"/>
               </a:ext>
             </a:extLst>
           </p:cNvPr>
@@ -5819,7 +5819,7 @@
           <p:cNvPr id="8" name="objective-3">
             <a:extLst xmlns:a="http://schemas.openxmlformats.org/drawingml/2006/main">
               <a:ext uri="{FF2B5EF4-FFF2-40B4-BE49-F238E27FC236}">
-                <a16:creationId xmlns:a16="http://schemas.microsoft.com/office/drawing/2014/main" id="{565BA89D-6628-47D9-8EEF-A2E6ACDBF248}"/>
+                <a16:creationId xmlns:a16="http://schemas.microsoft.com/office/drawing/2014/main" id="{FBB2C5B9-E254-4E03-9646-04DC5E816DEB}"/>
               </a:ext>
             </a:extLst>
           </p:cNvPr>
@@ -5906,7 +5906,7 @@
           <p:cNvPr id="9" name="objective-4">
             <a:extLst xmlns:a="http://schemas.openxmlformats.org/drawingml/2006/main">
               <a:ext uri="{FF2B5EF4-FFF2-40B4-BE49-F238E27FC236}">
-                <a16:creationId xmlns:a16="http://schemas.microsoft.com/office/drawing/2014/main" id="{E54F05B5-12AB-40C8-95BE-548E46D0361F}"/>
+                <a16:creationId xmlns:a16="http://schemas.microsoft.com/office/drawing/2014/main" id="{1E6AD801-3C8B-4E60-90DA-871A731BB639}"/>
               </a:ext>
             </a:extLst>
           </p:cNvPr>
@@ -5991,7 +5991,7 @@
     </p:spTree>
     <p:extLst>
       <p:ext uri="{BB962C8B-B14F-4D97-AF65-F5344CB8AC3E}">
-        <p14:creationId xmlns:p14="http://schemas.microsoft.com/office/powerpoint/2010/main" val="1176224083"/>
+        <p14:creationId xmlns:p14="http://schemas.microsoft.com/office/powerpoint/2010/main" val="400131821"/>
       </p:ext>
     </p:extLst>
   </p:cSld>
@@ -6022,7 +6022,7 @@
           <p:cNvPr id="1" name="s3-rule">
             <a:extLst xmlns:a="http://schemas.openxmlformats.org/drawingml/2006/main">
               <a:ext uri="{FF2B5EF4-FFF2-40B4-BE49-F238E27FC236}">
-                <a16:creationId xmlns:a16="http://schemas.microsoft.com/office/drawing/2014/main" id="{5150DD4F-B97A-4427-A1BD-0DBCD76E46FF}"/>
+                <a16:creationId xmlns:a16="http://schemas.microsoft.com/office/drawing/2014/main" id="{3774FD59-DC21-4CAA-BE21-67BC022424E8}"/>
               </a:ext>
             </a:extLst>
           </p:cNvPr>
@@ -6055,7 +6055,7 @@
           <p:cNvPr id="2" name="s3-eyebrow">
             <a:extLst xmlns:a="http://schemas.openxmlformats.org/drawingml/2006/main">
               <a:ext uri="{FF2B5EF4-FFF2-40B4-BE49-F238E27FC236}">
-                <a16:creationId xmlns:a16="http://schemas.microsoft.com/office/drawing/2014/main" id="{86CCF425-635C-43F2-8CF3-7866269A1570}"/>
+                <a16:creationId xmlns:a16="http://schemas.microsoft.com/office/drawing/2014/main" id="{CD4A55C8-C82C-4EA7-833D-DE7B64FA1DF6}"/>
               </a:ext>
             </a:extLst>
           </p:cNvPr>
@@ -6113,7 +6113,7 @@
           <p:cNvPr id="3" name="s3-title">
             <a:extLst xmlns:a="http://schemas.openxmlformats.org/drawingml/2006/main">
               <a:ext uri="{FF2B5EF4-FFF2-40B4-BE49-F238E27FC236}">
-                <a16:creationId xmlns:a16="http://schemas.microsoft.com/office/drawing/2014/main" id="{6BEC4432-1B77-4040-A547-918EBF9C5B91}"/>
+                <a16:creationId xmlns:a16="http://schemas.microsoft.com/office/drawing/2014/main" id="{77DABFFF-4195-4C55-BB10-B2E0CF88CD24}"/>
               </a:ext>
             </a:extLst>
           </p:cNvPr>
@@ -6171,7 +6171,7 @@
           <p:cNvPr id="4" name="s3-footer">
             <a:extLst xmlns:a="http://schemas.openxmlformats.org/drawingml/2006/main">
               <a:ext uri="{FF2B5EF4-FFF2-40B4-BE49-F238E27FC236}">
-                <a16:creationId xmlns:a16="http://schemas.microsoft.com/office/drawing/2014/main" id="{399FD018-533C-49FE-96DD-A7A416288288}"/>
+                <a16:creationId xmlns:a16="http://schemas.microsoft.com/office/drawing/2014/main" id="{F1BCA020-484B-4C6B-952D-64E0FC4C38B2}"/>
               </a:ext>
             </a:extLst>
           </p:cNvPr>
@@ -6202,7 +6202,7 @@
           <p:cNvPr id="5" name="s3-identity">
             <a:extLst xmlns:a="http://schemas.openxmlformats.org/drawingml/2006/main">
               <a:ext uri="{FF2B5EF4-FFF2-40B4-BE49-F238E27FC236}">
-                <a16:creationId xmlns:a16="http://schemas.microsoft.com/office/drawing/2014/main" id="{BDB2D044-9B89-4D23-BD4A-4AC6A19E5E4B}"/>
+                <a16:creationId xmlns:a16="http://schemas.microsoft.com/office/drawing/2014/main" id="{C24BECBA-AE14-45AA-915A-FC3696963EAA}"/>
               </a:ext>
             </a:extLst>
           </p:cNvPr>
@@ -6260,7 +6260,7 @@
           <p:cNvPr id="6" name="core-no-0">
             <a:extLst xmlns:a="http://schemas.openxmlformats.org/drawingml/2006/main">
               <a:ext uri="{FF2B5EF4-FFF2-40B4-BE49-F238E27FC236}">
-                <a16:creationId xmlns:a16="http://schemas.microsoft.com/office/drawing/2014/main" id="{952546A7-B135-4479-A652-2634AF7E298D}"/>
+                <a16:creationId xmlns:a16="http://schemas.microsoft.com/office/drawing/2014/main" id="{DEECFD50-2EB3-43EA-8C34-497DC40BF0D3}"/>
               </a:ext>
             </a:extLst>
           </p:cNvPr>
@@ -6318,7 +6318,7 @@
           <p:cNvPr id="7" name="core-label-0">
             <a:extLst xmlns:a="http://schemas.openxmlformats.org/drawingml/2006/main">
               <a:ext uri="{FF2B5EF4-FFF2-40B4-BE49-F238E27FC236}">
-                <a16:creationId xmlns:a16="http://schemas.microsoft.com/office/drawing/2014/main" id="{A525B8B9-1B7D-4550-8B15-8C83F7BD296C}"/>
+                <a16:creationId xmlns:a16="http://schemas.microsoft.com/office/drawing/2014/main" id="{2674F9D6-CE29-431E-A370-79805DF08D9E}"/>
               </a:ext>
             </a:extLst>
           </p:cNvPr>
@@ -6376,7 +6376,7 @@
           <p:cNvPr id="8" name="core-body-0">
             <a:extLst xmlns:a="http://schemas.openxmlformats.org/drawingml/2006/main">
               <a:ext uri="{FF2B5EF4-FFF2-40B4-BE49-F238E27FC236}">
-                <a16:creationId xmlns:a16="http://schemas.microsoft.com/office/drawing/2014/main" id="{D8100DD6-0D45-4FAB-98FD-8A8CEEE0DA42}"/>
+                <a16:creationId xmlns:a16="http://schemas.microsoft.com/office/drawing/2014/main" id="{94A7B42B-DAEC-4CE0-B7FC-E6A0950D1D85}"/>
               </a:ext>
             </a:extLst>
           </p:cNvPr>
@@ -6440,7 +6440,7 @@
           <p:cNvPr id="9" name="core-no-1">
             <a:extLst xmlns:a="http://schemas.openxmlformats.org/drawingml/2006/main">
               <a:ext uri="{FF2B5EF4-FFF2-40B4-BE49-F238E27FC236}">
-                <a16:creationId xmlns:a16="http://schemas.microsoft.com/office/drawing/2014/main" id="{9A1A6905-FC3D-4645-A6D9-39B48CE1CED6}"/>
+                <a16:creationId xmlns:a16="http://schemas.microsoft.com/office/drawing/2014/main" id="{6810A67C-5289-49E6-A87A-642A4DC61BAA}"/>
               </a:ext>
             </a:extLst>
           </p:cNvPr>
@@ -6498,7 +6498,7 @@
           <p:cNvPr id="10" name="core-body-1">
             <a:extLst xmlns:a="http://schemas.openxmlformats.org/drawingml/2006/main">
               <a:ext uri="{FF2B5EF4-FFF2-40B4-BE49-F238E27FC236}">
-                <a16:creationId xmlns:a16="http://schemas.microsoft.com/office/drawing/2014/main" id="{F5B91F4D-FFC2-40E9-A81F-011A869B4FD1}"/>
+                <a16:creationId xmlns:a16="http://schemas.microsoft.com/office/drawing/2014/main" id="{D28A403C-5DC0-4955-9C45-66FA7D5EEB70}"/>
               </a:ext>
             </a:extLst>
           </p:cNvPr>
@@ -6562,7 +6562,7 @@
           <p:cNvPr id="11" name="s3-takeaway-rule">
             <a:extLst xmlns:a="http://schemas.openxmlformats.org/drawingml/2006/main">
               <a:ext uri="{FF2B5EF4-FFF2-40B4-BE49-F238E27FC236}">
-                <a16:creationId xmlns:a16="http://schemas.microsoft.com/office/drawing/2014/main" id="{A3B956E2-1CBA-48C9-BC6F-707A3C70F315}"/>
+                <a16:creationId xmlns:a16="http://schemas.microsoft.com/office/drawing/2014/main" id="{11072FD2-B569-4F0B-84ED-8D7BD47570A3}"/>
               </a:ext>
             </a:extLst>
           </p:cNvPr>
@@ -6595,7 +6595,7 @@
           <p:cNvPr id="12" name="s3-takeaway">
             <a:extLst xmlns:a="http://schemas.openxmlformats.org/drawingml/2006/main">
               <a:ext uri="{FF2B5EF4-FFF2-40B4-BE49-F238E27FC236}">
-                <a16:creationId xmlns:a16="http://schemas.microsoft.com/office/drawing/2014/main" id="{0947E649-EE30-4B29-A096-A4FB934919B7}"/>
+                <a16:creationId xmlns:a16="http://schemas.microsoft.com/office/drawing/2014/main" id="{38EC1B83-A335-4D3B-AFE6-93F16CF27B65}"/>
               </a:ext>
             </a:extLst>
           </p:cNvPr>
@@ -6651,7 +6651,7 @@
     </p:spTree>
     <p:extLst>
       <p:ext uri="{BB962C8B-B14F-4D97-AF65-F5344CB8AC3E}">
-        <p14:creationId xmlns:p14="http://schemas.microsoft.com/office/powerpoint/2010/main" val="1516665626"/>
+        <p14:creationId xmlns:p14="http://schemas.microsoft.com/office/powerpoint/2010/main" val="1634073520"/>
       </p:ext>
     </p:extLst>
   </p:cSld>
@@ -6682,7 +6682,7 @@
           <p:cNvPr id="1" name="s4-rule">
             <a:extLst xmlns:a="http://schemas.openxmlformats.org/drawingml/2006/main">
               <a:ext uri="{FF2B5EF4-FFF2-40B4-BE49-F238E27FC236}">
-                <a16:creationId xmlns:a16="http://schemas.microsoft.com/office/drawing/2014/main" id="{7705F7F8-627A-4117-97AF-95495EC450EF}"/>
+                <a16:creationId xmlns:a16="http://schemas.microsoft.com/office/drawing/2014/main" id="{0961B2A7-7219-40D3-A183-21524A4CC295}"/>
               </a:ext>
             </a:extLst>
           </p:cNvPr>
@@ -6715,7 +6715,7 @@
           <p:cNvPr id="2" name="s4-eyebrow">
             <a:extLst xmlns:a="http://schemas.openxmlformats.org/drawingml/2006/main">
               <a:ext uri="{FF2B5EF4-FFF2-40B4-BE49-F238E27FC236}">
-                <a16:creationId xmlns:a16="http://schemas.microsoft.com/office/drawing/2014/main" id="{1F1C73EE-B5D7-4704-A64E-C52CD367437A}"/>
+                <a16:creationId xmlns:a16="http://schemas.microsoft.com/office/drawing/2014/main" id="{3F76D3C1-D004-4E0F-980D-A7512C1136D1}"/>
               </a:ext>
             </a:extLst>
           </p:cNvPr>
@@ -6773,7 +6773,7 @@
           <p:cNvPr id="3" name="s4-title">
             <a:extLst xmlns:a="http://schemas.openxmlformats.org/drawingml/2006/main">
               <a:ext uri="{FF2B5EF4-FFF2-40B4-BE49-F238E27FC236}">
-                <a16:creationId xmlns:a16="http://schemas.microsoft.com/office/drawing/2014/main" id="{C7A876BA-55EC-44C8-A060-B61791BB4EDC}"/>
+                <a16:creationId xmlns:a16="http://schemas.microsoft.com/office/drawing/2014/main" id="{76E53E4B-76A8-4680-BFDC-FE88724B92CF}"/>
               </a:ext>
             </a:extLst>
           </p:cNvPr>
@@ -6831,7 +6831,7 @@
           <p:cNvPr id="4" name="s4-footer">
             <a:extLst xmlns:a="http://schemas.openxmlformats.org/drawingml/2006/main">
               <a:ext uri="{FF2B5EF4-FFF2-40B4-BE49-F238E27FC236}">
-                <a16:creationId xmlns:a16="http://schemas.microsoft.com/office/drawing/2014/main" id="{8E41FE00-F51B-4C00-9D8E-124EE5A75133}"/>
+                <a16:creationId xmlns:a16="http://schemas.microsoft.com/office/drawing/2014/main" id="{9DA9EA81-95B9-414E-BF97-433F317343D3}"/>
               </a:ext>
             </a:extLst>
           </p:cNvPr>
@@ -6862,7 +6862,7 @@
           <p:cNvPr id="5" name="s4-identity">
             <a:extLst xmlns:a="http://schemas.openxmlformats.org/drawingml/2006/main">
               <a:ext uri="{FF2B5EF4-FFF2-40B4-BE49-F238E27FC236}">
-                <a16:creationId xmlns:a16="http://schemas.microsoft.com/office/drawing/2014/main" id="{06D3C0AB-B76C-49B8-92C5-0162FA7D0BD5}"/>
+                <a16:creationId xmlns:a16="http://schemas.microsoft.com/office/drawing/2014/main" id="{766A2CCC-AF90-448E-B35B-19F50E505017}"/>
               </a:ext>
             </a:extLst>
           </p:cNvPr>
@@ -6920,7 +6920,7 @@
           <p:cNvPr id="6" name="core-no-0">
             <a:extLst xmlns:a="http://schemas.openxmlformats.org/drawingml/2006/main">
               <a:ext uri="{FF2B5EF4-FFF2-40B4-BE49-F238E27FC236}">
-                <a16:creationId xmlns:a16="http://schemas.microsoft.com/office/drawing/2014/main" id="{E48A5E16-67AE-4EFC-8A8F-E9328EA55719}"/>
+                <a16:creationId xmlns:a16="http://schemas.microsoft.com/office/drawing/2014/main" id="{68688772-45B1-418B-A87E-0CB117435292}"/>
               </a:ext>
             </a:extLst>
           </p:cNvPr>
@@ -6978,7 +6978,7 @@
           <p:cNvPr id="7" name="core-label-0">
             <a:extLst xmlns:a="http://schemas.openxmlformats.org/drawingml/2006/main">
               <a:ext uri="{FF2B5EF4-FFF2-40B4-BE49-F238E27FC236}">
-                <a16:creationId xmlns:a16="http://schemas.microsoft.com/office/drawing/2014/main" id="{561C6C2F-CA71-4058-9FC3-02682B929441}"/>
+                <a16:creationId xmlns:a16="http://schemas.microsoft.com/office/drawing/2014/main" id="{8DCFDC12-CCBD-45C3-B519-707D920EF177}"/>
               </a:ext>
             </a:extLst>
           </p:cNvPr>
@@ -7036,7 +7036,7 @@
           <p:cNvPr id="8" name="core-body-0">
             <a:extLst xmlns:a="http://schemas.openxmlformats.org/drawingml/2006/main">
               <a:ext uri="{FF2B5EF4-FFF2-40B4-BE49-F238E27FC236}">
-                <a16:creationId xmlns:a16="http://schemas.microsoft.com/office/drawing/2014/main" id="{C2C6B1D5-5F08-42B5-AB98-0564C5787F8A}"/>
+                <a16:creationId xmlns:a16="http://schemas.microsoft.com/office/drawing/2014/main" id="{7F5C8D56-4149-4E2E-BC26-7803D2500FAD}"/>
               </a:ext>
             </a:extLst>
           </p:cNvPr>
@@ -7100,7 +7100,7 @@
           <p:cNvPr id="9" name="core-no-1">
             <a:extLst xmlns:a="http://schemas.openxmlformats.org/drawingml/2006/main">
               <a:ext uri="{FF2B5EF4-FFF2-40B4-BE49-F238E27FC236}">
-                <a16:creationId xmlns:a16="http://schemas.microsoft.com/office/drawing/2014/main" id="{C966B10E-2D95-4109-8072-3A3BBD2E6FA1}"/>
+                <a16:creationId xmlns:a16="http://schemas.microsoft.com/office/drawing/2014/main" id="{76CE44AC-D85A-4834-BDCA-3D1D129E2FF5}"/>
               </a:ext>
             </a:extLst>
           </p:cNvPr>
@@ -7158,7 +7158,7 @@
           <p:cNvPr id="10" name="core-body-1">
             <a:extLst xmlns:a="http://schemas.openxmlformats.org/drawingml/2006/main">
               <a:ext uri="{FF2B5EF4-FFF2-40B4-BE49-F238E27FC236}">
-                <a16:creationId xmlns:a16="http://schemas.microsoft.com/office/drawing/2014/main" id="{A793F296-FDE3-4E20-AB11-EA21C0273227}"/>
+                <a16:creationId xmlns:a16="http://schemas.microsoft.com/office/drawing/2014/main" id="{BA1D04E6-4BDC-4739-B535-CDD3E0D0B4B7}"/>
               </a:ext>
             </a:extLst>
           </p:cNvPr>
@@ -7222,7 +7222,7 @@
           <p:cNvPr id="11" name="s4-takeaway-rule">
             <a:extLst xmlns:a="http://schemas.openxmlformats.org/drawingml/2006/main">
               <a:ext uri="{FF2B5EF4-FFF2-40B4-BE49-F238E27FC236}">
-                <a16:creationId xmlns:a16="http://schemas.microsoft.com/office/drawing/2014/main" id="{C48BB177-EAE0-4E62-80AB-45DC567A87D2}"/>
+                <a16:creationId xmlns:a16="http://schemas.microsoft.com/office/drawing/2014/main" id="{80D9AD1F-4EE7-4EB5-9FF5-B32CAE8B7D2A}"/>
               </a:ext>
             </a:extLst>
           </p:cNvPr>
@@ -7255,7 +7255,7 @@
           <p:cNvPr id="12" name="s4-takeaway">
             <a:extLst xmlns:a="http://schemas.openxmlformats.org/drawingml/2006/main">
               <a:ext uri="{FF2B5EF4-FFF2-40B4-BE49-F238E27FC236}">
-                <a16:creationId xmlns:a16="http://schemas.microsoft.com/office/drawing/2014/main" id="{DD131893-7F73-406D-B20B-3563B144D84A}"/>
+                <a16:creationId xmlns:a16="http://schemas.microsoft.com/office/drawing/2014/main" id="{BC4A4E33-4D76-4C50-8CE1-A96F10A03184}"/>
               </a:ext>
             </a:extLst>
           </p:cNvPr>
@@ -7311,7 +7311,7 @@
     </p:spTree>
     <p:extLst>
       <p:ext uri="{BB962C8B-B14F-4D97-AF65-F5344CB8AC3E}">
-        <p14:creationId xmlns:p14="http://schemas.microsoft.com/office/powerpoint/2010/main" val="880528197"/>
+        <p14:creationId xmlns:p14="http://schemas.microsoft.com/office/powerpoint/2010/main" val="85503092"/>
       </p:ext>
     </p:extLst>
   </p:cSld>
@@ -7342,7 +7342,7 @@
           <p:cNvPr id="1" name="s5-rule">
             <a:extLst xmlns:a="http://schemas.openxmlformats.org/drawingml/2006/main">
               <a:ext uri="{FF2B5EF4-FFF2-40B4-BE49-F238E27FC236}">
-                <a16:creationId xmlns:a16="http://schemas.microsoft.com/office/drawing/2014/main" id="{07616901-BA70-47DF-A13C-67CF56534DDE}"/>
+                <a16:creationId xmlns:a16="http://schemas.microsoft.com/office/drawing/2014/main" id="{DAA53D5B-CFC6-4485-ACAB-7835EA161F98}"/>
               </a:ext>
             </a:extLst>
           </p:cNvPr>
@@ -7375,7 +7375,7 @@
           <p:cNvPr id="2" name="s5-eyebrow">
             <a:extLst xmlns:a="http://schemas.openxmlformats.org/drawingml/2006/main">
               <a:ext uri="{FF2B5EF4-FFF2-40B4-BE49-F238E27FC236}">
-                <a16:creationId xmlns:a16="http://schemas.microsoft.com/office/drawing/2014/main" id="{665EA2C4-7D0D-451A-87D5-E09A5A3F144A}"/>
+                <a16:creationId xmlns:a16="http://schemas.microsoft.com/office/drawing/2014/main" id="{DF63ABD5-AF91-48A3-9424-389855A6F3D5}"/>
               </a:ext>
             </a:extLst>
           </p:cNvPr>
@@ -7433,7 +7433,7 @@
           <p:cNvPr id="3" name="s5-title">
             <a:extLst xmlns:a="http://schemas.openxmlformats.org/drawingml/2006/main">
               <a:ext uri="{FF2B5EF4-FFF2-40B4-BE49-F238E27FC236}">
-                <a16:creationId xmlns:a16="http://schemas.microsoft.com/office/drawing/2014/main" id="{2E060669-1CC3-4263-9F8C-4086DA90C9BB}"/>
+                <a16:creationId xmlns:a16="http://schemas.microsoft.com/office/drawing/2014/main" id="{9CA7EA53-56B3-43A2-9271-F35946C0A563}"/>
               </a:ext>
             </a:extLst>
           </p:cNvPr>
@@ -7491,7 +7491,7 @@
           <p:cNvPr id="4" name="s5-footer">
             <a:extLst xmlns:a="http://schemas.openxmlformats.org/drawingml/2006/main">
               <a:ext uri="{FF2B5EF4-FFF2-40B4-BE49-F238E27FC236}">
-                <a16:creationId xmlns:a16="http://schemas.microsoft.com/office/drawing/2014/main" id="{D81BBFFC-58D0-41BA-8B0B-B8F1E7219579}"/>
+                <a16:creationId xmlns:a16="http://schemas.microsoft.com/office/drawing/2014/main" id="{2961C220-C093-4395-91A3-65DD7D330F78}"/>
               </a:ext>
             </a:extLst>
           </p:cNvPr>
@@ -7522,7 +7522,7 @@
           <p:cNvPr id="5" name="s5-identity">
             <a:extLst xmlns:a="http://schemas.openxmlformats.org/drawingml/2006/main">
               <a:ext uri="{FF2B5EF4-FFF2-40B4-BE49-F238E27FC236}">
-                <a16:creationId xmlns:a16="http://schemas.microsoft.com/office/drawing/2014/main" id="{7ED40890-7210-4E3F-8584-F79958A0CEEE}"/>
+                <a16:creationId xmlns:a16="http://schemas.microsoft.com/office/drawing/2014/main" id="{C27003FB-68D5-478C-82E5-8C14514F939F}"/>
               </a:ext>
             </a:extLst>
           </p:cNvPr>
@@ -7580,7 +7580,7 @@
           <p:cNvPr id="6" name="core-no-0">
             <a:extLst xmlns:a="http://schemas.openxmlformats.org/drawingml/2006/main">
               <a:ext uri="{FF2B5EF4-FFF2-40B4-BE49-F238E27FC236}">
-                <a16:creationId xmlns:a16="http://schemas.microsoft.com/office/drawing/2014/main" id="{92A2D9B6-E88C-4754-830B-19B1E901FBCA}"/>
+                <a16:creationId xmlns:a16="http://schemas.microsoft.com/office/drawing/2014/main" id="{6C648D9A-7B77-491A-9D9F-3B70E6DAD537}"/>
               </a:ext>
             </a:extLst>
           </p:cNvPr>
@@ -7638,7 +7638,7 @@
           <p:cNvPr id="7" name="core-label-0">
             <a:extLst xmlns:a="http://schemas.openxmlformats.org/drawingml/2006/main">
               <a:ext uri="{FF2B5EF4-FFF2-40B4-BE49-F238E27FC236}">
-                <a16:creationId xmlns:a16="http://schemas.microsoft.com/office/drawing/2014/main" id="{D7F4D0FD-9456-4064-BC1C-30B33A2418B4}"/>
+                <a16:creationId xmlns:a16="http://schemas.microsoft.com/office/drawing/2014/main" id="{AE0FAB4D-7D1B-401B-B5F0-C4D801581DCA}"/>
               </a:ext>
             </a:extLst>
           </p:cNvPr>
@@ -7696,7 +7696,7 @@
           <p:cNvPr id="8" name="core-body-0">
             <a:extLst xmlns:a="http://schemas.openxmlformats.org/drawingml/2006/main">
               <a:ext uri="{FF2B5EF4-FFF2-40B4-BE49-F238E27FC236}">
-                <a16:creationId xmlns:a16="http://schemas.microsoft.com/office/drawing/2014/main" id="{D051B7D2-87D6-4AB8-8BD4-978074440897}"/>
+                <a16:creationId xmlns:a16="http://schemas.microsoft.com/office/drawing/2014/main" id="{8BBB3875-2963-41F6-BE8B-43ED189D11DA}"/>
               </a:ext>
             </a:extLst>
           </p:cNvPr>
@@ -7760,7 +7760,7 @@
           <p:cNvPr id="9" name="core-no-1">
             <a:extLst xmlns:a="http://schemas.openxmlformats.org/drawingml/2006/main">
               <a:ext uri="{FF2B5EF4-FFF2-40B4-BE49-F238E27FC236}">
-                <a16:creationId xmlns:a16="http://schemas.microsoft.com/office/drawing/2014/main" id="{2DF8CD26-5257-4F1C-8A44-48B35D0BC0CC}"/>
+                <a16:creationId xmlns:a16="http://schemas.microsoft.com/office/drawing/2014/main" id="{CA433B4A-8A4B-4939-A104-64B1192181AD}"/>
               </a:ext>
             </a:extLst>
           </p:cNvPr>
@@ -7818,7 +7818,7 @@
           <p:cNvPr id="10" name="core-body-1">
             <a:extLst xmlns:a="http://schemas.openxmlformats.org/drawingml/2006/main">
               <a:ext uri="{FF2B5EF4-FFF2-40B4-BE49-F238E27FC236}">
-                <a16:creationId xmlns:a16="http://schemas.microsoft.com/office/drawing/2014/main" id="{FBAC0DBC-B85E-4DBB-97BA-C9EB01FA8E58}"/>
+                <a16:creationId xmlns:a16="http://schemas.microsoft.com/office/drawing/2014/main" id="{9B664468-ECE6-4177-A22B-D74ADFB467CB}"/>
               </a:ext>
             </a:extLst>
           </p:cNvPr>
@@ -7882,7 +7882,7 @@
           <p:cNvPr id="11" name="s5-takeaway-rule">
             <a:extLst xmlns:a="http://schemas.openxmlformats.org/drawingml/2006/main">
               <a:ext uri="{FF2B5EF4-FFF2-40B4-BE49-F238E27FC236}">
-                <a16:creationId xmlns:a16="http://schemas.microsoft.com/office/drawing/2014/main" id="{D6CE0FEB-151D-4C43-B117-569B6B3BF6C8}"/>
+                <a16:creationId xmlns:a16="http://schemas.microsoft.com/office/drawing/2014/main" id="{CDE8D3D3-5698-49E1-AEAC-F27DC4D6650F}"/>
               </a:ext>
             </a:extLst>
           </p:cNvPr>
@@ -7915,7 +7915,7 @@
           <p:cNvPr id="12" name="s5-takeaway">
             <a:extLst xmlns:a="http://schemas.openxmlformats.org/drawingml/2006/main">
               <a:ext uri="{FF2B5EF4-FFF2-40B4-BE49-F238E27FC236}">
-                <a16:creationId xmlns:a16="http://schemas.microsoft.com/office/drawing/2014/main" id="{F30A0C83-8EAB-4327-8E0D-B85BFDADDCD1}"/>
+                <a16:creationId xmlns:a16="http://schemas.microsoft.com/office/drawing/2014/main" id="{2248333C-5FC9-4D2F-921D-938EDA144942}"/>
               </a:ext>
             </a:extLst>
           </p:cNvPr>
@@ -7971,7 +7971,7 @@
     </p:spTree>
     <p:extLst>
       <p:ext uri="{BB962C8B-B14F-4D97-AF65-F5344CB8AC3E}">
-        <p14:creationId xmlns:p14="http://schemas.microsoft.com/office/powerpoint/2010/main" val="1826327539"/>
+        <p14:creationId xmlns:p14="http://schemas.microsoft.com/office/powerpoint/2010/main" val="460027885"/>
       </p:ext>
     </p:extLst>
   </p:cSld>
@@ -8002,7 +8002,7 @@
           <p:cNvPr id="1" name="s6-rule">
             <a:extLst xmlns:a="http://schemas.openxmlformats.org/drawingml/2006/main">
               <a:ext uri="{FF2B5EF4-FFF2-40B4-BE49-F238E27FC236}">
-                <a16:creationId xmlns:a16="http://schemas.microsoft.com/office/drawing/2014/main" id="{A65C3128-8077-42BF-9B61-718F97FABDD7}"/>
+                <a16:creationId xmlns:a16="http://schemas.microsoft.com/office/drawing/2014/main" id="{A9E53274-E992-409C-B5D4-672D8E8BB1E1}"/>
               </a:ext>
             </a:extLst>
           </p:cNvPr>
@@ -8035,7 +8035,7 @@
           <p:cNvPr id="2" name="s6-eyebrow">
             <a:extLst xmlns:a="http://schemas.openxmlformats.org/drawingml/2006/main">
               <a:ext uri="{FF2B5EF4-FFF2-40B4-BE49-F238E27FC236}">
-                <a16:creationId xmlns:a16="http://schemas.microsoft.com/office/drawing/2014/main" id="{A8E7F270-8E52-47AC-A396-ABD0147EA618}"/>
+                <a16:creationId xmlns:a16="http://schemas.microsoft.com/office/drawing/2014/main" id="{FD151333-DEF1-48DB-A640-5814EEC7290F}"/>
               </a:ext>
             </a:extLst>
           </p:cNvPr>
@@ -8093,7 +8093,7 @@
           <p:cNvPr id="3" name="s6-title">
             <a:extLst xmlns:a="http://schemas.openxmlformats.org/drawingml/2006/main">
               <a:ext uri="{FF2B5EF4-FFF2-40B4-BE49-F238E27FC236}">
-                <a16:creationId xmlns:a16="http://schemas.microsoft.com/office/drawing/2014/main" id="{DCEB2E32-00E8-4649-835B-D5448D4E9780}"/>
+                <a16:creationId xmlns:a16="http://schemas.microsoft.com/office/drawing/2014/main" id="{9F0DA9DB-B403-4B0E-83A2-E63519899B89}"/>
               </a:ext>
             </a:extLst>
           </p:cNvPr>
@@ -8151,7 +8151,7 @@
           <p:cNvPr id="4" name="s6-footer">
             <a:extLst xmlns:a="http://schemas.openxmlformats.org/drawingml/2006/main">
               <a:ext uri="{FF2B5EF4-FFF2-40B4-BE49-F238E27FC236}">
-                <a16:creationId xmlns:a16="http://schemas.microsoft.com/office/drawing/2014/main" id="{F018FDB0-2952-412D-9542-1C02057A81DF}"/>
+                <a16:creationId xmlns:a16="http://schemas.microsoft.com/office/drawing/2014/main" id="{C585E0DD-0D6A-4B61-B248-D6996CE2BA3C}"/>
               </a:ext>
             </a:extLst>
           </p:cNvPr>
@@ -8182,7 +8182,7 @@
           <p:cNvPr id="5" name="s6-identity">
             <a:extLst xmlns:a="http://schemas.openxmlformats.org/drawingml/2006/main">
               <a:ext uri="{FF2B5EF4-FFF2-40B4-BE49-F238E27FC236}">
-                <a16:creationId xmlns:a16="http://schemas.microsoft.com/office/drawing/2014/main" id="{312B0360-7A7D-40C8-AFF0-6422B9384988}"/>
+                <a16:creationId xmlns:a16="http://schemas.microsoft.com/office/drawing/2014/main" id="{C3712C41-BDFE-42C9-8F4B-486F7742046C}"/>
               </a:ext>
             </a:extLst>
           </p:cNvPr>
@@ -8240,7 +8240,7 @@
           <p:cNvPr id="6" name="core-no-0">
             <a:extLst xmlns:a="http://schemas.openxmlformats.org/drawingml/2006/main">
               <a:ext uri="{FF2B5EF4-FFF2-40B4-BE49-F238E27FC236}">
-                <a16:creationId xmlns:a16="http://schemas.microsoft.com/office/drawing/2014/main" id="{0E5905A0-C866-4915-B986-C0550804D579}"/>
+                <a16:creationId xmlns:a16="http://schemas.microsoft.com/office/drawing/2014/main" id="{3B883D85-DAB9-441E-BCEC-83A64F0FD74E}"/>
               </a:ext>
             </a:extLst>
           </p:cNvPr>
@@ -8298,7 +8298,7 @@
           <p:cNvPr id="7" name="core-label-0">
             <a:extLst xmlns:a="http://schemas.openxmlformats.org/drawingml/2006/main">
               <a:ext uri="{FF2B5EF4-FFF2-40B4-BE49-F238E27FC236}">
-                <a16:creationId xmlns:a16="http://schemas.microsoft.com/office/drawing/2014/main" id="{74429ED5-2176-41E8-8119-D896E2ACDDC6}"/>
+                <a16:creationId xmlns:a16="http://schemas.microsoft.com/office/drawing/2014/main" id="{03544C6B-F3B0-4A0B-992A-410B9FF07D0F}"/>
               </a:ext>
             </a:extLst>
           </p:cNvPr>
@@ -8356,7 +8356,7 @@
           <p:cNvPr id="8" name="core-body-0">
             <a:extLst xmlns:a="http://schemas.openxmlformats.org/drawingml/2006/main">
               <a:ext uri="{FF2B5EF4-FFF2-40B4-BE49-F238E27FC236}">
-                <a16:creationId xmlns:a16="http://schemas.microsoft.com/office/drawing/2014/main" id="{E08D3530-E62E-4687-A083-BB663FDF4E75}"/>
+                <a16:creationId xmlns:a16="http://schemas.microsoft.com/office/drawing/2014/main" id="{CC127C0A-DACD-49CF-8028-2C8442928A1E}"/>
               </a:ext>
             </a:extLst>
           </p:cNvPr>
@@ -8420,7 +8420,7 @@
           <p:cNvPr id="9" name="core-no-1">
             <a:extLst xmlns:a="http://schemas.openxmlformats.org/drawingml/2006/main">
               <a:ext uri="{FF2B5EF4-FFF2-40B4-BE49-F238E27FC236}">
-                <a16:creationId xmlns:a16="http://schemas.microsoft.com/office/drawing/2014/main" id="{7FCA96BB-6066-481C-9B20-2A46ED428C69}"/>
+                <a16:creationId xmlns:a16="http://schemas.microsoft.com/office/drawing/2014/main" id="{6855EAA2-F106-471E-9B65-36D22CD4AADA}"/>
               </a:ext>
             </a:extLst>
           </p:cNvPr>
@@ -8478,7 +8478,7 @@
           <p:cNvPr id="10" name="core-body-1">
             <a:extLst xmlns:a="http://schemas.openxmlformats.org/drawingml/2006/main">
               <a:ext uri="{FF2B5EF4-FFF2-40B4-BE49-F238E27FC236}">
-                <a16:creationId xmlns:a16="http://schemas.microsoft.com/office/drawing/2014/main" id="{D6AD75D0-9490-464A-BFD4-AF8DB0A52948}"/>
+                <a16:creationId xmlns:a16="http://schemas.microsoft.com/office/drawing/2014/main" id="{4E54443D-4CC1-4A5B-8E08-0B17B98B1DD9}"/>
               </a:ext>
             </a:extLst>
           </p:cNvPr>
@@ -8542,7 +8542,7 @@
           <p:cNvPr id="11" name="s6-takeaway-rule">
             <a:extLst xmlns:a="http://schemas.openxmlformats.org/drawingml/2006/main">
               <a:ext uri="{FF2B5EF4-FFF2-40B4-BE49-F238E27FC236}">
-                <a16:creationId xmlns:a16="http://schemas.microsoft.com/office/drawing/2014/main" id="{97689EF5-2165-4529-AE7A-1CF39B5AFC0F}"/>
+                <a16:creationId xmlns:a16="http://schemas.microsoft.com/office/drawing/2014/main" id="{4AC2E887-4E07-4843-978C-B97EE5436403}"/>
               </a:ext>
             </a:extLst>
           </p:cNvPr>
@@ -8575,7 +8575,7 @@
           <p:cNvPr id="12" name="s6-takeaway">
             <a:extLst xmlns:a="http://schemas.openxmlformats.org/drawingml/2006/main">
               <a:ext uri="{FF2B5EF4-FFF2-40B4-BE49-F238E27FC236}">
-                <a16:creationId xmlns:a16="http://schemas.microsoft.com/office/drawing/2014/main" id="{91B99B37-3385-42C4-8B87-AF3DEF5A4661}"/>
+                <a16:creationId xmlns:a16="http://schemas.microsoft.com/office/drawing/2014/main" id="{9F199E72-25C3-4F79-BEE4-82E0FB7D03C4}"/>
               </a:ext>
             </a:extLst>
           </p:cNvPr>
@@ -8631,7 +8631,7 @@
     </p:spTree>
     <p:extLst>
       <p:ext uri="{BB962C8B-B14F-4D97-AF65-F5344CB8AC3E}">
-        <p14:creationId xmlns:p14="http://schemas.microsoft.com/office/powerpoint/2010/main" val="227158986"/>
+        <p14:creationId xmlns:p14="http://schemas.microsoft.com/office/powerpoint/2010/main" val="1609689082"/>
       </p:ext>
     </p:extLst>
   </p:cSld>
@@ -8662,7 +8662,7 @@
           <p:cNvPr id="1" name="s7-rule">
             <a:extLst xmlns:a="http://schemas.openxmlformats.org/drawingml/2006/main">
               <a:ext uri="{FF2B5EF4-FFF2-40B4-BE49-F238E27FC236}">
-                <a16:creationId xmlns:a16="http://schemas.microsoft.com/office/drawing/2014/main" id="{E26FB1D1-9F84-4F52-A3D2-6CE2E6096FE4}"/>
+                <a16:creationId xmlns:a16="http://schemas.microsoft.com/office/drawing/2014/main" id="{FC847551-D036-495E-AE71-2B6AD24408B6}"/>
               </a:ext>
             </a:extLst>
           </p:cNvPr>
@@ -8695,7 +8695,7 @@
           <p:cNvPr id="2" name="s7-eyebrow">
             <a:extLst xmlns:a="http://schemas.openxmlformats.org/drawingml/2006/main">
               <a:ext uri="{FF2B5EF4-FFF2-40B4-BE49-F238E27FC236}">
-                <a16:creationId xmlns:a16="http://schemas.microsoft.com/office/drawing/2014/main" id="{86E550A4-D4CD-46BB-B5E6-B4CDF66CEB17}"/>
+                <a16:creationId xmlns:a16="http://schemas.microsoft.com/office/drawing/2014/main" id="{F6E6CD37-810D-4932-BEEF-DBBF3B55BE8D}"/>
               </a:ext>
             </a:extLst>
           </p:cNvPr>
@@ -8753,7 +8753,7 @@
           <p:cNvPr id="3" name="s7-title">
             <a:extLst xmlns:a="http://schemas.openxmlformats.org/drawingml/2006/main">
               <a:ext uri="{FF2B5EF4-FFF2-40B4-BE49-F238E27FC236}">
-                <a16:creationId xmlns:a16="http://schemas.microsoft.com/office/drawing/2014/main" id="{9CF08AE1-038C-4474-9308-D774B7AD50D9}"/>
+                <a16:creationId xmlns:a16="http://schemas.microsoft.com/office/drawing/2014/main" id="{EB9E411F-8AC5-43F1-8CB7-AEEE2D49AAE4}"/>
               </a:ext>
             </a:extLst>
           </p:cNvPr>
@@ -8811,7 +8811,7 @@
           <p:cNvPr id="4" name="s7-footer">
             <a:extLst xmlns:a="http://schemas.openxmlformats.org/drawingml/2006/main">
               <a:ext uri="{FF2B5EF4-FFF2-40B4-BE49-F238E27FC236}">
-                <a16:creationId xmlns:a16="http://schemas.microsoft.com/office/drawing/2014/main" id="{CE8BFAB5-D6DF-4C27-8B13-541C514DB904}"/>
+                <a16:creationId xmlns:a16="http://schemas.microsoft.com/office/drawing/2014/main" id="{F27B1B40-E2F2-49BC-A90D-D1952AEB151C}"/>
               </a:ext>
             </a:extLst>
           </p:cNvPr>
@@ -8842,7 +8842,7 @@
           <p:cNvPr id="5" name="s7-identity">
             <a:extLst xmlns:a="http://schemas.openxmlformats.org/drawingml/2006/main">
               <a:ext uri="{FF2B5EF4-FFF2-40B4-BE49-F238E27FC236}">
-                <a16:creationId xmlns:a16="http://schemas.microsoft.com/office/drawing/2014/main" id="{FFD08BD8-741C-4C13-A36F-F9F399576E55}"/>
+                <a16:creationId xmlns:a16="http://schemas.microsoft.com/office/drawing/2014/main" id="{627A1B31-7C86-4BF0-9BAF-7F7F454B1F6F}"/>
               </a:ext>
             </a:extLst>
           </p:cNvPr>
@@ -8900,7 +8900,7 @@
           <p:cNvPr id="6" name="core-no-0">
             <a:extLst xmlns:a="http://schemas.openxmlformats.org/drawingml/2006/main">
               <a:ext uri="{FF2B5EF4-FFF2-40B4-BE49-F238E27FC236}">
-                <a16:creationId xmlns:a16="http://schemas.microsoft.com/office/drawing/2014/main" id="{EFA6EE36-E584-4A81-A57A-97D60B505B98}"/>
+                <a16:creationId xmlns:a16="http://schemas.microsoft.com/office/drawing/2014/main" id="{064685A4-2575-4CAD-951E-FE097DB467F3}"/>
               </a:ext>
             </a:extLst>
           </p:cNvPr>
@@ -8958,7 +8958,7 @@
           <p:cNvPr id="7" name="core-label-0">
             <a:extLst xmlns:a="http://schemas.openxmlformats.org/drawingml/2006/main">
               <a:ext uri="{FF2B5EF4-FFF2-40B4-BE49-F238E27FC236}">
-                <a16:creationId xmlns:a16="http://schemas.microsoft.com/office/drawing/2014/main" id="{30A77C60-BBEF-44C4-80F7-2AD3A590F903}"/>
+                <a16:creationId xmlns:a16="http://schemas.microsoft.com/office/drawing/2014/main" id="{38B59106-F3B7-48D0-8277-361D6AC5A521}"/>
               </a:ext>
             </a:extLst>
           </p:cNvPr>
@@ -9016,7 +9016,7 @@
           <p:cNvPr id="8" name="core-body-0">
             <a:extLst xmlns:a="http://schemas.openxmlformats.org/drawingml/2006/main">
               <a:ext uri="{FF2B5EF4-FFF2-40B4-BE49-F238E27FC236}">
-                <a16:creationId xmlns:a16="http://schemas.microsoft.com/office/drawing/2014/main" id="{D4C7F078-E093-44B5-A4C7-5CCF2CD4BCAA}"/>
+                <a16:creationId xmlns:a16="http://schemas.microsoft.com/office/drawing/2014/main" id="{AE36FF90-CE78-42FB-858F-3B9A001EE22E}"/>
               </a:ext>
             </a:extLst>
           </p:cNvPr>
@@ -9080,7 +9080,7 @@
           <p:cNvPr id="9" name="core-no-1">
             <a:extLst xmlns:a="http://schemas.openxmlformats.org/drawingml/2006/main">
               <a:ext uri="{FF2B5EF4-FFF2-40B4-BE49-F238E27FC236}">
-                <a16:creationId xmlns:a16="http://schemas.microsoft.com/office/drawing/2014/main" id="{BC3BD196-92F9-4743-8592-A11B693D5584}"/>
+                <a16:creationId xmlns:a16="http://schemas.microsoft.com/office/drawing/2014/main" id="{C36598A9-FDF3-49B5-850C-77F2C01A081B}"/>
               </a:ext>
             </a:extLst>
           </p:cNvPr>
@@ -9138,7 +9138,7 @@
           <p:cNvPr id="10" name="core-body-1">
             <a:extLst xmlns:a="http://schemas.openxmlformats.org/drawingml/2006/main">
               <a:ext uri="{FF2B5EF4-FFF2-40B4-BE49-F238E27FC236}">
-                <a16:creationId xmlns:a16="http://schemas.microsoft.com/office/drawing/2014/main" id="{A52DFE8A-3D3F-4166-AF4B-D4DF713A2E30}"/>
+                <a16:creationId xmlns:a16="http://schemas.microsoft.com/office/drawing/2014/main" id="{E6F6F0F9-3919-4005-8482-5C105DC29E68}"/>
               </a:ext>
             </a:extLst>
           </p:cNvPr>
@@ -9202,7 +9202,7 @@
           <p:cNvPr id="11" name="s7-takeaway-rule">
             <a:extLst xmlns:a="http://schemas.openxmlformats.org/drawingml/2006/main">
               <a:ext uri="{FF2B5EF4-FFF2-40B4-BE49-F238E27FC236}">
-                <a16:creationId xmlns:a16="http://schemas.microsoft.com/office/drawing/2014/main" id="{CA09FC8E-E73F-434A-AA99-0FD7639E8476}"/>
+                <a16:creationId xmlns:a16="http://schemas.microsoft.com/office/drawing/2014/main" id="{84543FC5-4EFB-488F-A141-EF03BAD95263}"/>
               </a:ext>
             </a:extLst>
           </p:cNvPr>
@@ -9235,7 +9235,7 @@
           <p:cNvPr id="12" name="s7-takeaway">
             <a:extLst xmlns:a="http://schemas.openxmlformats.org/drawingml/2006/main">
               <a:ext uri="{FF2B5EF4-FFF2-40B4-BE49-F238E27FC236}">
-                <a16:creationId xmlns:a16="http://schemas.microsoft.com/office/drawing/2014/main" id="{64FC64EF-C3FE-482B-ACB6-0721D33E6EA7}"/>
+                <a16:creationId xmlns:a16="http://schemas.microsoft.com/office/drawing/2014/main" id="{A9C7CED6-628F-4795-84EF-366C974F6DD6}"/>
               </a:ext>
             </a:extLst>
           </p:cNvPr>
@@ -9291,7 +9291,7 @@
     </p:spTree>
     <p:extLst>
       <p:ext uri="{BB962C8B-B14F-4D97-AF65-F5344CB8AC3E}">
-        <p14:creationId xmlns:p14="http://schemas.microsoft.com/office/powerpoint/2010/main" val="1887588767"/>
+        <p14:creationId xmlns:p14="http://schemas.microsoft.com/office/powerpoint/2010/main" val="180105970"/>
       </p:ext>
     </p:extLst>
   </p:cSld>
@@ -9322,7 +9322,7 @@
           <p:cNvPr id="1" name="s8-rule">
             <a:extLst xmlns:a="http://schemas.openxmlformats.org/drawingml/2006/main">
               <a:ext uri="{FF2B5EF4-FFF2-40B4-BE49-F238E27FC236}">
-                <a16:creationId xmlns:a16="http://schemas.microsoft.com/office/drawing/2014/main" id="{7F7B8AA1-2CE2-4CC6-BFD3-5152D5125FA8}"/>
+                <a16:creationId xmlns:a16="http://schemas.microsoft.com/office/drawing/2014/main" id="{2184739B-B1E6-494F-A972-D49F4C155DAB}"/>
               </a:ext>
             </a:extLst>
           </p:cNvPr>
@@ -9355,7 +9355,7 @@
           <p:cNvPr id="2" name="s8-eyebrow">
             <a:extLst xmlns:a="http://schemas.openxmlformats.org/drawingml/2006/main">
               <a:ext uri="{FF2B5EF4-FFF2-40B4-BE49-F238E27FC236}">
-                <a16:creationId xmlns:a16="http://schemas.microsoft.com/office/drawing/2014/main" id="{CBC619B4-4D93-4682-A67F-B5AFD883034B}"/>
+                <a16:creationId xmlns:a16="http://schemas.microsoft.com/office/drawing/2014/main" id="{81033ADF-451B-46E4-876C-E4C06EA1EC1B}"/>
               </a:ext>
             </a:extLst>
           </p:cNvPr>
@@ -9413,7 +9413,7 @@
           <p:cNvPr id="3" name="s8-title">
             <a:extLst xmlns:a="http://schemas.openxmlformats.org/drawingml/2006/main">
               <a:ext uri="{FF2B5EF4-FFF2-40B4-BE49-F238E27FC236}">
-                <a16:creationId xmlns:a16="http://schemas.microsoft.com/office/drawing/2014/main" id="{0E8B54F6-A37F-4582-BCFB-717B57432A9D}"/>
+                <a16:creationId xmlns:a16="http://schemas.microsoft.com/office/drawing/2014/main" id="{E88F7105-39F1-425B-B6E8-785F1D0C10DB}"/>
               </a:ext>
             </a:extLst>
           </p:cNvPr>
@@ -9471,7 +9471,7 @@
           <p:cNvPr id="4" name="s8-footer">
             <a:extLst xmlns:a="http://schemas.openxmlformats.org/drawingml/2006/main">
               <a:ext uri="{FF2B5EF4-FFF2-40B4-BE49-F238E27FC236}">
-                <a16:creationId xmlns:a16="http://schemas.microsoft.com/office/drawing/2014/main" id="{912DB104-9B2A-4EB8-BA41-F41257850CE4}"/>
+                <a16:creationId xmlns:a16="http://schemas.microsoft.com/office/drawing/2014/main" id="{A20DBB55-48FF-4121-BA00-18355FD94A59}"/>
               </a:ext>
             </a:extLst>
           </p:cNvPr>
@@ -9502,7 +9502,7 @@
           <p:cNvPr id="5" name="s8-identity">
             <a:extLst xmlns:a="http://schemas.openxmlformats.org/drawingml/2006/main">
               <a:ext uri="{FF2B5EF4-FFF2-40B4-BE49-F238E27FC236}">
-                <a16:creationId xmlns:a16="http://schemas.microsoft.com/office/drawing/2014/main" id="{56A2EA3B-BEAD-489F-A79B-6214E90DD6BD}"/>
+                <a16:creationId xmlns:a16="http://schemas.microsoft.com/office/drawing/2014/main" id="{64B492D8-B682-4310-9087-F6047587E871}"/>
               </a:ext>
             </a:extLst>
           </p:cNvPr>
@@ -9560,7 +9560,7 @@
           <p:cNvPr id="6" name="core-no-0">
             <a:extLst xmlns:a="http://schemas.openxmlformats.org/drawingml/2006/main">
               <a:ext uri="{FF2B5EF4-FFF2-40B4-BE49-F238E27FC236}">
-                <a16:creationId xmlns:a16="http://schemas.microsoft.com/office/drawing/2014/main" id="{401008DA-F63C-4CD6-943F-A0E7F4AD42FF}"/>
+                <a16:creationId xmlns:a16="http://schemas.microsoft.com/office/drawing/2014/main" id="{FEA134F1-3172-4E14-B628-812DF00BBA9F}"/>
               </a:ext>
             </a:extLst>
           </p:cNvPr>
@@ -9618,7 +9618,7 @@
           <p:cNvPr id="7" name="core-label-0">
             <a:extLst xmlns:a="http://schemas.openxmlformats.org/drawingml/2006/main">
               <a:ext uri="{FF2B5EF4-FFF2-40B4-BE49-F238E27FC236}">
-                <a16:creationId xmlns:a16="http://schemas.microsoft.com/office/drawing/2014/main" id="{8580AE3B-E5B0-43D0-9D24-7DC3DF04B4C9}"/>
+                <a16:creationId xmlns:a16="http://schemas.microsoft.com/office/drawing/2014/main" id="{A583C5BE-F067-454F-BC39-B4B513FBF1D9}"/>
               </a:ext>
             </a:extLst>
           </p:cNvPr>
@@ -9676,7 +9676,7 @@
           <p:cNvPr id="8" name="core-body-0">
             <a:extLst xmlns:a="http://schemas.openxmlformats.org/drawingml/2006/main">
               <a:ext uri="{FF2B5EF4-FFF2-40B4-BE49-F238E27FC236}">
-                <a16:creationId xmlns:a16="http://schemas.microsoft.com/office/drawing/2014/main" id="{8A6A6B13-381C-428F-9067-B1A605E228E6}"/>
+                <a16:creationId xmlns:a16="http://schemas.microsoft.com/office/drawing/2014/main" id="{CC092F6B-B88A-4C84-8950-F8E026758097}"/>
               </a:ext>
             </a:extLst>
           </p:cNvPr>
@@ -9740,7 +9740,7 @@
           <p:cNvPr id="9" name="core-no-1">
             <a:extLst xmlns:a="http://schemas.openxmlformats.org/drawingml/2006/main">
               <a:ext uri="{FF2B5EF4-FFF2-40B4-BE49-F238E27FC236}">
-                <a16:creationId xmlns:a16="http://schemas.microsoft.com/office/drawing/2014/main" id="{B03C15FF-FF17-498B-B5B5-03255A4CBD02}"/>
+                <a16:creationId xmlns:a16="http://schemas.microsoft.com/office/drawing/2014/main" id="{4B58D563-4C63-4A58-973B-056D11E9660B}"/>
               </a:ext>
             </a:extLst>
           </p:cNvPr>
@@ -9798,7 +9798,7 @@
           <p:cNvPr id="10" name="core-body-1">
             <a:extLst xmlns:a="http://schemas.openxmlformats.org/drawingml/2006/main">
               <a:ext uri="{FF2B5EF4-FFF2-40B4-BE49-F238E27FC236}">
-                <a16:creationId xmlns:a16="http://schemas.microsoft.com/office/drawing/2014/main" id="{C14E58AE-7612-46FB-AE5C-5D5C258FDF83}"/>
+                <a16:creationId xmlns:a16="http://schemas.microsoft.com/office/drawing/2014/main" id="{DE08F063-0ADD-475B-8958-99E0452D766D}"/>
               </a:ext>
             </a:extLst>
           </p:cNvPr>
@@ -9862,7 +9862,7 @@
           <p:cNvPr id="11" name="s8-takeaway-rule">
             <a:extLst xmlns:a="http://schemas.openxmlformats.org/drawingml/2006/main">
               <a:ext uri="{FF2B5EF4-FFF2-40B4-BE49-F238E27FC236}">
-                <a16:creationId xmlns:a16="http://schemas.microsoft.com/office/drawing/2014/main" id="{D1315D15-8415-4317-AEAA-8D96DB081B44}"/>
+                <a16:creationId xmlns:a16="http://schemas.microsoft.com/office/drawing/2014/main" id="{BF9FAB12-70F6-4E58-8D33-F7EBFD895944}"/>
               </a:ext>
             </a:extLst>
           </p:cNvPr>
@@ -9895,7 +9895,7 @@
           <p:cNvPr id="12" name="s8-takeaway">
             <a:extLst xmlns:a="http://schemas.openxmlformats.org/drawingml/2006/main">
               <a:ext uri="{FF2B5EF4-FFF2-40B4-BE49-F238E27FC236}">
-                <a16:creationId xmlns:a16="http://schemas.microsoft.com/office/drawing/2014/main" id="{BED9C002-0064-4FB1-B2AB-7C829A72B8EB}"/>
+                <a16:creationId xmlns:a16="http://schemas.microsoft.com/office/drawing/2014/main" id="{12913942-DA4C-4AFA-A19A-4DD30D1C8697}"/>
               </a:ext>
             </a:extLst>
           </p:cNvPr>
@@ -9951,7 +9951,7 @@
     </p:spTree>
     <p:extLst>
       <p:ext uri="{BB962C8B-B14F-4D97-AF65-F5344CB8AC3E}">
-        <p14:creationId xmlns:p14="http://schemas.microsoft.com/office/powerpoint/2010/main" val="1564641546"/>
+        <p14:creationId xmlns:p14="http://schemas.microsoft.com/office/powerpoint/2010/main" val="2124040358"/>
       </p:ext>
     </p:extLst>
   </p:cSld>
@@ -9982,7 +9982,7 @@
           <p:cNvPr id="1" name="s9-rule">
             <a:extLst xmlns:a="http://schemas.openxmlformats.org/drawingml/2006/main">
               <a:ext uri="{FF2B5EF4-FFF2-40B4-BE49-F238E27FC236}">
-                <a16:creationId xmlns:a16="http://schemas.microsoft.com/office/drawing/2014/main" id="{FA118E70-63F1-414E-B81A-243EA5CC4A57}"/>
+                <a16:creationId xmlns:a16="http://schemas.microsoft.com/office/drawing/2014/main" id="{7795FAE9-103E-43BA-B255-2E8E7CA63E48}"/>
               </a:ext>
             </a:extLst>
           </p:cNvPr>
@@ -10015,7 +10015,7 @@
           <p:cNvPr id="2" name="s9-eyebrow">
             <a:extLst xmlns:a="http://schemas.openxmlformats.org/drawingml/2006/main">
               <a:ext uri="{FF2B5EF4-FFF2-40B4-BE49-F238E27FC236}">
-                <a16:creationId xmlns:a16="http://schemas.microsoft.com/office/drawing/2014/main" id="{177E6DEE-9632-441D-B05C-B9923DEEDE25}"/>
+                <a16:creationId xmlns:a16="http://schemas.microsoft.com/office/drawing/2014/main" id="{E61225F8-2857-4540-A009-FE5E65AA93A1}"/>
               </a:ext>
             </a:extLst>
           </p:cNvPr>
@@ -10073,7 +10073,7 @@
           <p:cNvPr id="3" name="s9-title">
             <a:extLst xmlns:a="http://schemas.openxmlformats.org/drawingml/2006/main">
               <a:ext uri="{FF2B5EF4-FFF2-40B4-BE49-F238E27FC236}">
-                <a16:creationId xmlns:a16="http://schemas.microsoft.com/office/drawing/2014/main" id="{EEBD3FF2-15B4-4E67-BE9A-E86FD1F3D018}"/>
+                <a16:creationId xmlns:a16="http://schemas.microsoft.com/office/drawing/2014/main" id="{7C8E722E-397D-4BF0-96E1-4C4C7A517AC3}"/>
               </a:ext>
             </a:extLst>
           </p:cNvPr>
@@ -10131,7 +10131,7 @@
           <p:cNvPr id="4" name="s9-footer">
             <a:extLst xmlns:a="http://schemas.openxmlformats.org/drawingml/2006/main">
               <a:ext uri="{FF2B5EF4-FFF2-40B4-BE49-F238E27FC236}">
-                <a16:creationId xmlns:a16="http://schemas.microsoft.com/office/drawing/2014/main" id="{6591674A-FBDF-4EFB-8801-789B077DD295}"/>
+                <a16:creationId xmlns:a16="http://schemas.microsoft.com/office/drawing/2014/main" id="{C14BA6E4-CD59-407A-BA27-201BA5563447}"/>
               </a:ext>
             </a:extLst>
           </p:cNvPr>
@@ -10162,7 +10162,7 @@
           <p:cNvPr id="5" name="s9-identity">
             <a:extLst xmlns:a="http://schemas.openxmlformats.org/drawingml/2006/main">
               <a:ext uri="{FF2B5EF4-FFF2-40B4-BE49-F238E27FC236}">
-                <a16:creationId xmlns:a16="http://schemas.microsoft.com/office/drawing/2014/main" id="{CB3D20F0-A972-4758-84C4-6081FD57EECC}"/>
+                <a16:creationId xmlns:a16="http://schemas.microsoft.com/office/drawing/2014/main" id="{693F851E-B5DD-49F2-BED0-AA0F18DCC0EC}"/>
               </a:ext>
             </a:extLst>
           </p:cNvPr>
@@ -10220,7 +10220,7 @@
           <p:cNvPr id="6" name="case-title">
             <a:extLst xmlns:a="http://schemas.openxmlformats.org/drawingml/2006/main">
               <a:ext uri="{FF2B5EF4-FFF2-40B4-BE49-F238E27FC236}">
-                <a16:creationId xmlns:a16="http://schemas.microsoft.com/office/drawing/2014/main" id="{4117907A-E001-4306-B6C3-B17FEA67998D}"/>
+                <a16:creationId xmlns:a16="http://schemas.microsoft.com/office/drawing/2014/main" id="{092F0F19-2484-4E7B-8F9B-6A49788BBB9B}"/>
               </a:ext>
             </a:extLst>
           </p:cNvPr>
@@ -10284,7 +10284,7 @@
           <p:cNvPr id="7" name="case-row-0">
             <a:extLst xmlns:a="http://schemas.openxmlformats.org/drawingml/2006/main">
               <a:ext uri="{FF2B5EF4-FFF2-40B4-BE49-F238E27FC236}">
-                <a16:creationId xmlns:a16="http://schemas.microsoft.com/office/drawing/2014/main" id="{49F6AE49-3B76-4952-9D13-926792E344D9}"/>
+                <a16:creationId xmlns:a16="http://schemas.microsoft.com/office/drawing/2014/main" id="{6AF7E534-B845-4672-B4F8-9EA9D5DDEBAE}"/>
               </a:ext>
             </a:extLst>
           </p:cNvPr>
@@ -10348,7 +10348,7 @@
           <p:cNvPr id="8" name="case-row-1">
             <a:extLst xmlns:a="http://schemas.openxmlformats.org/drawingml/2006/main">
               <a:ext uri="{FF2B5EF4-FFF2-40B4-BE49-F238E27FC236}">
-                <a16:creationId xmlns:a16="http://schemas.microsoft.com/office/drawing/2014/main" id="{43F692BF-4374-4E06-B69D-3C7B986B5963}"/>
+                <a16:creationId xmlns:a16="http://schemas.microsoft.com/office/drawing/2014/main" id="{EB86695A-2FF5-4394-8171-D7B408263303}"/>
               </a:ext>
             </a:extLst>
           </p:cNvPr>
@@ -10412,7 +10412,7 @@
           <p:cNvPr id="9" name="case-row-2">
             <a:extLst xmlns:a="http://schemas.openxmlformats.org/drawingml/2006/main">
               <a:ext uri="{FF2B5EF4-FFF2-40B4-BE49-F238E27FC236}">
-                <a16:creationId xmlns:a16="http://schemas.microsoft.com/office/drawing/2014/main" id="{836D4B1E-F27A-478E-90A5-75F40A892D18}"/>
+                <a16:creationId xmlns:a16="http://schemas.microsoft.com/office/drawing/2014/main" id="{D4D3156E-E6FA-4EC3-A5E5-31BDADE430CB}"/>
               </a:ext>
             </a:extLst>
           </p:cNvPr>
@@ -10476,7 +10476,7 @@
           <p:cNvPr id="10" name="case-row-3">
             <a:extLst xmlns:a="http://schemas.openxmlformats.org/drawingml/2006/main">
               <a:ext uri="{FF2B5EF4-FFF2-40B4-BE49-F238E27FC236}">
-                <a16:creationId xmlns:a16="http://schemas.microsoft.com/office/drawing/2014/main" id="{802FC0E0-C073-497A-9EC1-9D6A6D4F43E1}"/>
+                <a16:creationId xmlns:a16="http://schemas.microsoft.com/office/drawing/2014/main" id="{F68B8DC1-8298-48D2-BC3B-0F20FC0EFC26}"/>
               </a:ext>
             </a:extLst>
           </p:cNvPr>
@@ -10540,7 +10540,7 @@
           <p:cNvPr id="11" name="s9-takeaway-rule">
             <a:extLst xmlns:a="http://schemas.openxmlformats.org/drawingml/2006/main">
               <a:ext uri="{FF2B5EF4-FFF2-40B4-BE49-F238E27FC236}">
-                <a16:creationId xmlns:a16="http://schemas.microsoft.com/office/drawing/2014/main" id="{74304477-6514-4C5E-B372-D0F302026884}"/>
+                <a16:creationId xmlns:a16="http://schemas.microsoft.com/office/drawing/2014/main" id="{D91D69AF-31D1-4193-85F5-7DA9833CF2ED}"/>
               </a:ext>
             </a:extLst>
           </p:cNvPr>
@@ -10573,7 +10573,7 @@
           <p:cNvPr id="12" name="s9-takeaway">
             <a:extLst xmlns:a="http://schemas.openxmlformats.org/drawingml/2006/main">
               <a:ext uri="{FF2B5EF4-FFF2-40B4-BE49-F238E27FC236}">
-                <a16:creationId xmlns:a16="http://schemas.microsoft.com/office/drawing/2014/main" id="{6F6D338D-9A74-4DB2-9EE0-4EED3599A255}"/>
+                <a16:creationId xmlns:a16="http://schemas.microsoft.com/office/drawing/2014/main" id="{0CA4AB07-BAD6-4D52-BA28-EDBA30649BF3}"/>
               </a:ext>
             </a:extLst>
           </p:cNvPr>
@@ -10629,7 +10629,7 @@
     </p:spTree>
     <p:extLst>
       <p:ext uri="{BB962C8B-B14F-4D97-AF65-F5344CB8AC3E}">
-        <p14:creationId xmlns:p14="http://schemas.microsoft.com/office/powerpoint/2010/main" val="1141810123"/>
+        <p14:creationId xmlns:p14="http://schemas.microsoft.com/office/powerpoint/2010/main" val="753881489"/>
       </p:ext>
     </p:extLst>
   </p:cSld>

--- a/docs/public/course-assets/course-pptx/in-005.pptx
+++ b/docs/public/course-assets/course-pptx/in-005.pptx
@@ -2,25 +2,25 @@
 <file path=ppt/presentation.xml><?xml version="1.0" encoding="utf-8"?>
 <p:presentation xmlns:p="http://schemas.openxmlformats.org/presentationml/2006/main">
   <p:sldMasterIdLst>
-    <p:sldMasterId xmlns:r="http://schemas.openxmlformats.org/officeDocument/2006/relationships" id="2147483648" r:id="Re011e289100d479c"/>
+    <p:sldMasterId xmlns:r="http://schemas.openxmlformats.org/officeDocument/2006/relationships" id="2147483648" r:id="Raf6488958b0e4d96"/>
   </p:sldMasterIdLst>
   <p:notesMasterIdLst>
-    <p:notesMasterId xmlns:r="http://schemas.openxmlformats.org/officeDocument/2006/relationships" r:id="R7237c0df293a4c8f"/>
+    <p:notesMasterId xmlns:r="http://schemas.openxmlformats.org/officeDocument/2006/relationships" r:id="R84ba646496c644db"/>
   </p:notesMasterIdLst>
   <p:sldIdLst>
-    <p:sldId xmlns:r="http://schemas.openxmlformats.org/officeDocument/2006/relationships" id="256" r:id="R5d3bc90f8480459b"/>
-    <p:sldId xmlns:r="http://schemas.openxmlformats.org/officeDocument/2006/relationships" id="257" r:id="R7d463c17c9834b5d"/>
-    <p:sldId xmlns:r="http://schemas.openxmlformats.org/officeDocument/2006/relationships" id="258" r:id="R705590f349774b04"/>
-    <p:sldId xmlns:r="http://schemas.openxmlformats.org/officeDocument/2006/relationships" id="259" r:id="R11d25b99103a47a2"/>
-    <p:sldId xmlns:r="http://schemas.openxmlformats.org/officeDocument/2006/relationships" id="260" r:id="R80cf95b032fd4688"/>
-    <p:sldId xmlns:r="http://schemas.openxmlformats.org/officeDocument/2006/relationships" id="261" r:id="R25b0d4e5df9243f7"/>
-    <p:sldId xmlns:r="http://schemas.openxmlformats.org/officeDocument/2006/relationships" id="262" r:id="R6a7fc0104fa1492a"/>
-    <p:sldId xmlns:r="http://schemas.openxmlformats.org/officeDocument/2006/relationships" id="263" r:id="R832adcd9c4f84f2d"/>
-    <p:sldId xmlns:r="http://schemas.openxmlformats.org/officeDocument/2006/relationships" id="264" r:id="R6873218653054981"/>
-    <p:sldId xmlns:r="http://schemas.openxmlformats.org/officeDocument/2006/relationships" id="265" r:id="R575cf29147b04102"/>
-    <p:sldId xmlns:r="http://schemas.openxmlformats.org/officeDocument/2006/relationships" id="266" r:id="R03671e870d6e4372"/>
-    <p:sldId xmlns:r="http://schemas.openxmlformats.org/officeDocument/2006/relationships" id="267" r:id="R4d011b53e1c8499f"/>
-    <p:sldId xmlns:r="http://schemas.openxmlformats.org/officeDocument/2006/relationships" id="268" r:id="R0f4a092fbbf043bf"/>
+    <p:sldId xmlns:r="http://schemas.openxmlformats.org/officeDocument/2006/relationships" id="256" r:id="R8e8e3d79d80f44c6"/>
+    <p:sldId xmlns:r="http://schemas.openxmlformats.org/officeDocument/2006/relationships" id="257" r:id="R4daf6b8c833441ab"/>
+    <p:sldId xmlns:r="http://schemas.openxmlformats.org/officeDocument/2006/relationships" id="258" r:id="Rff85cfa6d792403d"/>
+    <p:sldId xmlns:r="http://schemas.openxmlformats.org/officeDocument/2006/relationships" id="259" r:id="R0289da218a3149cd"/>
+    <p:sldId xmlns:r="http://schemas.openxmlformats.org/officeDocument/2006/relationships" id="260" r:id="R38d69c867a24490a"/>
+    <p:sldId xmlns:r="http://schemas.openxmlformats.org/officeDocument/2006/relationships" id="261" r:id="Rfe56158c0304475a"/>
+    <p:sldId xmlns:r="http://schemas.openxmlformats.org/officeDocument/2006/relationships" id="262" r:id="R5dfb12e1af1645ce"/>
+    <p:sldId xmlns:r="http://schemas.openxmlformats.org/officeDocument/2006/relationships" id="263" r:id="Rcac9e09e3dc24d5d"/>
+    <p:sldId xmlns:r="http://schemas.openxmlformats.org/officeDocument/2006/relationships" id="264" r:id="Rfe248d06e3f94e6e"/>
+    <p:sldId xmlns:r="http://schemas.openxmlformats.org/officeDocument/2006/relationships" id="265" r:id="R9d04521a2099478f"/>
+    <p:sldId xmlns:r="http://schemas.openxmlformats.org/officeDocument/2006/relationships" id="266" r:id="Reed24acf9c6d49ed"/>
+    <p:sldId xmlns:r="http://schemas.openxmlformats.org/officeDocument/2006/relationships" id="267" r:id="R0d0766251cca4ddc"/>
+    <p:sldId xmlns:r="http://schemas.openxmlformats.org/officeDocument/2006/relationships" id="268" r:id="Raf72292459cf4316"/>
   </p:sldIdLst>
   <p:sldSz cx="12192000" cy="6858000"/>
   <p:notesSz cx="6858000" cy="9144000"/>
@@ -1405,7 +1405,7 @@
   </p:cSld>
   <p:clrMap bg1="lt1" tx1="dk1" bg2="lt2" tx2="dk2" accent1="accent1" accent2="accent2" accent3="accent3" accent4="accent4" accent5="accent5" accent6="accent6" hlink="hlink" folHlink="folHlink"/>
   <p:sldLayoutIdLst>
-    <p:sldLayoutId xmlns:r="http://schemas.openxmlformats.org/officeDocument/2006/relationships" id="2147483649" r:id="Re702456f0acf4897"/>
+    <p:sldLayoutId xmlns:r="http://schemas.openxmlformats.org/officeDocument/2006/relationships" id="2147483649" r:id="R9955a75271e74bc7"/>
   </p:sldLayoutIdLst>
   <p:txStyles>
     <p:titleStyle>
@@ -1956,7 +1956,7 @@
           <p:cNvPr id="1" name="cover-rule">
             <a:extLst xmlns:a="http://schemas.openxmlformats.org/drawingml/2006/main">
               <a:ext uri="{FF2B5EF4-FFF2-40B4-BE49-F238E27FC236}">
-                <a16:creationId xmlns:a16="http://schemas.microsoft.com/office/drawing/2014/main" id="{781427FF-90F7-4182-9A5C-5E06F23270E1}"/>
+                <a16:creationId xmlns:a16="http://schemas.microsoft.com/office/drawing/2014/main" id="{F29A38E1-0FE5-4C68-A62E-0F2AF242FC5F}"/>
               </a:ext>
             </a:extLst>
           </p:cNvPr>
@@ -1989,7 +1989,7 @@
           <p:cNvPr id="2" name="cover-ring-1">
             <a:extLst xmlns:a="http://schemas.openxmlformats.org/drawingml/2006/main">
               <a:ext uri="{FF2B5EF4-FFF2-40B4-BE49-F238E27FC236}">
-                <a16:creationId xmlns:a16="http://schemas.microsoft.com/office/drawing/2014/main" id="{3F4A7655-099A-4B32-A435-6A94DE1C9FD1}"/>
+                <a16:creationId xmlns:a16="http://schemas.microsoft.com/office/drawing/2014/main" id="{979CCCB5-88CF-4580-8803-6B7B47576963}"/>
               </a:ext>
             </a:extLst>
           </p:cNvPr>
@@ -2020,7 +2020,7 @@
           <p:cNvPr id="3" name="cover-ring-2">
             <a:extLst xmlns:a="http://schemas.openxmlformats.org/drawingml/2006/main">
               <a:ext uri="{FF2B5EF4-FFF2-40B4-BE49-F238E27FC236}">
-                <a16:creationId xmlns:a16="http://schemas.microsoft.com/office/drawing/2014/main" id="{04E35C3E-6015-4816-B738-313797C8C541}"/>
+                <a16:creationId xmlns:a16="http://schemas.microsoft.com/office/drawing/2014/main" id="{3EB23BE3-8005-480A-AC26-925CAB3F1410}"/>
               </a:ext>
             </a:extLst>
           </p:cNvPr>
@@ -2051,7 +2051,7 @@
           <p:cNvPr id="4" name="cover-core">
             <a:extLst xmlns:a="http://schemas.openxmlformats.org/drawingml/2006/main">
               <a:ext uri="{FF2B5EF4-FFF2-40B4-BE49-F238E27FC236}">
-                <a16:creationId xmlns:a16="http://schemas.microsoft.com/office/drawing/2014/main" id="{33F7606D-A169-44FC-8B37-0B57925F7A46}"/>
+                <a16:creationId xmlns:a16="http://schemas.microsoft.com/office/drawing/2014/main" id="{32342169-A4BA-4072-9650-520D294425E5}"/>
               </a:ext>
             </a:extLst>
           </p:cNvPr>
@@ -2084,7 +2084,7 @@
           <p:cNvPr id="5" name="cover-line-1">
             <a:extLst xmlns:a="http://schemas.openxmlformats.org/drawingml/2006/main">
               <a:ext uri="{FF2B5EF4-FFF2-40B4-BE49-F238E27FC236}">
-                <a16:creationId xmlns:a16="http://schemas.microsoft.com/office/drawing/2014/main" id="{8D66BFBD-0896-435D-92C2-86BDAB84F60E}"/>
+                <a16:creationId xmlns:a16="http://schemas.microsoft.com/office/drawing/2014/main" id="{B6A7A3CF-6703-4B2E-835A-D59823AE4E25}"/>
               </a:ext>
             </a:extLst>
           </p:cNvPr>
@@ -2115,7 +2115,7 @@
           <p:cNvPr id="6" name="cover-line-2">
             <a:extLst xmlns:a="http://schemas.openxmlformats.org/drawingml/2006/main">
               <a:ext uri="{FF2B5EF4-FFF2-40B4-BE49-F238E27FC236}">
-                <a16:creationId xmlns:a16="http://schemas.microsoft.com/office/drawing/2014/main" id="{CCF1D287-CFC6-4C90-89B9-BBB7D05D7E64}"/>
+                <a16:creationId xmlns:a16="http://schemas.microsoft.com/office/drawing/2014/main" id="{679BB0A4-C766-4E25-8D3D-6A531D22404F}"/>
               </a:ext>
             </a:extLst>
           </p:cNvPr>
@@ -2146,7 +2146,7 @@
           <p:cNvPr id="7" name="cover-eyebrow">
             <a:extLst xmlns:a="http://schemas.openxmlformats.org/drawingml/2006/main">
               <a:ext uri="{FF2B5EF4-FFF2-40B4-BE49-F238E27FC236}">
-                <a16:creationId xmlns:a16="http://schemas.microsoft.com/office/drawing/2014/main" id="{E8954FBE-6B16-48F2-8B3B-B16AA4D10E0C}"/>
+                <a16:creationId xmlns:a16="http://schemas.microsoft.com/office/drawing/2014/main" id="{F03798C8-E2A4-41C7-B894-B02F5E59A2D9}"/>
               </a:ext>
             </a:extLst>
           </p:cNvPr>
@@ -2204,7 +2204,7 @@
           <p:cNvPr id="8" name="cover-title">
             <a:extLst xmlns:a="http://schemas.openxmlformats.org/drawingml/2006/main">
               <a:ext uri="{FF2B5EF4-FFF2-40B4-BE49-F238E27FC236}">
-                <a16:creationId xmlns:a16="http://schemas.microsoft.com/office/drawing/2014/main" id="{8EB16A4F-F9F0-474F-A036-3BFB69C7CAB1}"/>
+                <a16:creationId xmlns:a16="http://schemas.microsoft.com/office/drawing/2014/main" id="{5D9B2226-C047-4D62-8D3A-AA7C646EC790}"/>
               </a:ext>
             </a:extLst>
           </p:cNvPr>
@@ -2262,7 +2262,7 @@
           <p:cNvPr id="9" name="cover-subtitle">
             <a:extLst xmlns:a="http://schemas.openxmlformats.org/drawingml/2006/main">
               <a:ext uri="{FF2B5EF4-FFF2-40B4-BE49-F238E27FC236}">
-                <a16:creationId xmlns:a16="http://schemas.microsoft.com/office/drawing/2014/main" id="{6F9B8156-7DBC-4E0C-8540-902720330452}"/>
+                <a16:creationId xmlns:a16="http://schemas.microsoft.com/office/drawing/2014/main" id="{2BF5A9AB-2DE7-45B6-BFF2-DC6D20AE98E7}"/>
               </a:ext>
             </a:extLst>
           </p:cNvPr>
@@ -2324,7 +2324,7 @@
           <p:cNvPr id="10" name="cover-lead">
             <a:extLst xmlns:a="http://schemas.openxmlformats.org/drawingml/2006/main">
               <a:ext uri="{FF2B5EF4-FFF2-40B4-BE49-F238E27FC236}">
-                <a16:creationId xmlns:a16="http://schemas.microsoft.com/office/drawing/2014/main" id="{56DA82F8-AC0E-4BFF-8880-7304998014BA}"/>
+                <a16:creationId xmlns:a16="http://schemas.microsoft.com/office/drawing/2014/main" id="{237D55EE-74A1-4876-9547-EF3E2BEC5F28}"/>
               </a:ext>
             </a:extLst>
           </p:cNvPr>
@@ -2382,7 +2382,7 @@
           <p:cNvPr id="11" name="cover-course">
             <a:extLst xmlns:a="http://schemas.openxmlformats.org/drawingml/2006/main">
               <a:ext uri="{FF2B5EF4-FFF2-40B4-BE49-F238E27FC236}">
-                <a16:creationId xmlns:a16="http://schemas.microsoft.com/office/drawing/2014/main" id="{A941AA13-088B-4987-BA61-B6251ACB1E3C}"/>
+                <a16:creationId xmlns:a16="http://schemas.microsoft.com/office/drawing/2014/main" id="{310252AF-E349-48FD-87E0-C7D2EB6331F5}"/>
               </a:ext>
             </a:extLst>
           </p:cNvPr>
@@ -2440,7 +2440,7 @@
           <p:cNvPr id="12" name="cover-id">
             <a:extLst xmlns:a="http://schemas.openxmlformats.org/drawingml/2006/main">
               <a:ext uri="{FF2B5EF4-FFF2-40B4-BE49-F238E27FC236}">
-                <a16:creationId xmlns:a16="http://schemas.microsoft.com/office/drawing/2014/main" id="{8B16A0C6-FA6A-4FA9-8A6D-E0B55FBF35CF}"/>
+                <a16:creationId xmlns:a16="http://schemas.microsoft.com/office/drawing/2014/main" id="{A989D59F-1D2F-4013-BE20-C28FB10F0B8D}"/>
               </a:ext>
             </a:extLst>
           </p:cNvPr>
@@ -2496,7 +2496,7 @@
     </p:spTree>
     <p:extLst>
       <p:ext uri="{BB962C8B-B14F-4D97-AF65-F5344CB8AC3E}">
-        <p14:creationId xmlns:p14="http://schemas.microsoft.com/office/powerpoint/2010/main" val="1261011139"/>
+        <p14:creationId xmlns:p14="http://schemas.microsoft.com/office/powerpoint/2010/main" val="1533326806"/>
       </p:ext>
     </p:extLst>
   </p:cSld>
@@ -2527,7 +2527,7 @@
           <p:cNvPr id="1" name="s10-rule">
             <a:extLst xmlns:a="http://schemas.openxmlformats.org/drawingml/2006/main">
               <a:ext uri="{FF2B5EF4-FFF2-40B4-BE49-F238E27FC236}">
-                <a16:creationId xmlns:a16="http://schemas.microsoft.com/office/drawing/2014/main" id="{B6D1C530-CBC2-482C-857D-6320D11751C3}"/>
+                <a16:creationId xmlns:a16="http://schemas.microsoft.com/office/drawing/2014/main" id="{84676079-B37F-4A80-8E74-2D4B1AB73D1E}"/>
               </a:ext>
             </a:extLst>
           </p:cNvPr>
@@ -2560,7 +2560,7 @@
           <p:cNvPr id="2" name="s10-eyebrow">
             <a:extLst xmlns:a="http://schemas.openxmlformats.org/drawingml/2006/main">
               <a:ext uri="{FF2B5EF4-FFF2-40B4-BE49-F238E27FC236}">
-                <a16:creationId xmlns:a16="http://schemas.microsoft.com/office/drawing/2014/main" id="{8E00CAEC-7705-42DA-BCEF-DBB46E473061}"/>
+                <a16:creationId xmlns:a16="http://schemas.microsoft.com/office/drawing/2014/main" id="{2F20DCD2-92A4-4424-BC4C-428406B2F60E}"/>
               </a:ext>
             </a:extLst>
           </p:cNvPr>
@@ -2618,7 +2618,7 @@
           <p:cNvPr id="3" name="s10-title">
             <a:extLst xmlns:a="http://schemas.openxmlformats.org/drawingml/2006/main">
               <a:ext uri="{FF2B5EF4-FFF2-40B4-BE49-F238E27FC236}">
-                <a16:creationId xmlns:a16="http://schemas.microsoft.com/office/drawing/2014/main" id="{2A20C8D9-8918-401A-A365-7F308A04DE1E}"/>
+                <a16:creationId xmlns:a16="http://schemas.microsoft.com/office/drawing/2014/main" id="{AB09E7CE-804A-4292-BDBE-39575CF0E751}"/>
               </a:ext>
             </a:extLst>
           </p:cNvPr>
@@ -2676,7 +2676,7 @@
           <p:cNvPr id="4" name="s10-footer">
             <a:extLst xmlns:a="http://schemas.openxmlformats.org/drawingml/2006/main">
               <a:ext uri="{FF2B5EF4-FFF2-40B4-BE49-F238E27FC236}">
-                <a16:creationId xmlns:a16="http://schemas.microsoft.com/office/drawing/2014/main" id="{7E985467-6F5A-4047-8FD6-71927B9F2B34}"/>
+                <a16:creationId xmlns:a16="http://schemas.microsoft.com/office/drawing/2014/main" id="{DE11D573-421A-4A51-853E-A9D617C50D22}"/>
               </a:ext>
             </a:extLst>
           </p:cNvPr>
@@ -2707,7 +2707,7 @@
           <p:cNvPr id="5" name="s10-identity">
             <a:extLst xmlns:a="http://schemas.openxmlformats.org/drawingml/2006/main">
               <a:ext uri="{FF2B5EF4-FFF2-40B4-BE49-F238E27FC236}">
-                <a16:creationId xmlns:a16="http://schemas.microsoft.com/office/drawing/2014/main" id="{EAC01B8C-BF47-41D8-A9F8-765358C45AC8}"/>
+                <a16:creationId xmlns:a16="http://schemas.microsoft.com/office/drawing/2014/main" id="{48C8115B-26BA-4789-A0CA-C54826E52A05}"/>
               </a:ext>
             </a:extLst>
           </p:cNvPr>
@@ -2765,7 +2765,7 @@
           <p:cNvPr id="6" name="case-title">
             <a:extLst xmlns:a="http://schemas.openxmlformats.org/drawingml/2006/main">
               <a:ext uri="{FF2B5EF4-FFF2-40B4-BE49-F238E27FC236}">
-                <a16:creationId xmlns:a16="http://schemas.microsoft.com/office/drawing/2014/main" id="{DEB1E957-D421-49F3-B7AA-AB96CF9305D3}"/>
+                <a16:creationId xmlns:a16="http://schemas.microsoft.com/office/drawing/2014/main" id="{8E14D11F-6110-47F3-B616-FD5CD1BEECFD}"/>
               </a:ext>
             </a:extLst>
           </p:cNvPr>
@@ -2829,7 +2829,7 @@
           <p:cNvPr id="7" name="case-row-0">
             <a:extLst xmlns:a="http://schemas.openxmlformats.org/drawingml/2006/main">
               <a:ext uri="{FF2B5EF4-FFF2-40B4-BE49-F238E27FC236}">
-                <a16:creationId xmlns:a16="http://schemas.microsoft.com/office/drawing/2014/main" id="{48F58CB1-CEC4-4A80-B67F-6B3B1D9A341D}"/>
+                <a16:creationId xmlns:a16="http://schemas.microsoft.com/office/drawing/2014/main" id="{6C9399EC-4AD3-4997-98FA-F835EBD35C1B}"/>
               </a:ext>
             </a:extLst>
           </p:cNvPr>
@@ -2893,7 +2893,7 @@
           <p:cNvPr id="8" name="case-row-1">
             <a:extLst xmlns:a="http://schemas.openxmlformats.org/drawingml/2006/main">
               <a:ext uri="{FF2B5EF4-FFF2-40B4-BE49-F238E27FC236}">
-                <a16:creationId xmlns:a16="http://schemas.microsoft.com/office/drawing/2014/main" id="{E4C826A4-F638-47E7-B390-0EAE5EA091A7}"/>
+                <a16:creationId xmlns:a16="http://schemas.microsoft.com/office/drawing/2014/main" id="{3CC063F9-9F8A-4F10-8F1D-F10C3B05969C}"/>
               </a:ext>
             </a:extLst>
           </p:cNvPr>
@@ -2957,7 +2957,7 @@
           <p:cNvPr id="9" name="case-row-2">
             <a:extLst xmlns:a="http://schemas.openxmlformats.org/drawingml/2006/main">
               <a:ext uri="{FF2B5EF4-FFF2-40B4-BE49-F238E27FC236}">
-                <a16:creationId xmlns:a16="http://schemas.microsoft.com/office/drawing/2014/main" id="{676386E7-79E2-44CD-BD9A-14A2B8B3F02C}"/>
+                <a16:creationId xmlns:a16="http://schemas.microsoft.com/office/drawing/2014/main" id="{13AB2109-AE14-4ED2-88F2-115C944C132A}"/>
               </a:ext>
             </a:extLst>
           </p:cNvPr>
@@ -3021,7 +3021,7 @@
           <p:cNvPr id="10" name="s10-takeaway-rule">
             <a:extLst xmlns:a="http://schemas.openxmlformats.org/drawingml/2006/main">
               <a:ext uri="{FF2B5EF4-FFF2-40B4-BE49-F238E27FC236}">
-                <a16:creationId xmlns:a16="http://schemas.microsoft.com/office/drawing/2014/main" id="{7B8A6D10-B6B4-4285-89BA-8C795F6C3FA6}"/>
+                <a16:creationId xmlns:a16="http://schemas.microsoft.com/office/drawing/2014/main" id="{69600740-9D02-409A-A36F-7500EAD5F26B}"/>
               </a:ext>
             </a:extLst>
           </p:cNvPr>
@@ -3054,7 +3054,7 @@
           <p:cNvPr id="11" name="s10-takeaway">
             <a:extLst xmlns:a="http://schemas.openxmlformats.org/drawingml/2006/main">
               <a:ext uri="{FF2B5EF4-FFF2-40B4-BE49-F238E27FC236}">
-                <a16:creationId xmlns:a16="http://schemas.microsoft.com/office/drawing/2014/main" id="{10EAB8DC-C85C-4823-BB11-CB5EEB148BC2}"/>
+                <a16:creationId xmlns:a16="http://schemas.microsoft.com/office/drawing/2014/main" id="{4181E91C-550E-4C91-9C86-ABC50085EF2F}"/>
               </a:ext>
             </a:extLst>
           </p:cNvPr>
@@ -3110,7 +3110,7 @@
     </p:spTree>
     <p:extLst>
       <p:ext uri="{BB962C8B-B14F-4D97-AF65-F5344CB8AC3E}">
-        <p14:creationId xmlns:p14="http://schemas.microsoft.com/office/powerpoint/2010/main" val="1407475571"/>
+        <p14:creationId xmlns:p14="http://schemas.microsoft.com/office/powerpoint/2010/main" val="1219747260"/>
       </p:ext>
     </p:extLst>
   </p:cSld>
@@ -3141,7 +3141,7 @@
           <p:cNvPr id="1" name="s11-rule">
             <a:extLst xmlns:a="http://schemas.openxmlformats.org/drawingml/2006/main">
               <a:ext uri="{FF2B5EF4-FFF2-40B4-BE49-F238E27FC236}">
-                <a16:creationId xmlns:a16="http://schemas.microsoft.com/office/drawing/2014/main" id="{E030FD4F-6326-43E9-A9EF-3494A010860B}"/>
+                <a16:creationId xmlns:a16="http://schemas.microsoft.com/office/drawing/2014/main" id="{522E7016-75D9-4850-A03A-D804B9A73E27}"/>
               </a:ext>
             </a:extLst>
           </p:cNvPr>
@@ -3174,7 +3174,7 @@
           <p:cNvPr id="2" name="s11-eyebrow">
             <a:extLst xmlns:a="http://schemas.openxmlformats.org/drawingml/2006/main">
               <a:ext uri="{FF2B5EF4-FFF2-40B4-BE49-F238E27FC236}">
-                <a16:creationId xmlns:a16="http://schemas.microsoft.com/office/drawing/2014/main" id="{8D40F159-EF01-49A0-B8B0-069002911F10}"/>
+                <a16:creationId xmlns:a16="http://schemas.microsoft.com/office/drawing/2014/main" id="{4E64A209-AAF5-46DB-90BD-ADB82FF8E24C}"/>
               </a:ext>
             </a:extLst>
           </p:cNvPr>
@@ -3232,7 +3232,7 @@
           <p:cNvPr id="3" name="s11-title">
             <a:extLst xmlns:a="http://schemas.openxmlformats.org/drawingml/2006/main">
               <a:ext uri="{FF2B5EF4-FFF2-40B4-BE49-F238E27FC236}">
-                <a16:creationId xmlns:a16="http://schemas.microsoft.com/office/drawing/2014/main" id="{50E8E276-C851-4571-98D1-64835EC02E18}"/>
+                <a16:creationId xmlns:a16="http://schemas.microsoft.com/office/drawing/2014/main" id="{58C5B094-4EAE-4C39-9DE2-A8EF0E0685B5}"/>
               </a:ext>
             </a:extLst>
           </p:cNvPr>
@@ -3290,7 +3290,7 @@
           <p:cNvPr id="4" name="s11-footer">
             <a:extLst xmlns:a="http://schemas.openxmlformats.org/drawingml/2006/main">
               <a:ext uri="{FF2B5EF4-FFF2-40B4-BE49-F238E27FC236}">
-                <a16:creationId xmlns:a16="http://schemas.microsoft.com/office/drawing/2014/main" id="{B86BDC39-8090-4173-83C1-F44C2FB3AF40}"/>
+                <a16:creationId xmlns:a16="http://schemas.microsoft.com/office/drawing/2014/main" id="{FED266ED-8EC1-43F1-AC46-093E6F9E52BB}"/>
               </a:ext>
             </a:extLst>
           </p:cNvPr>
@@ -3321,7 +3321,7 @@
           <p:cNvPr id="5" name="s11-identity">
             <a:extLst xmlns:a="http://schemas.openxmlformats.org/drawingml/2006/main">
               <a:ext uri="{FF2B5EF4-FFF2-40B4-BE49-F238E27FC236}">
-                <a16:creationId xmlns:a16="http://schemas.microsoft.com/office/drawing/2014/main" id="{7455D1D3-C52C-44C7-90CE-ED3A95B684DC}"/>
+                <a16:creationId xmlns:a16="http://schemas.microsoft.com/office/drawing/2014/main" id="{F6327217-B973-4D92-8C85-1D5D417FCA68}"/>
               </a:ext>
             </a:extLst>
           </p:cNvPr>
@@ -3379,7 +3379,7 @@
           <p:cNvPr id="6" name="practice-circle-0">
             <a:extLst xmlns:a="http://schemas.openxmlformats.org/drawingml/2006/main">
               <a:ext uri="{FF2B5EF4-FFF2-40B4-BE49-F238E27FC236}">
-                <a16:creationId xmlns:a16="http://schemas.microsoft.com/office/drawing/2014/main" id="{3634194D-1B28-49A2-BF65-9D7E47277481}"/>
+                <a16:creationId xmlns:a16="http://schemas.microsoft.com/office/drawing/2014/main" id="{C752D74E-5116-419C-90F6-FBE9CF399ACB}"/>
               </a:ext>
             </a:extLst>
           </p:cNvPr>
@@ -3412,7 +3412,7 @@
           <p:cNvPr id="7" name="practice-number-0">
             <a:extLst xmlns:a="http://schemas.openxmlformats.org/drawingml/2006/main">
               <a:ext uri="{FF2B5EF4-FFF2-40B4-BE49-F238E27FC236}">
-                <a16:creationId xmlns:a16="http://schemas.microsoft.com/office/drawing/2014/main" id="{D4F6CD3F-3154-4289-9822-C95C634D2FB7}"/>
+                <a16:creationId xmlns:a16="http://schemas.microsoft.com/office/drawing/2014/main" id="{CC5852A0-D1F2-4006-AD8E-4C0F9E0AB18B}"/>
               </a:ext>
             </a:extLst>
           </p:cNvPr>
@@ -3470,7 +3470,7 @@
           <p:cNvPr id="8" name="practice-item-0">
             <a:extLst xmlns:a="http://schemas.openxmlformats.org/drawingml/2006/main">
               <a:ext uri="{FF2B5EF4-FFF2-40B4-BE49-F238E27FC236}">
-                <a16:creationId xmlns:a16="http://schemas.microsoft.com/office/drawing/2014/main" id="{A17A6DAD-2ECB-496F-8666-23314A61DD7B}"/>
+                <a16:creationId xmlns:a16="http://schemas.microsoft.com/office/drawing/2014/main" id="{036B9320-0486-430D-A57E-32111972C5FD}"/>
               </a:ext>
             </a:extLst>
           </p:cNvPr>
@@ -3534,7 +3534,7 @@
           <p:cNvPr id="9" name="practice-connector-0">
             <a:extLst xmlns:a="http://schemas.openxmlformats.org/drawingml/2006/main">
               <a:ext uri="{FF2B5EF4-FFF2-40B4-BE49-F238E27FC236}">
-                <a16:creationId xmlns:a16="http://schemas.microsoft.com/office/drawing/2014/main" id="{8B9FA2FB-B55C-45CE-87AC-D36D7630E0C4}"/>
+                <a16:creationId xmlns:a16="http://schemas.microsoft.com/office/drawing/2014/main" id="{FA28E509-6A22-4529-A49D-68B5F14C6C5F}"/>
               </a:ext>
             </a:extLst>
           </p:cNvPr>
@@ -3565,7 +3565,7 @@
           <p:cNvPr id="10" name="practice-circle-1">
             <a:extLst xmlns:a="http://schemas.openxmlformats.org/drawingml/2006/main">
               <a:ext uri="{FF2B5EF4-FFF2-40B4-BE49-F238E27FC236}">
-                <a16:creationId xmlns:a16="http://schemas.microsoft.com/office/drawing/2014/main" id="{A299DF57-BAA2-4B06-A98E-EF996ECAB22F}"/>
+                <a16:creationId xmlns:a16="http://schemas.microsoft.com/office/drawing/2014/main" id="{33B74A91-8641-4A8D-9317-9371F812EAB9}"/>
               </a:ext>
             </a:extLst>
           </p:cNvPr>
@@ -3598,7 +3598,7 @@
           <p:cNvPr id="11" name="practice-number-1">
             <a:extLst xmlns:a="http://schemas.openxmlformats.org/drawingml/2006/main">
               <a:ext uri="{FF2B5EF4-FFF2-40B4-BE49-F238E27FC236}">
-                <a16:creationId xmlns:a16="http://schemas.microsoft.com/office/drawing/2014/main" id="{D632DA36-4D57-4E5F-BB1B-F2BD35BF5AC5}"/>
+                <a16:creationId xmlns:a16="http://schemas.microsoft.com/office/drawing/2014/main" id="{B2A51B34-F203-46BA-900D-E10C3CC79B30}"/>
               </a:ext>
             </a:extLst>
           </p:cNvPr>
@@ -3656,7 +3656,7 @@
           <p:cNvPr id="12" name="practice-item-1">
             <a:extLst xmlns:a="http://schemas.openxmlformats.org/drawingml/2006/main">
               <a:ext uri="{FF2B5EF4-FFF2-40B4-BE49-F238E27FC236}">
-                <a16:creationId xmlns:a16="http://schemas.microsoft.com/office/drawing/2014/main" id="{CCD53963-8732-481A-BC98-D1A826648AB8}"/>
+                <a16:creationId xmlns:a16="http://schemas.microsoft.com/office/drawing/2014/main" id="{D75E94C3-FAB6-43D1-802F-7B7FD1D42C93}"/>
               </a:ext>
             </a:extLst>
           </p:cNvPr>
@@ -3720,7 +3720,7 @@
           <p:cNvPr id="13" name="practice-connector-1">
             <a:extLst xmlns:a="http://schemas.openxmlformats.org/drawingml/2006/main">
               <a:ext uri="{FF2B5EF4-FFF2-40B4-BE49-F238E27FC236}">
-                <a16:creationId xmlns:a16="http://schemas.microsoft.com/office/drawing/2014/main" id="{5BDD3DF0-BAAC-4AD1-A010-84EB13A2B4A5}"/>
+                <a16:creationId xmlns:a16="http://schemas.microsoft.com/office/drawing/2014/main" id="{E16F86AE-A183-46B1-8975-D015C337C221}"/>
               </a:ext>
             </a:extLst>
           </p:cNvPr>
@@ -3751,7 +3751,7 @@
           <p:cNvPr id="14" name="practice-circle-2">
             <a:extLst xmlns:a="http://schemas.openxmlformats.org/drawingml/2006/main">
               <a:ext uri="{FF2B5EF4-FFF2-40B4-BE49-F238E27FC236}">
-                <a16:creationId xmlns:a16="http://schemas.microsoft.com/office/drawing/2014/main" id="{9E40F9BE-F942-4634-97E9-B20964F21832}"/>
+                <a16:creationId xmlns:a16="http://schemas.microsoft.com/office/drawing/2014/main" id="{16A5D9ED-6136-4DA0-ABAF-B620BA221486}"/>
               </a:ext>
             </a:extLst>
           </p:cNvPr>
@@ -3784,7 +3784,7 @@
           <p:cNvPr id="15" name="practice-number-2">
             <a:extLst xmlns:a="http://schemas.openxmlformats.org/drawingml/2006/main">
               <a:ext uri="{FF2B5EF4-FFF2-40B4-BE49-F238E27FC236}">
-                <a16:creationId xmlns:a16="http://schemas.microsoft.com/office/drawing/2014/main" id="{16F84CD5-55CC-43EA-9616-48149915967F}"/>
+                <a16:creationId xmlns:a16="http://schemas.microsoft.com/office/drawing/2014/main" id="{69035163-4D44-4576-A219-E7D1B6E83FDC}"/>
               </a:ext>
             </a:extLst>
           </p:cNvPr>
@@ -3842,7 +3842,7 @@
           <p:cNvPr id="16" name="practice-item-2">
             <a:extLst xmlns:a="http://schemas.openxmlformats.org/drawingml/2006/main">
               <a:ext uri="{FF2B5EF4-FFF2-40B4-BE49-F238E27FC236}">
-                <a16:creationId xmlns:a16="http://schemas.microsoft.com/office/drawing/2014/main" id="{90C9132E-6174-49FC-9C0E-36D7F0A23EE2}"/>
+                <a16:creationId xmlns:a16="http://schemas.microsoft.com/office/drawing/2014/main" id="{5826AD39-500D-4A4A-8AE1-8D286E785880}"/>
               </a:ext>
             </a:extLst>
           </p:cNvPr>
@@ -3904,7 +3904,7 @@
     </p:spTree>
     <p:extLst>
       <p:ext uri="{BB962C8B-B14F-4D97-AF65-F5344CB8AC3E}">
-        <p14:creationId xmlns:p14="http://schemas.microsoft.com/office/powerpoint/2010/main" val="1202374205"/>
+        <p14:creationId xmlns:p14="http://schemas.microsoft.com/office/powerpoint/2010/main" val="1066069869"/>
       </p:ext>
     </p:extLst>
   </p:cSld>
@@ -3935,7 +3935,7 @@
           <p:cNvPr id="1" name="s12-rule">
             <a:extLst xmlns:a="http://schemas.openxmlformats.org/drawingml/2006/main">
               <a:ext uri="{FF2B5EF4-FFF2-40B4-BE49-F238E27FC236}">
-                <a16:creationId xmlns:a16="http://schemas.microsoft.com/office/drawing/2014/main" id="{09FF516E-6B6E-492C-B2C7-089F6F63794D}"/>
+                <a16:creationId xmlns:a16="http://schemas.microsoft.com/office/drawing/2014/main" id="{C146D7CC-8476-4482-971E-B2C4D9E1FCFF}"/>
               </a:ext>
             </a:extLst>
           </p:cNvPr>
@@ -3968,7 +3968,7 @@
           <p:cNvPr id="2" name="s12-eyebrow">
             <a:extLst xmlns:a="http://schemas.openxmlformats.org/drawingml/2006/main">
               <a:ext uri="{FF2B5EF4-FFF2-40B4-BE49-F238E27FC236}">
-                <a16:creationId xmlns:a16="http://schemas.microsoft.com/office/drawing/2014/main" id="{004764DB-636D-49C8-ABDD-830EA465597A}"/>
+                <a16:creationId xmlns:a16="http://schemas.microsoft.com/office/drawing/2014/main" id="{08FF51E6-1F08-4F22-9AC4-954EA7A58A6A}"/>
               </a:ext>
             </a:extLst>
           </p:cNvPr>
@@ -4026,7 +4026,7 @@
           <p:cNvPr id="3" name="s12-title">
             <a:extLst xmlns:a="http://schemas.openxmlformats.org/drawingml/2006/main">
               <a:ext uri="{FF2B5EF4-FFF2-40B4-BE49-F238E27FC236}">
-                <a16:creationId xmlns:a16="http://schemas.microsoft.com/office/drawing/2014/main" id="{87990A9C-9B8C-45E1-99C3-436458D8ED85}"/>
+                <a16:creationId xmlns:a16="http://schemas.microsoft.com/office/drawing/2014/main" id="{D710A354-5EF3-483C-A224-BE635B4F8892}"/>
               </a:ext>
             </a:extLst>
           </p:cNvPr>
@@ -4084,7 +4084,7 @@
           <p:cNvPr id="4" name="s12-footer">
             <a:extLst xmlns:a="http://schemas.openxmlformats.org/drawingml/2006/main">
               <a:ext uri="{FF2B5EF4-FFF2-40B4-BE49-F238E27FC236}">
-                <a16:creationId xmlns:a16="http://schemas.microsoft.com/office/drawing/2014/main" id="{A644DE97-B493-4B2E-BB45-205210E3B0A7}"/>
+                <a16:creationId xmlns:a16="http://schemas.microsoft.com/office/drawing/2014/main" id="{F1192DB8-2C2F-426F-BCEB-A8DA5932A810}"/>
               </a:ext>
             </a:extLst>
           </p:cNvPr>
@@ -4115,7 +4115,7 @@
           <p:cNvPr id="5" name="s12-identity">
             <a:extLst xmlns:a="http://schemas.openxmlformats.org/drawingml/2006/main">
               <a:ext uri="{FF2B5EF4-FFF2-40B4-BE49-F238E27FC236}">
-                <a16:creationId xmlns:a16="http://schemas.microsoft.com/office/drawing/2014/main" id="{05D34E96-8AE8-44F1-BAA0-B866282AE895}"/>
+                <a16:creationId xmlns:a16="http://schemas.microsoft.com/office/drawing/2014/main" id="{99BCFF08-9BE7-49BA-B8B3-9EE66ABE6D16}"/>
               </a:ext>
             </a:extLst>
           </p:cNvPr>
@@ -4173,7 +4173,7 @@
           <p:cNvPr id="6" name="recap-circle-0">
             <a:extLst xmlns:a="http://schemas.openxmlformats.org/drawingml/2006/main">
               <a:ext uri="{FF2B5EF4-FFF2-40B4-BE49-F238E27FC236}">
-                <a16:creationId xmlns:a16="http://schemas.microsoft.com/office/drawing/2014/main" id="{062B0680-32DE-4E8D-AC36-481FDD6EA862}"/>
+                <a16:creationId xmlns:a16="http://schemas.microsoft.com/office/drawing/2014/main" id="{14D2B412-F4A1-44DA-BAE1-0F24E3DC880C}"/>
               </a:ext>
             </a:extLst>
           </p:cNvPr>
@@ -4206,7 +4206,7 @@
           <p:cNvPr id="7" name="recap-number-0">
             <a:extLst xmlns:a="http://schemas.openxmlformats.org/drawingml/2006/main">
               <a:ext uri="{FF2B5EF4-FFF2-40B4-BE49-F238E27FC236}">
-                <a16:creationId xmlns:a16="http://schemas.microsoft.com/office/drawing/2014/main" id="{4DAECCEE-539C-4182-BCB5-8A3541C86DAA}"/>
+                <a16:creationId xmlns:a16="http://schemas.microsoft.com/office/drawing/2014/main" id="{47CA3FFE-5692-4526-89EA-19E60D199362}"/>
               </a:ext>
             </a:extLst>
           </p:cNvPr>
@@ -4264,7 +4264,7 @@
           <p:cNvPr id="8" name="recap-item-0">
             <a:extLst xmlns:a="http://schemas.openxmlformats.org/drawingml/2006/main">
               <a:ext uri="{FF2B5EF4-FFF2-40B4-BE49-F238E27FC236}">
-                <a16:creationId xmlns:a16="http://schemas.microsoft.com/office/drawing/2014/main" id="{5AD33BF0-8948-4CAE-A80C-5B6C4CE24D81}"/>
+                <a16:creationId xmlns:a16="http://schemas.microsoft.com/office/drawing/2014/main" id="{52F993BD-8AEE-408C-ABA0-2DAB25480909}"/>
               </a:ext>
             </a:extLst>
           </p:cNvPr>
@@ -4328,7 +4328,7 @@
           <p:cNvPr id="9" name="recap-connector-0">
             <a:extLst xmlns:a="http://schemas.openxmlformats.org/drawingml/2006/main">
               <a:ext uri="{FF2B5EF4-FFF2-40B4-BE49-F238E27FC236}">
-                <a16:creationId xmlns:a16="http://schemas.microsoft.com/office/drawing/2014/main" id="{B282997F-3943-40E6-985A-BA7120777169}"/>
+                <a16:creationId xmlns:a16="http://schemas.microsoft.com/office/drawing/2014/main" id="{BDDE8280-9B76-44D5-B405-464ACF810AB2}"/>
               </a:ext>
             </a:extLst>
           </p:cNvPr>
@@ -4359,7 +4359,7 @@
           <p:cNvPr id="10" name="recap-circle-1">
             <a:extLst xmlns:a="http://schemas.openxmlformats.org/drawingml/2006/main">
               <a:ext uri="{FF2B5EF4-FFF2-40B4-BE49-F238E27FC236}">
-                <a16:creationId xmlns:a16="http://schemas.microsoft.com/office/drawing/2014/main" id="{21BF2844-BC77-455E-B4E3-DA64BFF83AFC}"/>
+                <a16:creationId xmlns:a16="http://schemas.microsoft.com/office/drawing/2014/main" id="{A8BD7209-98CE-4E7F-84DF-AF7B067F5552}"/>
               </a:ext>
             </a:extLst>
           </p:cNvPr>
@@ -4392,7 +4392,7 @@
           <p:cNvPr id="11" name="recap-number-1">
             <a:extLst xmlns:a="http://schemas.openxmlformats.org/drawingml/2006/main">
               <a:ext uri="{FF2B5EF4-FFF2-40B4-BE49-F238E27FC236}">
-                <a16:creationId xmlns:a16="http://schemas.microsoft.com/office/drawing/2014/main" id="{951D54F6-6E93-4E2E-8D3F-EAFCDE46F340}"/>
+                <a16:creationId xmlns:a16="http://schemas.microsoft.com/office/drawing/2014/main" id="{9A0EB3A5-9C43-4965-BE46-06BD4190A314}"/>
               </a:ext>
             </a:extLst>
           </p:cNvPr>
@@ -4450,7 +4450,7 @@
           <p:cNvPr id="12" name="recap-item-1">
             <a:extLst xmlns:a="http://schemas.openxmlformats.org/drawingml/2006/main">
               <a:ext uri="{FF2B5EF4-FFF2-40B4-BE49-F238E27FC236}">
-                <a16:creationId xmlns:a16="http://schemas.microsoft.com/office/drawing/2014/main" id="{5104AE3F-17E3-4A7F-A754-39655B0D30CB}"/>
+                <a16:creationId xmlns:a16="http://schemas.microsoft.com/office/drawing/2014/main" id="{7D30208B-7B98-46A8-BD3A-861155D29D46}"/>
               </a:ext>
             </a:extLst>
           </p:cNvPr>
@@ -4514,7 +4514,7 @@
           <p:cNvPr id="13" name="recap-connector-1">
             <a:extLst xmlns:a="http://schemas.openxmlformats.org/drawingml/2006/main">
               <a:ext uri="{FF2B5EF4-FFF2-40B4-BE49-F238E27FC236}">
-                <a16:creationId xmlns:a16="http://schemas.microsoft.com/office/drawing/2014/main" id="{9D623C81-C41E-4F1D-9478-819CA745E642}"/>
+                <a16:creationId xmlns:a16="http://schemas.microsoft.com/office/drawing/2014/main" id="{C783024C-551C-4664-B122-E1200ED67FD4}"/>
               </a:ext>
             </a:extLst>
           </p:cNvPr>
@@ -4545,7 +4545,7 @@
           <p:cNvPr id="14" name="recap-circle-2">
             <a:extLst xmlns:a="http://schemas.openxmlformats.org/drawingml/2006/main">
               <a:ext uri="{FF2B5EF4-FFF2-40B4-BE49-F238E27FC236}">
-                <a16:creationId xmlns:a16="http://schemas.microsoft.com/office/drawing/2014/main" id="{D5C51348-7A09-47C6-8B69-6F25DB47DB76}"/>
+                <a16:creationId xmlns:a16="http://schemas.microsoft.com/office/drawing/2014/main" id="{B5E60A2C-244F-4F05-9355-B12C2F8F51D6}"/>
               </a:ext>
             </a:extLst>
           </p:cNvPr>
@@ -4578,7 +4578,7 @@
           <p:cNvPr id="15" name="recap-number-2">
             <a:extLst xmlns:a="http://schemas.openxmlformats.org/drawingml/2006/main">
               <a:ext uri="{FF2B5EF4-FFF2-40B4-BE49-F238E27FC236}">
-                <a16:creationId xmlns:a16="http://schemas.microsoft.com/office/drawing/2014/main" id="{EB4BEB9E-6A44-4D3A-9B9C-D60A385E8DE5}"/>
+                <a16:creationId xmlns:a16="http://schemas.microsoft.com/office/drawing/2014/main" id="{CE7AB126-498A-4848-8DAA-F5B7B84B5884}"/>
               </a:ext>
             </a:extLst>
           </p:cNvPr>
@@ -4636,7 +4636,7 @@
           <p:cNvPr id="16" name="recap-item-2">
             <a:extLst xmlns:a="http://schemas.openxmlformats.org/drawingml/2006/main">
               <a:ext uri="{FF2B5EF4-FFF2-40B4-BE49-F238E27FC236}">
-                <a16:creationId xmlns:a16="http://schemas.microsoft.com/office/drawing/2014/main" id="{6964BF7C-0E68-452A-B679-873A01F9C459}"/>
+                <a16:creationId xmlns:a16="http://schemas.microsoft.com/office/drawing/2014/main" id="{FEBAAB2C-C853-4790-BC6F-549B6FCAF758}"/>
               </a:ext>
             </a:extLst>
           </p:cNvPr>
@@ -4698,7 +4698,7 @@
     </p:spTree>
     <p:extLst>
       <p:ext uri="{BB962C8B-B14F-4D97-AF65-F5344CB8AC3E}">
-        <p14:creationId xmlns:p14="http://schemas.microsoft.com/office/powerpoint/2010/main" val="457346384"/>
+        <p14:creationId xmlns:p14="http://schemas.microsoft.com/office/powerpoint/2010/main" val="938388350"/>
       </p:ext>
     </p:extLst>
   </p:cSld>
@@ -4729,7 +4729,7 @@
           <p:cNvPr id="1" name="s13-rule">
             <a:extLst xmlns:a="http://schemas.openxmlformats.org/drawingml/2006/main">
               <a:ext uri="{FF2B5EF4-FFF2-40B4-BE49-F238E27FC236}">
-                <a16:creationId xmlns:a16="http://schemas.microsoft.com/office/drawing/2014/main" id="{C1B5934D-5337-404B-A2D1-913F7350D96B}"/>
+                <a16:creationId xmlns:a16="http://schemas.microsoft.com/office/drawing/2014/main" id="{F236B97D-1D22-40C5-9166-ED67AD1D0DEC}"/>
               </a:ext>
             </a:extLst>
           </p:cNvPr>
@@ -4762,7 +4762,7 @@
           <p:cNvPr id="2" name="s13-eyebrow">
             <a:extLst xmlns:a="http://schemas.openxmlformats.org/drawingml/2006/main">
               <a:ext uri="{FF2B5EF4-FFF2-40B4-BE49-F238E27FC236}">
-                <a16:creationId xmlns:a16="http://schemas.microsoft.com/office/drawing/2014/main" id="{C1C76574-A6E9-47CF-A8C9-76E909B8F652}"/>
+                <a16:creationId xmlns:a16="http://schemas.microsoft.com/office/drawing/2014/main" id="{652D6C6E-7C44-401E-B909-A34848F9566B}"/>
               </a:ext>
             </a:extLst>
           </p:cNvPr>
@@ -4820,7 +4820,7 @@
           <p:cNvPr id="3" name="s13-title">
             <a:extLst xmlns:a="http://schemas.openxmlformats.org/drawingml/2006/main">
               <a:ext uri="{FF2B5EF4-FFF2-40B4-BE49-F238E27FC236}">
-                <a16:creationId xmlns:a16="http://schemas.microsoft.com/office/drawing/2014/main" id="{A8C27F35-81E5-4F37-9F4E-A14E395A532E}"/>
+                <a16:creationId xmlns:a16="http://schemas.microsoft.com/office/drawing/2014/main" id="{5A33CF10-C1B0-4102-A4DC-D048D88DAFC0}"/>
               </a:ext>
             </a:extLst>
           </p:cNvPr>
@@ -4878,7 +4878,7 @@
           <p:cNvPr id="4" name="s13-footer">
             <a:extLst xmlns:a="http://schemas.openxmlformats.org/drawingml/2006/main">
               <a:ext uri="{FF2B5EF4-FFF2-40B4-BE49-F238E27FC236}">
-                <a16:creationId xmlns:a16="http://schemas.microsoft.com/office/drawing/2014/main" id="{367A7C70-2B61-407F-BBE9-4C95C5096B19}"/>
+                <a16:creationId xmlns:a16="http://schemas.microsoft.com/office/drawing/2014/main" id="{FE7520A8-CA73-43DB-B496-7E4873A4A73D}"/>
               </a:ext>
             </a:extLst>
           </p:cNvPr>
@@ -4909,7 +4909,7 @@
           <p:cNvPr id="5" name="s13-identity">
             <a:extLst xmlns:a="http://schemas.openxmlformats.org/drawingml/2006/main">
               <a:ext uri="{FF2B5EF4-FFF2-40B4-BE49-F238E27FC236}">
-                <a16:creationId xmlns:a16="http://schemas.microsoft.com/office/drawing/2014/main" id="{E69C137D-C324-41BD-B939-1791BEB7833F}"/>
+                <a16:creationId xmlns:a16="http://schemas.microsoft.com/office/drawing/2014/main" id="{4A17E201-9BDB-4F2D-B5C8-2B0E1D70334B}"/>
               </a:ext>
             </a:extLst>
           </p:cNvPr>
@@ -4967,7 +4967,7 @@
           <p:cNvPr id="6" name="source-0">
             <a:extLst xmlns:a="http://schemas.openxmlformats.org/drawingml/2006/main">
               <a:ext uri="{FF2B5EF4-FFF2-40B4-BE49-F238E27FC236}">
-                <a16:creationId xmlns:a16="http://schemas.microsoft.com/office/drawing/2014/main" id="{AD4DC202-74DA-4E16-A141-FCA3CEBF353A}"/>
+                <a16:creationId xmlns:a16="http://schemas.microsoft.com/office/drawing/2014/main" id="{1D471933-3986-445A-A2A8-F25155B2B9A5}"/>
               </a:ext>
             </a:extLst>
           </p:cNvPr>
@@ -5031,7 +5031,7 @@
           <p:cNvPr id="7" name="source-1">
             <a:extLst xmlns:a="http://schemas.openxmlformats.org/drawingml/2006/main">
               <a:ext uri="{FF2B5EF4-FFF2-40B4-BE49-F238E27FC236}">
-                <a16:creationId xmlns:a16="http://schemas.microsoft.com/office/drawing/2014/main" id="{F43D5652-8C1F-4630-9C2F-F6F813A568B0}"/>
+                <a16:creationId xmlns:a16="http://schemas.microsoft.com/office/drawing/2014/main" id="{AC82798D-A217-4CF6-88DF-2BE27DDDABC0}"/>
               </a:ext>
             </a:extLst>
           </p:cNvPr>
@@ -5095,7 +5095,7 @@
           <p:cNvPr id="8" name="source-2">
             <a:extLst xmlns:a="http://schemas.openxmlformats.org/drawingml/2006/main">
               <a:ext uri="{FF2B5EF4-FFF2-40B4-BE49-F238E27FC236}">
-                <a16:creationId xmlns:a16="http://schemas.microsoft.com/office/drawing/2014/main" id="{D744F6F4-1C4E-490A-9CBF-B02717C38860}"/>
+                <a16:creationId xmlns:a16="http://schemas.microsoft.com/office/drawing/2014/main" id="{E8B20DF2-A3B2-4BF5-8A5D-B4FADDFFE03A}"/>
               </a:ext>
             </a:extLst>
           </p:cNvPr>
@@ -5159,7 +5159,7 @@
           <p:cNvPr id="9" name="source-3">
             <a:extLst xmlns:a="http://schemas.openxmlformats.org/drawingml/2006/main">
               <a:ext uri="{FF2B5EF4-FFF2-40B4-BE49-F238E27FC236}">
-                <a16:creationId xmlns:a16="http://schemas.microsoft.com/office/drawing/2014/main" id="{05A2DE05-C591-4351-9A09-4D4EA5699D7E}"/>
+                <a16:creationId xmlns:a16="http://schemas.microsoft.com/office/drawing/2014/main" id="{E70D4073-D1B6-46BC-980D-82B690909247}"/>
               </a:ext>
             </a:extLst>
           </p:cNvPr>
@@ -5223,7 +5223,7 @@
           <p:cNvPr id="10" name="source-4">
             <a:extLst xmlns:a="http://schemas.openxmlformats.org/drawingml/2006/main">
               <a:ext uri="{FF2B5EF4-FFF2-40B4-BE49-F238E27FC236}">
-                <a16:creationId xmlns:a16="http://schemas.microsoft.com/office/drawing/2014/main" id="{2DC65E9A-6AFF-4ADB-9D90-7EE001D2E7DF}"/>
+                <a16:creationId xmlns:a16="http://schemas.microsoft.com/office/drawing/2014/main" id="{CA9EF426-DD1D-4B13-A859-79C8C6C576E1}"/>
               </a:ext>
             </a:extLst>
           </p:cNvPr>
@@ -5287,7 +5287,7 @@
           <p:cNvPr id="11" name="s13-takeaway-rule">
             <a:extLst xmlns:a="http://schemas.openxmlformats.org/drawingml/2006/main">
               <a:ext uri="{FF2B5EF4-FFF2-40B4-BE49-F238E27FC236}">
-                <a16:creationId xmlns:a16="http://schemas.microsoft.com/office/drawing/2014/main" id="{283B4B29-9E96-4BC4-B604-53E8CCFD7A91}"/>
+                <a16:creationId xmlns:a16="http://schemas.microsoft.com/office/drawing/2014/main" id="{9CB22A36-1A32-4E38-8569-032426A43EA9}"/>
               </a:ext>
             </a:extLst>
           </p:cNvPr>
@@ -5320,7 +5320,7 @@
           <p:cNvPr id="12" name="s13-takeaway">
             <a:extLst xmlns:a="http://schemas.openxmlformats.org/drawingml/2006/main">
               <a:ext uri="{FF2B5EF4-FFF2-40B4-BE49-F238E27FC236}">
-                <a16:creationId xmlns:a16="http://schemas.microsoft.com/office/drawing/2014/main" id="{5AF5857A-79F8-4650-9743-572CE7EFAF6C}"/>
+                <a16:creationId xmlns:a16="http://schemas.microsoft.com/office/drawing/2014/main" id="{0D330AE7-6848-448E-A420-645AC5B60E72}"/>
               </a:ext>
             </a:extLst>
           </p:cNvPr>
@@ -5345,7 +5345,7 @@
         </p:spPr>
         <p:txBody>
           <a:bodyPr xmlns:a="http://schemas.openxmlformats.org/drawingml/2006/main" lIns="0" tIns="0" rIns="0" bIns="0" anchor="ctr">
-            <a:normAutofit fontScale="95911"/>
+            <a:normAutofit fontScale="100000"/>
           </a:bodyPr>
           <a:lstStyle xmlns:a="http://schemas.openxmlformats.org/drawingml/2006/main"/>
           <a:p xmlns:a="http://schemas.openxmlformats.org/drawingml/2006/main">
@@ -5368,7 +5368,7 @@
                 <a:ea typeface="PingFang SC"/>
                 <a:cs typeface="PingFang SC"/>
               </a:rPr>
-              <a:t>课程精编页用于讲授主线；播放器中的“原课件”模式保留团队 PowerPoint 精选页、真实图片和可播放视频。</a:t>
+              <a:t>课程正文与幻灯片共享同一知识主线，图片和视频用于帮助理解本节概念与案例。</a:t>
             </a:r>
           </a:p>
         </p:txBody>
@@ -5376,7 +5376,7 @@
     </p:spTree>
     <p:extLst>
       <p:ext uri="{BB962C8B-B14F-4D97-AF65-F5344CB8AC3E}">
-        <p14:creationId xmlns:p14="http://schemas.microsoft.com/office/powerpoint/2010/main" val="1247812076"/>
+        <p14:creationId xmlns:p14="http://schemas.microsoft.com/office/powerpoint/2010/main" val="1986483202"/>
       </p:ext>
     </p:extLst>
   </p:cSld>
@@ -5407,7 +5407,7 @@
           <p:cNvPr id="1" name="s2-rule">
             <a:extLst xmlns:a="http://schemas.openxmlformats.org/drawingml/2006/main">
               <a:ext uri="{FF2B5EF4-FFF2-40B4-BE49-F238E27FC236}">
-                <a16:creationId xmlns:a16="http://schemas.microsoft.com/office/drawing/2014/main" id="{68348DA3-161B-4249-BBB9-F7C9B9007C3B}"/>
+                <a16:creationId xmlns:a16="http://schemas.microsoft.com/office/drawing/2014/main" id="{DDE6D372-BBF7-4F68-94B3-4FFDA7517C5D}"/>
               </a:ext>
             </a:extLst>
           </p:cNvPr>
@@ -5440,7 +5440,7 @@
           <p:cNvPr id="2" name="s2-eyebrow">
             <a:extLst xmlns:a="http://schemas.openxmlformats.org/drawingml/2006/main">
               <a:ext uri="{FF2B5EF4-FFF2-40B4-BE49-F238E27FC236}">
-                <a16:creationId xmlns:a16="http://schemas.microsoft.com/office/drawing/2014/main" id="{2B7317D4-2B52-4194-A70E-1DF9B91C608E}"/>
+                <a16:creationId xmlns:a16="http://schemas.microsoft.com/office/drawing/2014/main" id="{43DC7239-D068-42E6-9FE8-E62886D3E801}"/>
               </a:ext>
             </a:extLst>
           </p:cNvPr>
@@ -5498,7 +5498,7 @@
           <p:cNvPr id="3" name="s2-title">
             <a:extLst xmlns:a="http://schemas.openxmlformats.org/drawingml/2006/main">
               <a:ext uri="{FF2B5EF4-FFF2-40B4-BE49-F238E27FC236}">
-                <a16:creationId xmlns:a16="http://schemas.microsoft.com/office/drawing/2014/main" id="{40F8B085-FB14-458F-9D42-0C747ABAC57B}"/>
+                <a16:creationId xmlns:a16="http://schemas.microsoft.com/office/drawing/2014/main" id="{5E7C9699-E7E0-42E8-BA76-85AFF9AFDD21}"/>
               </a:ext>
             </a:extLst>
           </p:cNvPr>
@@ -5556,7 +5556,7 @@
           <p:cNvPr id="4" name="s2-footer">
             <a:extLst xmlns:a="http://schemas.openxmlformats.org/drawingml/2006/main">
               <a:ext uri="{FF2B5EF4-FFF2-40B4-BE49-F238E27FC236}">
-                <a16:creationId xmlns:a16="http://schemas.microsoft.com/office/drawing/2014/main" id="{AA0C96E5-0EA3-405F-A2AC-C0F3916281D3}"/>
+                <a16:creationId xmlns:a16="http://schemas.microsoft.com/office/drawing/2014/main" id="{B91BB1E6-B2FF-42C3-96BA-FE8E0E43B257}"/>
               </a:ext>
             </a:extLst>
           </p:cNvPr>
@@ -5587,7 +5587,7 @@
           <p:cNvPr id="5" name="s2-identity">
             <a:extLst xmlns:a="http://schemas.openxmlformats.org/drawingml/2006/main">
               <a:ext uri="{FF2B5EF4-FFF2-40B4-BE49-F238E27FC236}">
-                <a16:creationId xmlns:a16="http://schemas.microsoft.com/office/drawing/2014/main" id="{5E406F93-298A-44B8-A71F-DAECCA8AD358}"/>
+                <a16:creationId xmlns:a16="http://schemas.microsoft.com/office/drawing/2014/main" id="{EECF52DE-51E0-493F-8811-F84E62968CF8}"/>
               </a:ext>
             </a:extLst>
           </p:cNvPr>
@@ -5645,7 +5645,7 @@
           <p:cNvPr id="6" name="objective-1">
             <a:extLst xmlns:a="http://schemas.openxmlformats.org/drawingml/2006/main">
               <a:ext uri="{FF2B5EF4-FFF2-40B4-BE49-F238E27FC236}">
-                <a16:creationId xmlns:a16="http://schemas.microsoft.com/office/drawing/2014/main" id="{ED90C361-9966-4CBA-A055-585DD582F6EF}"/>
+                <a16:creationId xmlns:a16="http://schemas.microsoft.com/office/drawing/2014/main" id="{C8506332-0C9A-481D-9EE5-3560983828DB}"/>
               </a:ext>
             </a:extLst>
           </p:cNvPr>
@@ -5732,7 +5732,7 @@
           <p:cNvPr id="7" name="objective-2">
             <a:extLst xmlns:a="http://schemas.openxmlformats.org/drawingml/2006/main">
               <a:ext uri="{FF2B5EF4-FFF2-40B4-BE49-F238E27FC236}">
-                <a16:creationId xmlns:a16="http://schemas.microsoft.com/office/drawing/2014/main" id="{994FD009-B12A-4681-8A88-CE334E345AB6}"/>
+                <a16:creationId xmlns:a16="http://schemas.microsoft.com/office/drawing/2014/main" id="{5E1FEFEA-44CB-44AC-BD59-7A72F650A592}"/>
               </a:ext>
             </a:extLst>
           </p:cNvPr>
@@ -5819,7 +5819,7 @@
           <p:cNvPr id="8" name="objective-3">
             <a:extLst xmlns:a="http://schemas.openxmlformats.org/drawingml/2006/main">
               <a:ext uri="{FF2B5EF4-FFF2-40B4-BE49-F238E27FC236}">
-                <a16:creationId xmlns:a16="http://schemas.microsoft.com/office/drawing/2014/main" id="{FBB2C5B9-E254-4E03-9646-04DC5E816DEB}"/>
+                <a16:creationId xmlns:a16="http://schemas.microsoft.com/office/drawing/2014/main" id="{DCEC7C50-4932-4E34-A842-8C2AC77BCA70}"/>
               </a:ext>
             </a:extLst>
           </p:cNvPr>
@@ -5906,7 +5906,7 @@
           <p:cNvPr id="9" name="objective-4">
             <a:extLst xmlns:a="http://schemas.openxmlformats.org/drawingml/2006/main">
               <a:ext uri="{FF2B5EF4-FFF2-40B4-BE49-F238E27FC236}">
-                <a16:creationId xmlns:a16="http://schemas.microsoft.com/office/drawing/2014/main" id="{1E6AD801-3C8B-4E60-90DA-871A731BB639}"/>
+                <a16:creationId xmlns:a16="http://schemas.microsoft.com/office/drawing/2014/main" id="{FD6235EE-1120-481F-9F80-6B73189421E9}"/>
               </a:ext>
             </a:extLst>
           </p:cNvPr>
@@ -5991,7 +5991,7 @@
     </p:spTree>
     <p:extLst>
       <p:ext uri="{BB962C8B-B14F-4D97-AF65-F5344CB8AC3E}">
-        <p14:creationId xmlns:p14="http://schemas.microsoft.com/office/powerpoint/2010/main" val="400131821"/>
+        <p14:creationId xmlns:p14="http://schemas.microsoft.com/office/powerpoint/2010/main" val="341321031"/>
       </p:ext>
     </p:extLst>
   </p:cSld>
@@ -6022,7 +6022,7 @@
           <p:cNvPr id="1" name="s3-rule">
             <a:extLst xmlns:a="http://schemas.openxmlformats.org/drawingml/2006/main">
               <a:ext uri="{FF2B5EF4-FFF2-40B4-BE49-F238E27FC236}">
-                <a16:creationId xmlns:a16="http://schemas.microsoft.com/office/drawing/2014/main" id="{3774FD59-DC21-4CAA-BE21-67BC022424E8}"/>
+                <a16:creationId xmlns:a16="http://schemas.microsoft.com/office/drawing/2014/main" id="{2FD89BE2-DE29-475C-953F-CB64AD059516}"/>
               </a:ext>
             </a:extLst>
           </p:cNvPr>
@@ -6055,7 +6055,7 @@
           <p:cNvPr id="2" name="s3-eyebrow">
             <a:extLst xmlns:a="http://schemas.openxmlformats.org/drawingml/2006/main">
               <a:ext uri="{FF2B5EF4-FFF2-40B4-BE49-F238E27FC236}">
-                <a16:creationId xmlns:a16="http://schemas.microsoft.com/office/drawing/2014/main" id="{CD4A55C8-C82C-4EA7-833D-DE7B64FA1DF6}"/>
+                <a16:creationId xmlns:a16="http://schemas.microsoft.com/office/drawing/2014/main" id="{D34A0568-FB58-40A8-B5E3-AEF94D16FFAD}"/>
               </a:ext>
             </a:extLst>
           </p:cNvPr>
@@ -6113,7 +6113,7 @@
           <p:cNvPr id="3" name="s3-title">
             <a:extLst xmlns:a="http://schemas.openxmlformats.org/drawingml/2006/main">
               <a:ext uri="{FF2B5EF4-FFF2-40B4-BE49-F238E27FC236}">
-                <a16:creationId xmlns:a16="http://schemas.microsoft.com/office/drawing/2014/main" id="{77DABFFF-4195-4C55-BB10-B2E0CF88CD24}"/>
+                <a16:creationId xmlns:a16="http://schemas.microsoft.com/office/drawing/2014/main" id="{6C5981D2-936A-4498-9BDB-6E5A799A8EF0}"/>
               </a:ext>
             </a:extLst>
           </p:cNvPr>
@@ -6171,7 +6171,7 @@
           <p:cNvPr id="4" name="s3-footer">
             <a:extLst xmlns:a="http://schemas.openxmlformats.org/drawingml/2006/main">
               <a:ext uri="{FF2B5EF4-FFF2-40B4-BE49-F238E27FC236}">
-                <a16:creationId xmlns:a16="http://schemas.microsoft.com/office/drawing/2014/main" id="{F1BCA020-484B-4C6B-952D-64E0FC4C38B2}"/>
+                <a16:creationId xmlns:a16="http://schemas.microsoft.com/office/drawing/2014/main" id="{BE2CDFDA-85F6-4629-A026-FF2A73D5D99F}"/>
               </a:ext>
             </a:extLst>
           </p:cNvPr>
@@ -6202,7 +6202,7 @@
           <p:cNvPr id="5" name="s3-identity">
             <a:extLst xmlns:a="http://schemas.openxmlformats.org/drawingml/2006/main">
               <a:ext uri="{FF2B5EF4-FFF2-40B4-BE49-F238E27FC236}">
-                <a16:creationId xmlns:a16="http://schemas.microsoft.com/office/drawing/2014/main" id="{C24BECBA-AE14-45AA-915A-FC3696963EAA}"/>
+                <a16:creationId xmlns:a16="http://schemas.microsoft.com/office/drawing/2014/main" id="{2B00ACAB-C184-4BBC-BBAA-7201303C8A7F}"/>
               </a:ext>
             </a:extLst>
           </p:cNvPr>
@@ -6260,7 +6260,7 @@
           <p:cNvPr id="6" name="core-no-0">
             <a:extLst xmlns:a="http://schemas.openxmlformats.org/drawingml/2006/main">
               <a:ext uri="{FF2B5EF4-FFF2-40B4-BE49-F238E27FC236}">
-                <a16:creationId xmlns:a16="http://schemas.microsoft.com/office/drawing/2014/main" id="{DEECFD50-2EB3-43EA-8C34-497DC40BF0D3}"/>
+                <a16:creationId xmlns:a16="http://schemas.microsoft.com/office/drawing/2014/main" id="{C4CA8011-E154-41E0-AA52-AFFF1E2A3CF1}"/>
               </a:ext>
             </a:extLst>
           </p:cNvPr>
@@ -6318,7 +6318,7 @@
           <p:cNvPr id="7" name="core-label-0">
             <a:extLst xmlns:a="http://schemas.openxmlformats.org/drawingml/2006/main">
               <a:ext uri="{FF2B5EF4-FFF2-40B4-BE49-F238E27FC236}">
-                <a16:creationId xmlns:a16="http://schemas.microsoft.com/office/drawing/2014/main" id="{2674F9D6-CE29-431E-A370-79805DF08D9E}"/>
+                <a16:creationId xmlns:a16="http://schemas.microsoft.com/office/drawing/2014/main" id="{D01800CF-F84A-456B-9C8E-DB4AF3DC8133}"/>
               </a:ext>
             </a:extLst>
           </p:cNvPr>
@@ -6376,7 +6376,7 @@
           <p:cNvPr id="8" name="core-body-0">
             <a:extLst xmlns:a="http://schemas.openxmlformats.org/drawingml/2006/main">
               <a:ext uri="{FF2B5EF4-FFF2-40B4-BE49-F238E27FC236}">
-                <a16:creationId xmlns:a16="http://schemas.microsoft.com/office/drawing/2014/main" id="{94A7B42B-DAEC-4CE0-B7FC-E6A0950D1D85}"/>
+                <a16:creationId xmlns:a16="http://schemas.microsoft.com/office/drawing/2014/main" id="{2E8ACC27-E525-4331-BD68-354B5A33D219}"/>
               </a:ext>
             </a:extLst>
           </p:cNvPr>
@@ -6440,7 +6440,7 @@
           <p:cNvPr id="9" name="core-no-1">
             <a:extLst xmlns:a="http://schemas.openxmlformats.org/drawingml/2006/main">
               <a:ext uri="{FF2B5EF4-FFF2-40B4-BE49-F238E27FC236}">
-                <a16:creationId xmlns:a16="http://schemas.microsoft.com/office/drawing/2014/main" id="{6810A67C-5289-49E6-A87A-642A4DC61BAA}"/>
+                <a16:creationId xmlns:a16="http://schemas.microsoft.com/office/drawing/2014/main" id="{1A3AD985-3D70-445B-A981-B0A91A549943}"/>
               </a:ext>
             </a:extLst>
           </p:cNvPr>
@@ -6498,7 +6498,7 @@
           <p:cNvPr id="10" name="core-body-1">
             <a:extLst xmlns:a="http://schemas.openxmlformats.org/drawingml/2006/main">
               <a:ext uri="{FF2B5EF4-FFF2-40B4-BE49-F238E27FC236}">
-                <a16:creationId xmlns:a16="http://schemas.microsoft.com/office/drawing/2014/main" id="{D28A403C-5DC0-4955-9C45-66FA7D5EEB70}"/>
+                <a16:creationId xmlns:a16="http://schemas.microsoft.com/office/drawing/2014/main" id="{A2E44275-B173-444A-8114-461E65B66CAC}"/>
               </a:ext>
             </a:extLst>
           </p:cNvPr>
@@ -6562,7 +6562,7 @@
           <p:cNvPr id="11" name="s3-takeaway-rule">
             <a:extLst xmlns:a="http://schemas.openxmlformats.org/drawingml/2006/main">
               <a:ext uri="{FF2B5EF4-FFF2-40B4-BE49-F238E27FC236}">
-                <a16:creationId xmlns:a16="http://schemas.microsoft.com/office/drawing/2014/main" id="{11072FD2-B569-4F0B-84ED-8D7BD47570A3}"/>
+                <a16:creationId xmlns:a16="http://schemas.microsoft.com/office/drawing/2014/main" id="{E24C6BF4-02F8-4B87-8CBD-5A66DCFE6A2F}"/>
               </a:ext>
             </a:extLst>
           </p:cNvPr>
@@ -6595,7 +6595,7 @@
           <p:cNvPr id="12" name="s3-takeaway">
             <a:extLst xmlns:a="http://schemas.openxmlformats.org/drawingml/2006/main">
               <a:ext uri="{FF2B5EF4-FFF2-40B4-BE49-F238E27FC236}">
-                <a16:creationId xmlns:a16="http://schemas.microsoft.com/office/drawing/2014/main" id="{38EC1B83-A335-4D3B-AFE6-93F16CF27B65}"/>
+                <a16:creationId xmlns:a16="http://schemas.microsoft.com/office/drawing/2014/main" id="{2F62C7B9-7EA1-4B62-9A26-81B4BDCE5EDE}"/>
               </a:ext>
             </a:extLst>
           </p:cNvPr>
@@ -6651,7 +6651,7 @@
     </p:spTree>
     <p:extLst>
       <p:ext uri="{BB962C8B-B14F-4D97-AF65-F5344CB8AC3E}">
-        <p14:creationId xmlns:p14="http://schemas.microsoft.com/office/powerpoint/2010/main" val="1634073520"/>
+        <p14:creationId xmlns:p14="http://schemas.microsoft.com/office/powerpoint/2010/main" val="842537646"/>
       </p:ext>
     </p:extLst>
   </p:cSld>
@@ -6682,7 +6682,7 @@
           <p:cNvPr id="1" name="s4-rule">
             <a:extLst xmlns:a="http://schemas.openxmlformats.org/drawingml/2006/main">
               <a:ext uri="{FF2B5EF4-FFF2-40B4-BE49-F238E27FC236}">
-                <a16:creationId xmlns:a16="http://schemas.microsoft.com/office/drawing/2014/main" id="{0961B2A7-7219-40D3-A183-21524A4CC295}"/>
+                <a16:creationId xmlns:a16="http://schemas.microsoft.com/office/drawing/2014/main" id="{CD01BF5B-5113-4A7B-A58E-18BBC529FC8E}"/>
               </a:ext>
             </a:extLst>
           </p:cNvPr>
@@ -6715,7 +6715,7 @@
           <p:cNvPr id="2" name="s4-eyebrow">
             <a:extLst xmlns:a="http://schemas.openxmlformats.org/drawingml/2006/main">
               <a:ext uri="{FF2B5EF4-FFF2-40B4-BE49-F238E27FC236}">
-                <a16:creationId xmlns:a16="http://schemas.microsoft.com/office/drawing/2014/main" id="{3F76D3C1-D004-4E0F-980D-A7512C1136D1}"/>
+                <a16:creationId xmlns:a16="http://schemas.microsoft.com/office/drawing/2014/main" id="{77913BBE-EE8A-409D-865A-C8EAA7BC1462}"/>
               </a:ext>
             </a:extLst>
           </p:cNvPr>
@@ -6773,7 +6773,7 @@
           <p:cNvPr id="3" name="s4-title">
             <a:extLst xmlns:a="http://schemas.openxmlformats.org/drawingml/2006/main">
               <a:ext uri="{FF2B5EF4-FFF2-40B4-BE49-F238E27FC236}">
-                <a16:creationId xmlns:a16="http://schemas.microsoft.com/office/drawing/2014/main" id="{76E53E4B-76A8-4680-BFDC-FE88724B92CF}"/>
+                <a16:creationId xmlns:a16="http://schemas.microsoft.com/office/drawing/2014/main" id="{D767024D-76E1-4124-8D37-B4390FEC9D79}"/>
               </a:ext>
             </a:extLst>
           </p:cNvPr>
@@ -6831,7 +6831,7 @@
           <p:cNvPr id="4" name="s4-footer">
             <a:extLst xmlns:a="http://schemas.openxmlformats.org/drawingml/2006/main">
               <a:ext uri="{FF2B5EF4-FFF2-40B4-BE49-F238E27FC236}">
-                <a16:creationId xmlns:a16="http://schemas.microsoft.com/office/drawing/2014/main" id="{9DA9EA81-95B9-414E-BF97-433F317343D3}"/>
+                <a16:creationId xmlns:a16="http://schemas.microsoft.com/office/drawing/2014/main" id="{9DE34ADE-74C6-413B-9619-83A57E555AC9}"/>
               </a:ext>
             </a:extLst>
           </p:cNvPr>
@@ -6862,7 +6862,7 @@
           <p:cNvPr id="5" name="s4-identity">
             <a:extLst xmlns:a="http://schemas.openxmlformats.org/drawingml/2006/main">
               <a:ext uri="{FF2B5EF4-FFF2-40B4-BE49-F238E27FC236}">
-                <a16:creationId xmlns:a16="http://schemas.microsoft.com/office/drawing/2014/main" id="{766A2CCC-AF90-448E-B35B-19F50E505017}"/>
+                <a16:creationId xmlns:a16="http://schemas.microsoft.com/office/drawing/2014/main" id="{38C3E315-33E4-4EA7-8DD1-83BC7D02ADDA}"/>
               </a:ext>
             </a:extLst>
           </p:cNvPr>
@@ -6920,7 +6920,7 @@
           <p:cNvPr id="6" name="core-no-0">
             <a:extLst xmlns:a="http://schemas.openxmlformats.org/drawingml/2006/main">
               <a:ext uri="{FF2B5EF4-FFF2-40B4-BE49-F238E27FC236}">
-                <a16:creationId xmlns:a16="http://schemas.microsoft.com/office/drawing/2014/main" id="{68688772-45B1-418B-A87E-0CB117435292}"/>
+                <a16:creationId xmlns:a16="http://schemas.microsoft.com/office/drawing/2014/main" id="{3C8504FA-0695-4AF2-8FE9-0FDEBEAE7726}"/>
               </a:ext>
             </a:extLst>
           </p:cNvPr>
@@ -6978,7 +6978,7 @@
           <p:cNvPr id="7" name="core-label-0">
             <a:extLst xmlns:a="http://schemas.openxmlformats.org/drawingml/2006/main">
               <a:ext uri="{FF2B5EF4-FFF2-40B4-BE49-F238E27FC236}">
-                <a16:creationId xmlns:a16="http://schemas.microsoft.com/office/drawing/2014/main" id="{8DCFDC12-CCBD-45C3-B519-707D920EF177}"/>
+                <a16:creationId xmlns:a16="http://schemas.microsoft.com/office/drawing/2014/main" id="{E3C449D2-5A34-4F82-A9EC-2DC83B0F08E7}"/>
               </a:ext>
             </a:extLst>
           </p:cNvPr>
@@ -7036,7 +7036,7 @@
           <p:cNvPr id="8" name="core-body-0">
             <a:extLst xmlns:a="http://schemas.openxmlformats.org/drawingml/2006/main">
               <a:ext uri="{FF2B5EF4-FFF2-40B4-BE49-F238E27FC236}">
-                <a16:creationId xmlns:a16="http://schemas.microsoft.com/office/drawing/2014/main" id="{7F5C8D56-4149-4E2E-BC26-7803D2500FAD}"/>
+                <a16:creationId xmlns:a16="http://schemas.microsoft.com/office/drawing/2014/main" id="{6AAFC056-0622-4783-AEED-F036A96CE0C5}"/>
               </a:ext>
             </a:extLst>
           </p:cNvPr>
@@ -7100,7 +7100,7 @@
           <p:cNvPr id="9" name="core-no-1">
             <a:extLst xmlns:a="http://schemas.openxmlformats.org/drawingml/2006/main">
               <a:ext uri="{FF2B5EF4-FFF2-40B4-BE49-F238E27FC236}">
-                <a16:creationId xmlns:a16="http://schemas.microsoft.com/office/drawing/2014/main" id="{76CE44AC-D85A-4834-BDCA-3D1D129E2FF5}"/>
+                <a16:creationId xmlns:a16="http://schemas.microsoft.com/office/drawing/2014/main" id="{9BB27275-0D53-4040-95DF-3F972304B86E}"/>
               </a:ext>
             </a:extLst>
           </p:cNvPr>
@@ -7158,7 +7158,7 @@
           <p:cNvPr id="10" name="core-body-1">
             <a:extLst xmlns:a="http://schemas.openxmlformats.org/drawingml/2006/main">
               <a:ext uri="{FF2B5EF4-FFF2-40B4-BE49-F238E27FC236}">
-                <a16:creationId xmlns:a16="http://schemas.microsoft.com/office/drawing/2014/main" id="{BA1D04E6-4BDC-4739-B535-CDD3E0D0B4B7}"/>
+                <a16:creationId xmlns:a16="http://schemas.microsoft.com/office/drawing/2014/main" id="{2B0B7474-0936-43DF-899E-A83BF8571839}"/>
               </a:ext>
             </a:extLst>
           </p:cNvPr>
@@ -7222,7 +7222,7 @@
           <p:cNvPr id="11" name="s4-takeaway-rule">
             <a:extLst xmlns:a="http://schemas.openxmlformats.org/drawingml/2006/main">
               <a:ext uri="{FF2B5EF4-FFF2-40B4-BE49-F238E27FC236}">
-                <a16:creationId xmlns:a16="http://schemas.microsoft.com/office/drawing/2014/main" id="{80D9AD1F-4EE7-4EB5-9FF5-B32CAE8B7D2A}"/>
+                <a16:creationId xmlns:a16="http://schemas.microsoft.com/office/drawing/2014/main" id="{704191CD-451C-42C7-BF8B-D4B393DFFB05}"/>
               </a:ext>
             </a:extLst>
           </p:cNvPr>
@@ -7255,7 +7255,7 @@
           <p:cNvPr id="12" name="s4-takeaway">
             <a:extLst xmlns:a="http://schemas.openxmlformats.org/drawingml/2006/main">
               <a:ext uri="{FF2B5EF4-FFF2-40B4-BE49-F238E27FC236}">
-                <a16:creationId xmlns:a16="http://schemas.microsoft.com/office/drawing/2014/main" id="{BC4A4E33-4D76-4C50-8CE1-A96F10A03184}"/>
+                <a16:creationId xmlns:a16="http://schemas.microsoft.com/office/drawing/2014/main" id="{E30757C4-CC0D-469C-9DA7-B2D8CADAECEC}"/>
               </a:ext>
             </a:extLst>
           </p:cNvPr>
@@ -7311,7 +7311,7 @@
     </p:spTree>
     <p:extLst>
       <p:ext uri="{BB962C8B-B14F-4D97-AF65-F5344CB8AC3E}">
-        <p14:creationId xmlns:p14="http://schemas.microsoft.com/office/powerpoint/2010/main" val="85503092"/>
+        <p14:creationId xmlns:p14="http://schemas.microsoft.com/office/powerpoint/2010/main" val="2114902206"/>
       </p:ext>
     </p:extLst>
   </p:cSld>
@@ -7342,7 +7342,7 @@
           <p:cNvPr id="1" name="s5-rule">
             <a:extLst xmlns:a="http://schemas.openxmlformats.org/drawingml/2006/main">
               <a:ext uri="{FF2B5EF4-FFF2-40B4-BE49-F238E27FC236}">
-                <a16:creationId xmlns:a16="http://schemas.microsoft.com/office/drawing/2014/main" id="{DAA53D5B-CFC6-4485-ACAB-7835EA161F98}"/>
+                <a16:creationId xmlns:a16="http://schemas.microsoft.com/office/drawing/2014/main" id="{425C5E88-B7BD-4B31-BCE6-0A845572B2FD}"/>
               </a:ext>
             </a:extLst>
           </p:cNvPr>
@@ -7375,7 +7375,7 @@
           <p:cNvPr id="2" name="s5-eyebrow">
             <a:extLst xmlns:a="http://schemas.openxmlformats.org/drawingml/2006/main">
               <a:ext uri="{FF2B5EF4-FFF2-40B4-BE49-F238E27FC236}">
-                <a16:creationId xmlns:a16="http://schemas.microsoft.com/office/drawing/2014/main" id="{DF63ABD5-AF91-48A3-9424-389855A6F3D5}"/>
+                <a16:creationId xmlns:a16="http://schemas.microsoft.com/office/drawing/2014/main" id="{C996BCE2-DC9F-4A29-8191-D37D60B74DFD}"/>
               </a:ext>
             </a:extLst>
           </p:cNvPr>
@@ -7433,7 +7433,7 @@
           <p:cNvPr id="3" name="s5-title">
             <a:extLst xmlns:a="http://schemas.openxmlformats.org/drawingml/2006/main">
               <a:ext uri="{FF2B5EF4-FFF2-40B4-BE49-F238E27FC236}">
-                <a16:creationId xmlns:a16="http://schemas.microsoft.com/office/drawing/2014/main" id="{9CA7EA53-56B3-43A2-9271-F35946C0A563}"/>
+                <a16:creationId xmlns:a16="http://schemas.microsoft.com/office/drawing/2014/main" id="{B43E37D5-B7DD-4D31-9717-0FE2E2FDF0B2}"/>
               </a:ext>
             </a:extLst>
           </p:cNvPr>
@@ -7491,7 +7491,7 @@
           <p:cNvPr id="4" name="s5-footer">
             <a:extLst xmlns:a="http://schemas.openxmlformats.org/drawingml/2006/main">
               <a:ext uri="{FF2B5EF4-FFF2-40B4-BE49-F238E27FC236}">
-                <a16:creationId xmlns:a16="http://schemas.microsoft.com/office/drawing/2014/main" id="{2961C220-C093-4395-91A3-65DD7D330F78}"/>
+                <a16:creationId xmlns:a16="http://schemas.microsoft.com/office/drawing/2014/main" id="{48B46CAC-EDC2-46FC-BB16-3DF622C36CFC}"/>
               </a:ext>
             </a:extLst>
           </p:cNvPr>
@@ -7522,7 +7522,7 @@
           <p:cNvPr id="5" name="s5-identity">
             <a:extLst xmlns:a="http://schemas.openxmlformats.org/drawingml/2006/main">
               <a:ext uri="{FF2B5EF4-FFF2-40B4-BE49-F238E27FC236}">
-                <a16:creationId xmlns:a16="http://schemas.microsoft.com/office/drawing/2014/main" id="{C27003FB-68D5-478C-82E5-8C14514F939F}"/>
+                <a16:creationId xmlns:a16="http://schemas.microsoft.com/office/drawing/2014/main" id="{614FDDFA-132B-47D9-B3B7-DCC8476BCD42}"/>
               </a:ext>
             </a:extLst>
           </p:cNvPr>
@@ -7580,7 +7580,7 @@
           <p:cNvPr id="6" name="core-no-0">
             <a:extLst xmlns:a="http://schemas.openxmlformats.org/drawingml/2006/main">
               <a:ext uri="{FF2B5EF4-FFF2-40B4-BE49-F238E27FC236}">
-                <a16:creationId xmlns:a16="http://schemas.microsoft.com/office/drawing/2014/main" id="{6C648D9A-7B77-491A-9D9F-3B70E6DAD537}"/>
+                <a16:creationId xmlns:a16="http://schemas.microsoft.com/office/drawing/2014/main" id="{BF29C1B3-DB9D-4C95-AB13-646C6B0E9C38}"/>
               </a:ext>
             </a:extLst>
           </p:cNvPr>
@@ -7638,7 +7638,7 @@
           <p:cNvPr id="7" name="core-label-0">
             <a:extLst xmlns:a="http://schemas.openxmlformats.org/drawingml/2006/main">
               <a:ext uri="{FF2B5EF4-FFF2-40B4-BE49-F238E27FC236}">
-                <a16:creationId xmlns:a16="http://schemas.microsoft.com/office/drawing/2014/main" id="{AE0FAB4D-7D1B-401B-B5F0-C4D801581DCA}"/>
+                <a16:creationId xmlns:a16="http://schemas.microsoft.com/office/drawing/2014/main" id="{F3557C52-7903-4585-BF76-3074F9A67370}"/>
               </a:ext>
             </a:extLst>
           </p:cNvPr>
@@ -7696,7 +7696,7 @@
           <p:cNvPr id="8" name="core-body-0">
             <a:extLst xmlns:a="http://schemas.openxmlformats.org/drawingml/2006/main">
               <a:ext uri="{FF2B5EF4-FFF2-40B4-BE49-F238E27FC236}">
-                <a16:creationId xmlns:a16="http://schemas.microsoft.com/office/drawing/2014/main" id="{8BBB3875-2963-41F6-BE8B-43ED189D11DA}"/>
+                <a16:creationId xmlns:a16="http://schemas.microsoft.com/office/drawing/2014/main" id="{644B61F5-884D-4EEF-ACD7-D1E16DDF9E42}"/>
               </a:ext>
             </a:extLst>
           </p:cNvPr>
@@ -7760,7 +7760,7 @@
           <p:cNvPr id="9" name="core-no-1">
             <a:extLst xmlns:a="http://schemas.openxmlformats.org/drawingml/2006/main">
               <a:ext uri="{FF2B5EF4-FFF2-40B4-BE49-F238E27FC236}">
-                <a16:creationId xmlns:a16="http://schemas.microsoft.com/office/drawing/2014/main" id="{CA433B4A-8A4B-4939-A104-64B1192181AD}"/>
+                <a16:creationId xmlns:a16="http://schemas.microsoft.com/office/drawing/2014/main" id="{42D587BF-87B0-4507-86B0-F8C245E45209}"/>
               </a:ext>
             </a:extLst>
           </p:cNvPr>
@@ -7818,7 +7818,7 @@
           <p:cNvPr id="10" name="core-body-1">
             <a:extLst xmlns:a="http://schemas.openxmlformats.org/drawingml/2006/main">
               <a:ext uri="{FF2B5EF4-FFF2-40B4-BE49-F238E27FC236}">
-                <a16:creationId xmlns:a16="http://schemas.microsoft.com/office/drawing/2014/main" id="{9B664468-ECE6-4177-A22B-D74ADFB467CB}"/>
+                <a16:creationId xmlns:a16="http://schemas.microsoft.com/office/drawing/2014/main" id="{A597C6A3-6214-4C68-AC16-1F3416E3F79C}"/>
               </a:ext>
             </a:extLst>
           </p:cNvPr>
@@ -7882,7 +7882,7 @@
           <p:cNvPr id="11" name="s5-takeaway-rule">
             <a:extLst xmlns:a="http://schemas.openxmlformats.org/drawingml/2006/main">
               <a:ext uri="{FF2B5EF4-FFF2-40B4-BE49-F238E27FC236}">
-                <a16:creationId xmlns:a16="http://schemas.microsoft.com/office/drawing/2014/main" id="{CDE8D3D3-5698-49E1-AEAC-F27DC4D6650F}"/>
+                <a16:creationId xmlns:a16="http://schemas.microsoft.com/office/drawing/2014/main" id="{541AB388-5F69-400F-9E32-37CCBC196366}"/>
               </a:ext>
             </a:extLst>
           </p:cNvPr>
@@ -7915,7 +7915,7 @@
           <p:cNvPr id="12" name="s5-takeaway">
             <a:extLst xmlns:a="http://schemas.openxmlformats.org/drawingml/2006/main">
               <a:ext uri="{FF2B5EF4-FFF2-40B4-BE49-F238E27FC236}">
-                <a16:creationId xmlns:a16="http://schemas.microsoft.com/office/drawing/2014/main" id="{2248333C-5FC9-4D2F-921D-938EDA144942}"/>
+                <a16:creationId xmlns:a16="http://schemas.microsoft.com/office/drawing/2014/main" id="{64C974E1-FADC-4A9A-9141-219BE60D1337}"/>
               </a:ext>
             </a:extLst>
           </p:cNvPr>
@@ -7971,7 +7971,7 @@
     </p:spTree>
     <p:extLst>
       <p:ext uri="{BB962C8B-B14F-4D97-AF65-F5344CB8AC3E}">
-        <p14:creationId xmlns:p14="http://schemas.microsoft.com/office/powerpoint/2010/main" val="460027885"/>
+        <p14:creationId xmlns:p14="http://schemas.microsoft.com/office/powerpoint/2010/main" val="1981026386"/>
       </p:ext>
     </p:extLst>
   </p:cSld>
@@ -8002,7 +8002,7 @@
           <p:cNvPr id="1" name="s6-rule">
             <a:extLst xmlns:a="http://schemas.openxmlformats.org/drawingml/2006/main">
               <a:ext uri="{FF2B5EF4-FFF2-40B4-BE49-F238E27FC236}">
-                <a16:creationId xmlns:a16="http://schemas.microsoft.com/office/drawing/2014/main" id="{A9E53274-E992-409C-B5D4-672D8E8BB1E1}"/>
+                <a16:creationId xmlns:a16="http://schemas.microsoft.com/office/drawing/2014/main" id="{00E13CCF-50C2-4388-955D-BB43D7053717}"/>
               </a:ext>
             </a:extLst>
           </p:cNvPr>
@@ -8035,7 +8035,7 @@
           <p:cNvPr id="2" name="s6-eyebrow">
             <a:extLst xmlns:a="http://schemas.openxmlformats.org/drawingml/2006/main">
               <a:ext uri="{FF2B5EF4-FFF2-40B4-BE49-F238E27FC236}">
-                <a16:creationId xmlns:a16="http://schemas.microsoft.com/office/drawing/2014/main" id="{FD151333-DEF1-48DB-A640-5814EEC7290F}"/>
+                <a16:creationId xmlns:a16="http://schemas.microsoft.com/office/drawing/2014/main" id="{3C94ACF4-DF06-448F-AE0A-7C2F20297FB6}"/>
               </a:ext>
             </a:extLst>
           </p:cNvPr>
@@ -8093,7 +8093,7 @@
           <p:cNvPr id="3" name="s6-title">
             <a:extLst xmlns:a="http://schemas.openxmlformats.org/drawingml/2006/main">
               <a:ext uri="{FF2B5EF4-FFF2-40B4-BE49-F238E27FC236}">
-                <a16:creationId xmlns:a16="http://schemas.microsoft.com/office/drawing/2014/main" id="{9F0DA9DB-B403-4B0E-83A2-E63519899B89}"/>
+                <a16:creationId xmlns:a16="http://schemas.microsoft.com/office/drawing/2014/main" id="{0A4DA435-1462-41C6-B9BF-9911C7A33A9F}"/>
               </a:ext>
             </a:extLst>
           </p:cNvPr>
@@ -8151,7 +8151,7 @@
           <p:cNvPr id="4" name="s6-footer">
             <a:extLst xmlns:a="http://schemas.openxmlformats.org/drawingml/2006/main">
               <a:ext uri="{FF2B5EF4-FFF2-40B4-BE49-F238E27FC236}">
-                <a16:creationId xmlns:a16="http://schemas.microsoft.com/office/drawing/2014/main" id="{C585E0DD-0D6A-4B61-B248-D6996CE2BA3C}"/>
+                <a16:creationId xmlns:a16="http://schemas.microsoft.com/office/drawing/2014/main" id="{494E54C3-5AB8-4A92-B7FA-066F1228A588}"/>
               </a:ext>
             </a:extLst>
           </p:cNvPr>
@@ -8182,7 +8182,7 @@
           <p:cNvPr id="5" name="s6-identity">
             <a:extLst xmlns:a="http://schemas.openxmlformats.org/drawingml/2006/main">
               <a:ext uri="{FF2B5EF4-FFF2-40B4-BE49-F238E27FC236}">
-                <a16:creationId xmlns:a16="http://schemas.microsoft.com/office/drawing/2014/main" id="{C3712C41-BDFE-42C9-8F4B-486F7742046C}"/>
+                <a16:creationId xmlns:a16="http://schemas.microsoft.com/office/drawing/2014/main" id="{10BD8CE4-4449-44CE-9154-48A6127576E5}"/>
               </a:ext>
             </a:extLst>
           </p:cNvPr>
@@ -8240,7 +8240,7 @@
           <p:cNvPr id="6" name="core-no-0">
             <a:extLst xmlns:a="http://schemas.openxmlformats.org/drawingml/2006/main">
               <a:ext uri="{FF2B5EF4-FFF2-40B4-BE49-F238E27FC236}">
-                <a16:creationId xmlns:a16="http://schemas.microsoft.com/office/drawing/2014/main" id="{3B883D85-DAB9-441E-BCEC-83A64F0FD74E}"/>
+                <a16:creationId xmlns:a16="http://schemas.microsoft.com/office/drawing/2014/main" id="{5DE1A2E6-ACDD-477E-82DA-BB2DE78C0B53}"/>
               </a:ext>
             </a:extLst>
           </p:cNvPr>
@@ -8298,7 +8298,7 @@
           <p:cNvPr id="7" name="core-label-0">
             <a:extLst xmlns:a="http://schemas.openxmlformats.org/drawingml/2006/main">
               <a:ext uri="{FF2B5EF4-FFF2-40B4-BE49-F238E27FC236}">
-                <a16:creationId xmlns:a16="http://schemas.microsoft.com/office/drawing/2014/main" id="{03544C6B-F3B0-4A0B-992A-410B9FF07D0F}"/>
+                <a16:creationId xmlns:a16="http://schemas.microsoft.com/office/drawing/2014/main" id="{25E04414-1216-43A0-97B5-B57455E1B9F6}"/>
               </a:ext>
             </a:extLst>
           </p:cNvPr>
@@ -8356,7 +8356,7 @@
           <p:cNvPr id="8" name="core-body-0">
             <a:extLst xmlns:a="http://schemas.openxmlformats.org/drawingml/2006/main">
               <a:ext uri="{FF2B5EF4-FFF2-40B4-BE49-F238E27FC236}">
-                <a16:creationId xmlns:a16="http://schemas.microsoft.com/office/drawing/2014/main" id="{CC127C0A-DACD-49CF-8028-2C8442928A1E}"/>
+                <a16:creationId xmlns:a16="http://schemas.microsoft.com/office/drawing/2014/main" id="{97E59AC1-11B4-4637-BDEC-8F5BF3E4849D}"/>
               </a:ext>
             </a:extLst>
           </p:cNvPr>
@@ -8420,7 +8420,7 @@
           <p:cNvPr id="9" name="core-no-1">
             <a:extLst xmlns:a="http://schemas.openxmlformats.org/drawingml/2006/main">
               <a:ext uri="{FF2B5EF4-FFF2-40B4-BE49-F238E27FC236}">
-                <a16:creationId xmlns:a16="http://schemas.microsoft.com/office/drawing/2014/main" id="{6855EAA2-F106-471E-9B65-36D22CD4AADA}"/>
+                <a16:creationId xmlns:a16="http://schemas.microsoft.com/office/drawing/2014/main" id="{F808AB1C-2045-4D3F-9B44-4FDB7009F4DD}"/>
               </a:ext>
             </a:extLst>
           </p:cNvPr>
@@ -8478,7 +8478,7 @@
           <p:cNvPr id="10" name="core-body-1">
             <a:extLst xmlns:a="http://schemas.openxmlformats.org/drawingml/2006/main">
               <a:ext uri="{FF2B5EF4-FFF2-40B4-BE49-F238E27FC236}">
-                <a16:creationId xmlns:a16="http://schemas.microsoft.com/office/drawing/2014/main" id="{4E54443D-4CC1-4A5B-8E08-0B17B98B1DD9}"/>
+                <a16:creationId xmlns:a16="http://schemas.microsoft.com/office/drawing/2014/main" id="{8F28FE49-3582-40CB-9334-0859E2686A9F}"/>
               </a:ext>
             </a:extLst>
           </p:cNvPr>
@@ -8542,7 +8542,7 @@
           <p:cNvPr id="11" name="s6-takeaway-rule">
             <a:extLst xmlns:a="http://schemas.openxmlformats.org/drawingml/2006/main">
               <a:ext uri="{FF2B5EF4-FFF2-40B4-BE49-F238E27FC236}">
-                <a16:creationId xmlns:a16="http://schemas.microsoft.com/office/drawing/2014/main" id="{4AC2E887-4E07-4843-978C-B97EE5436403}"/>
+                <a16:creationId xmlns:a16="http://schemas.microsoft.com/office/drawing/2014/main" id="{355BF1A7-3DB9-4A91-ACF5-67F878B2DA71}"/>
               </a:ext>
             </a:extLst>
           </p:cNvPr>
@@ -8575,7 +8575,7 @@
           <p:cNvPr id="12" name="s6-takeaway">
             <a:extLst xmlns:a="http://schemas.openxmlformats.org/drawingml/2006/main">
               <a:ext uri="{FF2B5EF4-FFF2-40B4-BE49-F238E27FC236}">
-                <a16:creationId xmlns:a16="http://schemas.microsoft.com/office/drawing/2014/main" id="{9F199E72-25C3-4F79-BEE4-82E0FB7D03C4}"/>
+                <a16:creationId xmlns:a16="http://schemas.microsoft.com/office/drawing/2014/main" id="{CABF6850-1647-4E6C-AFF5-F564DF48768B}"/>
               </a:ext>
             </a:extLst>
           </p:cNvPr>
@@ -8631,7 +8631,7 @@
     </p:spTree>
     <p:extLst>
       <p:ext uri="{BB962C8B-B14F-4D97-AF65-F5344CB8AC3E}">
-        <p14:creationId xmlns:p14="http://schemas.microsoft.com/office/powerpoint/2010/main" val="1609689082"/>
+        <p14:creationId xmlns:p14="http://schemas.microsoft.com/office/powerpoint/2010/main" val="1909130707"/>
       </p:ext>
     </p:extLst>
   </p:cSld>
@@ -8662,7 +8662,7 @@
           <p:cNvPr id="1" name="s7-rule">
             <a:extLst xmlns:a="http://schemas.openxmlformats.org/drawingml/2006/main">
               <a:ext uri="{FF2B5EF4-FFF2-40B4-BE49-F238E27FC236}">
-                <a16:creationId xmlns:a16="http://schemas.microsoft.com/office/drawing/2014/main" id="{FC847551-D036-495E-AE71-2B6AD24408B6}"/>
+                <a16:creationId xmlns:a16="http://schemas.microsoft.com/office/drawing/2014/main" id="{6FB708B8-27A4-4E11-901E-FE0CCBB4233A}"/>
               </a:ext>
             </a:extLst>
           </p:cNvPr>
@@ -8695,7 +8695,7 @@
           <p:cNvPr id="2" name="s7-eyebrow">
             <a:extLst xmlns:a="http://schemas.openxmlformats.org/drawingml/2006/main">
               <a:ext uri="{FF2B5EF4-FFF2-40B4-BE49-F238E27FC236}">
-                <a16:creationId xmlns:a16="http://schemas.microsoft.com/office/drawing/2014/main" id="{F6E6CD37-810D-4932-BEEF-DBBF3B55BE8D}"/>
+                <a16:creationId xmlns:a16="http://schemas.microsoft.com/office/drawing/2014/main" id="{7C2D6D56-7DBA-4C6E-A9C6-7083934F7A42}"/>
               </a:ext>
             </a:extLst>
           </p:cNvPr>
@@ -8753,7 +8753,7 @@
           <p:cNvPr id="3" name="s7-title">
             <a:extLst xmlns:a="http://schemas.openxmlformats.org/drawingml/2006/main">
               <a:ext uri="{FF2B5EF4-FFF2-40B4-BE49-F238E27FC236}">
-                <a16:creationId xmlns:a16="http://schemas.microsoft.com/office/drawing/2014/main" id="{EB9E411F-8AC5-43F1-8CB7-AEEE2D49AAE4}"/>
+                <a16:creationId xmlns:a16="http://schemas.microsoft.com/office/drawing/2014/main" id="{396291E5-4E73-4AAD-BED3-98F73B39034C}"/>
               </a:ext>
             </a:extLst>
           </p:cNvPr>
@@ -8811,7 +8811,7 @@
           <p:cNvPr id="4" name="s7-footer">
             <a:extLst xmlns:a="http://schemas.openxmlformats.org/drawingml/2006/main">
               <a:ext uri="{FF2B5EF4-FFF2-40B4-BE49-F238E27FC236}">
-                <a16:creationId xmlns:a16="http://schemas.microsoft.com/office/drawing/2014/main" id="{F27B1B40-E2F2-49BC-A90D-D1952AEB151C}"/>
+                <a16:creationId xmlns:a16="http://schemas.microsoft.com/office/drawing/2014/main" id="{43A6DFA4-3B37-40FD-B231-85038DCCE9F0}"/>
               </a:ext>
             </a:extLst>
           </p:cNvPr>
@@ -8842,7 +8842,7 @@
           <p:cNvPr id="5" name="s7-identity">
             <a:extLst xmlns:a="http://schemas.openxmlformats.org/drawingml/2006/main">
               <a:ext uri="{FF2B5EF4-FFF2-40B4-BE49-F238E27FC236}">
-                <a16:creationId xmlns:a16="http://schemas.microsoft.com/office/drawing/2014/main" id="{627A1B31-7C86-4BF0-9BAF-7F7F454B1F6F}"/>
+                <a16:creationId xmlns:a16="http://schemas.microsoft.com/office/drawing/2014/main" id="{CA98734B-06BE-4045-8194-8A720EDEE9C7}"/>
               </a:ext>
             </a:extLst>
           </p:cNvPr>
@@ -8900,7 +8900,7 @@
           <p:cNvPr id="6" name="core-no-0">
             <a:extLst xmlns:a="http://schemas.openxmlformats.org/drawingml/2006/main">
               <a:ext uri="{FF2B5EF4-FFF2-40B4-BE49-F238E27FC236}">
-                <a16:creationId xmlns:a16="http://schemas.microsoft.com/office/drawing/2014/main" id="{064685A4-2575-4CAD-951E-FE097DB467F3}"/>
+                <a16:creationId xmlns:a16="http://schemas.microsoft.com/office/drawing/2014/main" id="{B39EA238-74DD-4ADF-8F9E-D50DA2C2B770}"/>
               </a:ext>
             </a:extLst>
           </p:cNvPr>
@@ -8958,7 +8958,7 @@
           <p:cNvPr id="7" name="core-label-0">
             <a:extLst xmlns:a="http://schemas.openxmlformats.org/drawingml/2006/main">
               <a:ext uri="{FF2B5EF4-FFF2-40B4-BE49-F238E27FC236}">
-                <a16:creationId xmlns:a16="http://schemas.microsoft.com/office/drawing/2014/main" id="{38B59106-F3B7-48D0-8277-361D6AC5A521}"/>
+                <a16:creationId xmlns:a16="http://schemas.microsoft.com/office/drawing/2014/main" id="{B3E4A48D-B3A5-44D9-A135-3FBC86D4D96D}"/>
               </a:ext>
             </a:extLst>
           </p:cNvPr>
@@ -9016,7 +9016,7 @@
           <p:cNvPr id="8" name="core-body-0">
             <a:extLst xmlns:a="http://schemas.openxmlformats.org/drawingml/2006/main">
               <a:ext uri="{FF2B5EF4-FFF2-40B4-BE49-F238E27FC236}">
-                <a16:creationId xmlns:a16="http://schemas.microsoft.com/office/drawing/2014/main" id="{AE36FF90-CE78-42FB-858F-3B9A001EE22E}"/>
+                <a16:creationId xmlns:a16="http://schemas.microsoft.com/office/drawing/2014/main" id="{039CB013-6DCF-40F5-AA29-A078DBC1BA5A}"/>
               </a:ext>
             </a:extLst>
           </p:cNvPr>
@@ -9080,7 +9080,7 @@
           <p:cNvPr id="9" name="core-no-1">
             <a:extLst xmlns:a="http://schemas.openxmlformats.org/drawingml/2006/main">
               <a:ext uri="{FF2B5EF4-FFF2-40B4-BE49-F238E27FC236}">
-                <a16:creationId xmlns:a16="http://schemas.microsoft.com/office/drawing/2014/main" id="{C36598A9-FDF3-49B5-850C-77F2C01A081B}"/>
+                <a16:creationId xmlns:a16="http://schemas.microsoft.com/office/drawing/2014/main" id="{3068BBBE-E130-45F8-AEA6-2AA698393039}"/>
               </a:ext>
             </a:extLst>
           </p:cNvPr>
@@ -9138,7 +9138,7 @@
           <p:cNvPr id="10" name="core-body-1">
             <a:extLst xmlns:a="http://schemas.openxmlformats.org/drawingml/2006/main">
               <a:ext uri="{FF2B5EF4-FFF2-40B4-BE49-F238E27FC236}">
-                <a16:creationId xmlns:a16="http://schemas.microsoft.com/office/drawing/2014/main" id="{E6F6F0F9-3919-4005-8482-5C105DC29E68}"/>
+                <a16:creationId xmlns:a16="http://schemas.microsoft.com/office/drawing/2014/main" id="{1427E3B7-FA8F-4354-9700-070BA3E64D4A}"/>
               </a:ext>
             </a:extLst>
           </p:cNvPr>
@@ -9202,7 +9202,7 @@
           <p:cNvPr id="11" name="s7-takeaway-rule">
             <a:extLst xmlns:a="http://schemas.openxmlformats.org/drawingml/2006/main">
               <a:ext uri="{FF2B5EF4-FFF2-40B4-BE49-F238E27FC236}">
-                <a16:creationId xmlns:a16="http://schemas.microsoft.com/office/drawing/2014/main" id="{84543FC5-4EFB-488F-A141-EF03BAD95263}"/>
+                <a16:creationId xmlns:a16="http://schemas.microsoft.com/office/drawing/2014/main" id="{EDFC501F-EF95-41DF-8170-F582B8FEE2FD}"/>
               </a:ext>
             </a:extLst>
           </p:cNvPr>
@@ -9235,7 +9235,7 @@
           <p:cNvPr id="12" name="s7-takeaway">
             <a:extLst xmlns:a="http://schemas.openxmlformats.org/drawingml/2006/main">
               <a:ext uri="{FF2B5EF4-FFF2-40B4-BE49-F238E27FC236}">
-                <a16:creationId xmlns:a16="http://schemas.microsoft.com/office/drawing/2014/main" id="{A9C7CED6-628F-4795-84EF-366C974F6DD6}"/>
+                <a16:creationId xmlns:a16="http://schemas.microsoft.com/office/drawing/2014/main" id="{47699BAA-CB27-4012-B1D1-0CDD4C0D4614}"/>
               </a:ext>
             </a:extLst>
           </p:cNvPr>
@@ -9291,7 +9291,7 @@
     </p:spTree>
     <p:extLst>
       <p:ext uri="{BB962C8B-B14F-4D97-AF65-F5344CB8AC3E}">
-        <p14:creationId xmlns:p14="http://schemas.microsoft.com/office/powerpoint/2010/main" val="180105970"/>
+        <p14:creationId xmlns:p14="http://schemas.microsoft.com/office/powerpoint/2010/main" val="1520119692"/>
       </p:ext>
     </p:extLst>
   </p:cSld>
@@ -9322,7 +9322,7 @@
           <p:cNvPr id="1" name="s8-rule">
             <a:extLst xmlns:a="http://schemas.openxmlformats.org/drawingml/2006/main">
               <a:ext uri="{FF2B5EF4-FFF2-40B4-BE49-F238E27FC236}">
-                <a16:creationId xmlns:a16="http://schemas.microsoft.com/office/drawing/2014/main" id="{2184739B-B1E6-494F-A972-D49F4C155DAB}"/>
+                <a16:creationId xmlns:a16="http://schemas.microsoft.com/office/drawing/2014/main" id="{4FA9F439-860F-4D52-A546-FCDD332BF9F7}"/>
               </a:ext>
             </a:extLst>
           </p:cNvPr>
@@ -9355,7 +9355,7 @@
           <p:cNvPr id="2" name="s8-eyebrow">
             <a:extLst xmlns:a="http://schemas.openxmlformats.org/drawingml/2006/main">
               <a:ext uri="{FF2B5EF4-FFF2-40B4-BE49-F238E27FC236}">
-                <a16:creationId xmlns:a16="http://schemas.microsoft.com/office/drawing/2014/main" id="{81033ADF-451B-46E4-876C-E4C06EA1EC1B}"/>
+                <a16:creationId xmlns:a16="http://schemas.microsoft.com/office/drawing/2014/main" id="{1E384121-0CB8-4367-B944-1F73983C9753}"/>
               </a:ext>
             </a:extLst>
           </p:cNvPr>
@@ -9413,7 +9413,7 @@
           <p:cNvPr id="3" name="s8-title">
             <a:extLst xmlns:a="http://schemas.openxmlformats.org/drawingml/2006/main">
               <a:ext uri="{FF2B5EF4-FFF2-40B4-BE49-F238E27FC236}">
-                <a16:creationId xmlns:a16="http://schemas.microsoft.com/office/drawing/2014/main" id="{E88F7105-39F1-425B-B6E8-785F1D0C10DB}"/>
+                <a16:creationId xmlns:a16="http://schemas.microsoft.com/office/drawing/2014/main" id="{74504D57-BD63-4BBE-9C75-216AF236B065}"/>
               </a:ext>
             </a:extLst>
           </p:cNvPr>
@@ -9471,7 +9471,7 @@
           <p:cNvPr id="4" name="s8-footer">
             <a:extLst xmlns:a="http://schemas.openxmlformats.org/drawingml/2006/main">
               <a:ext uri="{FF2B5EF4-FFF2-40B4-BE49-F238E27FC236}">
-                <a16:creationId xmlns:a16="http://schemas.microsoft.com/office/drawing/2014/main" id="{A20DBB55-48FF-4121-BA00-18355FD94A59}"/>
+                <a16:creationId xmlns:a16="http://schemas.microsoft.com/office/drawing/2014/main" id="{736E9032-54CB-4D22-9BB8-E1B091C7CFDB}"/>
               </a:ext>
             </a:extLst>
           </p:cNvPr>
@@ -9502,7 +9502,7 @@
           <p:cNvPr id="5" name="s8-identity">
             <a:extLst xmlns:a="http://schemas.openxmlformats.org/drawingml/2006/main">
               <a:ext uri="{FF2B5EF4-FFF2-40B4-BE49-F238E27FC236}">
-                <a16:creationId xmlns:a16="http://schemas.microsoft.com/office/drawing/2014/main" id="{64B492D8-B682-4310-9087-F6047587E871}"/>
+                <a16:creationId xmlns:a16="http://schemas.microsoft.com/office/drawing/2014/main" id="{51596086-C84A-4CA9-8BEE-2906272DC722}"/>
               </a:ext>
             </a:extLst>
           </p:cNvPr>
@@ -9560,7 +9560,7 @@
           <p:cNvPr id="6" name="core-no-0">
             <a:extLst xmlns:a="http://schemas.openxmlformats.org/drawingml/2006/main">
               <a:ext uri="{FF2B5EF4-FFF2-40B4-BE49-F238E27FC236}">
-                <a16:creationId xmlns:a16="http://schemas.microsoft.com/office/drawing/2014/main" id="{FEA134F1-3172-4E14-B628-812DF00BBA9F}"/>
+                <a16:creationId xmlns:a16="http://schemas.microsoft.com/office/drawing/2014/main" id="{DED8AAC8-A92B-4E14-BF10-6ACFC1900887}"/>
               </a:ext>
             </a:extLst>
           </p:cNvPr>
@@ -9618,7 +9618,7 @@
           <p:cNvPr id="7" name="core-label-0">
             <a:extLst xmlns:a="http://schemas.openxmlformats.org/drawingml/2006/main">
               <a:ext uri="{FF2B5EF4-FFF2-40B4-BE49-F238E27FC236}">
-                <a16:creationId xmlns:a16="http://schemas.microsoft.com/office/drawing/2014/main" id="{A583C5BE-F067-454F-BC39-B4B513FBF1D9}"/>
+                <a16:creationId xmlns:a16="http://schemas.microsoft.com/office/drawing/2014/main" id="{33B1AA48-A848-4FF3-8B11-A10F96CAB9E3}"/>
               </a:ext>
             </a:extLst>
           </p:cNvPr>
@@ -9676,7 +9676,7 @@
           <p:cNvPr id="8" name="core-body-0">
             <a:extLst xmlns:a="http://schemas.openxmlformats.org/drawingml/2006/main">
               <a:ext uri="{FF2B5EF4-FFF2-40B4-BE49-F238E27FC236}">
-                <a16:creationId xmlns:a16="http://schemas.microsoft.com/office/drawing/2014/main" id="{CC092F6B-B88A-4C84-8950-F8E026758097}"/>
+                <a16:creationId xmlns:a16="http://schemas.microsoft.com/office/drawing/2014/main" id="{04A2559D-487D-44DF-B1F5-765DBB22D72C}"/>
               </a:ext>
             </a:extLst>
           </p:cNvPr>
@@ -9740,7 +9740,7 @@
           <p:cNvPr id="9" name="core-no-1">
             <a:extLst xmlns:a="http://schemas.openxmlformats.org/drawingml/2006/main">
               <a:ext uri="{FF2B5EF4-FFF2-40B4-BE49-F238E27FC236}">
-                <a16:creationId xmlns:a16="http://schemas.microsoft.com/office/drawing/2014/main" id="{4B58D563-4C63-4A58-973B-056D11E9660B}"/>
+                <a16:creationId xmlns:a16="http://schemas.microsoft.com/office/drawing/2014/main" id="{422CF4C1-70F1-447D-A39C-7C5C71FECDF3}"/>
               </a:ext>
             </a:extLst>
           </p:cNvPr>
@@ -9798,7 +9798,7 @@
           <p:cNvPr id="10" name="core-body-1">
             <a:extLst xmlns:a="http://schemas.openxmlformats.org/drawingml/2006/main">
               <a:ext uri="{FF2B5EF4-FFF2-40B4-BE49-F238E27FC236}">
-                <a16:creationId xmlns:a16="http://schemas.microsoft.com/office/drawing/2014/main" id="{DE08F063-0ADD-475B-8958-99E0452D766D}"/>
+                <a16:creationId xmlns:a16="http://schemas.microsoft.com/office/drawing/2014/main" id="{435F27DF-25CD-4020-BE42-F5AB5385B680}"/>
               </a:ext>
             </a:extLst>
           </p:cNvPr>
@@ -9862,7 +9862,7 @@
           <p:cNvPr id="11" name="s8-takeaway-rule">
             <a:extLst xmlns:a="http://schemas.openxmlformats.org/drawingml/2006/main">
               <a:ext uri="{FF2B5EF4-FFF2-40B4-BE49-F238E27FC236}">
-                <a16:creationId xmlns:a16="http://schemas.microsoft.com/office/drawing/2014/main" id="{BF9FAB12-70F6-4E58-8D33-F7EBFD895944}"/>
+                <a16:creationId xmlns:a16="http://schemas.microsoft.com/office/drawing/2014/main" id="{D0251DD6-0DFC-4B35-878A-0BFCD0689684}"/>
               </a:ext>
             </a:extLst>
           </p:cNvPr>
@@ -9895,7 +9895,7 @@
           <p:cNvPr id="12" name="s8-takeaway">
             <a:extLst xmlns:a="http://schemas.openxmlformats.org/drawingml/2006/main">
               <a:ext uri="{FF2B5EF4-FFF2-40B4-BE49-F238E27FC236}">
-                <a16:creationId xmlns:a16="http://schemas.microsoft.com/office/drawing/2014/main" id="{12913942-DA4C-4AFA-A19A-4DD30D1C8697}"/>
+                <a16:creationId xmlns:a16="http://schemas.microsoft.com/office/drawing/2014/main" id="{7960499E-6970-4968-BDF7-010BA56FD6FF}"/>
               </a:ext>
             </a:extLst>
           </p:cNvPr>
@@ -9951,7 +9951,7 @@
     </p:spTree>
     <p:extLst>
       <p:ext uri="{BB962C8B-B14F-4D97-AF65-F5344CB8AC3E}">
-        <p14:creationId xmlns:p14="http://schemas.microsoft.com/office/powerpoint/2010/main" val="2124040358"/>
+        <p14:creationId xmlns:p14="http://schemas.microsoft.com/office/powerpoint/2010/main" val="401896416"/>
       </p:ext>
     </p:extLst>
   </p:cSld>
@@ -9982,7 +9982,7 @@
           <p:cNvPr id="1" name="s9-rule">
             <a:extLst xmlns:a="http://schemas.openxmlformats.org/drawingml/2006/main">
               <a:ext uri="{FF2B5EF4-FFF2-40B4-BE49-F238E27FC236}">
-                <a16:creationId xmlns:a16="http://schemas.microsoft.com/office/drawing/2014/main" id="{7795FAE9-103E-43BA-B255-2E8E7CA63E48}"/>
+                <a16:creationId xmlns:a16="http://schemas.microsoft.com/office/drawing/2014/main" id="{FC11A92E-84FE-44CD-921C-65F117FB3D85}"/>
               </a:ext>
             </a:extLst>
           </p:cNvPr>
@@ -10015,7 +10015,7 @@
           <p:cNvPr id="2" name="s9-eyebrow">
             <a:extLst xmlns:a="http://schemas.openxmlformats.org/drawingml/2006/main">
               <a:ext uri="{FF2B5EF4-FFF2-40B4-BE49-F238E27FC236}">
-                <a16:creationId xmlns:a16="http://schemas.microsoft.com/office/drawing/2014/main" id="{E61225F8-2857-4540-A009-FE5E65AA93A1}"/>
+                <a16:creationId xmlns:a16="http://schemas.microsoft.com/office/drawing/2014/main" id="{519F4D4C-97DE-47D3-8952-CFC92F63D754}"/>
               </a:ext>
             </a:extLst>
           </p:cNvPr>
@@ -10073,7 +10073,7 @@
           <p:cNvPr id="3" name="s9-title">
             <a:extLst xmlns:a="http://schemas.openxmlformats.org/drawingml/2006/main">
               <a:ext uri="{FF2B5EF4-FFF2-40B4-BE49-F238E27FC236}">
-                <a16:creationId xmlns:a16="http://schemas.microsoft.com/office/drawing/2014/main" id="{7C8E722E-397D-4BF0-96E1-4C4C7A517AC3}"/>
+                <a16:creationId xmlns:a16="http://schemas.microsoft.com/office/drawing/2014/main" id="{0B468BA5-2361-439D-BEFD-97484D002C05}"/>
               </a:ext>
             </a:extLst>
           </p:cNvPr>
@@ -10131,7 +10131,7 @@
           <p:cNvPr id="4" name="s9-footer">
             <a:extLst xmlns:a="http://schemas.openxmlformats.org/drawingml/2006/main">
               <a:ext uri="{FF2B5EF4-FFF2-40B4-BE49-F238E27FC236}">
-                <a16:creationId xmlns:a16="http://schemas.microsoft.com/office/drawing/2014/main" id="{C14BA6E4-CD59-407A-BA27-201BA5563447}"/>
+                <a16:creationId xmlns:a16="http://schemas.microsoft.com/office/drawing/2014/main" id="{86250AE4-6A6F-4F99-827D-3DC6FE25E572}"/>
               </a:ext>
             </a:extLst>
           </p:cNvPr>
@@ -10162,7 +10162,7 @@
           <p:cNvPr id="5" name="s9-identity">
             <a:extLst xmlns:a="http://schemas.openxmlformats.org/drawingml/2006/main">
               <a:ext uri="{FF2B5EF4-FFF2-40B4-BE49-F238E27FC236}">
-                <a16:creationId xmlns:a16="http://schemas.microsoft.com/office/drawing/2014/main" id="{693F851E-B5DD-49F2-BED0-AA0F18DCC0EC}"/>
+                <a16:creationId xmlns:a16="http://schemas.microsoft.com/office/drawing/2014/main" id="{9A83B7AB-EDD3-4315-AB3A-EFA33BC93624}"/>
               </a:ext>
             </a:extLst>
           </p:cNvPr>
@@ -10220,7 +10220,7 @@
           <p:cNvPr id="6" name="case-title">
             <a:extLst xmlns:a="http://schemas.openxmlformats.org/drawingml/2006/main">
               <a:ext uri="{FF2B5EF4-FFF2-40B4-BE49-F238E27FC236}">
-                <a16:creationId xmlns:a16="http://schemas.microsoft.com/office/drawing/2014/main" id="{092F0F19-2484-4E7B-8F9B-6A49788BBB9B}"/>
+                <a16:creationId xmlns:a16="http://schemas.microsoft.com/office/drawing/2014/main" id="{8D64E2A1-92C2-431F-8843-2EE8CD74E911}"/>
               </a:ext>
             </a:extLst>
           </p:cNvPr>
@@ -10284,7 +10284,7 @@
           <p:cNvPr id="7" name="case-row-0">
             <a:extLst xmlns:a="http://schemas.openxmlformats.org/drawingml/2006/main">
               <a:ext uri="{FF2B5EF4-FFF2-40B4-BE49-F238E27FC236}">
-                <a16:creationId xmlns:a16="http://schemas.microsoft.com/office/drawing/2014/main" id="{6AF7E534-B845-4672-B4F8-9EA9D5DDEBAE}"/>
+                <a16:creationId xmlns:a16="http://schemas.microsoft.com/office/drawing/2014/main" id="{0A41A7FE-58F5-4D7D-A67A-A0EA199AE10F}"/>
               </a:ext>
             </a:extLst>
           </p:cNvPr>
@@ -10348,7 +10348,7 @@
           <p:cNvPr id="8" name="case-row-1">
             <a:extLst xmlns:a="http://schemas.openxmlformats.org/drawingml/2006/main">
               <a:ext uri="{FF2B5EF4-FFF2-40B4-BE49-F238E27FC236}">
-                <a16:creationId xmlns:a16="http://schemas.microsoft.com/office/drawing/2014/main" id="{EB86695A-2FF5-4394-8171-D7B408263303}"/>
+                <a16:creationId xmlns:a16="http://schemas.microsoft.com/office/drawing/2014/main" id="{CD7A194D-EE2D-4138-AAD4-7E31CD86033C}"/>
               </a:ext>
             </a:extLst>
           </p:cNvPr>
@@ -10412,7 +10412,7 @@
           <p:cNvPr id="9" name="case-row-2">
             <a:extLst xmlns:a="http://schemas.openxmlformats.org/drawingml/2006/main">
               <a:ext uri="{FF2B5EF4-FFF2-40B4-BE49-F238E27FC236}">
-                <a16:creationId xmlns:a16="http://schemas.microsoft.com/office/drawing/2014/main" id="{D4D3156E-E6FA-4EC3-A5E5-31BDADE430CB}"/>
+                <a16:creationId xmlns:a16="http://schemas.microsoft.com/office/drawing/2014/main" id="{F4B69F70-9E8D-4B40-89B8-725ED7304984}"/>
               </a:ext>
             </a:extLst>
           </p:cNvPr>
@@ -10476,7 +10476,7 @@
           <p:cNvPr id="10" name="case-row-3">
             <a:extLst xmlns:a="http://schemas.openxmlformats.org/drawingml/2006/main">
               <a:ext uri="{FF2B5EF4-FFF2-40B4-BE49-F238E27FC236}">
-                <a16:creationId xmlns:a16="http://schemas.microsoft.com/office/drawing/2014/main" id="{F68B8DC1-8298-48D2-BC3B-0F20FC0EFC26}"/>
+                <a16:creationId xmlns:a16="http://schemas.microsoft.com/office/drawing/2014/main" id="{CC5C5CB3-3DDC-481A-B2BA-96A8017F61F7}"/>
               </a:ext>
             </a:extLst>
           </p:cNvPr>
@@ -10540,7 +10540,7 @@
           <p:cNvPr id="11" name="s9-takeaway-rule">
             <a:extLst xmlns:a="http://schemas.openxmlformats.org/drawingml/2006/main">
               <a:ext uri="{FF2B5EF4-FFF2-40B4-BE49-F238E27FC236}">
-                <a16:creationId xmlns:a16="http://schemas.microsoft.com/office/drawing/2014/main" id="{D91D69AF-31D1-4193-85F5-7DA9833CF2ED}"/>
+                <a16:creationId xmlns:a16="http://schemas.microsoft.com/office/drawing/2014/main" id="{D7BF8B19-6C63-4C81-8AB5-10D8A1AC6E09}"/>
               </a:ext>
             </a:extLst>
           </p:cNvPr>
@@ -10573,7 +10573,7 @@
           <p:cNvPr id="12" name="s9-takeaway">
             <a:extLst xmlns:a="http://schemas.openxmlformats.org/drawingml/2006/main">
               <a:ext uri="{FF2B5EF4-FFF2-40B4-BE49-F238E27FC236}">
-                <a16:creationId xmlns:a16="http://schemas.microsoft.com/office/drawing/2014/main" id="{0CA4AB07-BAD6-4D52-BA28-EDBA30649BF3}"/>
+                <a16:creationId xmlns:a16="http://schemas.microsoft.com/office/drawing/2014/main" id="{0A56233F-B2C8-4C61-8C76-AF5412FD981D}"/>
               </a:ext>
             </a:extLst>
           </p:cNvPr>
@@ -10629,7 +10629,7 @@
     </p:spTree>
     <p:extLst>
       <p:ext uri="{BB962C8B-B14F-4D97-AF65-F5344CB8AC3E}">
-        <p14:creationId xmlns:p14="http://schemas.microsoft.com/office/powerpoint/2010/main" val="753881489"/>
+        <p14:creationId xmlns:p14="http://schemas.microsoft.com/office/powerpoint/2010/main" val="1054508796"/>
       </p:ext>
     </p:extLst>
   </p:cSld>
